--- a/docs/pptx/whole/jx-linsubhr-ratio-akikdigo.pptx
+++ b/docs/pptx/whole/jx-linsubhr-ratio-akikdigo.pptx
@@ -2271,7 +2271,7 @@
           </p:nvSpPr>
           <p:spPr>
             <a:xfrm>
-              <a:off x="817517" y="5114368"/>
+              <a:off x="817517" y="5142518"/>
               <a:ext cx="7799693" cy="0"/>
             </a:xfrm>
             <a:custGeom>
@@ -2314,7 +2314,7 @@
           </p:nvSpPr>
           <p:spPr>
             <a:xfrm>
-              <a:off x="817517" y="4244691"/>
+              <a:off x="817517" y="4313054"/>
               <a:ext cx="7799693" cy="0"/>
             </a:xfrm>
             <a:custGeom>
@@ -2357,7 +2357,7 @@
           </p:nvSpPr>
           <p:spPr>
             <a:xfrm>
-              <a:off x="817517" y="3375014"/>
+              <a:off x="817517" y="3483591"/>
               <a:ext cx="7799693" cy="0"/>
             </a:xfrm>
             <a:custGeom>
@@ -2400,7 +2400,7 @@
           </p:nvSpPr>
           <p:spPr>
             <a:xfrm>
-              <a:off x="817517" y="2505337"/>
+              <a:off x="817517" y="2654127"/>
               <a:ext cx="7799693" cy="0"/>
             </a:xfrm>
             <a:custGeom>
@@ -2443,15 +2443,15 @@
           </p:nvSpPr>
           <p:spPr>
             <a:xfrm>
-              <a:off x="1615213" y="1896563"/>
-              <a:ext cx="0" cy="3826579"/>
+              <a:off x="1615213" y="2073503"/>
+              <a:ext cx="0" cy="3649639"/>
             </a:xfrm>
             <a:custGeom>
               <a:avLst/>
               <a:pathLst>
-                <a:path w="0" h="3826579">
+                <a:path w="0" h="3649639">
                   <a:moveTo>
-                    <a:pt x="0" y="3826579"/>
+                    <a:pt x="0" y="3649639"/>
                   </a:moveTo>
                   <a:lnTo>
                     <a:pt x="0" y="0"/>
@@ -2486,15 +2486,15 @@
           </p:nvSpPr>
           <p:spPr>
             <a:xfrm>
-              <a:off x="3387871" y="1896563"/>
-              <a:ext cx="0" cy="3826579"/>
+              <a:off x="3387871" y="2073503"/>
+              <a:ext cx="0" cy="3649639"/>
             </a:xfrm>
             <a:custGeom>
               <a:avLst/>
               <a:pathLst>
-                <a:path w="0" h="3826579">
+                <a:path w="0" h="3649639">
                   <a:moveTo>
-                    <a:pt x="0" y="3826579"/>
+                    <a:pt x="0" y="3649639"/>
                   </a:moveTo>
                   <a:lnTo>
                     <a:pt x="0" y="0"/>
@@ -2529,15 +2529,15 @@
           </p:nvSpPr>
           <p:spPr>
             <a:xfrm>
-              <a:off x="5160528" y="1896563"/>
-              <a:ext cx="0" cy="3826579"/>
+              <a:off x="5160528" y="2073503"/>
+              <a:ext cx="0" cy="3649639"/>
             </a:xfrm>
             <a:custGeom>
               <a:avLst/>
               <a:pathLst>
-                <a:path w="0" h="3826579">
+                <a:path w="0" h="3649639">
                   <a:moveTo>
-                    <a:pt x="0" y="3826579"/>
+                    <a:pt x="0" y="3649639"/>
                   </a:moveTo>
                   <a:lnTo>
                     <a:pt x="0" y="0"/>
@@ -2572,15 +2572,15 @@
           </p:nvSpPr>
           <p:spPr>
             <a:xfrm>
-              <a:off x="6933186" y="1896563"/>
-              <a:ext cx="0" cy="3826579"/>
+              <a:off x="6933186" y="2073503"/>
+              <a:ext cx="0" cy="3649639"/>
             </a:xfrm>
             <a:custGeom>
               <a:avLst/>
               <a:pathLst>
-                <a:path w="0" h="3826579">
+                <a:path w="0" h="3649639">
                   <a:moveTo>
-                    <a:pt x="0" y="3826579"/>
+                    <a:pt x="0" y="3649639"/>
                   </a:moveTo>
                   <a:lnTo>
                     <a:pt x="0" y="0"/>
@@ -2615,7 +2615,7 @@
           </p:nvSpPr>
           <p:spPr>
             <a:xfrm>
-              <a:off x="817517" y="5549207"/>
+              <a:off x="817517" y="5557249"/>
               <a:ext cx="7799693" cy="0"/>
             </a:xfrm>
             <a:custGeom>
@@ -2658,7 +2658,7 @@
           </p:nvSpPr>
           <p:spPr>
             <a:xfrm>
-              <a:off x="817517" y="4679530"/>
+              <a:off x="817517" y="4727786"/>
               <a:ext cx="7799693" cy="0"/>
             </a:xfrm>
             <a:custGeom>
@@ -2701,7 +2701,7 @@
           </p:nvSpPr>
           <p:spPr>
             <a:xfrm>
-              <a:off x="817517" y="3809853"/>
+              <a:off x="817517" y="3898322"/>
               <a:ext cx="7799693" cy="0"/>
             </a:xfrm>
             <a:custGeom>
@@ -2744,7 +2744,7 @@
           </p:nvSpPr>
           <p:spPr>
             <a:xfrm>
-              <a:off x="817517" y="2940175"/>
+              <a:off x="817517" y="3068859"/>
               <a:ext cx="7799693" cy="0"/>
             </a:xfrm>
             <a:custGeom>
@@ -2787,7 +2787,7 @@
           </p:nvSpPr>
           <p:spPr>
             <a:xfrm>
-              <a:off x="817517" y="2070498"/>
+              <a:off x="817517" y="2239395"/>
               <a:ext cx="7799693" cy="0"/>
             </a:xfrm>
             <a:custGeom>
@@ -2830,15 +2830,15 @@
           </p:nvSpPr>
           <p:spPr>
             <a:xfrm>
-              <a:off x="2501542" y="1896563"/>
-              <a:ext cx="0" cy="3826579"/>
+              <a:off x="2501542" y="2073503"/>
+              <a:ext cx="0" cy="3649639"/>
             </a:xfrm>
             <a:custGeom>
               <a:avLst/>
               <a:pathLst>
-                <a:path w="0" h="3826579">
+                <a:path w="0" h="3649639">
                   <a:moveTo>
-                    <a:pt x="0" y="3826579"/>
+                    <a:pt x="0" y="3649639"/>
                   </a:moveTo>
                   <a:lnTo>
                     <a:pt x="0" y="0"/>
@@ -2873,15 +2873,15 @@
           </p:nvSpPr>
           <p:spPr>
             <a:xfrm>
-              <a:off x="4274200" y="1896563"/>
-              <a:ext cx="0" cy="3826579"/>
+              <a:off x="4274200" y="2073503"/>
+              <a:ext cx="0" cy="3649639"/>
             </a:xfrm>
             <a:custGeom>
               <a:avLst/>
               <a:pathLst>
-                <a:path w="0" h="3826579">
+                <a:path w="0" h="3649639">
                   <a:moveTo>
-                    <a:pt x="0" y="3826579"/>
+                    <a:pt x="0" y="3649639"/>
                   </a:moveTo>
                   <a:lnTo>
                     <a:pt x="0" y="0"/>
@@ -2916,15 +2916,15 @@
           </p:nvSpPr>
           <p:spPr>
             <a:xfrm>
-              <a:off x="6046857" y="1896563"/>
-              <a:ext cx="0" cy="3826579"/>
+              <a:off x="6046857" y="2073503"/>
+              <a:ext cx="0" cy="3649639"/>
             </a:xfrm>
             <a:custGeom>
               <a:avLst/>
               <a:pathLst>
-                <a:path w="0" h="3826579">
+                <a:path w="0" h="3649639">
                   <a:moveTo>
-                    <a:pt x="0" y="3826579"/>
+                    <a:pt x="0" y="3649639"/>
                   </a:moveTo>
                   <a:lnTo>
                     <a:pt x="0" y="0"/>
@@ -2959,15 +2959,15 @@
           </p:nvSpPr>
           <p:spPr>
             <a:xfrm>
-              <a:off x="7819515" y="1896563"/>
-              <a:ext cx="0" cy="3826579"/>
+              <a:off x="7819515" y="2073503"/>
+              <a:ext cx="0" cy="3649639"/>
             </a:xfrm>
             <a:custGeom>
               <a:avLst/>
               <a:pathLst>
-                <a:path w="0" h="3826579">
+                <a:path w="0" h="3649639">
                   <a:moveTo>
-                    <a:pt x="0" y="3826579"/>
+                    <a:pt x="0" y="3649639"/>
                   </a:moveTo>
                   <a:lnTo>
                     <a:pt x="0" y="0"/>
@@ -3002,588 +3002,588 @@
           </p:nvSpPr>
           <p:spPr>
             <a:xfrm>
-              <a:off x="817517" y="1896563"/>
-              <a:ext cx="7235830" cy="3522573"/>
+              <a:off x="817517" y="2073503"/>
+              <a:ext cx="7235830" cy="3359691"/>
             </a:xfrm>
             <a:custGeom>
               <a:avLst/>
               <a:pathLst>
-                <a:path w="7235830" h="3522573">
+                <a:path w="7235830" h="3359691">
                   <a:moveTo>
                     <a:pt x="593553" y="0"/>
                   </a:moveTo>
                   <a:lnTo>
-                    <a:pt x="597427" y="7225"/>
-                  </a:lnTo>
-                  <a:lnTo>
-                    <a:pt x="671187" y="139764"/>
-                  </a:lnTo>
-                  <a:lnTo>
-                    <a:pt x="744947" y="267483"/>
-                  </a:lnTo>
-                  <a:lnTo>
-                    <a:pt x="818707" y="390560"/>
-                  </a:lnTo>
-                  <a:lnTo>
-                    <a:pt x="892467" y="509161"/>
-                  </a:lnTo>
-                  <a:lnTo>
-                    <a:pt x="966227" y="623451"/>
-                  </a:lnTo>
-                  <a:lnTo>
-                    <a:pt x="1039987" y="733585"/>
-                  </a:lnTo>
-                  <a:lnTo>
-                    <a:pt x="1113747" y="839715"/>
-                  </a:lnTo>
-                  <a:lnTo>
-                    <a:pt x="1187508" y="941987"/>
-                  </a:lnTo>
-                  <a:lnTo>
-                    <a:pt x="1261268" y="1040540"/>
-                  </a:lnTo>
-                  <a:lnTo>
-                    <a:pt x="1335028" y="1135509"/>
-                  </a:lnTo>
-                  <a:lnTo>
-                    <a:pt x="1408788" y="1227026"/>
-                  </a:lnTo>
-                  <a:lnTo>
-                    <a:pt x="1482548" y="1315216"/>
-                  </a:lnTo>
-                  <a:lnTo>
-                    <a:pt x="1556308" y="1400199"/>
-                  </a:lnTo>
-                  <a:lnTo>
-                    <a:pt x="1630068" y="1482093"/>
-                  </a:lnTo>
-                  <a:lnTo>
-                    <a:pt x="1703828" y="1561009"/>
-                  </a:lnTo>
-                  <a:lnTo>
-                    <a:pt x="1777588" y="1637056"/>
-                  </a:lnTo>
-                  <a:lnTo>
-                    <a:pt x="1851348" y="1710338"/>
-                  </a:lnTo>
-                  <a:lnTo>
-                    <a:pt x="1925108" y="1780955"/>
-                  </a:lnTo>
-                  <a:lnTo>
-                    <a:pt x="1998868" y="1849005"/>
-                  </a:lnTo>
-                  <a:lnTo>
-                    <a:pt x="2072628" y="1914581"/>
-                  </a:lnTo>
-                  <a:lnTo>
-                    <a:pt x="2146388" y="1977773"/>
-                  </a:lnTo>
-                  <a:lnTo>
-                    <a:pt x="2220148" y="2038668"/>
-                  </a:lnTo>
-                  <a:lnTo>
-                    <a:pt x="2293908" y="2097348"/>
-                  </a:lnTo>
-                  <a:lnTo>
-                    <a:pt x="2367668" y="2153895"/>
-                  </a:lnTo>
-                  <a:lnTo>
-                    <a:pt x="2441428" y="2208386"/>
-                  </a:lnTo>
-                  <a:lnTo>
-                    <a:pt x="2515188" y="2260895"/>
-                  </a:lnTo>
-                  <a:lnTo>
-                    <a:pt x="2588948" y="2311496"/>
-                  </a:lnTo>
-                  <a:lnTo>
-                    <a:pt x="2662708" y="2360257"/>
-                  </a:lnTo>
-                  <a:lnTo>
-                    <a:pt x="2736468" y="2407245"/>
-                  </a:lnTo>
-                  <a:lnTo>
-                    <a:pt x="2810228" y="2452525"/>
-                  </a:lnTo>
-                  <a:lnTo>
-                    <a:pt x="2883988" y="2496158"/>
-                  </a:lnTo>
-                  <a:lnTo>
-                    <a:pt x="2957748" y="2538205"/>
-                  </a:lnTo>
-                  <a:lnTo>
-                    <a:pt x="3031508" y="2578724"/>
-                  </a:lnTo>
-                  <a:lnTo>
-                    <a:pt x="3105268" y="2617769"/>
-                  </a:lnTo>
-                  <a:lnTo>
-                    <a:pt x="3179028" y="2655394"/>
-                  </a:lnTo>
-                  <a:lnTo>
-                    <a:pt x="3252788" y="2691652"/>
-                  </a:lnTo>
-                  <a:lnTo>
-                    <a:pt x="3326548" y="2726591"/>
-                  </a:lnTo>
-                  <a:lnTo>
-                    <a:pt x="3400308" y="2760260"/>
-                  </a:lnTo>
-                  <a:lnTo>
-                    <a:pt x="3474068" y="2786433"/>
-                  </a:lnTo>
-                  <a:lnTo>
-                    <a:pt x="3547828" y="2797738"/>
-                  </a:lnTo>
-                  <a:lnTo>
-                    <a:pt x="3621588" y="2808896"/>
-                  </a:lnTo>
-                  <a:lnTo>
-                    <a:pt x="3695348" y="2819907"/>
-                  </a:lnTo>
-                  <a:lnTo>
-                    <a:pt x="3769108" y="2830775"/>
-                  </a:lnTo>
-                  <a:lnTo>
-                    <a:pt x="3842868" y="2841501"/>
-                  </a:lnTo>
-                  <a:lnTo>
-                    <a:pt x="3916628" y="2852088"/>
-                  </a:lnTo>
-                  <a:lnTo>
-                    <a:pt x="3990388" y="2862536"/>
-                  </a:lnTo>
-                  <a:lnTo>
-                    <a:pt x="4064149" y="2872847"/>
-                  </a:lnTo>
-                  <a:lnTo>
-                    <a:pt x="4137909" y="2883024"/>
-                  </a:lnTo>
-                  <a:lnTo>
-                    <a:pt x="4211669" y="2893069"/>
-                  </a:lnTo>
-                  <a:lnTo>
-                    <a:pt x="4285429" y="2902982"/>
-                  </a:lnTo>
-                  <a:lnTo>
-                    <a:pt x="4359189" y="2912766"/>
-                  </a:lnTo>
-                  <a:lnTo>
-                    <a:pt x="4432949" y="2922422"/>
-                  </a:lnTo>
-                  <a:lnTo>
-                    <a:pt x="4506709" y="2931952"/>
-                  </a:lnTo>
-                  <a:lnTo>
-                    <a:pt x="4580469" y="2941358"/>
-                  </a:lnTo>
-                  <a:lnTo>
-                    <a:pt x="4654229" y="2950641"/>
-                  </a:lnTo>
-                  <a:lnTo>
-                    <a:pt x="4727989" y="2959802"/>
-                  </a:lnTo>
-                  <a:lnTo>
-                    <a:pt x="4801749" y="2968845"/>
-                  </a:lnTo>
-                  <a:lnTo>
-                    <a:pt x="4875509" y="2977769"/>
-                  </a:lnTo>
-                  <a:lnTo>
-                    <a:pt x="4949269" y="2986577"/>
-                  </a:lnTo>
-                  <a:lnTo>
-                    <a:pt x="5023029" y="2995269"/>
-                  </a:lnTo>
-                  <a:lnTo>
-                    <a:pt x="5096789" y="3003849"/>
-                  </a:lnTo>
-                  <a:lnTo>
-                    <a:pt x="5170549" y="3012316"/>
-                  </a:lnTo>
-                  <a:lnTo>
-                    <a:pt x="5244309" y="3020673"/>
-                  </a:lnTo>
-                  <a:lnTo>
-                    <a:pt x="5318069" y="3028921"/>
-                  </a:lnTo>
-                  <a:lnTo>
-                    <a:pt x="5391829" y="3037061"/>
-                  </a:lnTo>
-                  <a:lnTo>
-                    <a:pt x="5465589" y="3045095"/>
-                  </a:lnTo>
-                  <a:lnTo>
-                    <a:pt x="5539349" y="3053024"/>
-                  </a:lnTo>
-                  <a:lnTo>
-                    <a:pt x="5613109" y="3060850"/>
-                  </a:lnTo>
-                  <a:lnTo>
-                    <a:pt x="5686869" y="3068573"/>
-                  </a:lnTo>
-                  <a:lnTo>
-                    <a:pt x="5760629" y="3076196"/>
-                  </a:lnTo>
-                  <a:lnTo>
-                    <a:pt x="5834389" y="3083719"/>
-                  </a:lnTo>
-                  <a:lnTo>
-                    <a:pt x="5908149" y="3091144"/>
-                  </a:lnTo>
-                  <a:lnTo>
-                    <a:pt x="5981909" y="3098472"/>
-                  </a:lnTo>
-                  <a:lnTo>
-                    <a:pt x="6055669" y="3105705"/>
-                  </a:lnTo>
-                  <a:lnTo>
-                    <a:pt x="6129429" y="3112843"/>
-                  </a:lnTo>
-                  <a:lnTo>
-                    <a:pt x="6203189" y="3119888"/>
-                  </a:lnTo>
-                  <a:lnTo>
-                    <a:pt x="6276949" y="3126841"/>
-                  </a:lnTo>
-                  <a:lnTo>
-                    <a:pt x="6350709" y="3133703"/>
-                  </a:lnTo>
-                  <a:lnTo>
-                    <a:pt x="6424469" y="3140476"/>
-                  </a:lnTo>
-                  <a:lnTo>
-                    <a:pt x="6498229" y="3147160"/>
-                  </a:lnTo>
-                  <a:lnTo>
-                    <a:pt x="6571989" y="3153757"/>
-                  </a:lnTo>
-                  <a:lnTo>
-                    <a:pt x="6645749" y="3160268"/>
-                  </a:lnTo>
-                  <a:lnTo>
-                    <a:pt x="6719509" y="3166694"/>
-                  </a:lnTo>
-                  <a:lnTo>
-                    <a:pt x="6793269" y="3173036"/>
-                  </a:lnTo>
-                  <a:lnTo>
-                    <a:pt x="6867029" y="3179295"/>
-                  </a:lnTo>
-                  <a:lnTo>
-                    <a:pt x="6940789" y="3185473"/>
-                  </a:lnTo>
-                  <a:lnTo>
-                    <a:pt x="7014550" y="3191570"/>
-                  </a:lnTo>
-                  <a:lnTo>
-                    <a:pt x="7088310" y="3197587"/>
-                  </a:lnTo>
-                  <a:lnTo>
-                    <a:pt x="7162070" y="3203526"/>
-                  </a:lnTo>
-                  <a:lnTo>
-                    <a:pt x="7235830" y="3209388"/>
-                  </a:lnTo>
-                  <a:lnTo>
-                    <a:pt x="7235830" y="3522573"/>
-                  </a:lnTo>
-                  <a:lnTo>
-                    <a:pt x="7162070" y="3517666"/>
-                  </a:lnTo>
-                  <a:lnTo>
-                    <a:pt x="7088310" y="3512573"/>
-                  </a:lnTo>
-                  <a:lnTo>
-                    <a:pt x="7014550" y="3507288"/>
-                  </a:lnTo>
-                  <a:lnTo>
-                    <a:pt x="6940789" y="3501804"/>
-                  </a:lnTo>
-                  <a:lnTo>
-                    <a:pt x="6867029" y="3496113"/>
-                  </a:lnTo>
-                  <a:lnTo>
-                    <a:pt x="6793269" y="3490207"/>
-                  </a:lnTo>
-                  <a:lnTo>
-                    <a:pt x="6719509" y="3484079"/>
-                  </a:lnTo>
-                  <a:lnTo>
-                    <a:pt x="6645749" y="3477719"/>
-                  </a:lnTo>
-                  <a:lnTo>
-                    <a:pt x="6571989" y="3471119"/>
-                  </a:lnTo>
-                  <a:lnTo>
-                    <a:pt x="6498229" y="3464270"/>
-                  </a:lnTo>
-                  <a:lnTo>
-                    <a:pt x="6424469" y="3457163"/>
-                  </a:lnTo>
-                  <a:lnTo>
-                    <a:pt x="6350709" y="3449788"/>
-                  </a:lnTo>
-                  <a:lnTo>
-                    <a:pt x="6276949" y="3442134"/>
-                  </a:lnTo>
-                  <a:lnTo>
-                    <a:pt x="6203189" y="3434192"/>
-                  </a:lnTo>
-                  <a:lnTo>
-                    <a:pt x="6129429" y="3425950"/>
-                  </a:lnTo>
-                  <a:lnTo>
-                    <a:pt x="6055669" y="3417397"/>
-                  </a:lnTo>
-                  <a:lnTo>
-                    <a:pt x="5981909" y="3408521"/>
-                  </a:lnTo>
-                  <a:lnTo>
-                    <a:pt x="5908149" y="3399310"/>
-                  </a:lnTo>
-                  <a:lnTo>
-                    <a:pt x="5834389" y="3389752"/>
-                  </a:lnTo>
-                  <a:lnTo>
-                    <a:pt x="5760629" y="3379834"/>
-                  </a:lnTo>
-                  <a:lnTo>
-                    <a:pt x="5686869" y="3369541"/>
-                  </a:lnTo>
-                  <a:lnTo>
-                    <a:pt x="5613109" y="3358859"/>
-                  </a:lnTo>
-                  <a:lnTo>
-                    <a:pt x="5539349" y="3347775"/>
-                  </a:lnTo>
-                  <a:lnTo>
-                    <a:pt x="5465589" y="3336273"/>
-                  </a:lnTo>
-                  <a:lnTo>
-                    <a:pt x="5391829" y="3324336"/>
-                  </a:lnTo>
-                  <a:lnTo>
-                    <a:pt x="5318069" y="3311949"/>
-                  </a:lnTo>
-                  <a:lnTo>
-                    <a:pt x="5244309" y="3299095"/>
-                  </a:lnTo>
-                  <a:lnTo>
-                    <a:pt x="5170549" y="3285756"/>
-                  </a:lnTo>
-                  <a:lnTo>
-                    <a:pt x="5096789" y="3271914"/>
-                  </a:lnTo>
-                  <a:lnTo>
-                    <a:pt x="5023029" y="3257549"/>
-                  </a:lnTo>
-                  <a:lnTo>
-                    <a:pt x="4949269" y="3242642"/>
-                  </a:lnTo>
-                  <a:lnTo>
-                    <a:pt x="4875509" y="3227173"/>
-                  </a:lnTo>
-                  <a:lnTo>
-                    <a:pt x="4801749" y="3211120"/>
-                  </a:lnTo>
-                  <a:lnTo>
-                    <a:pt x="4727989" y="3194462"/>
-                  </a:lnTo>
-                  <a:lnTo>
-                    <a:pt x="4654229" y="3177175"/>
-                  </a:lnTo>
-                  <a:lnTo>
-                    <a:pt x="4580469" y="3159236"/>
-                  </a:lnTo>
-                  <a:lnTo>
-                    <a:pt x="4506709" y="3140620"/>
-                  </a:lnTo>
-                  <a:lnTo>
-                    <a:pt x="4432949" y="3121302"/>
-                  </a:lnTo>
-                  <a:lnTo>
-                    <a:pt x="4359189" y="3101255"/>
-                  </a:lnTo>
-                  <a:lnTo>
-                    <a:pt x="4285429" y="3080451"/>
-                  </a:lnTo>
-                  <a:lnTo>
-                    <a:pt x="4211669" y="3058863"/>
-                  </a:lnTo>
-                  <a:lnTo>
-                    <a:pt x="4137909" y="3036460"/>
-                  </a:lnTo>
-                  <a:lnTo>
-                    <a:pt x="4064149" y="3013211"/>
-                  </a:lnTo>
-                  <a:lnTo>
-                    <a:pt x="3990388" y="2989086"/>
-                  </a:lnTo>
-                  <a:lnTo>
-                    <a:pt x="3916628" y="2964050"/>
-                  </a:lnTo>
-                  <a:lnTo>
-                    <a:pt x="3842868" y="2938070"/>
-                  </a:lnTo>
-                  <a:lnTo>
-                    <a:pt x="3769108" y="2911110"/>
-                  </a:lnTo>
-                  <a:lnTo>
-                    <a:pt x="3695348" y="2883132"/>
-                  </a:lnTo>
-                  <a:lnTo>
-                    <a:pt x="3621588" y="2854099"/>
-                  </a:lnTo>
-                  <a:lnTo>
-                    <a:pt x="3547828" y="2823971"/>
-                  </a:lnTo>
-                  <a:lnTo>
-                    <a:pt x="3474068" y="2792705"/>
-                  </a:lnTo>
-                  <a:lnTo>
-                    <a:pt x="3400308" y="2774979"/>
-                  </a:lnTo>
-                  <a:lnTo>
-                    <a:pt x="3326548" y="2763373"/>
-                  </a:lnTo>
-                  <a:lnTo>
-                    <a:pt x="3252788" y="2751614"/>
-                  </a:lnTo>
-                  <a:lnTo>
-                    <a:pt x="3179028" y="2739699"/>
-                  </a:lnTo>
-                  <a:lnTo>
-                    <a:pt x="3105268" y="2727627"/>
-                  </a:lnTo>
-                  <a:lnTo>
-                    <a:pt x="3031508" y="2715395"/>
-                  </a:lnTo>
-                  <a:lnTo>
-                    <a:pt x="2957748" y="2703001"/>
-                  </a:lnTo>
-                  <a:lnTo>
-                    <a:pt x="2883988" y="2690443"/>
-                  </a:lnTo>
-                  <a:lnTo>
-                    <a:pt x="2810228" y="2677720"/>
-                  </a:lnTo>
-                  <a:lnTo>
-                    <a:pt x="2736468" y="2664828"/>
-                  </a:lnTo>
-                  <a:lnTo>
-                    <a:pt x="2662708" y="2651765"/>
-                  </a:lnTo>
-                  <a:lnTo>
-                    <a:pt x="2588948" y="2638530"/>
-                  </a:lnTo>
-                  <a:lnTo>
-                    <a:pt x="2515188" y="2625120"/>
-                  </a:lnTo>
-                  <a:lnTo>
-                    <a:pt x="2441428" y="2611532"/>
-                  </a:lnTo>
-                  <a:lnTo>
-                    <a:pt x="2367668" y="2597765"/>
-                  </a:lnTo>
-                  <a:lnTo>
-                    <a:pt x="2293908" y="2583816"/>
-                  </a:lnTo>
-                  <a:lnTo>
-                    <a:pt x="2220148" y="2569682"/>
-                  </a:lnTo>
-                  <a:lnTo>
-                    <a:pt x="2146388" y="2555362"/>
-                  </a:lnTo>
-                  <a:lnTo>
-                    <a:pt x="2072628" y="2540852"/>
-                  </a:lnTo>
-                  <a:lnTo>
-                    <a:pt x="1998868" y="2526150"/>
-                  </a:lnTo>
-                  <a:lnTo>
-                    <a:pt x="1925108" y="2511254"/>
-                  </a:lnTo>
-                  <a:lnTo>
-                    <a:pt x="1851348" y="2496160"/>
-                  </a:lnTo>
-                  <a:lnTo>
-                    <a:pt x="1777588" y="2480868"/>
-                  </a:lnTo>
-                  <a:lnTo>
-                    <a:pt x="1703828" y="2465373"/>
-                  </a:lnTo>
-                  <a:lnTo>
-                    <a:pt x="1630068" y="2449673"/>
-                  </a:lnTo>
-                  <a:lnTo>
-                    <a:pt x="1556308" y="2433765"/>
-                  </a:lnTo>
-                  <a:lnTo>
-                    <a:pt x="1482548" y="2417647"/>
-                  </a:lnTo>
-                  <a:lnTo>
-                    <a:pt x="1408788" y="2401316"/>
-                  </a:lnTo>
-                  <a:lnTo>
-                    <a:pt x="1335028" y="2384769"/>
-                  </a:lnTo>
-                  <a:lnTo>
-                    <a:pt x="1261268" y="2368004"/>
-                  </a:lnTo>
-                  <a:lnTo>
-                    <a:pt x="1187508" y="2351016"/>
-                  </a:lnTo>
-                  <a:lnTo>
-                    <a:pt x="1113747" y="2333804"/>
-                  </a:lnTo>
-                  <a:lnTo>
-                    <a:pt x="1039987" y="2316364"/>
-                  </a:lnTo>
-                  <a:lnTo>
-                    <a:pt x="966227" y="2298694"/>
-                  </a:lnTo>
-                  <a:lnTo>
-                    <a:pt x="892467" y="2280790"/>
-                  </a:lnTo>
-                  <a:lnTo>
-                    <a:pt x="818707" y="2262649"/>
-                  </a:lnTo>
-                  <a:lnTo>
-                    <a:pt x="744947" y="2244268"/>
-                  </a:lnTo>
-                  <a:lnTo>
-                    <a:pt x="671187" y="2225645"/>
-                  </a:lnTo>
-                  <a:lnTo>
-                    <a:pt x="597427" y="2206775"/>
-                  </a:lnTo>
-                  <a:lnTo>
-                    <a:pt x="523667" y="2187655"/>
-                  </a:lnTo>
-                  <a:lnTo>
-                    <a:pt x="449907" y="2168283"/>
-                  </a:lnTo>
-                  <a:lnTo>
-                    <a:pt x="376147" y="2148654"/>
-                  </a:lnTo>
-                  <a:lnTo>
-                    <a:pt x="302387" y="2128766"/>
-                  </a:lnTo>
-                  <a:lnTo>
-                    <a:pt x="228627" y="2108615"/>
-                  </a:lnTo>
-                  <a:lnTo>
-                    <a:pt x="154867" y="2088198"/>
-                  </a:lnTo>
-                  <a:lnTo>
-                    <a:pt x="81107" y="2067510"/>
-                  </a:lnTo>
-                  <a:lnTo>
-                    <a:pt x="7347" y="2046549"/>
-                  </a:lnTo>
-                  <a:lnTo>
-                    <a:pt x="0" y="2044433"/>
+                    <a:pt x="597427" y="6891"/>
+                  </a:lnTo>
+                  <a:lnTo>
+                    <a:pt x="671187" y="133301"/>
+                  </a:lnTo>
+                  <a:lnTo>
+                    <a:pt x="744947" y="255115"/>
+                  </a:lnTo>
+                  <a:lnTo>
+                    <a:pt x="818707" y="372500"/>
+                  </a:lnTo>
+                  <a:lnTo>
+                    <a:pt x="892467" y="485618"/>
+                  </a:lnTo>
+                  <a:lnTo>
+                    <a:pt x="966227" y="594623"/>
+                  </a:lnTo>
+                  <a:lnTo>
+                    <a:pt x="1039987" y="699664"/>
+                  </a:lnTo>
+                  <a:lnTo>
+                    <a:pt x="1113747" y="800887"/>
+                  </a:lnTo>
+                  <a:lnTo>
+                    <a:pt x="1187508" y="898429"/>
+                  </a:lnTo>
+                  <a:lnTo>
+                    <a:pt x="1261268" y="992425"/>
+                  </a:lnTo>
+                  <a:lnTo>
+                    <a:pt x="1335028" y="1083004"/>
+                  </a:lnTo>
+                  <a:lnTo>
+                    <a:pt x="1408788" y="1170289"/>
+                  </a:lnTo>
+                  <a:lnTo>
+                    <a:pt x="1482548" y="1254401"/>
+                  </a:lnTo>
+                  <a:lnTo>
+                    <a:pt x="1556308" y="1335455"/>
+                  </a:lnTo>
+                  <a:lnTo>
+                    <a:pt x="1630068" y="1413561"/>
+                  </a:lnTo>
+                  <a:lnTo>
+                    <a:pt x="1703828" y="1488828"/>
+                  </a:lnTo>
+                  <a:lnTo>
+                    <a:pt x="1777588" y="1561359"/>
+                  </a:lnTo>
+                  <a:lnTo>
+                    <a:pt x="1851348" y="1631252"/>
+                  </a:lnTo>
+                  <a:lnTo>
+                    <a:pt x="1925108" y="1698605"/>
+                  </a:lnTo>
+                  <a:lnTo>
+                    <a:pt x="1998868" y="1763508"/>
+                  </a:lnTo>
+                  <a:lnTo>
+                    <a:pt x="2072628" y="1826052"/>
+                  </a:lnTo>
+                  <a:lnTo>
+                    <a:pt x="2146388" y="1886322"/>
+                  </a:lnTo>
+                  <a:lnTo>
+                    <a:pt x="2220148" y="1944400"/>
+                  </a:lnTo>
+                  <a:lnTo>
+                    <a:pt x="2293908" y="2000367"/>
+                  </a:lnTo>
+                  <a:lnTo>
+                    <a:pt x="2367668" y="2054299"/>
+                  </a:lnTo>
+                  <a:lnTo>
+                    <a:pt x="2441428" y="2106271"/>
+                  </a:lnTo>
+                  <a:lnTo>
+                    <a:pt x="2515188" y="2156352"/>
+                  </a:lnTo>
+                  <a:lnTo>
+                    <a:pt x="2588948" y="2204613"/>
+                  </a:lnTo>
+                  <a:lnTo>
+                    <a:pt x="2662708" y="2251120"/>
+                  </a:lnTo>
+                  <a:lnTo>
+                    <a:pt x="2736468" y="2295935"/>
+                  </a:lnTo>
+                  <a:lnTo>
+                    <a:pt x="2810228" y="2339121"/>
+                  </a:lnTo>
+                  <a:lnTo>
+                    <a:pt x="2883988" y="2380737"/>
+                  </a:lnTo>
+                  <a:lnTo>
+                    <a:pt x="2957748" y="2420840"/>
+                  </a:lnTo>
+                  <a:lnTo>
+                    <a:pt x="3031508" y="2459484"/>
+                  </a:lnTo>
+                  <a:lnTo>
+                    <a:pt x="3105268" y="2496724"/>
+                  </a:lnTo>
+                  <a:lnTo>
+                    <a:pt x="3179028" y="2532610"/>
+                  </a:lnTo>
+                  <a:lnTo>
+                    <a:pt x="3252788" y="2567191"/>
+                  </a:lnTo>
+                  <a:lnTo>
+                    <a:pt x="3326548" y="2600515"/>
+                  </a:lnTo>
+                  <a:lnTo>
+                    <a:pt x="3400308" y="2632627"/>
+                  </a:lnTo>
+                  <a:lnTo>
+                    <a:pt x="3474068" y="2657590"/>
+                  </a:lnTo>
+                  <a:lnTo>
+                    <a:pt x="3547828" y="2668372"/>
+                  </a:lnTo>
+                  <a:lnTo>
+                    <a:pt x="3621588" y="2679013"/>
+                  </a:lnTo>
+                  <a:lnTo>
+                    <a:pt x="3695348" y="2689516"/>
+                  </a:lnTo>
+                  <a:lnTo>
+                    <a:pt x="3769108" y="2699881"/>
+                  </a:lnTo>
+                  <a:lnTo>
+                    <a:pt x="3842868" y="2710111"/>
+                  </a:lnTo>
+                  <a:lnTo>
+                    <a:pt x="3916628" y="2720208"/>
+                  </a:lnTo>
+                  <a:lnTo>
+                    <a:pt x="3990388" y="2730173"/>
+                  </a:lnTo>
+                  <a:lnTo>
+                    <a:pt x="4064149" y="2740008"/>
+                  </a:lnTo>
+                  <a:lnTo>
+                    <a:pt x="4137909" y="2749714"/>
+                  </a:lnTo>
+                  <a:lnTo>
+                    <a:pt x="4211669" y="2759294"/>
+                  </a:lnTo>
+                  <a:lnTo>
+                    <a:pt x="4285429" y="2768749"/>
+                  </a:lnTo>
+                  <a:lnTo>
+                    <a:pt x="4359189" y="2778080"/>
+                  </a:lnTo>
+                  <a:lnTo>
+                    <a:pt x="4432949" y="2787290"/>
+                  </a:lnTo>
+                  <a:lnTo>
+                    <a:pt x="4506709" y="2796379"/>
+                  </a:lnTo>
+                  <a:lnTo>
+                    <a:pt x="4580469" y="2805350"/>
+                  </a:lnTo>
+                  <a:lnTo>
+                    <a:pt x="4654229" y="2814204"/>
+                  </a:lnTo>
+                  <a:lnTo>
+                    <a:pt x="4727989" y="2822942"/>
+                  </a:lnTo>
+                  <a:lnTo>
+                    <a:pt x="4801749" y="2831566"/>
+                  </a:lnTo>
+                  <a:lnTo>
+                    <a:pt x="4875509" y="2840078"/>
+                  </a:lnTo>
+                  <a:lnTo>
+                    <a:pt x="4949269" y="2848478"/>
+                  </a:lnTo>
+                  <a:lnTo>
+                    <a:pt x="5023029" y="2856769"/>
+                  </a:lnTo>
+                  <a:lnTo>
+                    <a:pt x="5096789" y="2864952"/>
+                  </a:lnTo>
+                  <a:lnTo>
+                    <a:pt x="5170549" y="2873028"/>
+                  </a:lnTo>
+                  <a:lnTo>
+                    <a:pt x="5244309" y="2880998"/>
+                  </a:lnTo>
+                  <a:lnTo>
+                    <a:pt x="5318069" y="2888865"/>
+                  </a:lnTo>
+                  <a:lnTo>
+                    <a:pt x="5391829" y="2896628"/>
+                  </a:lnTo>
+                  <a:lnTo>
+                    <a:pt x="5465589" y="2904291"/>
+                  </a:lnTo>
+                  <a:lnTo>
+                    <a:pt x="5539349" y="2911853"/>
+                  </a:lnTo>
+                  <a:lnTo>
+                    <a:pt x="5613109" y="2919317"/>
+                  </a:lnTo>
+                  <a:lnTo>
+                    <a:pt x="5686869" y="2926683"/>
+                  </a:lnTo>
+                  <a:lnTo>
+                    <a:pt x="5760629" y="2933954"/>
+                  </a:lnTo>
+                  <a:lnTo>
+                    <a:pt x="5834389" y="2941129"/>
+                  </a:lnTo>
+                  <a:lnTo>
+                    <a:pt x="5908149" y="2948211"/>
+                  </a:lnTo>
+                  <a:lnTo>
+                    <a:pt x="5981909" y="2955200"/>
+                  </a:lnTo>
+                  <a:lnTo>
+                    <a:pt x="6055669" y="2962098"/>
+                  </a:lnTo>
+                  <a:lnTo>
+                    <a:pt x="6129429" y="2968906"/>
+                  </a:lnTo>
+                  <a:lnTo>
+                    <a:pt x="6203189" y="2975625"/>
+                  </a:lnTo>
+                  <a:lnTo>
+                    <a:pt x="6276949" y="2982257"/>
+                  </a:lnTo>
+                  <a:lnTo>
+                    <a:pt x="6350709" y="2988802"/>
+                  </a:lnTo>
+                  <a:lnTo>
+                    <a:pt x="6424469" y="2995261"/>
+                  </a:lnTo>
+                  <a:lnTo>
+                    <a:pt x="6498229" y="3001636"/>
+                  </a:lnTo>
+                  <a:lnTo>
+                    <a:pt x="6571989" y="3007928"/>
+                  </a:lnTo>
+                  <a:lnTo>
+                    <a:pt x="6645749" y="3014138"/>
+                  </a:lnTo>
+                  <a:lnTo>
+                    <a:pt x="6719509" y="3020267"/>
+                  </a:lnTo>
+                  <a:lnTo>
+                    <a:pt x="6793269" y="3026316"/>
+                  </a:lnTo>
+                  <a:lnTo>
+                    <a:pt x="6867029" y="3032286"/>
+                  </a:lnTo>
+                  <a:lnTo>
+                    <a:pt x="6940789" y="3038178"/>
+                  </a:lnTo>
+                  <a:lnTo>
+                    <a:pt x="7014550" y="3043993"/>
+                  </a:lnTo>
+                  <a:lnTo>
+                    <a:pt x="7088310" y="3049732"/>
+                  </a:lnTo>
+                  <a:lnTo>
+                    <a:pt x="7162070" y="3055396"/>
+                  </a:lnTo>
+                  <a:lnTo>
+                    <a:pt x="7235830" y="3060987"/>
+                  </a:lnTo>
+                  <a:lnTo>
+                    <a:pt x="7235830" y="3359691"/>
+                  </a:lnTo>
+                  <a:lnTo>
+                    <a:pt x="7162070" y="3355010"/>
+                  </a:lnTo>
+                  <a:lnTo>
+                    <a:pt x="7088310" y="3350153"/>
+                  </a:lnTo>
+                  <a:lnTo>
+                    <a:pt x="7014550" y="3345113"/>
+                  </a:lnTo>
+                  <a:lnTo>
+                    <a:pt x="6940789" y="3339882"/>
+                  </a:lnTo>
+                  <a:lnTo>
+                    <a:pt x="6867029" y="3334454"/>
+                  </a:lnTo>
+                  <a:lnTo>
+                    <a:pt x="6793269" y="3328821"/>
+                  </a:lnTo>
+                  <a:lnTo>
+                    <a:pt x="6719509" y="3322976"/>
+                  </a:lnTo>
+                  <a:lnTo>
+                    <a:pt x="6645749" y="3316910"/>
+                  </a:lnTo>
+                  <a:lnTo>
+                    <a:pt x="6571989" y="3310616"/>
+                  </a:lnTo>
+                  <a:lnTo>
+                    <a:pt x="6498229" y="3304084"/>
+                  </a:lnTo>
+                  <a:lnTo>
+                    <a:pt x="6424469" y="3297305"/>
+                  </a:lnTo>
+                  <a:lnTo>
+                    <a:pt x="6350709" y="3290271"/>
+                  </a:lnTo>
+                  <a:lnTo>
+                    <a:pt x="6276949" y="3282971"/>
+                  </a:lnTo>
+                  <a:lnTo>
+                    <a:pt x="6203189" y="3275396"/>
+                  </a:lnTo>
+                  <a:lnTo>
+                    <a:pt x="6129429" y="3267535"/>
+                  </a:lnTo>
+                  <a:lnTo>
+                    <a:pt x="6055669" y="3259378"/>
+                  </a:lnTo>
+                  <a:lnTo>
+                    <a:pt x="5981909" y="3250912"/>
+                  </a:lnTo>
+                  <a:lnTo>
+                    <a:pt x="5908149" y="3242128"/>
+                  </a:lnTo>
+                  <a:lnTo>
+                    <a:pt x="5834389" y="3233011"/>
+                  </a:lnTo>
+                  <a:lnTo>
+                    <a:pt x="5760629" y="3223551"/>
+                  </a:lnTo>
+                  <a:lnTo>
+                    <a:pt x="5686869" y="3213734"/>
+                  </a:lnTo>
+                  <a:lnTo>
+                    <a:pt x="5613109" y="3203547"/>
+                  </a:lnTo>
+                  <a:lnTo>
+                    <a:pt x="5539349" y="3192975"/>
+                  </a:lnTo>
+                  <a:lnTo>
+                    <a:pt x="5465589" y="3182005"/>
+                  </a:lnTo>
+                  <a:lnTo>
+                    <a:pt x="5391829" y="3170620"/>
+                  </a:lnTo>
+                  <a:lnTo>
+                    <a:pt x="5318069" y="3158806"/>
+                  </a:lnTo>
+                  <a:lnTo>
+                    <a:pt x="5244309" y="3146546"/>
+                  </a:lnTo>
+                  <a:lnTo>
+                    <a:pt x="5170549" y="3133824"/>
+                  </a:lnTo>
+                  <a:lnTo>
+                    <a:pt x="5096789" y="3120621"/>
+                  </a:lnTo>
+                  <a:lnTo>
+                    <a:pt x="5023029" y="3106921"/>
+                  </a:lnTo>
+                  <a:lnTo>
+                    <a:pt x="4949269" y="3092704"/>
+                  </a:lnTo>
+                  <a:lnTo>
+                    <a:pt x="4875509" y="3077950"/>
+                  </a:lnTo>
+                  <a:lnTo>
+                    <a:pt x="4801749" y="3062639"/>
+                  </a:lnTo>
+                  <a:lnTo>
+                    <a:pt x="4727989" y="3046751"/>
+                  </a:lnTo>
+                  <a:lnTo>
+                    <a:pt x="4654229" y="3030264"/>
+                  </a:lnTo>
+                  <a:lnTo>
+                    <a:pt x="4580469" y="3013154"/>
+                  </a:lnTo>
+                  <a:lnTo>
+                    <a:pt x="4506709" y="2995399"/>
+                  </a:lnTo>
+                  <a:lnTo>
+                    <a:pt x="4432949" y="2976974"/>
+                  </a:lnTo>
+                  <a:lnTo>
+                    <a:pt x="4359189" y="2957854"/>
+                  </a:lnTo>
+                  <a:lnTo>
+                    <a:pt x="4285429" y="2938012"/>
+                  </a:lnTo>
+                  <a:lnTo>
+                    <a:pt x="4211669" y="2917422"/>
+                  </a:lnTo>
+                  <a:lnTo>
+                    <a:pt x="4137909" y="2896055"/>
+                  </a:lnTo>
+                  <a:lnTo>
+                    <a:pt x="4064149" y="2873882"/>
+                  </a:lnTo>
+                  <a:lnTo>
+                    <a:pt x="3990388" y="2850872"/>
+                  </a:lnTo>
+                  <a:lnTo>
+                    <a:pt x="3916628" y="2826994"/>
+                  </a:lnTo>
+                  <a:lnTo>
+                    <a:pt x="3842868" y="2802215"/>
+                  </a:lnTo>
+                  <a:lnTo>
+                    <a:pt x="3769108" y="2776501"/>
+                  </a:lnTo>
+                  <a:lnTo>
+                    <a:pt x="3695348" y="2749817"/>
+                  </a:lnTo>
+                  <a:lnTo>
+                    <a:pt x="3621588" y="2722127"/>
+                  </a:lnTo>
+                  <a:lnTo>
+                    <a:pt x="3547828" y="2693391"/>
+                  </a:lnTo>
+                  <a:lnTo>
+                    <a:pt x="3474068" y="2663572"/>
+                  </a:lnTo>
+                  <a:lnTo>
+                    <a:pt x="3400308" y="2646665"/>
+                  </a:lnTo>
+                  <a:lnTo>
+                    <a:pt x="3326548" y="2635596"/>
+                  </a:lnTo>
+                  <a:lnTo>
+                    <a:pt x="3252788" y="2624380"/>
+                  </a:lnTo>
+                  <a:lnTo>
+                    <a:pt x="3179028" y="2613016"/>
+                  </a:lnTo>
+                  <a:lnTo>
+                    <a:pt x="3105268" y="2601502"/>
+                  </a:lnTo>
+                  <a:lnTo>
+                    <a:pt x="3031508" y="2589836"/>
+                  </a:lnTo>
+                  <a:lnTo>
+                    <a:pt x="2957748" y="2578015"/>
+                  </a:lnTo>
+                  <a:lnTo>
+                    <a:pt x="2883988" y="2566038"/>
+                  </a:lnTo>
+                  <a:lnTo>
+                    <a:pt x="2810228" y="2553903"/>
+                  </a:lnTo>
+                  <a:lnTo>
+                    <a:pt x="2736468" y="2541607"/>
+                  </a:lnTo>
+                  <a:lnTo>
+                    <a:pt x="2662708" y="2529149"/>
+                  </a:lnTo>
+                  <a:lnTo>
+                    <a:pt x="2588948" y="2516525"/>
+                  </a:lnTo>
+                  <a:lnTo>
+                    <a:pt x="2515188" y="2503735"/>
+                  </a:lnTo>
+                  <a:lnTo>
+                    <a:pt x="2441428" y="2490776"/>
+                  </a:lnTo>
+                  <a:lnTo>
+                    <a:pt x="2367668" y="2477645"/>
+                  </a:lnTo>
+                  <a:lnTo>
+                    <a:pt x="2293908" y="2464341"/>
+                  </a:lnTo>
+                  <a:lnTo>
+                    <a:pt x="2220148" y="2450861"/>
+                  </a:lnTo>
+                  <a:lnTo>
+                    <a:pt x="2146388" y="2437203"/>
+                  </a:lnTo>
+                  <a:lnTo>
+                    <a:pt x="2072628" y="2423364"/>
+                  </a:lnTo>
+                  <a:lnTo>
+                    <a:pt x="1998868" y="2409342"/>
+                  </a:lnTo>
+                  <a:lnTo>
+                    <a:pt x="1925108" y="2395134"/>
+                  </a:lnTo>
+                  <a:lnTo>
+                    <a:pt x="1851348" y="2380739"/>
+                  </a:lnTo>
+                  <a:lnTo>
+                    <a:pt x="1777588" y="2366153"/>
+                  </a:lnTo>
+                  <a:lnTo>
+                    <a:pt x="1703828" y="2351375"/>
+                  </a:lnTo>
+                  <a:lnTo>
+                    <a:pt x="1630068" y="2336401"/>
+                  </a:lnTo>
+                  <a:lnTo>
+                    <a:pt x="1556308" y="2321229"/>
+                  </a:lnTo>
+                  <a:lnTo>
+                    <a:pt x="1482548" y="2305856"/>
+                  </a:lnTo>
+                  <a:lnTo>
+                    <a:pt x="1408788" y="2290280"/>
+                  </a:lnTo>
+                  <a:lnTo>
+                    <a:pt x="1335028" y="2274498"/>
+                  </a:lnTo>
+                  <a:lnTo>
+                    <a:pt x="1261268" y="2258508"/>
+                  </a:lnTo>
+                  <a:lnTo>
+                    <a:pt x="1187508" y="2242306"/>
+                  </a:lnTo>
+                  <a:lnTo>
+                    <a:pt x="1113747" y="2225890"/>
+                  </a:lnTo>
+                  <a:lnTo>
+                    <a:pt x="1039987" y="2209256"/>
+                  </a:lnTo>
+                  <a:lnTo>
+                    <a:pt x="966227" y="2192403"/>
+                  </a:lnTo>
+                  <a:lnTo>
+                    <a:pt x="892467" y="2175327"/>
+                  </a:lnTo>
+                  <a:lnTo>
+                    <a:pt x="818707" y="2158025"/>
+                  </a:lnTo>
+                  <a:lnTo>
+                    <a:pt x="744947" y="2140494"/>
+                  </a:lnTo>
+                  <a:lnTo>
+                    <a:pt x="671187" y="2122732"/>
+                  </a:lnTo>
+                  <a:lnTo>
+                    <a:pt x="597427" y="2104734"/>
+                  </a:lnTo>
+                  <a:lnTo>
+                    <a:pt x="523667" y="2086499"/>
+                  </a:lnTo>
+                  <a:lnTo>
+                    <a:pt x="449907" y="2068022"/>
+                  </a:lnTo>
+                  <a:lnTo>
+                    <a:pt x="376147" y="2049301"/>
+                  </a:lnTo>
+                  <a:lnTo>
+                    <a:pt x="302387" y="2030333"/>
+                  </a:lnTo>
+                  <a:lnTo>
+                    <a:pt x="228627" y="2011114"/>
+                  </a:lnTo>
+                  <a:lnTo>
+                    <a:pt x="154867" y="1991640"/>
+                  </a:lnTo>
+                  <a:lnTo>
+                    <a:pt x="81107" y="1971909"/>
+                  </a:lnTo>
+                  <a:lnTo>
+                    <a:pt x="7347" y="1951917"/>
+                  </a:lnTo>
+                  <a:lnTo>
+                    <a:pt x="0" y="1949900"/>
                   </a:lnTo>
                   <a:close/>
                 </a:path>
@@ -3609,288 +3609,288 @@
           </p:nvSpPr>
           <p:spPr>
             <a:xfrm>
-              <a:off x="1411070" y="1896563"/>
-              <a:ext cx="6642277" cy="3209388"/>
+              <a:off x="1411070" y="2073503"/>
+              <a:ext cx="6642277" cy="3060987"/>
             </a:xfrm>
             <a:custGeom>
               <a:avLst/>
               <a:pathLst>
-                <a:path w="6642277" h="3209388">
+                <a:path w="6642277" h="3060987">
                   <a:moveTo>
                     <a:pt x="0" y="0"/>
                   </a:moveTo>
                   <a:lnTo>
-                    <a:pt x="3874" y="7225"/>
-                  </a:lnTo>
-                  <a:lnTo>
-                    <a:pt x="77634" y="139764"/>
-                  </a:lnTo>
-                  <a:lnTo>
-                    <a:pt x="151394" y="267483"/>
-                  </a:lnTo>
-                  <a:lnTo>
-                    <a:pt x="225154" y="390560"/>
-                  </a:lnTo>
-                  <a:lnTo>
-                    <a:pt x="298914" y="509161"/>
-                  </a:lnTo>
-                  <a:lnTo>
-                    <a:pt x="372674" y="623451"/>
-                  </a:lnTo>
-                  <a:lnTo>
-                    <a:pt x="446434" y="733585"/>
-                  </a:lnTo>
-                  <a:lnTo>
-                    <a:pt x="520194" y="839715"/>
-                  </a:lnTo>
-                  <a:lnTo>
-                    <a:pt x="593954" y="941987"/>
-                  </a:lnTo>
-                  <a:lnTo>
-                    <a:pt x="667715" y="1040540"/>
-                  </a:lnTo>
-                  <a:lnTo>
-                    <a:pt x="741475" y="1135509"/>
-                  </a:lnTo>
-                  <a:lnTo>
-                    <a:pt x="815235" y="1227026"/>
-                  </a:lnTo>
-                  <a:lnTo>
-                    <a:pt x="888995" y="1315216"/>
-                  </a:lnTo>
-                  <a:lnTo>
-                    <a:pt x="962755" y="1400199"/>
-                  </a:lnTo>
-                  <a:lnTo>
-                    <a:pt x="1036515" y="1482093"/>
-                  </a:lnTo>
-                  <a:lnTo>
-                    <a:pt x="1110275" y="1561009"/>
-                  </a:lnTo>
-                  <a:lnTo>
-                    <a:pt x="1184035" y="1637056"/>
-                  </a:lnTo>
-                  <a:lnTo>
-                    <a:pt x="1257795" y="1710338"/>
-                  </a:lnTo>
-                  <a:lnTo>
-                    <a:pt x="1331555" y="1780955"/>
-                  </a:lnTo>
-                  <a:lnTo>
-                    <a:pt x="1405315" y="1849005"/>
-                  </a:lnTo>
-                  <a:lnTo>
-                    <a:pt x="1479075" y="1914581"/>
-                  </a:lnTo>
-                  <a:lnTo>
-                    <a:pt x="1552835" y="1977773"/>
-                  </a:lnTo>
-                  <a:lnTo>
-                    <a:pt x="1626595" y="2038668"/>
-                  </a:lnTo>
-                  <a:lnTo>
-                    <a:pt x="1700355" y="2097348"/>
-                  </a:lnTo>
-                  <a:lnTo>
-                    <a:pt x="1774115" y="2153895"/>
-                  </a:lnTo>
-                  <a:lnTo>
-                    <a:pt x="1847875" y="2208386"/>
-                  </a:lnTo>
-                  <a:lnTo>
-                    <a:pt x="1921635" y="2260895"/>
-                  </a:lnTo>
-                  <a:lnTo>
-                    <a:pt x="1995395" y="2311496"/>
-                  </a:lnTo>
-                  <a:lnTo>
-                    <a:pt x="2069155" y="2360257"/>
-                  </a:lnTo>
-                  <a:lnTo>
-                    <a:pt x="2142915" y="2407245"/>
-                  </a:lnTo>
-                  <a:lnTo>
-                    <a:pt x="2216675" y="2452525"/>
-                  </a:lnTo>
-                  <a:lnTo>
-                    <a:pt x="2290435" y="2496158"/>
-                  </a:lnTo>
-                  <a:lnTo>
-                    <a:pt x="2364195" y="2538205"/>
-                  </a:lnTo>
-                  <a:lnTo>
-                    <a:pt x="2437955" y="2578724"/>
-                  </a:lnTo>
-                  <a:lnTo>
-                    <a:pt x="2511715" y="2617769"/>
-                  </a:lnTo>
-                  <a:lnTo>
-                    <a:pt x="2585475" y="2655394"/>
-                  </a:lnTo>
-                  <a:lnTo>
-                    <a:pt x="2659235" y="2691652"/>
-                  </a:lnTo>
-                  <a:lnTo>
-                    <a:pt x="2732995" y="2726591"/>
-                  </a:lnTo>
-                  <a:lnTo>
-                    <a:pt x="2806755" y="2760260"/>
-                  </a:lnTo>
-                  <a:lnTo>
-                    <a:pt x="2880515" y="2786433"/>
-                  </a:lnTo>
-                  <a:lnTo>
-                    <a:pt x="2954275" y="2797738"/>
-                  </a:lnTo>
-                  <a:lnTo>
-                    <a:pt x="3028035" y="2808896"/>
-                  </a:lnTo>
-                  <a:lnTo>
-                    <a:pt x="3101795" y="2819907"/>
-                  </a:lnTo>
-                  <a:lnTo>
-                    <a:pt x="3175555" y="2830775"/>
-                  </a:lnTo>
-                  <a:lnTo>
-                    <a:pt x="3249315" y="2841501"/>
-                  </a:lnTo>
-                  <a:lnTo>
-                    <a:pt x="3323075" y="2852088"/>
-                  </a:lnTo>
-                  <a:lnTo>
-                    <a:pt x="3396835" y="2862536"/>
-                  </a:lnTo>
-                  <a:lnTo>
-                    <a:pt x="3470595" y="2872847"/>
-                  </a:lnTo>
-                  <a:lnTo>
-                    <a:pt x="3544355" y="2883024"/>
-                  </a:lnTo>
-                  <a:lnTo>
-                    <a:pt x="3618116" y="2893069"/>
-                  </a:lnTo>
-                  <a:lnTo>
-                    <a:pt x="3691876" y="2902982"/>
-                  </a:lnTo>
-                  <a:lnTo>
-                    <a:pt x="3765636" y="2912766"/>
-                  </a:lnTo>
-                  <a:lnTo>
-                    <a:pt x="3839396" y="2922422"/>
-                  </a:lnTo>
-                  <a:lnTo>
-                    <a:pt x="3913156" y="2931952"/>
-                  </a:lnTo>
-                  <a:lnTo>
-                    <a:pt x="3986916" y="2941358"/>
-                  </a:lnTo>
-                  <a:lnTo>
-                    <a:pt x="4060676" y="2950641"/>
-                  </a:lnTo>
-                  <a:lnTo>
-                    <a:pt x="4134436" y="2959802"/>
-                  </a:lnTo>
-                  <a:lnTo>
-                    <a:pt x="4208196" y="2968845"/>
-                  </a:lnTo>
-                  <a:lnTo>
-                    <a:pt x="4281956" y="2977769"/>
-                  </a:lnTo>
-                  <a:lnTo>
-                    <a:pt x="4355716" y="2986577"/>
-                  </a:lnTo>
-                  <a:lnTo>
-                    <a:pt x="4429476" y="2995269"/>
-                  </a:lnTo>
-                  <a:lnTo>
-                    <a:pt x="4503236" y="3003849"/>
-                  </a:lnTo>
-                  <a:lnTo>
-                    <a:pt x="4576996" y="3012316"/>
-                  </a:lnTo>
-                  <a:lnTo>
-                    <a:pt x="4650756" y="3020673"/>
-                  </a:lnTo>
-                  <a:lnTo>
-                    <a:pt x="4724516" y="3028921"/>
-                  </a:lnTo>
-                  <a:lnTo>
-                    <a:pt x="4798276" y="3037061"/>
-                  </a:lnTo>
-                  <a:lnTo>
-                    <a:pt x="4872036" y="3045095"/>
-                  </a:lnTo>
-                  <a:lnTo>
-                    <a:pt x="4945796" y="3053024"/>
-                  </a:lnTo>
-                  <a:lnTo>
-                    <a:pt x="5019556" y="3060850"/>
-                  </a:lnTo>
-                  <a:lnTo>
-                    <a:pt x="5093316" y="3068573"/>
-                  </a:lnTo>
-                  <a:lnTo>
-                    <a:pt x="5167076" y="3076196"/>
-                  </a:lnTo>
-                  <a:lnTo>
-                    <a:pt x="5240836" y="3083719"/>
-                  </a:lnTo>
-                  <a:lnTo>
-                    <a:pt x="5314596" y="3091144"/>
-                  </a:lnTo>
-                  <a:lnTo>
-                    <a:pt x="5388356" y="3098472"/>
-                  </a:lnTo>
-                  <a:lnTo>
-                    <a:pt x="5462116" y="3105705"/>
-                  </a:lnTo>
-                  <a:lnTo>
-                    <a:pt x="5535876" y="3112843"/>
-                  </a:lnTo>
-                  <a:lnTo>
-                    <a:pt x="5609636" y="3119888"/>
-                  </a:lnTo>
-                  <a:lnTo>
-                    <a:pt x="5683396" y="3126841"/>
-                  </a:lnTo>
-                  <a:lnTo>
-                    <a:pt x="5757156" y="3133703"/>
-                  </a:lnTo>
-                  <a:lnTo>
-                    <a:pt x="5830916" y="3140476"/>
-                  </a:lnTo>
-                  <a:lnTo>
-                    <a:pt x="5904676" y="3147160"/>
-                  </a:lnTo>
-                  <a:lnTo>
-                    <a:pt x="5978436" y="3153757"/>
-                  </a:lnTo>
-                  <a:lnTo>
-                    <a:pt x="6052196" y="3160268"/>
-                  </a:lnTo>
-                  <a:lnTo>
-                    <a:pt x="6125956" y="3166694"/>
-                  </a:lnTo>
-                  <a:lnTo>
-                    <a:pt x="6199716" y="3173036"/>
-                  </a:lnTo>
-                  <a:lnTo>
-                    <a:pt x="6273476" y="3179295"/>
-                  </a:lnTo>
-                  <a:lnTo>
-                    <a:pt x="6347236" y="3185473"/>
-                  </a:lnTo>
-                  <a:lnTo>
-                    <a:pt x="6420996" y="3191570"/>
-                  </a:lnTo>
-                  <a:lnTo>
-                    <a:pt x="6494757" y="3197587"/>
-                  </a:lnTo>
-                  <a:lnTo>
-                    <a:pt x="6568517" y="3203526"/>
-                  </a:lnTo>
-                  <a:lnTo>
-                    <a:pt x="6642277" y="3209388"/>
+                    <a:pt x="3874" y="6891"/>
+                  </a:lnTo>
+                  <a:lnTo>
+                    <a:pt x="77634" y="133301"/>
+                  </a:lnTo>
+                  <a:lnTo>
+                    <a:pt x="151394" y="255115"/>
+                  </a:lnTo>
+                  <a:lnTo>
+                    <a:pt x="225154" y="372500"/>
+                  </a:lnTo>
+                  <a:lnTo>
+                    <a:pt x="298914" y="485618"/>
+                  </a:lnTo>
+                  <a:lnTo>
+                    <a:pt x="372674" y="594623"/>
+                  </a:lnTo>
+                  <a:lnTo>
+                    <a:pt x="446434" y="699664"/>
+                  </a:lnTo>
+                  <a:lnTo>
+                    <a:pt x="520194" y="800887"/>
+                  </a:lnTo>
+                  <a:lnTo>
+                    <a:pt x="593954" y="898429"/>
+                  </a:lnTo>
+                  <a:lnTo>
+                    <a:pt x="667715" y="992425"/>
+                  </a:lnTo>
+                  <a:lnTo>
+                    <a:pt x="741475" y="1083004"/>
+                  </a:lnTo>
+                  <a:lnTo>
+                    <a:pt x="815235" y="1170289"/>
+                  </a:lnTo>
+                  <a:lnTo>
+                    <a:pt x="888995" y="1254401"/>
+                  </a:lnTo>
+                  <a:lnTo>
+                    <a:pt x="962755" y="1335455"/>
+                  </a:lnTo>
+                  <a:lnTo>
+                    <a:pt x="1036515" y="1413561"/>
+                  </a:lnTo>
+                  <a:lnTo>
+                    <a:pt x="1110275" y="1488828"/>
+                  </a:lnTo>
+                  <a:lnTo>
+                    <a:pt x="1184035" y="1561359"/>
+                  </a:lnTo>
+                  <a:lnTo>
+                    <a:pt x="1257795" y="1631252"/>
+                  </a:lnTo>
+                  <a:lnTo>
+                    <a:pt x="1331555" y="1698605"/>
+                  </a:lnTo>
+                  <a:lnTo>
+                    <a:pt x="1405315" y="1763508"/>
+                  </a:lnTo>
+                  <a:lnTo>
+                    <a:pt x="1479075" y="1826052"/>
+                  </a:lnTo>
+                  <a:lnTo>
+                    <a:pt x="1552835" y="1886322"/>
+                  </a:lnTo>
+                  <a:lnTo>
+                    <a:pt x="1626595" y="1944400"/>
+                  </a:lnTo>
+                  <a:lnTo>
+                    <a:pt x="1700355" y="2000367"/>
+                  </a:lnTo>
+                  <a:lnTo>
+                    <a:pt x="1774115" y="2054299"/>
+                  </a:lnTo>
+                  <a:lnTo>
+                    <a:pt x="1847875" y="2106271"/>
+                  </a:lnTo>
+                  <a:lnTo>
+                    <a:pt x="1921635" y="2156352"/>
+                  </a:lnTo>
+                  <a:lnTo>
+                    <a:pt x="1995395" y="2204613"/>
+                  </a:lnTo>
+                  <a:lnTo>
+                    <a:pt x="2069155" y="2251120"/>
+                  </a:lnTo>
+                  <a:lnTo>
+                    <a:pt x="2142915" y="2295935"/>
+                  </a:lnTo>
+                  <a:lnTo>
+                    <a:pt x="2216675" y="2339121"/>
+                  </a:lnTo>
+                  <a:lnTo>
+                    <a:pt x="2290435" y="2380737"/>
+                  </a:lnTo>
+                  <a:lnTo>
+                    <a:pt x="2364195" y="2420840"/>
+                  </a:lnTo>
+                  <a:lnTo>
+                    <a:pt x="2437955" y="2459484"/>
+                  </a:lnTo>
+                  <a:lnTo>
+                    <a:pt x="2511715" y="2496724"/>
+                  </a:lnTo>
+                  <a:lnTo>
+                    <a:pt x="2585475" y="2532610"/>
+                  </a:lnTo>
+                  <a:lnTo>
+                    <a:pt x="2659235" y="2567191"/>
+                  </a:lnTo>
+                  <a:lnTo>
+                    <a:pt x="2732995" y="2600515"/>
+                  </a:lnTo>
+                  <a:lnTo>
+                    <a:pt x="2806755" y="2632627"/>
+                  </a:lnTo>
+                  <a:lnTo>
+                    <a:pt x="2880515" y="2657590"/>
+                  </a:lnTo>
+                  <a:lnTo>
+                    <a:pt x="2954275" y="2668372"/>
+                  </a:lnTo>
+                  <a:lnTo>
+                    <a:pt x="3028035" y="2679013"/>
+                  </a:lnTo>
+                  <a:lnTo>
+                    <a:pt x="3101795" y="2689516"/>
+                  </a:lnTo>
+                  <a:lnTo>
+                    <a:pt x="3175555" y="2699881"/>
+                  </a:lnTo>
+                  <a:lnTo>
+                    <a:pt x="3249315" y="2710111"/>
+                  </a:lnTo>
+                  <a:lnTo>
+                    <a:pt x="3323075" y="2720208"/>
+                  </a:lnTo>
+                  <a:lnTo>
+                    <a:pt x="3396835" y="2730173"/>
+                  </a:lnTo>
+                  <a:lnTo>
+                    <a:pt x="3470595" y="2740008"/>
+                  </a:lnTo>
+                  <a:lnTo>
+                    <a:pt x="3544355" y="2749714"/>
+                  </a:lnTo>
+                  <a:lnTo>
+                    <a:pt x="3618116" y="2759294"/>
+                  </a:lnTo>
+                  <a:lnTo>
+                    <a:pt x="3691876" y="2768749"/>
+                  </a:lnTo>
+                  <a:lnTo>
+                    <a:pt x="3765636" y="2778080"/>
+                  </a:lnTo>
+                  <a:lnTo>
+                    <a:pt x="3839396" y="2787290"/>
+                  </a:lnTo>
+                  <a:lnTo>
+                    <a:pt x="3913156" y="2796379"/>
+                  </a:lnTo>
+                  <a:lnTo>
+                    <a:pt x="3986916" y="2805350"/>
+                  </a:lnTo>
+                  <a:lnTo>
+                    <a:pt x="4060676" y="2814204"/>
+                  </a:lnTo>
+                  <a:lnTo>
+                    <a:pt x="4134436" y="2822942"/>
+                  </a:lnTo>
+                  <a:lnTo>
+                    <a:pt x="4208196" y="2831566"/>
+                  </a:lnTo>
+                  <a:lnTo>
+                    <a:pt x="4281956" y="2840078"/>
+                  </a:lnTo>
+                  <a:lnTo>
+                    <a:pt x="4355716" y="2848478"/>
+                  </a:lnTo>
+                  <a:lnTo>
+                    <a:pt x="4429476" y="2856769"/>
+                  </a:lnTo>
+                  <a:lnTo>
+                    <a:pt x="4503236" y="2864952"/>
+                  </a:lnTo>
+                  <a:lnTo>
+                    <a:pt x="4576996" y="2873028"/>
+                  </a:lnTo>
+                  <a:lnTo>
+                    <a:pt x="4650756" y="2880998"/>
+                  </a:lnTo>
+                  <a:lnTo>
+                    <a:pt x="4724516" y="2888865"/>
+                  </a:lnTo>
+                  <a:lnTo>
+                    <a:pt x="4798276" y="2896628"/>
+                  </a:lnTo>
+                  <a:lnTo>
+                    <a:pt x="4872036" y="2904291"/>
+                  </a:lnTo>
+                  <a:lnTo>
+                    <a:pt x="4945796" y="2911853"/>
+                  </a:lnTo>
+                  <a:lnTo>
+                    <a:pt x="5019556" y="2919317"/>
+                  </a:lnTo>
+                  <a:lnTo>
+                    <a:pt x="5093316" y="2926683"/>
+                  </a:lnTo>
+                  <a:lnTo>
+                    <a:pt x="5167076" y="2933954"/>
+                  </a:lnTo>
+                  <a:lnTo>
+                    <a:pt x="5240836" y="2941129"/>
+                  </a:lnTo>
+                  <a:lnTo>
+                    <a:pt x="5314596" y="2948211"/>
+                  </a:lnTo>
+                  <a:lnTo>
+                    <a:pt x="5388356" y="2955200"/>
+                  </a:lnTo>
+                  <a:lnTo>
+                    <a:pt x="5462116" y="2962098"/>
+                  </a:lnTo>
+                  <a:lnTo>
+                    <a:pt x="5535876" y="2968906"/>
+                  </a:lnTo>
+                  <a:lnTo>
+                    <a:pt x="5609636" y="2975625"/>
+                  </a:lnTo>
+                  <a:lnTo>
+                    <a:pt x="5683396" y="2982257"/>
+                  </a:lnTo>
+                  <a:lnTo>
+                    <a:pt x="5757156" y="2988802"/>
+                  </a:lnTo>
+                  <a:lnTo>
+                    <a:pt x="5830916" y="2995261"/>
+                  </a:lnTo>
+                  <a:lnTo>
+                    <a:pt x="5904676" y="3001636"/>
+                  </a:lnTo>
+                  <a:lnTo>
+                    <a:pt x="5978436" y="3007928"/>
+                  </a:lnTo>
+                  <a:lnTo>
+                    <a:pt x="6052196" y="3014138"/>
+                  </a:lnTo>
+                  <a:lnTo>
+                    <a:pt x="6125956" y="3020267"/>
+                  </a:lnTo>
+                  <a:lnTo>
+                    <a:pt x="6199716" y="3026316"/>
+                  </a:lnTo>
+                  <a:lnTo>
+                    <a:pt x="6273476" y="3032286"/>
+                  </a:lnTo>
+                  <a:lnTo>
+                    <a:pt x="6347236" y="3038178"/>
+                  </a:lnTo>
+                  <a:lnTo>
+                    <a:pt x="6420996" y="3043993"/>
+                  </a:lnTo>
+                  <a:lnTo>
+                    <a:pt x="6494757" y="3049732"/>
+                  </a:lnTo>
+                  <a:lnTo>
+                    <a:pt x="6568517" y="3055396"/>
+                  </a:lnTo>
+                  <a:lnTo>
+                    <a:pt x="6642277" y="3060987"/>
                   </a:lnTo>
                 </a:path>
               </a:pathLst>
@@ -3910,309 +3910,309 @@
           </p:nvSpPr>
           <p:spPr>
             <a:xfrm>
-              <a:off x="817517" y="3940997"/>
-              <a:ext cx="7235830" cy="1478139"/>
+              <a:off x="817517" y="4023403"/>
+              <a:ext cx="7235830" cy="1409791"/>
             </a:xfrm>
             <a:custGeom>
               <a:avLst/>
               <a:pathLst>
-                <a:path w="7235830" h="1478139">
+                <a:path w="7235830" h="1409791">
                   <a:moveTo>
-                    <a:pt x="7235830" y="1478139"/>
+                    <a:pt x="7235830" y="1409791"/>
                   </a:moveTo>
                   <a:lnTo>
-                    <a:pt x="7162070" y="1473232"/>
-                  </a:lnTo>
-                  <a:lnTo>
-                    <a:pt x="7088310" y="1468139"/>
-                  </a:lnTo>
-                  <a:lnTo>
-                    <a:pt x="7014550" y="1462854"/>
-                  </a:lnTo>
-                  <a:lnTo>
-                    <a:pt x="6940789" y="1457370"/>
-                  </a:lnTo>
-                  <a:lnTo>
-                    <a:pt x="6867029" y="1451679"/>
-                  </a:lnTo>
-                  <a:lnTo>
-                    <a:pt x="6793269" y="1445773"/>
-                  </a:lnTo>
-                  <a:lnTo>
-                    <a:pt x="6719509" y="1439645"/>
-                  </a:lnTo>
-                  <a:lnTo>
-                    <a:pt x="6645749" y="1433285"/>
-                  </a:lnTo>
-                  <a:lnTo>
-                    <a:pt x="6571989" y="1426685"/>
-                  </a:lnTo>
-                  <a:lnTo>
-                    <a:pt x="6498229" y="1419836"/>
-                  </a:lnTo>
-                  <a:lnTo>
-                    <a:pt x="6424469" y="1412729"/>
-                  </a:lnTo>
-                  <a:lnTo>
-                    <a:pt x="6350709" y="1405354"/>
-                  </a:lnTo>
-                  <a:lnTo>
-                    <a:pt x="6276949" y="1397700"/>
-                  </a:lnTo>
-                  <a:lnTo>
-                    <a:pt x="6203189" y="1389758"/>
-                  </a:lnTo>
-                  <a:lnTo>
-                    <a:pt x="6129429" y="1381516"/>
-                  </a:lnTo>
-                  <a:lnTo>
-                    <a:pt x="6055669" y="1372963"/>
-                  </a:lnTo>
-                  <a:lnTo>
-                    <a:pt x="5981909" y="1364087"/>
-                  </a:lnTo>
-                  <a:lnTo>
-                    <a:pt x="5908149" y="1354876"/>
-                  </a:lnTo>
-                  <a:lnTo>
-                    <a:pt x="5834389" y="1345318"/>
-                  </a:lnTo>
-                  <a:lnTo>
-                    <a:pt x="5760629" y="1335400"/>
-                  </a:lnTo>
-                  <a:lnTo>
-                    <a:pt x="5686869" y="1325107"/>
-                  </a:lnTo>
-                  <a:lnTo>
-                    <a:pt x="5613109" y="1314425"/>
-                  </a:lnTo>
-                  <a:lnTo>
-                    <a:pt x="5539349" y="1303341"/>
-                  </a:lnTo>
-                  <a:lnTo>
-                    <a:pt x="5465589" y="1291839"/>
-                  </a:lnTo>
-                  <a:lnTo>
-                    <a:pt x="5391829" y="1279902"/>
-                  </a:lnTo>
-                  <a:lnTo>
-                    <a:pt x="5318069" y="1267515"/>
-                  </a:lnTo>
-                  <a:lnTo>
-                    <a:pt x="5244309" y="1254661"/>
-                  </a:lnTo>
-                  <a:lnTo>
-                    <a:pt x="5170549" y="1241322"/>
-                  </a:lnTo>
-                  <a:lnTo>
-                    <a:pt x="5096789" y="1227480"/>
-                  </a:lnTo>
-                  <a:lnTo>
-                    <a:pt x="5023029" y="1213115"/>
-                  </a:lnTo>
-                  <a:lnTo>
-                    <a:pt x="4949269" y="1198208"/>
-                  </a:lnTo>
-                  <a:lnTo>
-                    <a:pt x="4875509" y="1182739"/>
-                  </a:lnTo>
-                  <a:lnTo>
-                    <a:pt x="4801749" y="1166686"/>
-                  </a:lnTo>
-                  <a:lnTo>
-                    <a:pt x="4727989" y="1150028"/>
-                  </a:lnTo>
-                  <a:lnTo>
-                    <a:pt x="4654229" y="1132741"/>
-                  </a:lnTo>
-                  <a:lnTo>
-                    <a:pt x="4580469" y="1114802"/>
-                  </a:lnTo>
-                  <a:lnTo>
-                    <a:pt x="4506709" y="1096186"/>
-                  </a:lnTo>
-                  <a:lnTo>
-                    <a:pt x="4432949" y="1076868"/>
-                  </a:lnTo>
-                  <a:lnTo>
-                    <a:pt x="4359189" y="1056821"/>
-                  </a:lnTo>
-                  <a:lnTo>
-                    <a:pt x="4285429" y="1036017"/>
-                  </a:lnTo>
-                  <a:lnTo>
-                    <a:pt x="4211669" y="1014429"/>
-                  </a:lnTo>
-                  <a:lnTo>
-                    <a:pt x="4137909" y="992026"/>
-                  </a:lnTo>
-                  <a:lnTo>
-                    <a:pt x="4064149" y="968777"/>
-                  </a:lnTo>
-                  <a:lnTo>
-                    <a:pt x="3990388" y="944652"/>
-                  </a:lnTo>
-                  <a:lnTo>
-                    <a:pt x="3916628" y="919616"/>
-                  </a:lnTo>
-                  <a:lnTo>
-                    <a:pt x="3842868" y="893636"/>
-                  </a:lnTo>
-                  <a:lnTo>
-                    <a:pt x="3769108" y="866676"/>
-                  </a:lnTo>
-                  <a:lnTo>
-                    <a:pt x="3695348" y="838698"/>
-                  </a:lnTo>
-                  <a:lnTo>
-                    <a:pt x="3621588" y="809665"/>
-                  </a:lnTo>
-                  <a:lnTo>
-                    <a:pt x="3547828" y="779537"/>
-                  </a:lnTo>
-                  <a:lnTo>
-                    <a:pt x="3474068" y="748271"/>
-                  </a:lnTo>
-                  <a:lnTo>
-                    <a:pt x="3400308" y="730545"/>
-                  </a:lnTo>
-                  <a:lnTo>
-                    <a:pt x="3326548" y="718939"/>
-                  </a:lnTo>
-                  <a:lnTo>
-                    <a:pt x="3252788" y="707180"/>
-                  </a:lnTo>
-                  <a:lnTo>
-                    <a:pt x="3179028" y="695265"/>
-                  </a:lnTo>
-                  <a:lnTo>
-                    <a:pt x="3105268" y="683193"/>
-                  </a:lnTo>
-                  <a:lnTo>
-                    <a:pt x="3031508" y="670961"/>
-                  </a:lnTo>
-                  <a:lnTo>
-                    <a:pt x="2957748" y="658567"/>
-                  </a:lnTo>
-                  <a:lnTo>
-                    <a:pt x="2883988" y="646009"/>
-                  </a:lnTo>
-                  <a:lnTo>
-                    <a:pt x="2810228" y="633286"/>
-                  </a:lnTo>
-                  <a:lnTo>
-                    <a:pt x="2736468" y="620394"/>
-                  </a:lnTo>
-                  <a:lnTo>
-                    <a:pt x="2662708" y="607331"/>
-                  </a:lnTo>
-                  <a:lnTo>
-                    <a:pt x="2588948" y="594096"/>
-                  </a:lnTo>
-                  <a:lnTo>
-                    <a:pt x="2515188" y="580686"/>
-                  </a:lnTo>
-                  <a:lnTo>
-                    <a:pt x="2441428" y="567098"/>
-                  </a:lnTo>
-                  <a:lnTo>
-                    <a:pt x="2367668" y="553331"/>
-                  </a:lnTo>
-                  <a:lnTo>
-                    <a:pt x="2293908" y="539382"/>
-                  </a:lnTo>
-                  <a:lnTo>
-                    <a:pt x="2220148" y="525248"/>
-                  </a:lnTo>
-                  <a:lnTo>
-                    <a:pt x="2146388" y="510928"/>
-                  </a:lnTo>
-                  <a:lnTo>
-                    <a:pt x="2072628" y="496418"/>
-                  </a:lnTo>
-                  <a:lnTo>
-                    <a:pt x="1998868" y="481716"/>
-                  </a:lnTo>
-                  <a:lnTo>
-                    <a:pt x="1925108" y="466820"/>
-                  </a:lnTo>
-                  <a:lnTo>
-                    <a:pt x="1851348" y="451727"/>
-                  </a:lnTo>
-                  <a:lnTo>
-                    <a:pt x="1777588" y="436434"/>
-                  </a:lnTo>
-                  <a:lnTo>
-                    <a:pt x="1703828" y="420939"/>
-                  </a:lnTo>
-                  <a:lnTo>
-                    <a:pt x="1630068" y="405239"/>
-                  </a:lnTo>
-                  <a:lnTo>
-                    <a:pt x="1556308" y="389331"/>
-                  </a:lnTo>
-                  <a:lnTo>
-                    <a:pt x="1482548" y="373213"/>
-                  </a:lnTo>
-                  <a:lnTo>
-                    <a:pt x="1408788" y="356882"/>
-                  </a:lnTo>
-                  <a:lnTo>
-                    <a:pt x="1335028" y="340335"/>
-                  </a:lnTo>
-                  <a:lnTo>
-                    <a:pt x="1261268" y="323570"/>
-                  </a:lnTo>
-                  <a:lnTo>
-                    <a:pt x="1187508" y="306582"/>
-                  </a:lnTo>
-                  <a:lnTo>
-                    <a:pt x="1113747" y="289370"/>
-                  </a:lnTo>
-                  <a:lnTo>
-                    <a:pt x="1039987" y="271930"/>
-                  </a:lnTo>
-                  <a:lnTo>
-                    <a:pt x="966227" y="254260"/>
-                  </a:lnTo>
-                  <a:lnTo>
-                    <a:pt x="892467" y="236356"/>
-                  </a:lnTo>
-                  <a:lnTo>
-                    <a:pt x="818707" y="218215"/>
-                  </a:lnTo>
-                  <a:lnTo>
-                    <a:pt x="744947" y="199834"/>
-                  </a:lnTo>
-                  <a:lnTo>
-                    <a:pt x="671187" y="181211"/>
-                  </a:lnTo>
-                  <a:lnTo>
-                    <a:pt x="597427" y="162341"/>
-                  </a:lnTo>
-                  <a:lnTo>
-                    <a:pt x="523667" y="143221"/>
-                  </a:lnTo>
-                  <a:lnTo>
-                    <a:pt x="449907" y="123849"/>
-                  </a:lnTo>
-                  <a:lnTo>
-                    <a:pt x="376147" y="104220"/>
-                  </a:lnTo>
-                  <a:lnTo>
-                    <a:pt x="302387" y="84332"/>
-                  </a:lnTo>
-                  <a:lnTo>
-                    <a:pt x="228627" y="64181"/>
-                  </a:lnTo>
-                  <a:lnTo>
-                    <a:pt x="154867" y="43764"/>
-                  </a:lnTo>
-                  <a:lnTo>
-                    <a:pt x="81107" y="23076"/>
-                  </a:lnTo>
-                  <a:lnTo>
-                    <a:pt x="7347" y="2115"/>
+                    <a:pt x="7162070" y="1405110"/>
+                  </a:lnTo>
+                  <a:lnTo>
+                    <a:pt x="7088310" y="1400253"/>
+                  </a:lnTo>
+                  <a:lnTo>
+                    <a:pt x="7014550" y="1395212"/>
+                  </a:lnTo>
+                  <a:lnTo>
+                    <a:pt x="6940789" y="1389982"/>
+                  </a:lnTo>
+                  <a:lnTo>
+                    <a:pt x="6867029" y="1384554"/>
+                  </a:lnTo>
+                  <a:lnTo>
+                    <a:pt x="6793269" y="1378921"/>
+                  </a:lnTo>
+                  <a:lnTo>
+                    <a:pt x="6719509" y="1373076"/>
+                  </a:lnTo>
+                  <a:lnTo>
+                    <a:pt x="6645749" y="1367010"/>
+                  </a:lnTo>
+                  <a:lnTo>
+                    <a:pt x="6571989" y="1360716"/>
+                  </a:lnTo>
+                  <a:lnTo>
+                    <a:pt x="6498229" y="1354184"/>
+                  </a:lnTo>
+                  <a:lnTo>
+                    <a:pt x="6424469" y="1347405"/>
+                  </a:lnTo>
+                  <a:lnTo>
+                    <a:pt x="6350709" y="1340371"/>
+                  </a:lnTo>
+                  <a:lnTo>
+                    <a:pt x="6276949" y="1333071"/>
+                  </a:lnTo>
+                  <a:lnTo>
+                    <a:pt x="6203189" y="1325496"/>
+                  </a:lnTo>
+                  <a:lnTo>
+                    <a:pt x="6129429" y="1317635"/>
+                  </a:lnTo>
+                  <a:lnTo>
+                    <a:pt x="6055669" y="1309477"/>
+                  </a:lnTo>
+                  <a:lnTo>
+                    <a:pt x="5981909" y="1301012"/>
+                  </a:lnTo>
+                  <a:lnTo>
+                    <a:pt x="5908149" y="1292227"/>
+                  </a:lnTo>
+                  <a:lnTo>
+                    <a:pt x="5834389" y="1283111"/>
+                  </a:lnTo>
+                  <a:lnTo>
+                    <a:pt x="5760629" y="1273651"/>
+                  </a:lnTo>
+                  <a:lnTo>
+                    <a:pt x="5686869" y="1263834"/>
+                  </a:lnTo>
+                  <a:lnTo>
+                    <a:pt x="5613109" y="1253647"/>
+                  </a:lnTo>
+                  <a:lnTo>
+                    <a:pt x="5539349" y="1243075"/>
+                  </a:lnTo>
+                  <a:lnTo>
+                    <a:pt x="5465589" y="1232104"/>
+                  </a:lnTo>
+                  <a:lnTo>
+                    <a:pt x="5391829" y="1220720"/>
+                  </a:lnTo>
+                  <a:lnTo>
+                    <a:pt x="5318069" y="1208906"/>
+                  </a:lnTo>
+                  <a:lnTo>
+                    <a:pt x="5244309" y="1196646"/>
+                  </a:lnTo>
+                  <a:lnTo>
+                    <a:pt x="5170549" y="1183924"/>
+                  </a:lnTo>
+                  <a:lnTo>
+                    <a:pt x="5096789" y="1170721"/>
+                  </a:lnTo>
+                  <a:lnTo>
+                    <a:pt x="5023029" y="1157021"/>
+                  </a:lnTo>
+                  <a:lnTo>
+                    <a:pt x="4949269" y="1142804"/>
+                  </a:lnTo>
+                  <a:lnTo>
+                    <a:pt x="4875509" y="1128050"/>
+                  </a:lnTo>
+                  <a:lnTo>
+                    <a:pt x="4801749" y="1112739"/>
+                  </a:lnTo>
+                  <a:lnTo>
+                    <a:pt x="4727989" y="1096851"/>
+                  </a:lnTo>
+                  <a:lnTo>
+                    <a:pt x="4654229" y="1080364"/>
+                  </a:lnTo>
+                  <a:lnTo>
+                    <a:pt x="4580469" y="1063254"/>
+                  </a:lnTo>
+                  <a:lnTo>
+                    <a:pt x="4506709" y="1045499"/>
+                  </a:lnTo>
+                  <a:lnTo>
+                    <a:pt x="4432949" y="1027074"/>
+                  </a:lnTo>
+                  <a:lnTo>
+                    <a:pt x="4359189" y="1007954"/>
+                  </a:lnTo>
+                  <a:lnTo>
+                    <a:pt x="4285429" y="988112"/>
+                  </a:lnTo>
+                  <a:lnTo>
+                    <a:pt x="4211669" y="967522"/>
+                  </a:lnTo>
+                  <a:lnTo>
+                    <a:pt x="4137909" y="946155"/>
+                  </a:lnTo>
+                  <a:lnTo>
+                    <a:pt x="4064149" y="923981"/>
+                  </a:lnTo>
+                  <a:lnTo>
+                    <a:pt x="3990388" y="900972"/>
+                  </a:lnTo>
+                  <a:lnTo>
+                    <a:pt x="3916628" y="877094"/>
+                  </a:lnTo>
+                  <a:lnTo>
+                    <a:pt x="3842868" y="852315"/>
+                  </a:lnTo>
+                  <a:lnTo>
+                    <a:pt x="3769108" y="826601"/>
+                  </a:lnTo>
+                  <a:lnTo>
+                    <a:pt x="3695348" y="799917"/>
+                  </a:lnTo>
+                  <a:lnTo>
+                    <a:pt x="3621588" y="772226"/>
+                  </a:lnTo>
+                  <a:lnTo>
+                    <a:pt x="3547828" y="743491"/>
+                  </a:lnTo>
+                  <a:lnTo>
+                    <a:pt x="3474068" y="713671"/>
+                  </a:lnTo>
+                  <a:lnTo>
+                    <a:pt x="3400308" y="696765"/>
+                  </a:lnTo>
+                  <a:lnTo>
+                    <a:pt x="3326548" y="685696"/>
+                  </a:lnTo>
+                  <a:lnTo>
+                    <a:pt x="3252788" y="674480"/>
+                  </a:lnTo>
+                  <a:lnTo>
+                    <a:pt x="3179028" y="663116"/>
+                  </a:lnTo>
+                  <a:lnTo>
+                    <a:pt x="3105268" y="651602"/>
+                  </a:lnTo>
+                  <a:lnTo>
+                    <a:pt x="3031508" y="639936"/>
+                  </a:lnTo>
+                  <a:lnTo>
+                    <a:pt x="2957748" y="628115"/>
+                  </a:lnTo>
+                  <a:lnTo>
+                    <a:pt x="2883988" y="616138"/>
+                  </a:lnTo>
+                  <a:lnTo>
+                    <a:pt x="2810228" y="604003"/>
+                  </a:lnTo>
+                  <a:lnTo>
+                    <a:pt x="2736468" y="591707"/>
+                  </a:lnTo>
+                  <a:lnTo>
+                    <a:pt x="2662708" y="579248"/>
+                  </a:lnTo>
+                  <a:lnTo>
+                    <a:pt x="2588948" y="566625"/>
+                  </a:lnTo>
+                  <a:lnTo>
+                    <a:pt x="2515188" y="553835"/>
+                  </a:lnTo>
+                  <a:lnTo>
+                    <a:pt x="2441428" y="540876"/>
+                  </a:lnTo>
+                  <a:lnTo>
+                    <a:pt x="2367668" y="527745"/>
+                  </a:lnTo>
+                  <a:lnTo>
+                    <a:pt x="2293908" y="514441"/>
+                  </a:lnTo>
+                  <a:lnTo>
+                    <a:pt x="2220148" y="500961"/>
+                  </a:lnTo>
+                  <a:lnTo>
+                    <a:pt x="2146388" y="487303"/>
+                  </a:lnTo>
+                  <a:lnTo>
+                    <a:pt x="2072628" y="473464"/>
+                  </a:lnTo>
+                  <a:lnTo>
+                    <a:pt x="1998868" y="459442"/>
+                  </a:lnTo>
+                  <a:lnTo>
+                    <a:pt x="1925108" y="445234"/>
+                  </a:lnTo>
+                  <a:lnTo>
+                    <a:pt x="1851348" y="430839"/>
+                  </a:lnTo>
+                  <a:lnTo>
+                    <a:pt x="1777588" y="416253"/>
+                  </a:lnTo>
+                  <a:lnTo>
+                    <a:pt x="1703828" y="401475"/>
+                  </a:lnTo>
+                  <a:lnTo>
+                    <a:pt x="1630068" y="386501"/>
+                  </a:lnTo>
+                  <a:lnTo>
+                    <a:pt x="1556308" y="371329"/>
+                  </a:lnTo>
+                  <a:lnTo>
+                    <a:pt x="1482548" y="355956"/>
+                  </a:lnTo>
+                  <a:lnTo>
+                    <a:pt x="1408788" y="340380"/>
+                  </a:lnTo>
+                  <a:lnTo>
+                    <a:pt x="1335028" y="324598"/>
+                  </a:lnTo>
+                  <a:lnTo>
+                    <a:pt x="1261268" y="308608"/>
+                  </a:lnTo>
+                  <a:lnTo>
+                    <a:pt x="1187508" y="292406"/>
+                  </a:lnTo>
+                  <a:lnTo>
+                    <a:pt x="1113747" y="275990"/>
+                  </a:lnTo>
+                  <a:lnTo>
+                    <a:pt x="1039987" y="259356"/>
+                  </a:lnTo>
+                  <a:lnTo>
+                    <a:pt x="966227" y="242503"/>
+                  </a:lnTo>
+                  <a:lnTo>
+                    <a:pt x="892467" y="225427"/>
+                  </a:lnTo>
+                  <a:lnTo>
+                    <a:pt x="818707" y="208125"/>
+                  </a:lnTo>
+                  <a:lnTo>
+                    <a:pt x="744947" y="190594"/>
+                  </a:lnTo>
+                  <a:lnTo>
+                    <a:pt x="671187" y="172832"/>
+                  </a:lnTo>
+                  <a:lnTo>
+                    <a:pt x="597427" y="154834"/>
+                  </a:lnTo>
+                  <a:lnTo>
+                    <a:pt x="523667" y="136599"/>
+                  </a:lnTo>
+                  <a:lnTo>
+                    <a:pt x="449907" y="118122"/>
+                  </a:lnTo>
+                  <a:lnTo>
+                    <a:pt x="376147" y="99401"/>
+                  </a:lnTo>
+                  <a:lnTo>
+                    <a:pt x="302387" y="80433"/>
+                  </a:lnTo>
+                  <a:lnTo>
+                    <a:pt x="228627" y="61214"/>
+                  </a:lnTo>
+                  <a:lnTo>
+                    <a:pt x="154867" y="41740"/>
+                  </a:lnTo>
+                  <a:lnTo>
+                    <a:pt x="81107" y="22009"/>
+                  </a:lnTo>
+                  <a:lnTo>
+                    <a:pt x="7347" y="2017"/>
                   </a:lnTo>
                   <a:lnTo>
                     <a:pt x="0" y="0"/>
@@ -4235,312 +4235,312 @@
           </p:nvSpPr>
           <p:spPr>
             <a:xfrm>
-              <a:off x="817517" y="2736054"/>
-              <a:ext cx="7235830" cy="2573039"/>
+              <a:off x="817517" y="2874176"/>
+              <a:ext cx="7235830" cy="2454062"/>
             </a:xfrm>
             <a:custGeom>
               <a:avLst/>
               <a:pathLst>
-                <a:path w="7235830" h="2573039">
+                <a:path w="7235830" h="2454062">
                   <a:moveTo>
                     <a:pt x="0" y="0"/>
                   </a:moveTo>
                   <a:lnTo>
-                    <a:pt x="7347" y="7100"/>
-                  </a:lnTo>
-                  <a:lnTo>
-                    <a:pt x="81107" y="76617"/>
-                  </a:lnTo>
-                  <a:lnTo>
-                    <a:pt x="154867" y="144412"/>
-                  </a:lnTo>
-                  <a:lnTo>
-                    <a:pt x="228627" y="210527"/>
-                  </a:lnTo>
-                  <a:lnTo>
-                    <a:pt x="302387" y="275004"/>
-                  </a:lnTo>
-                  <a:lnTo>
-                    <a:pt x="376147" y="337884"/>
-                  </a:lnTo>
-                  <a:lnTo>
-                    <a:pt x="449907" y="399206"/>
-                  </a:lnTo>
-                  <a:lnTo>
-                    <a:pt x="523667" y="459009"/>
-                  </a:lnTo>
-                  <a:lnTo>
-                    <a:pt x="597427" y="517330"/>
-                  </a:lnTo>
-                  <a:lnTo>
-                    <a:pt x="671187" y="574207"/>
-                  </a:lnTo>
-                  <a:lnTo>
-                    <a:pt x="744947" y="629674"/>
-                  </a:lnTo>
-                  <a:lnTo>
-                    <a:pt x="818707" y="683768"/>
-                  </a:lnTo>
-                  <a:lnTo>
-                    <a:pt x="892467" y="736521"/>
-                  </a:lnTo>
-                  <a:lnTo>
-                    <a:pt x="966227" y="787967"/>
-                  </a:lnTo>
-                  <a:lnTo>
-                    <a:pt x="1039987" y="838139"/>
-                  </a:lnTo>
-                  <a:lnTo>
-                    <a:pt x="1113747" y="887068"/>
-                  </a:lnTo>
-                  <a:lnTo>
-                    <a:pt x="1187508" y="934784"/>
-                  </a:lnTo>
-                  <a:lnTo>
-                    <a:pt x="1261268" y="981319"/>
-                  </a:lnTo>
-                  <a:lnTo>
-                    <a:pt x="1335028" y="1026700"/>
-                  </a:lnTo>
-                  <a:lnTo>
-                    <a:pt x="1408788" y="1070958"/>
-                  </a:lnTo>
-                  <a:lnTo>
-                    <a:pt x="1482548" y="1114119"/>
-                  </a:lnTo>
-                  <a:lnTo>
-                    <a:pt x="1556308" y="1156211"/>
-                  </a:lnTo>
-                  <a:lnTo>
-                    <a:pt x="1630068" y="1197259"/>
-                  </a:lnTo>
-                  <a:lnTo>
-                    <a:pt x="1703828" y="1237291"/>
-                  </a:lnTo>
-                  <a:lnTo>
-                    <a:pt x="1777588" y="1276332"/>
-                  </a:lnTo>
-                  <a:lnTo>
-                    <a:pt x="1851348" y="1314405"/>
-                  </a:lnTo>
-                  <a:lnTo>
-                    <a:pt x="1925108" y="1351535"/>
-                  </a:lnTo>
-                  <a:lnTo>
-                    <a:pt x="1998868" y="1387745"/>
-                  </a:lnTo>
-                  <a:lnTo>
-                    <a:pt x="2072628" y="1423057"/>
-                  </a:lnTo>
-                  <a:lnTo>
-                    <a:pt x="2146388" y="1457496"/>
-                  </a:lnTo>
-                  <a:lnTo>
-                    <a:pt x="2220148" y="1491080"/>
-                  </a:lnTo>
-                  <a:lnTo>
-                    <a:pt x="2293908" y="1523833"/>
-                  </a:lnTo>
-                  <a:lnTo>
-                    <a:pt x="2367668" y="1555775"/>
-                  </a:lnTo>
-                  <a:lnTo>
-                    <a:pt x="2441428" y="1586925"/>
-                  </a:lnTo>
-                  <a:lnTo>
-                    <a:pt x="2515188" y="1617303"/>
-                  </a:lnTo>
-                  <a:lnTo>
-                    <a:pt x="2588948" y="1646929"/>
-                  </a:lnTo>
-                  <a:lnTo>
-                    <a:pt x="2662708" y="1675821"/>
-                  </a:lnTo>
-                  <a:lnTo>
-                    <a:pt x="2736468" y="1703997"/>
-                  </a:lnTo>
-                  <a:lnTo>
-                    <a:pt x="2810228" y="1731475"/>
-                  </a:lnTo>
-                  <a:lnTo>
-                    <a:pt x="2883988" y="1758273"/>
-                  </a:lnTo>
-                  <a:lnTo>
-                    <a:pt x="2957748" y="1784406"/>
-                  </a:lnTo>
-                  <a:lnTo>
-                    <a:pt x="3031508" y="1809892"/>
-                  </a:lnTo>
-                  <a:lnTo>
-                    <a:pt x="3105268" y="1834747"/>
-                  </a:lnTo>
-                  <a:lnTo>
-                    <a:pt x="3179028" y="1858986"/>
-                  </a:lnTo>
-                  <a:lnTo>
-                    <a:pt x="3252788" y="1882624"/>
-                  </a:lnTo>
-                  <a:lnTo>
-                    <a:pt x="3326548" y="1905677"/>
-                  </a:lnTo>
-                  <a:lnTo>
-                    <a:pt x="3400308" y="1928159"/>
-                  </a:lnTo>
-                  <a:lnTo>
-                    <a:pt x="3474068" y="1950084"/>
-                  </a:lnTo>
-                  <a:lnTo>
-                    <a:pt x="3547828" y="1971465"/>
-                  </a:lnTo>
-                  <a:lnTo>
-                    <a:pt x="3621588" y="1992317"/>
-                  </a:lnTo>
-                  <a:lnTo>
-                    <a:pt x="3695348" y="2012652"/>
-                  </a:lnTo>
-                  <a:lnTo>
-                    <a:pt x="3769108" y="2032484"/>
-                  </a:lnTo>
-                  <a:lnTo>
-                    <a:pt x="3842868" y="2051824"/>
-                  </a:lnTo>
-                  <a:lnTo>
-                    <a:pt x="3916628" y="2070685"/>
-                  </a:lnTo>
-                  <a:lnTo>
-                    <a:pt x="3990388" y="2089079"/>
-                  </a:lnTo>
-                  <a:lnTo>
-                    <a:pt x="4064149" y="2107017"/>
-                  </a:lnTo>
-                  <a:lnTo>
-                    <a:pt x="4137909" y="2124511"/>
-                  </a:lnTo>
-                  <a:lnTo>
-                    <a:pt x="4211669" y="2141571"/>
-                  </a:lnTo>
-                  <a:lnTo>
-                    <a:pt x="4285429" y="2158209"/>
-                  </a:lnTo>
-                  <a:lnTo>
-                    <a:pt x="4359189" y="2174434"/>
-                  </a:lnTo>
-                  <a:lnTo>
-                    <a:pt x="4432949" y="2190258"/>
-                  </a:lnTo>
-                  <a:lnTo>
-                    <a:pt x="4506709" y="2205689"/>
-                  </a:lnTo>
-                  <a:lnTo>
-                    <a:pt x="4580469" y="2220739"/>
-                  </a:lnTo>
-                  <a:lnTo>
-                    <a:pt x="4654229" y="2235415"/>
-                  </a:lnTo>
-                  <a:lnTo>
-                    <a:pt x="4727989" y="2249728"/>
-                  </a:lnTo>
-                  <a:lnTo>
-                    <a:pt x="4801749" y="2263686"/>
-                  </a:lnTo>
-                  <a:lnTo>
-                    <a:pt x="4875509" y="2277298"/>
-                  </a:lnTo>
-                  <a:lnTo>
-                    <a:pt x="4949269" y="2290574"/>
-                  </a:lnTo>
-                  <a:lnTo>
-                    <a:pt x="5023029" y="2303520"/>
-                  </a:lnTo>
-                  <a:lnTo>
-                    <a:pt x="5096789" y="2316145"/>
-                  </a:lnTo>
-                  <a:lnTo>
-                    <a:pt x="5170549" y="2328458"/>
-                  </a:lnTo>
-                  <a:lnTo>
-                    <a:pt x="5244309" y="2340466"/>
-                  </a:lnTo>
-                  <a:lnTo>
-                    <a:pt x="5318069" y="2352176"/>
-                  </a:lnTo>
-                  <a:lnTo>
-                    <a:pt x="5391829" y="2363596"/>
-                  </a:lnTo>
-                  <a:lnTo>
-                    <a:pt x="5465589" y="2374734"/>
-                  </a:lnTo>
-                  <a:lnTo>
-                    <a:pt x="5539349" y="2385595"/>
-                  </a:lnTo>
-                  <a:lnTo>
-                    <a:pt x="5613109" y="2396187"/>
-                  </a:lnTo>
-                  <a:lnTo>
-                    <a:pt x="5686869" y="2406517"/>
-                  </a:lnTo>
-                  <a:lnTo>
-                    <a:pt x="5760629" y="2416591"/>
-                  </a:lnTo>
-                  <a:lnTo>
-                    <a:pt x="5834389" y="2426415"/>
-                  </a:lnTo>
-                  <a:lnTo>
-                    <a:pt x="5908149" y="2435996"/>
-                  </a:lnTo>
-                  <a:lnTo>
-                    <a:pt x="5981909" y="2445340"/>
-                  </a:lnTo>
-                  <a:lnTo>
-                    <a:pt x="6055669" y="2454452"/>
-                  </a:lnTo>
-                  <a:lnTo>
-                    <a:pt x="6129429" y="2463339"/>
-                  </a:lnTo>
-                  <a:lnTo>
-                    <a:pt x="6203189" y="2472005"/>
-                  </a:lnTo>
-                  <a:lnTo>
-                    <a:pt x="6276949" y="2480456"/>
-                  </a:lnTo>
-                  <a:lnTo>
-                    <a:pt x="6350709" y="2488699"/>
-                  </a:lnTo>
-                  <a:lnTo>
-                    <a:pt x="6424469" y="2496736"/>
-                  </a:lnTo>
-                  <a:lnTo>
-                    <a:pt x="6498229" y="2504575"/>
-                  </a:lnTo>
-                  <a:lnTo>
-                    <a:pt x="6571989" y="2512220"/>
-                  </a:lnTo>
-                  <a:lnTo>
-                    <a:pt x="6645749" y="2519675"/>
-                  </a:lnTo>
-                  <a:lnTo>
-                    <a:pt x="6719509" y="2526946"/>
-                  </a:lnTo>
-                  <a:lnTo>
-                    <a:pt x="6793269" y="2534036"/>
-                  </a:lnTo>
-                  <a:lnTo>
-                    <a:pt x="6867029" y="2540951"/>
-                  </a:lnTo>
-                  <a:lnTo>
-                    <a:pt x="6940789" y="2547695"/>
-                  </a:lnTo>
-                  <a:lnTo>
-                    <a:pt x="7014550" y="2554271"/>
-                  </a:lnTo>
-                  <a:lnTo>
-                    <a:pt x="7088310" y="2560684"/>
-                  </a:lnTo>
-                  <a:lnTo>
-                    <a:pt x="7162070" y="2566939"/>
-                  </a:lnTo>
-                  <a:lnTo>
-                    <a:pt x="7235830" y="2573039"/>
+                    <a:pt x="7347" y="6772"/>
+                  </a:lnTo>
+                  <a:lnTo>
+                    <a:pt x="81107" y="73074"/>
+                  </a:lnTo>
+                  <a:lnTo>
+                    <a:pt x="154867" y="137734"/>
+                  </a:lnTo>
+                  <a:lnTo>
+                    <a:pt x="228627" y="200792"/>
+                  </a:lnTo>
+                  <a:lnTo>
+                    <a:pt x="302387" y="262288"/>
+                  </a:lnTo>
+                  <a:lnTo>
+                    <a:pt x="376147" y="322260"/>
+                  </a:lnTo>
+                  <a:lnTo>
+                    <a:pt x="449907" y="380747"/>
+                  </a:lnTo>
+                  <a:lnTo>
+                    <a:pt x="523667" y="437785"/>
+                  </a:lnTo>
+                  <a:lnTo>
+                    <a:pt x="597427" y="493409"/>
+                  </a:lnTo>
+                  <a:lnTo>
+                    <a:pt x="671187" y="547656"/>
+                  </a:lnTo>
+                  <a:lnTo>
+                    <a:pt x="744947" y="600558"/>
+                  </a:lnTo>
+                  <a:lnTo>
+                    <a:pt x="818707" y="652150"/>
+                  </a:lnTo>
+                  <a:lnTo>
+                    <a:pt x="892467" y="702464"/>
+                  </a:lnTo>
+                  <a:lnTo>
+                    <a:pt x="966227" y="751532"/>
+                  </a:lnTo>
+                  <a:lnTo>
+                    <a:pt x="1039987" y="799384"/>
+                  </a:lnTo>
+                  <a:lnTo>
+                    <a:pt x="1113747" y="846050"/>
+                  </a:lnTo>
+                  <a:lnTo>
+                    <a:pt x="1187508" y="891560"/>
+                  </a:lnTo>
+                  <a:lnTo>
+                    <a:pt x="1261268" y="935943"/>
+                  </a:lnTo>
+                  <a:lnTo>
+                    <a:pt x="1335028" y="979226"/>
+                  </a:lnTo>
+                  <a:lnTo>
+                    <a:pt x="1408788" y="1021437"/>
+                  </a:lnTo>
+                  <a:lnTo>
+                    <a:pt x="1482548" y="1062602"/>
+                  </a:lnTo>
+                  <a:lnTo>
+                    <a:pt x="1556308" y="1102748"/>
+                  </a:lnTo>
+                  <a:lnTo>
+                    <a:pt x="1630068" y="1141899"/>
+                  </a:lnTo>
+                  <a:lnTo>
+                    <a:pt x="1703828" y="1180079"/>
+                  </a:lnTo>
+                  <a:lnTo>
+                    <a:pt x="1777588" y="1217315"/>
+                  </a:lnTo>
+                  <a:lnTo>
+                    <a:pt x="1851348" y="1253627"/>
+                  </a:lnTo>
+                  <a:lnTo>
+                    <a:pt x="1925108" y="1289040"/>
+                  </a:lnTo>
+                  <a:lnTo>
+                    <a:pt x="1998868" y="1323576"/>
+                  </a:lnTo>
+                  <a:lnTo>
+                    <a:pt x="2072628" y="1357256"/>
+                  </a:lnTo>
+                  <a:lnTo>
+                    <a:pt x="2146388" y="1390101"/>
+                  </a:lnTo>
+                  <a:lnTo>
+                    <a:pt x="2220148" y="1422133"/>
+                  </a:lnTo>
+                  <a:lnTo>
+                    <a:pt x="2293908" y="1453372"/>
+                  </a:lnTo>
+                  <a:lnTo>
+                    <a:pt x="2367668" y="1483836"/>
+                  </a:lnTo>
+                  <a:lnTo>
+                    <a:pt x="2441428" y="1513546"/>
+                  </a:lnTo>
+                  <a:lnTo>
+                    <a:pt x="2515188" y="1542520"/>
+                  </a:lnTo>
+                  <a:lnTo>
+                    <a:pt x="2588948" y="1570776"/>
+                  </a:lnTo>
+                  <a:lnTo>
+                    <a:pt x="2662708" y="1598332"/>
+                  </a:lnTo>
+                  <a:lnTo>
+                    <a:pt x="2736468" y="1625205"/>
+                  </a:lnTo>
+                  <a:lnTo>
+                    <a:pt x="2810228" y="1651413"/>
+                  </a:lnTo>
+                  <a:lnTo>
+                    <a:pt x="2883988" y="1676971"/>
+                  </a:lnTo>
+                  <a:lnTo>
+                    <a:pt x="2957748" y="1701896"/>
+                  </a:lnTo>
+                  <a:lnTo>
+                    <a:pt x="3031508" y="1726203"/>
+                  </a:lnTo>
+                  <a:lnTo>
+                    <a:pt x="3105268" y="1749909"/>
+                  </a:lnTo>
+                  <a:lnTo>
+                    <a:pt x="3179028" y="1773027"/>
+                  </a:lnTo>
+                  <a:lnTo>
+                    <a:pt x="3252788" y="1795572"/>
+                  </a:lnTo>
+                  <a:lnTo>
+                    <a:pt x="3326548" y="1817559"/>
+                  </a:lnTo>
+                  <a:lnTo>
+                    <a:pt x="3400308" y="1839001"/>
+                  </a:lnTo>
+                  <a:lnTo>
+                    <a:pt x="3474068" y="1859912"/>
+                  </a:lnTo>
+                  <a:lnTo>
+                    <a:pt x="3547828" y="1880305"/>
+                  </a:lnTo>
+                  <a:lnTo>
+                    <a:pt x="3621588" y="1900193"/>
+                  </a:lnTo>
+                  <a:lnTo>
+                    <a:pt x="3695348" y="1919588"/>
+                  </a:lnTo>
+                  <a:lnTo>
+                    <a:pt x="3769108" y="1938502"/>
+                  </a:lnTo>
+                  <a:lnTo>
+                    <a:pt x="3842868" y="1956948"/>
+                  </a:lnTo>
+                  <a:lnTo>
+                    <a:pt x="3916628" y="1974937"/>
+                  </a:lnTo>
+                  <a:lnTo>
+                    <a:pt x="3990388" y="1992481"/>
+                  </a:lnTo>
+                  <a:lnTo>
+                    <a:pt x="4064149" y="2009589"/>
+                  </a:lnTo>
+                  <a:lnTo>
+                    <a:pt x="4137909" y="2026274"/>
+                  </a:lnTo>
+                  <a:lnTo>
+                    <a:pt x="4211669" y="2042546"/>
+                  </a:lnTo>
+                  <a:lnTo>
+                    <a:pt x="4285429" y="2058414"/>
+                  </a:lnTo>
+                  <a:lnTo>
+                    <a:pt x="4359189" y="2073889"/>
+                  </a:lnTo>
+                  <a:lnTo>
+                    <a:pt x="4432949" y="2088981"/>
+                  </a:lnTo>
+                  <a:lnTo>
+                    <a:pt x="4506709" y="2103699"/>
+                  </a:lnTo>
+                  <a:lnTo>
+                    <a:pt x="4580469" y="2118052"/>
+                  </a:lnTo>
+                  <a:lnTo>
+                    <a:pt x="4654229" y="2132050"/>
+                  </a:lnTo>
+                  <a:lnTo>
+                    <a:pt x="4727989" y="2145701"/>
+                  </a:lnTo>
+                  <a:lnTo>
+                    <a:pt x="4801749" y="2159014"/>
+                  </a:lnTo>
+                  <a:lnTo>
+                    <a:pt x="4875509" y="2171997"/>
+                  </a:lnTo>
+                  <a:lnTo>
+                    <a:pt x="4949269" y="2184658"/>
+                  </a:lnTo>
+                  <a:lnTo>
+                    <a:pt x="5023029" y="2197006"/>
+                  </a:lnTo>
+                  <a:lnTo>
+                    <a:pt x="5096789" y="2209048"/>
+                  </a:lnTo>
+                  <a:lnTo>
+                    <a:pt x="5170549" y="2220791"/>
+                  </a:lnTo>
+                  <a:lnTo>
+                    <a:pt x="5244309" y="2232244"/>
+                  </a:lnTo>
+                  <a:lnTo>
+                    <a:pt x="5318069" y="2243412"/>
+                  </a:lnTo>
+                  <a:lnTo>
+                    <a:pt x="5391829" y="2254305"/>
+                  </a:lnTo>
+                  <a:lnTo>
+                    <a:pt x="5465589" y="2264927"/>
+                  </a:lnTo>
+                  <a:lnTo>
+                    <a:pt x="5539349" y="2275286"/>
+                  </a:lnTo>
+                  <a:lnTo>
+                    <a:pt x="5613109" y="2285388"/>
+                  </a:lnTo>
+                  <a:lnTo>
+                    <a:pt x="5686869" y="2295241"/>
+                  </a:lnTo>
+                  <a:lnTo>
+                    <a:pt x="5760629" y="2304849"/>
+                  </a:lnTo>
+                  <a:lnTo>
+                    <a:pt x="5834389" y="2314219"/>
+                  </a:lnTo>
+                  <a:lnTo>
+                    <a:pt x="5908149" y="2323357"/>
+                  </a:lnTo>
+                  <a:lnTo>
+                    <a:pt x="5981909" y="2332268"/>
+                  </a:lnTo>
+                  <a:lnTo>
+                    <a:pt x="6055669" y="2340959"/>
+                  </a:lnTo>
+                  <a:lnTo>
+                    <a:pt x="6129429" y="2349435"/>
+                  </a:lnTo>
+                  <a:lnTo>
+                    <a:pt x="6203189" y="2357700"/>
+                  </a:lnTo>
+                  <a:lnTo>
+                    <a:pt x="6276949" y="2365761"/>
+                  </a:lnTo>
+                  <a:lnTo>
+                    <a:pt x="6350709" y="2373622"/>
+                  </a:lnTo>
+                  <a:lnTo>
+                    <a:pt x="6424469" y="2381288"/>
+                  </a:lnTo>
+                  <a:lnTo>
+                    <a:pt x="6498229" y="2388765"/>
+                  </a:lnTo>
+                  <a:lnTo>
+                    <a:pt x="6571989" y="2396056"/>
+                  </a:lnTo>
+                  <a:lnTo>
+                    <a:pt x="6645749" y="2403166"/>
+                  </a:lnTo>
+                  <a:lnTo>
+                    <a:pt x="6719509" y="2410101"/>
+                  </a:lnTo>
+                  <a:lnTo>
+                    <a:pt x="6793269" y="2416863"/>
+                  </a:lnTo>
+                  <a:lnTo>
+                    <a:pt x="6867029" y="2423458"/>
+                  </a:lnTo>
+                  <a:lnTo>
+                    <a:pt x="6940789" y="2429890"/>
+                  </a:lnTo>
+                  <a:lnTo>
+                    <a:pt x="7014550" y="2436162"/>
+                  </a:lnTo>
+                  <a:lnTo>
+                    <a:pt x="7088310" y="2442279"/>
+                  </a:lnTo>
+                  <a:lnTo>
+                    <a:pt x="7162070" y="2448245"/>
+                  </a:lnTo>
+                  <a:lnTo>
+                    <a:pt x="7235830" y="2454062"/>
                   </a:lnTo>
                 </a:path>
               </a:pathLst>
@@ -4569,7 +4569,7 @@
           </p:nvSpPr>
           <p:spPr>
             <a:xfrm>
-              <a:off x="817517" y="4679530"/>
+              <a:off x="817517" y="4727786"/>
               <a:ext cx="7799693" cy="0"/>
             </a:xfrm>
             <a:custGeom>
@@ -4612,15 +4612,15 @@
           </p:nvSpPr>
           <p:spPr>
             <a:xfrm>
-              <a:off x="4269157" y="1896563"/>
-              <a:ext cx="0" cy="3826579"/>
+              <a:off x="4269157" y="2073503"/>
+              <a:ext cx="0" cy="3649639"/>
             </a:xfrm>
             <a:custGeom>
               <a:avLst/>
               <a:pathLst>
-                <a:path w="0" h="3826579">
+                <a:path w="0" h="3649639">
                   <a:moveTo>
-                    <a:pt x="0" y="3826579"/>
+                    <a:pt x="0" y="3649639"/>
                   </a:moveTo>
                   <a:lnTo>
                     <a:pt x="0" y="0"/>
@@ -4655,7 +4655,7 @@
           </p:nvSpPr>
           <p:spPr>
             <a:xfrm>
-              <a:off x="692708" y="5509156"/>
+              <a:off x="692708" y="5517199"/>
               <a:ext cx="62179" cy="80101"/>
             </a:xfrm>
             <a:prstGeom prst="rect">
@@ -4701,7 +4701,7 @@
           </p:nvSpPr>
           <p:spPr>
             <a:xfrm>
-              <a:off x="692708" y="4639479"/>
+              <a:off x="692708" y="4687735"/>
               <a:ext cx="62179" cy="80101"/>
             </a:xfrm>
             <a:prstGeom prst="rect">
@@ -4747,7 +4747,7 @@
           </p:nvSpPr>
           <p:spPr>
             <a:xfrm>
-              <a:off x="692708" y="3769802"/>
+              <a:off x="692708" y="3858272"/>
               <a:ext cx="62179" cy="80101"/>
             </a:xfrm>
             <a:prstGeom prst="rect">
@@ -4793,7 +4793,7 @@
           </p:nvSpPr>
           <p:spPr>
             <a:xfrm>
-              <a:off x="692708" y="2900125"/>
+              <a:off x="692708" y="3028808"/>
               <a:ext cx="62179" cy="80101"/>
             </a:xfrm>
             <a:prstGeom prst="rect">
@@ -4839,7 +4839,7 @@
           </p:nvSpPr>
           <p:spPr>
             <a:xfrm>
-              <a:off x="692708" y="2030448"/>
+              <a:off x="692708" y="2199345"/>
               <a:ext cx="62179" cy="80101"/>
             </a:xfrm>
             <a:prstGeom prst="rect">
@@ -5115,7 +5115,7 @@
           </p:nvSpPr>
           <p:spPr>
             <a:xfrm rot="-5400000">
-              <a:off x="68446" y="3759743"/>
+              <a:off x="68446" y="3848213"/>
               <a:ext cx="1016904" cy="100218"/>
             </a:xfrm>
             <a:prstGeom prst="rect">
@@ -5156,6 +5156,52 @@
         <p:sp>
           <p:nvSpPr>
             <p:cNvPr id="38" name="tx38"/>
+            <p:cNvSpPr/>
+            <p:nvPr/>
+          </p:nvSpPr>
+          <p:spPr>
+            <a:xfrm>
+              <a:off x="817517" y="1896563"/>
+              <a:ext cx="5626211" cy="82021"/>
+            </a:xfrm>
+            <a:prstGeom prst="rect">
+              <a:avLst/>
+            </a:prstGeom>
+            <a:noFill/>
+          </p:spPr>
+          <p:txBody>
+            <a:bodyPr lIns="0" rIns="0" tIns="0" bIns="0" anchorCtr="1" anchor="ctr" wrap="none"/>
+            <a:lstStyle/>
+            <a:p>
+              <a:pPr algn="l" marL="0" marR="0" indent="0">
+                <a:lnSpc>
+                  <a:spcPts val="900"/>
+                </a:lnSpc>
+                <a:spcBef>
+                  <a:spcPts val="0"/>
+                </a:spcBef>
+                <a:spcAft>
+                  <a:spcPts val="0"/>
+                </a:spcAft>
+              </a:pPr>
+              <a:r>
+                <a:rPr sz="900">
+                  <a:solidFill>
+                    <a:srgbClr val="404040">
+                      <a:alpha val="100000"/>
+                    </a:srgbClr>
+                  </a:solidFill>
+                  <a:latin typeface="Helvetica"/>
+                  <a:cs typeface="Helvetica"/>
+                </a:rPr>
+                <a:t>subHR per 0.1 ratio decline: 1.35 (1.17-1.56)  |  per IQR decline (Δ = 0.29): 2.42 (1.59-3.68)  |  IQR: [0.85, 1.15]</a:t>
+              </a:r>
+            </a:p>
+          </p:txBody>
+        </p:sp>
+        <p:sp>
+          <p:nvSpPr>
+            <p:cNvPr id="39" name="tx39"/>
             <p:cNvSpPr/>
             <p:nvPr/>
           </p:nvSpPr>

--- a/docs/pptx/whole/jx-linsubhr-ratio-akikdigo.pptx
+++ b/docs/pptx/whole/jx-linsubhr-ratio-akikdigo.pptx
@@ -5162,7 +5162,7 @@
           <p:spPr>
             <a:xfrm>
               <a:off x="817517" y="1896563"/>
-              <a:ext cx="5626211" cy="82021"/>
+              <a:ext cx="6236116" cy="82021"/>
             </a:xfrm>
             <a:prstGeom prst="rect">
               <a:avLst/>
@@ -5194,7 +5194,7 @@
                   <a:latin typeface="Helvetica"/>
                   <a:cs typeface="Helvetica"/>
                 </a:rPr>
-                <a:t>subHR per 0.1 ratio decline: 1.35 (1.17-1.56)  |  per IQR decline (Δ = 0.29): 2.42 (1.59-3.68)  |  IQR: [0.85, 1.15]</a:t>
+                <a:t>subHR per 0.1 ratio decline: 1.35 (1.17-1.56), p = &lt;0.001  |  per IQR decline (Δ = 0.29): 2.42 (1.59-3.68)  |  IQR: [0.85, 1.15]</a:t>
               </a:r>
             </a:p>
           </p:txBody>

--- a/docs/pptx/whole/jx-linsubhr-ratio-akikdigo.pptx
+++ b/docs/pptx/whole/jx-linsubhr-ratio-akikdigo.pptx
@@ -5162,7 +5162,7 @@
           <p:spPr>
             <a:xfrm>
               <a:off x="817517" y="1896563"/>
-              <a:ext cx="6236116" cy="82021"/>
+              <a:ext cx="6899879" cy="82021"/>
             </a:xfrm>
             <a:prstGeom prst="rect">
               <a:avLst/>
@@ -5194,7 +5194,7 @@
                   <a:latin typeface="Helvetica"/>
                   <a:cs typeface="Helvetica"/>
                 </a:rPr>
-                <a:t>subHR per 0.1 ratio decline: 1.35 (1.17-1.56), p = &lt;0.001  |  per IQR decline (Δ = 0.29): 2.42 (1.59-3.68)  |  IQR: [0.85, 1.15]</a:t>
+                <a:t>subHR per 0.1 ratio decline: 1.35 (1.17-1.56), p_Bonf = &lt;0.001 (n = 6)  |  per IQR decline (Δ = 0.29): 2.42 (1.59-3.68)  |  IQR: [0.85, 1.15]</a:t>
               </a:r>
             </a:p>
           </p:txBody>

--- a/docs/pptx/whole/jx-linsubhr-ratio-akikdigo.pptx
+++ b/docs/pptx/whole/jx-linsubhr-ratio-akikdigo.pptx
@@ -2443,7 +2443,7 @@
           </p:nvSpPr>
           <p:spPr>
             <a:xfrm>
-              <a:off x="1615213" y="2073503"/>
+              <a:off x="1365633" y="2073503"/>
               <a:ext cx="0" cy="3649639"/>
             </a:xfrm>
             <a:custGeom>
@@ -2486,7 +2486,7 @@
           </p:nvSpPr>
           <p:spPr>
             <a:xfrm>
-              <a:off x="3387871" y="2073503"/>
+              <a:off x="3517243" y="2073503"/>
               <a:ext cx="0" cy="3649639"/>
             </a:xfrm>
             <a:custGeom>
@@ -2529,7 +2529,7 @@
           </p:nvSpPr>
           <p:spPr>
             <a:xfrm>
-              <a:off x="5160528" y="2073503"/>
+              <a:off x="5668852" y="2073503"/>
               <a:ext cx="0" cy="3649639"/>
             </a:xfrm>
             <a:custGeom>
@@ -2572,7 +2572,7 @@
           </p:nvSpPr>
           <p:spPr>
             <a:xfrm>
-              <a:off x="6933186" y="2073503"/>
+              <a:off x="7820461" y="2073503"/>
               <a:ext cx="0" cy="3649639"/>
             </a:xfrm>
             <a:custGeom>
@@ -2830,7 +2830,7 @@
           </p:nvSpPr>
           <p:spPr>
             <a:xfrm>
-              <a:off x="2501542" y="2073503"/>
+              <a:off x="2441438" y="2073503"/>
               <a:ext cx="0" cy="3649639"/>
             </a:xfrm>
             <a:custGeom>
@@ -2873,7 +2873,7 @@
           </p:nvSpPr>
           <p:spPr>
             <a:xfrm>
-              <a:off x="4274200" y="2073503"/>
+              <a:off x="4593047" y="2073503"/>
               <a:ext cx="0" cy="3649639"/>
             </a:xfrm>
             <a:custGeom>
@@ -2916,7 +2916,7 @@
           </p:nvSpPr>
           <p:spPr>
             <a:xfrm>
-              <a:off x="6046857" y="2073503"/>
+              <a:off x="6744657" y="2073503"/>
               <a:ext cx="0" cy="3649639"/>
             </a:xfrm>
             <a:custGeom>
@@ -2953,637 +2953,594 @@
         </p:sp>
         <p:sp>
           <p:nvSpPr>
-            <p:cNvPr id="20" name="pl20"/>
+            <p:cNvPr id="20" name="pg20"/>
             <p:cNvSpPr/>
             <p:nvPr/>
           </p:nvSpPr>
           <p:spPr>
             <a:xfrm>
-              <a:off x="7819515" y="2073503"/>
-              <a:ext cx="0" cy="3649639"/>
+              <a:off x="1172049" y="2073503"/>
+              <a:ext cx="7090630" cy="3359691"/>
             </a:xfrm>
             <a:custGeom>
               <a:avLst/>
               <a:pathLst>
-                <a:path w="0" h="3649639">
+                <a:path w="7090630" h="3359691">
                   <a:moveTo>
-                    <a:pt x="0" y="3649639"/>
+                    <a:pt x="640840" y="0"/>
                   </a:moveTo>
                   <a:lnTo>
-                    <a:pt x="0" y="0"/>
-                  </a:lnTo>
-                  <a:lnTo>
-                    <a:pt x="0" y="0"/>
-                  </a:lnTo>
-                </a:path>
-              </a:pathLst>
-            </a:custGeom>
-            <a:ln w="13550" cap="flat">
-              <a:solidFill>
-                <a:srgbClr val="EBEBEB">
-                  <a:alpha val="100000"/>
-                </a:srgbClr>
-              </a:solidFill>
-              <a:prstDash val="solid"/>
-              <a:round/>
-            </a:ln>
-          </p:spPr>
-          <p:txBody>
-            <a:bodyPr/>
-            <a:lstStyle/>
-            <a:p/>
-          </p:txBody>
-        </p:sp>
-        <p:sp>
-          <p:nvSpPr>
-            <p:cNvPr id="21" name="pg21"/>
-            <p:cNvSpPr/>
-            <p:nvPr/>
-          </p:nvSpPr>
-          <p:spPr>
-            <a:xfrm>
-              <a:off x="817517" y="2073503"/>
-              <a:ext cx="7235830" cy="3359691"/>
-            </a:xfrm>
-            <a:custGeom>
-              <a:avLst/>
-              <a:pathLst>
-                <a:path w="7235830" h="3359691">
-                  <a:moveTo>
-                    <a:pt x="593553" y="0"/>
-                  </a:moveTo>
-                  <a:lnTo>
-                    <a:pt x="597427" y="6891"/>
-                  </a:lnTo>
-                  <a:lnTo>
-                    <a:pt x="671187" y="133301"/>
-                  </a:lnTo>
-                  <a:lnTo>
-                    <a:pt x="744947" y="255115"/>
-                  </a:lnTo>
-                  <a:lnTo>
-                    <a:pt x="818707" y="372500"/>
-                  </a:lnTo>
-                  <a:lnTo>
-                    <a:pt x="892467" y="485618"/>
-                  </a:lnTo>
-                  <a:lnTo>
-                    <a:pt x="966227" y="594623"/>
-                  </a:lnTo>
-                  <a:lnTo>
-                    <a:pt x="1039987" y="699664"/>
-                  </a:lnTo>
-                  <a:lnTo>
-                    <a:pt x="1113747" y="800887"/>
-                  </a:lnTo>
-                  <a:lnTo>
-                    <a:pt x="1187508" y="898429"/>
-                  </a:lnTo>
-                  <a:lnTo>
-                    <a:pt x="1261268" y="992425"/>
-                  </a:lnTo>
-                  <a:lnTo>
-                    <a:pt x="1335028" y="1083004"/>
-                  </a:lnTo>
-                  <a:lnTo>
-                    <a:pt x="1408788" y="1170289"/>
-                  </a:lnTo>
-                  <a:lnTo>
-                    <a:pt x="1482548" y="1254401"/>
-                  </a:lnTo>
-                  <a:lnTo>
-                    <a:pt x="1556308" y="1335455"/>
-                  </a:lnTo>
-                  <a:lnTo>
-                    <a:pt x="1630068" y="1413561"/>
-                  </a:lnTo>
-                  <a:lnTo>
-                    <a:pt x="1703828" y="1488828"/>
-                  </a:lnTo>
-                  <a:lnTo>
-                    <a:pt x="1777588" y="1561359"/>
-                  </a:lnTo>
-                  <a:lnTo>
-                    <a:pt x="1851348" y="1631252"/>
-                  </a:lnTo>
-                  <a:lnTo>
-                    <a:pt x="1925108" y="1698605"/>
-                  </a:lnTo>
-                  <a:lnTo>
-                    <a:pt x="1998868" y="1763508"/>
-                  </a:lnTo>
-                  <a:lnTo>
-                    <a:pt x="2072628" y="1826052"/>
-                  </a:lnTo>
-                  <a:lnTo>
-                    <a:pt x="2146388" y="1886322"/>
-                  </a:lnTo>
-                  <a:lnTo>
-                    <a:pt x="2220148" y="1944400"/>
-                  </a:lnTo>
-                  <a:lnTo>
-                    <a:pt x="2293908" y="2000367"/>
-                  </a:lnTo>
-                  <a:lnTo>
-                    <a:pt x="2367668" y="2054299"/>
-                  </a:lnTo>
-                  <a:lnTo>
-                    <a:pt x="2441428" y="2106271"/>
-                  </a:lnTo>
-                  <a:lnTo>
-                    <a:pt x="2515188" y="2156352"/>
-                  </a:lnTo>
-                  <a:lnTo>
-                    <a:pt x="2588948" y="2204613"/>
-                  </a:lnTo>
-                  <a:lnTo>
-                    <a:pt x="2662708" y="2251120"/>
-                  </a:lnTo>
-                  <a:lnTo>
-                    <a:pt x="2736468" y="2295935"/>
-                  </a:lnTo>
-                  <a:lnTo>
-                    <a:pt x="2810228" y="2339121"/>
-                  </a:lnTo>
-                  <a:lnTo>
-                    <a:pt x="2883988" y="2380737"/>
-                  </a:lnTo>
-                  <a:lnTo>
-                    <a:pt x="2957748" y="2420840"/>
-                  </a:lnTo>
-                  <a:lnTo>
-                    <a:pt x="3031508" y="2459484"/>
-                  </a:lnTo>
-                  <a:lnTo>
-                    <a:pt x="3105268" y="2496724"/>
-                  </a:lnTo>
-                  <a:lnTo>
-                    <a:pt x="3179028" y="2532610"/>
-                  </a:lnTo>
-                  <a:lnTo>
-                    <a:pt x="3252788" y="2567191"/>
-                  </a:lnTo>
-                  <a:lnTo>
-                    <a:pt x="3326548" y="2600515"/>
-                  </a:lnTo>
-                  <a:lnTo>
-                    <a:pt x="3400308" y="2632627"/>
-                  </a:lnTo>
-                  <a:lnTo>
-                    <a:pt x="3474068" y="2657590"/>
-                  </a:lnTo>
-                  <a:lnTo>
-                    <a:pt x="3547828" y="2668372"/>
-                  </a:lnTo>
-                  <a:lnTo>
-                    <a:pt x="3621588" y="2679013"/>
-                  </a:lnTo>
-                  <a:lnTo>
-                    <a:pt x="3695348" y="2689516"/>
-                  </a:lnTo>
-                  <a:lnTo>
-                    <a:pt x="3769108" y="2699881"/>
-                  </a:lnTo>
-                  <a:lnTo>
-                    <a:pt x="3842868" y="2710111"/>
-                  </a:lnTo>
-                  <a:lnTo>
-                    <a:pt x="3916628" y="2720208"/>
-                  </a:lnTo>
-                  <a:lnTo>
-                    <a:pt x="3990388" y="2730173"/>
-                  </a:lnTo>
-                  <a:lnTo>
-                    <a:pt x="4064149" y="2740008"/>
-                  </a:lnTo>
-                  <a:lnTo>
-                    <a:pt x="4137909" y="2749714"/>
-                  </a:lnTo>
-                  <a:lnTo>
-                    <a:pt x="4211669" y="2759294"/>
-                  </a:lnTo>
-                  <a:lnTo>
-                    <a:pt x="4285429" y="2768749"/>
-                  </a:lnTo>
-                  <a:lnTo>
-                    <a:pt x="4359189" y="2778080"/>
-                  </a:lnTo>
-                  <a:lnTo>
-                    <a:pt x="4432949" y="2787290"/>
-                  </a:lnTo>
-                  <a:lnTo>
-                    <a:pt x="4506709" y="2796379"/>
-                  </a:lnTo>
-                  <a:lnTo>
-                    <a:pt x="4580469" y="2805350"/>
-                  </a:lnTo>
-                  <a:lnTo>
-                    <a:pt x="4654229" y="2814204"/>
-                  </a:lnTo>
-                  <a:lnTo>
-                    <a:pt x="4727989" y="2822942"/>
-                  </a:lnTo>
-                  <a:lnTo>
-                    <a:pt x="4801749" y="2831566"/>
-                  </a:lnTo>
-                  <a:lnTo>
-                    <a:pt x="4875509" y="2840078"/>
-                  </a:lnTo>
-                  <a:lnTo>
-                    <a:pt x="4949269" y="2848478"/>
-                  </a:lnTo>
-                  <a:lnTo>
-                    <a:pt x="5023029" y="2856769"/>
-                  </a:lnTo>
-                  <a:lnTo>
-                    <a:pt x="5096789" y="2864952"/>
-                  </a:lnTo>
-                  <a:lnTo>
-                    <a:pt x="5170549" y="2873028"/>
-                  </a:lnTo>
-                  <a:lnTo>
-                    <a:pt x="5244309" y="2880998"/>
-                  </a:lnTo>
-                  <a:lnTo>
-                    <a:pt x="5318069" y="2888865"/>
-                  </a:lnTo>
-                  <a:lnTo>
-                    <a:pt x="5391829" y="2896628"/>
-                  </a:lnTo>
-                  <a:lnTo>
-                    <a:pt x="5465589" y="2904291"/>
-                  </a:lnTo>
-                  <a:lnTo>
-                    <a:pt x="5539349" y="2911853"/>
-                  </a:lnTo>
-                  <a:lnTo>
-                    <a:pt x="5613109" y="2919317"/>
-                  </a:lnTo>
-                  <a:lnTo>
-                    <a:pt x="5686869" y="2926683"/>
-                  </a:lnTo>
-                  <a:lnTo>
-                    <a:pt x="5760629" y="2933954"/>
-                  </a:lnTo>
-                  <a:lnTo>
-                    <a:pt x="5834389" y="2941129"/>
-                  </a:lnTo>
-                  <a:lnTo>
-                    <a:pt x="5908149" y="2948211"/>
-                  </a:lnTo>
-                  <a:lnTo>
-                    <a:pt x="5981909" y="2955200"/>
-                  </a:lnTo>
-                  <a:lnTo>
-                    <a:pt x="6055669" y="2962098"/>
-                  </a:lnTo>
-                  <a:lnTo>
-                    <a:pt x="6129429" y="2968906"/>
-                  </a:lnTo>
-                  <a:lnTo>
-                    <a:pt x="6203189" y="2975625"/>
-                  </a:lnTo>
-                  <a:lnTo>
-                    <a:pt x="6276949" y="2982257"/>
-                  </a:lnTo>
-                  <a:lnTo>
-                    <a:pt x="6350709" y="2988802"/>
-                  </a:lnTo>
-                  <a:lnTo>
-                    <a:pt x="6424469" y="2995261"/>
-                  </a:lnTo>
-                  <a:lnTo>
-                    <a:pt x="6498229" y="3001636"/>
-                  </a:lnTo>
-                  <a:lnTo>
-                    <a:pt x="6571989" y="3007928"/>
-                  </a:lnTo>
-                  <a:lnTo>
-                    <a:pt x="6645749" y="3014138"/>
-                  </a:lnTo>
-                  <a:lnTo>
-                    <a:pt x="6719509" y="3020267"/>
-                  </a:lnTo>
-                  <a:lnTo>
-                    <a:pt x="6793269" y="3026316"/>
-                  </a:lnTo>
-                  <a:lnTo>
-                    <a:pt x="6867029" y="3032286"/>
-                  </a:lnTo>
-                  <a:lnTo>
-                    <a:pt x="6940789" y="3038178"/>
-                  </a:lnTo>
-                  <a:lnTo>
-                    <a:pt x="7014550" y="3043993"/>
-                  </a:lnTo>
-                  <a:lnTo>
-                    <a:pt x="7088310" y="3049732"/>
-                  </a:lnTo>
-                  <a:lnTo>
-                    <a:pt x="7162070" y="3055396"/>
-                  </a:lnTo>
-                  <a:lnTo>
-                    <a:pt x="7235830" y="3060987"/>
-                  </a:lnTo>
-                  <a:lnTo>
-                    <a:pt x="7235830" y="3359691"/>
-                  </a:lnTo>
-                  <a:lnTo>
-                    <a:pt x="7162070" y="3355010"/>
-                  </a:lnTo>
-                  <a:lnTo>
-                    <a:pt x="7088310" y="3350153"/>
-                  </a:lnTo>
-                  <a:lnTo>
-                    <a:pt x="7014550" y="3345113"/>
-                  </a:lnTo>
-                  <a:lnTo>
-                    <a:pt x="6940789" y="3339882"/>
-                  </a:lnTo>
-                  <a:lnTo>
-                    <a:pt x="6867029" y="3334454"/>
-                  </a:lnTo>
-                  <a:lnTo>
-                    <a:pt x="6793269" y="3328821"/>
-                  </a:lnTo>
-                  <a:lnTo>
-                    <a:pt x="6719509" y="3322976"/>
-                  </a:lnTo>
-                  <a:lnTo>
-                    <a:pt x="6645749" y="3316910"/>
-                  </a:lnTo>
-                  <a:lnTo>
-                    <a:pt x="6571989" y="3310616"/>
-                  </a:lnTo>
-                  <a:lnTo>
-                    <a:pt x="6498229" y="3304084"/>
-                  </a:lnTo>
-                  <a:lnTo>
-                    <a:pt x="6424469" y="3297305"/>
-                  </a:lnTo>
-                  <a:lnTo>
-                    <a:pt x="6350709" y="3290271"/>
-                  </a:lnTo>
-                  <a:lnTo>
-                    <a:pt x="6276949" y="3282971"/>
-                  </a:lnTo>
-                  <a:lnTo>
-                    <a:pt x="6203189" y="3275396"/>
-                  </a:lnTo>
-                  <a:lnTo>
-                    <a:pt x="6129429" y="3267535"/>
-                  </a:lnTo>
-                  <a:lnTo>
-                    <a:pt x="6055669" y="3259378"/>
-                  </a:lnTo>
-                  <a:lnTo>
-                    <a:pt x="5981909" y="3250912"/>
-                  </a:lnTo>
-                  <a:lnTo>
-                    <a:pt x="5908149" y="3242128"/>
-                  </a:lnTo>
-                  <a:lnTo>
-                    <a:pt x="5834389" y="3233011"/>
-                  </a:lnTo>
-                  <a:lnTo>
-                    <a:pt x="5760629" y="3223551"/>
-                  </a:lnTo>
-                  <a:lnTo>
-                    <a:pt x="5686869" y="3213734"/>
-                  </a:lnTo>
-                  <a:lnTo>
-                    <a:pt x="5613109" y="3203547"/>
-                  </a:lnTo>
-                  <a:lnTo>
-                    <a:pt x="5539349" y="3192975"/>
-                  </a:lnTo>
-                  <a:lnTo>
-                    <a:pt x="5465589" y="3182005"/>
-                  </a:lnTo>
-                  <a:lnTo>
-                    <a:pt x="5391829" y="3170620"/>
-                  </a:lnTo>
-                  <a:lnTo>
-                    <a:pt x="5318069" y="3158806"/>
-                  </a:lnTo>
-                  <a:lnTo>
-                    <a:pt x="5244309" y="3146546"/>
-                  </a:lnTo>
-                  <a:lnTo>
-                    <a:pt x="5170549" y="3133824"/>
-                  </a:lnTo>
-                  <a:lnTo>
-                    <a:pt x="5096789" y="3120621"/>
-                  </a:lnTo>
-                  <a:lnTo>
-                    <a:pt x="5023029" y="3106921"/>
-                  </a:lnTo>
-                  <a:lnTo>
-                    <a:pt x="4949269" y="3092704"/>
-                  </a:lnTo>
-                  <a:lnTo>
-                    <a:pt x="4875509" y="3077950"/>
-                  </a:lnTo>
-                  <a:lnTo>
-                    <a:pt x="4801749" y="3062639"/>
-                  </a:lnTo>
-                  <a:lnTo>
-                    <a:pt x="4727989" y="3046751"/>
-                  </a:lnTo>
-                  <a:lnTo>
-                    <a:pt x="4654229" y="3030264"/>
-                  </a:lnTo>
-                  <a:lnTo>
-                    <a:pt x="4580469" y="3013154"/>
-                  </a:lnTo>
-                  <a:lnTo>
-                    <a:pt x="4506709" y="2995399"/>
-                  </a:lnTo>
-                  <a:lnTo>
-                    <a:pt x="4432949" y="2976974"/>
-                  </a:lnTo>
-                  <a:lnTo>
-                    <a:pt x="4359189" y="2957854"/>
-                  </a:lnTo>
-                  <a:lnTo>
-                    <a:pt x="4285429" y="2938012"/>
-                  </a:lnTo>
-                  <a:lnTo>
-                    <a:pt x="4211669" y="2917422"/>
-                  </a:lnTo>
-                  <a:lnTo>
-                    <a:pt x="4137909" y="2896055"/>
-                  </a:lnTo>
-                  <a:lnTo>
-                    <a:pt x="4064149" y="2873882"/>
-                  </a:lnTo>
-                  <a:lnTo>
-                    <a:pt x="3990388" y="2850872"/>
-                  </a:lnTo>
-                  <a:lnTo>
-                    <a:pt x="3916628" y="2826994"/>
-                  </a:lnTo>
-                  <a:lnTo>
-                    <a:pt x="3842868" y="2802215"/>
-                  </a:lnTo>
-                  <a:lnTo>
-                    <a:pt x="3769108" y="2776501"/>
-                  </a:lnTo>
-                  <a:lnTo>
-                    <a:pt x="3695348" y="2749817"/>
-                  </a:lnTo>
-                  <a:lnTo>
-                    <a:pt x="3621588" y="2722127"/>
-                  </a:lnTo>
-                  <a:lnTo>
-                    <a:pt x="3547828" y="2693391"/>
-                  </a:lnTo>
-                  <a:lnTo>
-                    <a:pt x="3474068" y="2663572"/>
-                  </a:lnTo>
-                  <a:lnTo>
-                    <a:pt x="3400308" y="2646665"/>
-                  </a:lnTo>
-                  <a:lnTo>
-                    <a:pt x="3326548" y="2635596"/>
-                  </a:lnTo>
-                  <a:lnTo>
-                    <a:pt x="3252788" y="2624380"/>
-                  </a:lnTo>
-                  <a:lnTo>
-                    <a:pt x="3179028" y="2613016"/>
-                  </a:lnTo>
-                  <a:lnTo>
-                    <a:pt x="3105268" y="2601502"/>
-                  </a:lnTo>
-                  <a:lnTo>
-                    <a:pt x="3031508" y="2589836"/>
-                  </a:lnTo>
-                  <a:lnTo>
-                    <a:pt x="2957748" y="2578015"/>
-                  </a:lnTo>
-                  <a:lnTo>
-                    <a:pt x="2883988" y="2566038"/>
-                  </a:lnTo>
-                  <a:lnTo>
-                    <a:pt x="2810228" y="2553903"/>
-                  </a:lnTo>
-                  <a:lnTo>
-                    <a:pt x="2736468" y="2541607"/>
-                  </a:lnTo>
-                  <a:lnTo>
-                    <a:pt x="2662708" y="2529149"/>
-                  </a:lnTo>
-                  <a:lnTo>
-                    <a:pt x="2588948" y="2516525"/>
-                  </a:lnTo>
-                  <a:lnTo>
-                    <a:pt x="2515188" y="2503735"/>
-                  </a:lnTo>
-                  <a:lnTo>
-                    <a:pt x="2441428" y="2490776"/>
-                  </a:lnTo>
-                  <a:lnTo>
-                    <a:pt x="2367668" y="2477645"/>
-                  </a:lnTo>
-                  <a:lnTo>
-                    <a:pt x="2293908" y="2464341"/>
-                  </a:lnTo>
-                  <a:lnTo>
-                    <a:pt x="2220148" y="2450861"/>
-                  </a:lnTo>
-                  <a:lnTo>
-                    <a:pt x="2146388" y="2437203"/>
-                  </a:lnTo>
-                  <a:lnTo>
-                    <a:pt x="2072628" y="2423364"/>
-                  </a:lnTo>
-                  <a:lnTo>
-                    <a:pt x="1998868" y="2409342"/>
-                  </a:lnTo>
-                  <a:lnTo>
-                    <a:pt x="1925108" y="2395134"/>
-                  </a:lnTo>
-                  <a:lnTo>
-                    <a:pt x="1851348" y="2380739"/>
-                  </a:lnTo>
-                  <a:lnTo>
-                    <a:pt x="1777588" y="2366153"/>
-                  </a:lnTo>
-                  <a:lnTo>
-                    <a:pt x="1703828" y="2351375"/>
-                  </a:lnTo>
-                  <a:lnTo>
-                    <a:pt x="1630068" y="2336401"/>
-                  </a:lnTo>
-                  <a:lnTo>
-                    <a:pt x="1556308" y="2321229"/>
-                  </a:lnTo>
-                  <a:lnTo>
-                    <a:pt x="1482548" y="2305856"/>
-                  </a:lnTo>
-                  <a:lnTo>
-                    <a:pt x="1408788" y="2290280"/>
-                  </a:lnTo>
-                  <a:lnTo>
-                    <a:pt x="1335028" y="2274498"/>
-                  </a:lnTo>
-                  <a:lnTo>
-                    <a:pt x="1261268" y="2258508"/>
-                  </a:lnTo>
-                  <a:lnTo>
-                    <a:pt x="1187508" y="2242306"/>
-                  </a:lnTo>
-                  <a:lnTo>
-                    <a:pt x="1113747" y="2225890"/>
-                  </a:lnTo>
-                  <a:lnTo>
-                    <a:pt x="1039987" y="2209256"/>
-                  </a:lnTo>
-                  <a:lnTo>
-                    <a:pt x="966227" y="2192403"/>
-                  </a:lnTo>
-                  <a:lnTo>
-                    <a:pt x="892467" y="2175327"/>
-                  </a:lnTo>
-                  <a:lnTo>
-                    <a:pt x="818707" y="2158025"/>
-                  </a:lnTo>
-                  <a:lnTo>
-                    <a:pt x="744947" y="2140494"/>
-                  </a:lnTo>
-                  <a:lnTo>
-                    <a:pt x="671187" y="2122732"/>
-                  </a:lnTo>
-                  <a:lnTo>
-                    <a:pt x="597427" y="2104734"/>
-                  </a:lnTo>
-                  <a:lnTo>
-                    <a:pt x="523667" y="2086499"/>
-                  </a:lnTo>
-                  <a:lnTo>
-                    <a:pt x="449907" y="2068022"/>
-                  </a:lnTo>
-                  <a:lnTo>
-                    <a:pt x="376147" y="2049301"/>
-                  </a:lnTo>
-                  <a:lnTo>
-                    <a:pt x="302387" y="2030333"/>
-                  </a:lnTo>
-                  <a:lnTo>
-                    <a:pt x="228627" y="2011114"/>
-                  </a:lnTo>
-                  <a:lnTo>
-                    <a:pt x="154867" y="1991640"/>
-                  </a:lnTo>
-                  <a:lnTo>
-                    <a:pt x="81107" y="1971909"/>
-                  </a:lnTo>
-                  <a:lnTo>
-                    <a:pt x="7347" y="1951917"/>
-                  </a:lnTo>
-                  <a:lnTo>
-                    <a:pt x="0" y="1949900"/>
+                    <a:pt x="644602" y="6891"/>
+                  </a:lnTo>
+                  <a:lnTo>
+                    <a:pt x="716225" y="133301"/>
+                  </a:lnTo>
+                  <a:lnTo>
+                    <a:pt x="787847" y="255115"/>
+                  </a:lnTo>
+                  <a:lnTo>
+                    <a:pt x="859470" y="372500"/>
+                  </a:lnTo>
+                  <a:lnTo>
+                    <a:pt x="931092" y="485618"/>
+                  </a:lnTo>
+                  <a:lnTo>
+                    <a:pt x="1002715" y="594623"/>
+                  </a:lnTo>
+                  <a:lnTo>
+                    <a:pt x="1074337" y="699664"/>
+                  </a:lnTo>
+                  <a:lnTo>
+                    <a:pt x="1145960" y="800887"/>
+                  </a:lnTo>
+                  <a:lnTo>
+                    <a:pt x="1217582" y="898429"/>
+                  </a:lnTo>
+                  <a:lnTo>
+                    <a:pt x="1289205" y="992425"/>
+                  </a:lnTo>
+                  <a:lnTo>
+                    <a:pt x="1360827" y="1083004"/>
+                  </a:lnTo>
+                  <a:lnTo>
+                    <a:pt x="1432450" y="1170289"/>
+                  </a:lnTo>
+                  <a:lnTo>
+                    <a:pt x="1504073" y="1254401"/>
+                  </a:lnTo>
+                  <a:lnTo>
+                    <a:pt x="1575695" y="1335455"/>
+                  </a:lnTo>
+                  <a:lnTo>
+                    <a:pt x="1647318" y="1413561"/>
+                  </a:lnTo>
+                  <a:lnTo>
+                    <a:pt x="1718940" y="1488828"/>
+                  </a:lnTo>
+                  <a:lnTo>
+                    <a:pt x="1790563" y="1561359"/>
+                  </a:lnTo>
+                  <a:lnTo>
+                    <a:pt x="1862185" y="1631252"/>
+                  </a:lnTo>
+                  <a:lnTo>
+                    <a:pt x="1933808" y="1698605"/>
+                  </a:lnTo>
+                  <a:lnTo>
+                    <a:pt x="2005430" y="1763508"/>
+                  </a:lnTo>
+                  <a:lnTo>
+                    <a:pt x="2077053" y="1826052"/>
+                  </a:lnTo>
+                  <a:lnTo>
+                    <a:pt x="2148675" y="1886322"/>
+                  </a:lnTo>
+                  <a:lnTo>
+                    <a:pt x="2220298" y="1944400"/>
+                  </a:lnTo>
+                  <a:lnTo>
+                    <a:pt x="2291920" y="2000367"/>
+                  </a:lnTo>
+                  <a:lnTo>
+                    <a:pt x="2363543" y="2054299"/>
+                  </a:lnTo>
+                  <a:lnTo>
+                    <a:pt x="2435165" y="2106271"/>
+                  </a:lnTo>
+                  <a:lnTo>
+                    <a:pt x="2506788" y="2156352"/>
+                  </a:lnTo>
+                  <a:lnTo>
+                    <a:pt x="2578410" y="2204613"/>
+                  </a:lnTo>
+                  <a:lnTo>
+                    <a:pt x="2650033" y="2251120"/>
+                  </a:lnTo>
+                  <a:lnTo>
+                    <a:pt x="2721655" y="2295935"/>
+                  </a:lnTo>
+                  <a:lnTo>
+                    <a:pt x="2793278" y="2339121"/>
+                  </a:lnTo>
+                  <a:lnTo>
+                    <a:pt x="2864901" y="2380737"/>
+                  </a:lnTo>
+                  <a:lnTo>
+                    <a:pt x="2936523" y="2420840"/>
+                  </a:lnTo>
+                  <a:lnTo>
+                    <a:pt x="3008146" y="2459484"/>
+                  </a:lnTo>
+                  <a:lnTo>
+                    <a:pt x="3079768" y="2496724"/>
+                  </a:lnTo>
+                  <a:lnTo>
+                    <a:pt x="3151391" y="2532610"/>
+                  </a:lnTo>
+                  <a:lnTo>
+                    <a:pt x="3223013" y="2567191"/>
+                  </a:lnTo>
+                  <a:lnTo>
+                    <a:pt x="3294636" y="2600515"/>
+                  </a:lnTo>
+                  <a:lnTo>
+                    <a:pt x="3366258" y="2632627"/>
+                  </a:lnTo>
+                  <a:lnTo>
+                    <a:pt x="3437881" y="2657590"/>
+                  </a:lnTo>
+                  <a:lnTo>
+                    <a:pt x="3509503" y="2668372"/>
+                  </a:lnTo>
+                  <a:lnTo>
+                    <a:pt x="3581126" y="2679013"/>
+                  </a:lnTo>
+                  <a:lnTo>
+                    <a:pt x="3652748" y="2689516"/>
+                  </a:lnTo>
+                  <a:lnTo>
+                    <a:pt x="3724371" y="2699881"/>
+                  </a:lnTo>
+                  <a:lnTo>
+                    <a:pt x="3795993" y="2710111"/>
+                  </a:lnTo>
+                  <a:lnTo>
+                    <a:pt x="3867616" y="2720208"/>
+                  </a:lnTo>
+                  <a:lnTo>
+                    <a:pt x="3939238" y="2730173"/>
+                  </a:lnTo>
+                  <a:lnTo>
+                    <a:pt x="4010861" y="2740008"/>
+                  </a:lnTo>
+                  <a:lnTo>
+                    <a:pt x="4082483" y="2749714"/>
+                  </a:lnTo>
+                  <a:lnTo>
+                    <a:pt x="4154106" y="2759294"/>
+                  </a:lnTo>
+                  <a:lnTo>
+                    <a:pt x="4225729" y="2768749"/>
+                  </a:lnTo>
+                  <a:lnTo>
+                    <a:pt x="4297351" y="2778080"/>
+                  </a:lnTo>
+                  <a:lnTo>
+                    <a:pt x="4368974" y="2787290"/>
+                  </a:lnTo>
+                  <a:lnTo>
+                    <a:pt x="4440596" y="2796379"/>
+                  </a:lnTo>
+                  <a:lnTo>
+                    <a:pt x="4512219" y="2805350"/>
+                  </a:lnTo>
+                  <a:lnTo>
+                    <a:pt x="4583841" y="2814204"/>
+                  </a:lnTo>
+                  <a:lnTo>
+                    <a:pt x="4655464" y="2822942"/>
+                  </a:lnTo>
+                  <a:lnTo>
+                    <a:pt x="4727086" y="2831566"/>
+                  </a:lnTo>
+                  <a:lnTo>
+                    <a:pt x="4798709" y="2840078"/>
+                  </a:lnTo>
+                  <a:lnTo>
+                    <a:pt x="4870331" y="2848478"/>
+                  </a:lnTo>
+                  <a:lnTo>
+                    <a:pt x="4941954" y="2856769"/>
+                  </a:lnTo>
+                  <a:lnTo>
+                    <a:pt x="5013576" y="2864952"/>
+                  </a:lnTo>
+                  <a:lnTo>
+                    <a:pt x="5085199" y="2873028"/>
+                  </a:lnTo>
+                  <a:lnTo>
+                    <a:pt x="5156821" y="2880998"/>
+                  </a:lnTo>
+                  <a:lnTo>
+                    <a:pt x="5228444" y="2888865"/>
+                  </a:lnTo>
+                  <a:lnTo>
+                    <a:pt x="5300066" y="2896628"/>
+                  </a:lnTo>
+                  <a:lnTo>
+                    <a:pt x="5371689" y="2904291"/>
+                  </a:lnTo>
+                  <a:lnTo>
+                    <a:pt x="5443311" y="2911853"/>
+                  </a:lnTo>
+                  <a:lnTo>
+                    <a:pt x="5514934" y="2919317"/>
+                  </a:lnTo>
+                  <a:lnTo>
+                    <a:pt x="5586557" y="2926683"/>
+                  </a:lnTo>
+                  <a:lnTo>
+                    <a:pt x="5658179" y="2933954"/>
+                  </a:lnTo>
+                  <a:lnTo>
+                    <a:pt x="5729802" y="2941129"/>
+                  </a:lnTo>
+                  <a:lnTo>
+                    <a:pt x="5801424" y="2948211"/>
+                  </a:lnTo>
+                  <a:lnTo>
+                    <a:pt x="5873047" y="2955200"/>
+                  </a:lnTo>
+                  <a:lnTo>
+                    <a:pt x="5944669" y="2962098"/>
+                  </a:lnTo>
+                  <a:lnTo>
+                    <a:pt x="6016292" y="2968906"/>
+                  </a:lnTo>
+                  <a:lnTo>
+                    <a:pt x="6087914" y="2975625"/>
+                  </a:lnTo>
+                  <a:lnTo>
+                    <a:pt x="6159537" y="2982257"/>
+                  </a:lnTo>
+                  <a:lnTo>
+                    <a:pt x="6231159" y="2988802"/>
+                  </a:lnTo>
+                  <a:lnTo>
+                    <a:pt x="6302782" y="2995261"/>
+                  </a:lnTo>
+                  <a:lnTo>
+                    <a:pt x="6374404" y="3001636"/>
+                  </a:lnTo>
+                  <a:lnTo>
+                    <a:pt x="6446027" y="3007928"/>
+                  </a:lnTo>
+                  <a:lnTo>
+                    <a:pt x="6517649" y="3014138"/>
+                  </a:lnTo>
+                  <a:lnTo>
+                    <a:pt x="6589272" y="3020267"/>
+                  </a:lnTo>
+                  <a:lnTo>
+                    <a:pt x="6660894" y="3026316"/>
+                  </a:lnTo>
+                  <a:lnTo>
+                    <a:pt x="6732517" y="3032286"/>
+                  </a:lnTo>
+                  <a:lnTo>
+                    <a:pt x="6804139" y="3038178"/>
+                  </a:lnTo>
+                  <a:lnTo>
+                    <a:pt x="6875762" y="3043993"/>
+                  </a:lnTo>
+                  <a:lnTo>
+                    <a:pt x="6947385" y="3049732"/>
+                  </a:lnTo>
+                  <a:lnTo>
+                    <a:pt x="7019007" y="3055396"/>
+                  </a:lnTo>
+                  <a:lnTo>
+                    <a:pt x="7090630" y="3060987"/>
+                  </a:lnTo>
+                  <a:lnTo>
+                    <a:pt x="7090630" y="3359691"/>
+                  </a:lnTo>
+                  <a:lnTo>
+                    <a:pt x="7019007" y="3355010"/>
+                  </a:lnTo>
+                  <a:lnTo>
+                    <a:pt x="6947385" y="3350153"/>
+                  </a:lnTo>
+                  <a:lnTo>
+                    <a:pt x="6875762" y="3345113"/>
+                  </a:lnTo>
+                  <a:lnTo>
+                    <a:pt x="6804139" y="3339882"/>
+                  </a:lnTo>
+                  <a:lnTo>
+                    <a:pt x="6732517" y="3334454"/>
+                  </a:lnTo>
+                  <a:lnTo>
+                    <a:pt x="6660894" y="3328821"/>
+                  </a:lnTo>
+                  <a:lnTo>
+                    <a:pt x="6589272" y="3322976"/>
+                  </a:lnTo>
+                  <a:lnTo>
+                    <a:pt x="6517649" y="3316910"/>
+                  </a:lnTo>
+                  <a:lnTo>
+                    <a:pt x="6446027" y="3310616"/>
+                  </a:lnTo>
+                  <a:lnTo>
+                    <a:pt x="6374404" y="3304084"/>
+                  </a:lnTo>
+                  <a:lnTo>
+                    <a:pt x="6302782" y="3297305"/>
+                  </a:lnTo>
+                  <a:lnTo>
+                    <a:pt x="6231159" y="3290271"/>
+                  </a:lnTo>
+                  <a:lnTo>
+                    <a:pt x="6159537" y="3282971"/>
+                  </a:lnTo>
+                  <a:lnTo>
+                    <a:pt x="6087914" y="3275396"/>
+                  </a:lnTo>
+                  <a:lnTo>
+                    <a:pt x="6016292" y="3267535"/>
+                  </a:lnTo>
+                  <a:lnTo>
+                    <a:pt x="5944669" y="3259378"/>
+                  </a:lnTo>
+                  <a:lnTo>
+                    <a:pt x="5873047" y="3250912"/>
+                  </a:lnTo>
+                  <a:lnTo>
+                    <a:pt x="5801424" y="3242128"/>
+                  </a:lnTo>
+                  <a:lnTo>
+                    <a:pt x="5729802" y="3233011"/>
+                  </a:lnTo>
+                  <a:lnTo>
+                    <a:pt x="5658179" y="3223551"/>
+                  </a:lnTo>
+                  <a:lnTo>
+                    <a:pt x="5586557" y="3213734"/>
+                  </a:lnTo>
+                  <a:lnTo>
+                    <a:pt x="5514934" y="3203547"/>
+                  </a:lnTo>
+                  <a:lnTo>
+                    <a:pt x="5443311" y="3192975"/>
+                  </a:lnTo>
+                  <a:lnTo>
+                    <a:pt x="5371689" y="3182005"/>
+                  </a:lnTo>
+                  <a:lnTo>
+                    <a:pt x="5300066" y="3170620"/>
+                  </a:lnTo>
+                  <a:lnTo>
+                    <a:pt x="5228444" y="3158806"/>
+                  </a:lnTo>
+                  <a:lnTo>
+                    <a:pt x="5156821" y="3146546"/>
+                  </a:lnTo>
+                  <a:lnTo>
+                    <a:pt x="5085199" y="3133824"/>
+                  </a:lnTo>
+                  <a:lnTo>
+                    <a:pt x="5013576" y="3120621"/>
+                  </a:lnTo>
+                  <a:lnTo>
+                    <a:pt x="4941954" y="3106921"/>
+                  </a:lnTo>
+                  <a:lnTo>
+                    <a:pt x="4870331" y="3092704"/>
+                  </a:lnTo>
+                  <a:lnTo>
+                    <a:pt x="4798709" y="3077950"/>
+                  </a:lnTo>
+                  <a:lnTo>
+                    <a:pt x="4727086" y="3062639"/>
+                  </a:lnTo>
+                  <a:lnTo>
+                    <a:pt x="4655464" y="3046751"/>
+                  </a:lnTo>
+                  <a:lnTo>
+                    <a:pt x="4583841" y="3030264"/>
+                  </a:lnTo>
+                  <a:lnTo>
+                    <a:pt x="4512219" y="3013154"/>
+                  </a:lnTo>
+                  <a:lnTo>
+                    <a:pt x="4440596" y="2995399"/>
+                  </a:lnTo>
+                  <a:lnTo>
+                    <a:pt x="4368974" y="2976974"/>
+                  </a:lnTo>
+                  <a:lnTo>
+                    <a:pt x="4297351" y="2957854"/>
+                  </a:lnTo>
+                  <a:lnTo>
+                    <a:pt x="4225729" y="2938012"/>
+                  </a:lnTo>
+                  <a:lnTo>
+                    <a:pt x="4154106" y="2917422"/>
+                  </a:lnTo>
+                  <a:lnTo>
+                    <a:pt x="4082483" y="2896055"/>
+                  </a:lnTo>
+                  <a:lnTo>
+                    <a:pt x="4010861" y="2873882"/>
+                  </a:lnTo>
+                  <a:lnTo>
+                    <a:pt x="3939238" y="2850872"/>
+                  </a:lnTo>
+                  <a:lnTo>
+                    <a:pt x="3867616" y="2826994"/>
+                  </a:lnTo>
+                  <a:lnTo>
+                    <a:pt x="3795993" y="2802215"/>
+                  </a:lnTo>
+                  <a:lnTo>
+                    <a:pt x="3724371" y="2776501"/>
+                  </a:lnTo>
+                  <a:lnTo>
+                    <a:pt x="3652748" y="2749817"/>
+                  </a:lnTo>
+                  <a:lnTo>
+                    <a:pt x="3581126" y="2722127"/>
+                  </a:lnTo>
+                  <a:lnTo>
+                    <a:pt x="3509503" y="2693391"/>
+                  </a:lnTo>
+                  <a:lnTo>
+                    <a:pt x="3437881" y="2663572"/>
+                  </a:lnTo>
+                  <a:lnTo>
+                    <a:pt x="3366258" y="2646665"/>
+                  </a:lnTo>
+                  <a:lnTo>
+                    <a:pt x="3294636" y="2635596"/>
+                  </a:lnTo>
+                  <a:lnTo>
+                    <a:pt x="3223013" y="2624380"/>
+                  </a:lnTo>
+                  <a:lnTo>
+                    <a:pt x="3151391" y="2613016"/>
+                  </a:lnTo>
+                  <a:lnTo>
+                    <a:pt x="3079768" y="2601502"/>
+                  </a:lnTo>
+                  <a:lnTo>
+                    <a:pt x="3008146" y="2589836"/>
+                  </a:lnTo>
+                  <a:lnTo>
+                    <a:pt x="2936523" y="2578015"/>
+                  </a:lnTo>
+                  <a:lnTo>
+                    <a:pt x="2864901" y="2566038"/>
+                  </a:lnTo>
+                  <a:lnTo>
+                    <a:pt x="2793278" y="2553903"/>
+                  </a:lnTo>
+                  <a:lnTo>
+                    <a:pt x="2721655" y="2541607"/>
+                  </a:lnTo>
+                  <a:lnTo>
+                    <a:pt x="2650033" y="2529149"/>
+                  </a:lnTo>
+                  <a:lnTo>
+                    <a:pt x="2578410" y="2516525"/>
+                  </a:lnTo>
+                  <a:lnTo>
+                    <a:pt x="2506788" y="2503735"/>
+                  </a:lnTo>
+                  <a:lnTo>
+                    <a:pt x="2435165" y="2490776"/>
+                  </a:lnTo>
+                  <a:lnTo>
+                    <a:pt x="2363543" y="2477645"/>
+                  </a:lnTo>
+                  <a:lnTo>
+                    <a:pt x="2291920" y="2464341"/>
+                  </a:lnTo>
+                  <a:lnTo>
+                    <a:pt x="2220298" y="2450861"/>
+                  </a:lnTo>
+                  <a:lnTo>
+                    <a:pt x="2148675" y="2437203"/>
+                  </a:lnTo>
+                  <a:lnTo>
+                    <a:pt x="2077053" y="2423364"/>
+                  </a:lnTo>
+                  <a:lnTo>
+                    <a:pt x="2005430" y="2409342"/>
+                  </a:lnTo>
+                  <a:lnTo>
+                    <a:pt x="1933808" y="2395134"/>
+                  </a:lnTo>
+                  <a:lnTo>
+                    <a:pt x="1862185" y="2380739"/>
+                  </a:lnTo>
+                  <a:lnTo>
+                    <a:pt x="1790563" y="2366153"/>
+                  </a:lnTo>
+                  <a:lnTo>
+                    <a:pt x="1718940" y="2351375"/>
+                  </a:lnTo>
+                  <a:lnTo>
+                    <a:pt x="1647318" y="2336401"/>
+                  </a:lnTo>
+                  <a:lnTo>
+                    <a:pt x="1575695" y="2321229"/>
+                  </a:lnTo>
+                  <a:lnTo>
+                    <a:pt x="1504073" y="2305856"/>
+                  </a:lnTo>
+                  <a:lnTo>
+                    <a:pt x="1432450" y="2290280"/>
+                  </a:lnTo>
+                  <a:lnTo>
+                    <a:pt x="1360827" y="2274498"/>
+                  </a:lnTo>
+                  <a:lnTo>
+                    <a:pt x="1289205" y="2258508"/>
+                  </a:lnTo>
+                  <a:lnTo>
+                    <a:pt x="1217582" y="2242306"/>
+                  </a:lnTo>
+                  <a:lnTo>
+                    <a:pt x="1145960" y="2225890"/>
+                  </a:lnTo>
+                  <a:lnTo>
+                    <a:pt x="1074337" y="2209256"/>
+                  </a:lnTo>
+                  <a:lnTo>
+                    <a:pt x="1002715" y="2192403"/>
+                  </a:lnTo>
+                  <a:lnTo>
+                    <a:pt x="931092" y="2175327"/>
+                  </a:lnTo>
+                  <a:lnTo>
+                    <a:pt x="859470" y="2158025"/>
+                  </a:lnTo>
+                  <a:lnTo>
+                    <a:pt x="787847" y="2140494"/>
+                  </a:lnTo>
+                  <a:lnTo>
+                    <a:pt x="716225" y="2122732"/>
+                  </a:lnTo>
+                  <a:lnTo>
+                    <a:pt x="644602" y="2104734"/>
+                  </a:lnTo>
+                  <a:lnTo>
+                    <a:pt x="572980" y="2086499"/>
+                  </a:lnTo>
+                  <a:lnTo>
+                    <a:pt x="501357" y="2068022"/>
+                  </a:lnTo>
+                  <a:lnTo>
+                    <a:pt x="429735" y="2049301"/>
+                  </a:lnTo>
+                  <a:lnTo>
+                    <a:pt x="358112" y="2030333"/>
+                  </a:lnTo>
+                  <a:lnTo>
+                    <a:pt x="286490" y="2011114"/>
+                  </a:lnTo>
+                  <a:lnTo>
+                    <a:pt x="214867" y="1991640"/>
+                  </a:lnTo>
+                  <a:lnTo>
+                    <a:pt x="143245" y="1971909"/>
+                  </a:lnTo>
+                  <a:lnTo>
+                    <a:pt x="71622" y="1951917"/>
+                  </a:lnTo>
+                  <a:lnTo>
+                    <a:pt x="0" y="1931661"/>
                   </a:lnTo>
                   <a:close/>
                 </a:path>
@@ -3603,294 +3560,619 @@
         </p:sp>
         <p:sp>
           <p:nvSpPr>
+            <p:cNvPr id="21" name="pl21"/>
+            <p:cNvSpPr/>
+            <p:nvPr/>
+          </p:nvSpPr>
+          <p:spPr>
+            <a:xfrm>
+              <a:off x="1812889" y="2073503"/>
+              <a:ext cx="6449789" cy="3060987"/>
+            </a:xfrm>
+            <a:custGeom>
+              <a:avLst/>
+              <a:pathLst>
+                <a:path w="6449789" h="3060987">
+                  <a:moveTo>
+                    <a:pt x="0" y="0"/>
+                  </a:moveTo>
+                  <a:lnTo>
+                    <a:pt x="3762" y="6891"/>
+                  </a:lnTo>
+                  <a:lnTo>
+                    <a:pt x="75385" y="133301"/>
+                  </a:lnTo>
+                  <a:lnTo>
+                    <a:pt x="147007" y="255115"/>
+                  </a:lnTo>
+                  <a:lnTo>
+                    <a:pt x="218630" y="372500"/>
+                  </a:lnTo>
+                  <a:lnTo>
+                    <a:pt x="290252" y="485618"/>
+                  </a:lnTo>
+                  <a:lnTo>
+                    <a:pt x="361875" y="594623"/>
+                  </a:lnTo>
+                  <a:lnTo>
+                    <a:pt x="433497" y="699664"/>
+                  </a:lnTo>
+                  <a:lnTo>
+                    <a:pt x="505120" y="800887"/>
+                  </a:lnTo>
+                  <a:lnTo>
+                    <a:pt x="576742" y="898429"/>
+                  </a:lnTo>
+                  <a:lnTo>
+                    <a:pt x="648365" y="992425"/>
+                  </a:lnTo>
+                  <a:lnTo>
+                    <a:pt x="719987" y="1083004"/>
+                  </a:lnTo>
+                  <a:lnTo>
+                    <a:pt x="791610" y="1170289"/>
+                  </a:lnTo>
+                  <a:lnTo>
+                    <a:pt x="863232" y="1254401"/>
+                  </a:lnTo>
+                  <a:lnTo>
+                    <a:pt x="934855" y="1335455"/>
+                  </a:lnTo>
+                  <a:lnTo>
+                    <a:pt x="1006477" y="1413561"/>
+                  </a:lnTo>
+                  <a:lnTo>
+                    <a:pt x="1078100" y="1488828"/>
+                  </a:lnTo>
+                  <a:lnTo>
+                    <a:pt x="1149722" y="1561359"/>
+                  </a:lnTo>
+                  <a:lnTo>
+                    <a:pt x="1221345" y="1631252"/>
+                  </a:lnTo>
+                  <a:lnTo>
+                    <a:pt x="1292967" y="1698605"/>
+                  </a:lnTo>
+                  <a:lnTo>
+                    <a:pt x="1364590" y="1763508"/>
+                  </a:lnTo>
+                  <a:lnTo>
+                    <a:pt x="1436213" y="1826052"/>
+                  </a:lnTo>
+                  <a:lnTo>
+                    <a:pt x="1507835" y="1886322"/>
+                  </a:lnTo>
+                  <a:lnTo>
+                    <a:pt x="1579458" y="1944400"/>
+                  </a:lnTo>
+                  <a:lnTo>
+                    <a:pt x="1651080" y="2000367"/>
+                  </a:lnTo>
+                  <a:lnTo>
+                    <a:pt x="1722703" y="2054299"/>
+                  </a:lnTo>
+                  <a:lnTo>
+                    <a:pt x="1794325" y="2106271"/>
+                  </a:lnTo>
+                  <a:lnTo>
+                    <a:pt x="1865948" y="2156352"/>
+                  </a:lnTo>
+                  <a:lnTo>
+                    <a:pt x="1937570" y="2204613"/>
+                  </a:lnTo>
+                  <a:lnTo>
+                    <a:pt x="2009193" y="2251120"/>
+                  </a:lnTo>
+                  <a:lnTo>
+                    <a:pt x="2080815" y="2295935"/>
+                  </a:lnTo>
+                  <a:lnTo>
+                    <a:pt x="2152438" y="2339121"/>
+                  </a:lnTo>
+                  <a:lnTo>
+                    <a:pt x="2224060" y="2380737"/>
+                  </a:lnTo>
+                  <a:lnTo>
+                    <a:pt x="2295683" y="2420840"/>
+                  </a:lnTo>
+                  <a:lnTo>
+                    <a:pt x="2367305" y="2459484"/>
+                  </a:lnTo>
+                  <a:lnTo>
+                    <a:pt x="2438928" y="2496724"/>
+                  </a:lnTo>
+                  <a:lnTo>
+                    <a:pt x="2510550" y="2532610"/>
+                  </a:lnTo>
+                  <a:lnTo>
+                    <a:pt x="2582173" y="2567191"/>
+                  </a:lnTo>
+                  <a:lnTo>
+                    <a:pt x="2653795" y="2600515"/>
+                  </a:lnTo>
+                  <a:lnTo>
+                    <a:pt x="2725418" y="2632627"/>
+                  </a:lnTo>
+                  <a:lnTo>
+                    <a:pt x="2797041" y="2657590"/>
+                  </a:lnTo>
+                  <a:lnTo>
+                    <a:pt x="2868663" y="2668372"/>
+                  </a:lnTo>
+                  <a:lnTo>
+                    <a:pt x="2940286" y="2679013"/>
+                  </a:lnTo>
+                  <a:lnTo>
+                    <a:pt x="3011908" y="2689516"/>
+                  </a:lnTo>
+                  <a:lnTo>
+                    <a:pt x="3083531" y="2699881"/>
+                  </a:lnTo>
+                  <a:lnTo>
+                    <a:pt x="3155153" y="2710111"/>
+                  </a:lnTo>
+                  <a:lnTo>
+                    <a:pt x="3226776" y="2720208"/>
+                  </a:lnTo>
+                  <a:lnTo>
+                    <a:pt x="3298398" y="2730173"/>
+                  </a:lnTo>
+                  <a:lnTo>
+                    <a:pt x="3370021" y="2740008"/>
+                  </a:lnTo>
+                  <a:lnTo>
+                    <a:pt x="3441643" y="2749714"/>
+                  </a:lnTo>
+                  <a:lnTo>
+                    <a:pt x="3513266" y="2759294"/>
+                  </a:lnTo>
+                  <a:lnTo>
+                    <a:pt x="3584888" y="2768749"/>
+                  </a:lnTo>
+                  <a:lnTo>
+                    <a:pt x="3656511" y="2778080"/>
+                  </a:lnTo>
+                  <a:lnTo>
+                    <a:pt x="3728133" y="2787290"/>
+                  </a:lnTo>
+                  <a:lnTo>
+                    <a:pt x="3799756" y="2796379"/>
+                  </a:lnTo>
+                  <a:lnTo>
+                    <a:pt x="3871378" y="2805350"/>
+                  </a:lnTo>
+                  <a:lnTo>
+                    <a:pt x="3943001" y="2814204"/>
+                  </a:lnTo>
+                  <a:lnTo>
+                    <a:pt x="4014623" y="2822942"/>
+                  </a:lnTo>
+                  <a:lnTo>
+                    <a:pt x="4086246" y="2831566"/>
+                  </a:lnTo>
+                  <a:lnTo>
+                    <a:pt x="4157869" y="2840078"/>
+                  </a:lnTo>
+                  <a:lnTo>
+                    <a:pt x="4229491" y="2848478"/>
+                  </a:lnTo>
+                  <a:lnTo>
+                    <a:pt x="4301114" y="2856769"/>
+                  </a:lnTo>
+                  <a:lnTo>
+                    <a:pt x="4372736" y="2864952"/>
+                  </a:lnTo>
+                  <a:lnTo>
+                    <a:pt x="4444359" y="2873028"/>
+                  </a:lnTo>
+                  <a:lnTo>
+                    <a:pt x="4515981" y="2880998"/>
+                  </a:lnTo>
+                  <a:lnTo>
+                    <a:pt x="4587604" y="2888865"/>
+                  </a:lnTo>
+                  <a:lnTo>
+                    <a:pt x="4659226" y="2896628"/>
+                  </a:lnTo>
+                  <a:lnTo>
+                    <a:pt x="4730849" y="2904291"/>
+                  </a:lnTo>
+                  <a:lnTo>
+                    <a:pt x="4802471" y="2911853"/>
+                  </a:lnTo>
+                  <a:lnTo>
+                    <a:pt x="4874094" y="2919317"/>
+                  </a:lnTo>
+                  <a:lnTo>
+                    <a:pt x="4945716" y="2926683"/>
+                  </a:lnTo>
+                  <a:lnTo>
+                    <a:pt x="5017339" y="2933954"/>
+                  </a:lnTo>
+                  <a:lnTo>
+                    <a:pt x="5088961" y="2941129"/>
+                  </a:lnTo>
+                  <a:lnTo>
+                    <a:pt x="5160584" y="2948211"/>
+                  </a:lnTo>
+                  <a:lnTo>
+                    <a:pt x="5232206" y="2955200"/>
+                  </a:lnTo>
+                  <a:lnTo>
+                    <a:pt x="5303829" y="2962098"/>
+                  </a:lnTo>
+                  <a:lnTo>
+                    <a:pt x="5375451" y="2968906"/>
+                  </a:lnTo>
+                  <a:lnTo>
+                    <a:pt x="5447074" y="2975625"/>
+                  </a:lnTo>
+                  <a:lnTo>
+                    <a:pt x="5518697" y="2982257"/>
+                  </a:lnTo>
+                  <a:lnTo>
+                    <a:pt x="5590319" y="2988802"/>
+                  </a:lnTo>
+                  <a:lnTo>
+                    <a:pt x="5661942" y="2995261"/>
+                  </a:lnTo>
+                  <a:lnTo>
+                    <a:pt x="5733564" y="3001636"/>
+                  </a:lnTo>
+                  <a:lnTo>
+                    <a:pt x="5805187" y="3007928"/>
+                  </a:lnTo>
+                  <a:lnTo>
+                    <a:pt x="5876809" y="3014138"/>
+                  </a:lnTo>
+                  <a:lnTo>
+                    <a:pt x="5948432" y="3020267"/>
+                  </a:lnTo>
+                  <a:lnTo>
+                    <a:pt x="6020054" y="3026316"/>
+                  </a:lnTo>
+                  <a:lnTo>
+                    <a:pt x="6091677" y="3032286"/>
+                  </a:lnTo>
+                  <a:lnTo>
+                    <a:pt x="6163299" y="3038178"/>
+                  </a:lnTo>
+                  <a:lnTo>
+                    <a:pt x="6234922" y="3043993"/>
+                  </a:lnTo>
+                  <a:lnTo>
+                    <a:pt x="6306544" y="3049732"/>
+                  </a:lnTo>
+                  <a:lnTo>
+                    <a:pt x="6378167" y="3055396"/>
+                  </a:lnTo>
+                  <a:lnTo>
+                    <a:pt x="6449789" y="3060987"/>
+                  </a:lnTo>
+                </a:path>
+              </a:pathLst>
+            </a:custGeom>
+          </p:spPr>
+          <p:txBody>
+            <a:bodyPr/>
+            <a:lstStyle/>
+            <a:p/>
+          </p:txBody>
+        </p:sp>
+        <p:sp>
+          <p:nvSpPr>
             <p:cNvPr id="22" name="pl22"/>
             <p:cNvSpPr/>
             <p:nvPr/>
           </p:nvSpPr>
           <p:spPr>
             <a:xfrm>
-              <a:off x="1411070" y="2073503"/>
-              <a:ext cx="6642277" cy="3060987"/>
+              <a:off x="1172049" y="4005164"/>
+              <a:ext cx="7090630" cy="1428029"/>
             </a:xfrm>
             <a:custGeom>
               <a:avLst/>
               <a:pathLst>
-                <a:path w="6642277" h="3060987">
+                <a:path w="7090630" h="1428029">
                   <a:moveTo>
+                    <a:pt x="7090630" y="1428029"/>
+                  </a:moveTo>
+                  <a:lnTo>
+                    <a:pt x="7019007" y="1423348"/>
+                  </a:lnTo>
+                  <a:lnTo>
+                    <a:pt x="6947385" y="1418491"/>
+                  </a:lnTo>
+                  <a:lnTo>
+                    <a:pt x="6875762" y="1413451"/>
+                  </a:lnTo>
+                  <a:lnTo>
+                    <a:pt x="6804139" y="1408220"/>
+                  </a:lnTo>
+                  <a:lnTo>
+                    <a:pt x="6732517" y="1402792"/>
+                  </a:lnTo>
+                  <a:lnTo>
+                    <a:pt x="6660894" y="1397160"/>
+                  </a:lnTo>
+                  <a:lnTo>
+                    <a:pt x="6589272" y="1391314"/>
+                  </a:lnTo>
+                  <a:lnTo>
+                    <a:pt x="6517649" y="1385249"/>
+                  </a:lnTo>
+                  <a:lnTo>
+                    <a:pt x="6446027" y="1378954"/>
+                  </a:lnTo>
+                  <a:lnTo>
+                    <a:pt x="6374404" y="1372422"/>
+                  </a:lnTo>
+                  <a:lnTo>
+                    <a:pt x="6302782" y="1365643"/>
+                  </a:lnTo>
+                  <a:lnTo>
+                    <a:pt x="6231159" y="1358609"/>
+                  </a:lnTo>
+                  <a:lnTo>
+                    <a:pt x="6159537" y="1351309"/>
+                  </a:lnTo>
+                  <a:lnTo>
+                    <a:pt x="6087914" y="1343734"/>
+                  </a:lnTo>
+                  <a:lnTo>
+                    <a:pt x="6016292" y="1335873"/>
+                  </a:lnTo>
+                  <a:lnTo>
+                    <a:pt x="5944669" y="1327716"/>
+                  </a:lnTo>
+                  <a:lnTo>
+                    <a:pt x="5873047" y="1319250"/>
+                  </a:lnTo>
+                  <a:lnTo>
+                    <a:pt x="5801424" y="1310466"/>
+                  </a:lnTo>
+                  <a:lnTo>
+                    <a:pt x="5729802" y="1301350"/>
+                  </a:lnTo>
+                  <a:lnTo>
+                    <a:pt x="5658179" y="1291890"/>
+                  </a:lnTo>
+                  <a:lnTo>
+                    <a:pt x="5586557" y="1282073"/>
+                  </a:lnTo>
+                  <a:lnTo>
+                    <a:pt x="5514934" y="1271885"/>
+                  </a:lnTo>
+                  <a:lnTo>
+                    <a:pt x="5443311" y="1261313"/>
+                  </a:lnTo>
+                  <a:lnTo>
+                    <a:pt x="5371689" y="1250343"/>
+                  </a:lnTo>
+                  <a:lnTo>
+                    <a:pt x="5300066" y="1238958"/>
+                  </a:lnTo>
+                  <a:lnTo>
+                    <a:pt x="5228444" y="1227144"/>
+                  </a:lnTo>
+                  <a:lnTo>
+                    <a:pt x="5156821" y="1214884"/>
+                  </a:lnTo>
+                  <a:lnTo>
+                    <a:pt x="5085199" y="1202162"/>
+                  </a:lnTo>
+                  <a:lnTo>
+                    <a:pt x="5013576" y="1188960"/>
+                  </a:lnTo>
+                  <a:lnTo>
+                    <a:pt x="4941954" y="1175259"/>
+                  </a:lnTo>
+                  <a:lnTo>
+                    <a:pt x="4870331" y="1161042"/>
+                  </a:lnTo>
+                  <a:lnTo>
+                    <a:pt x="4798709" y="1146288"/>
+                  </a:lnTo>
+                  <a:lnTo>
+                    <a:pt x="4727086" y="1130978"/>
+                  </a:lnTo>
+                  <a:lnTo>
+                    <a:pt x="4655464" y="1115090"/>
+                  </a:lnTo>
+                  <a:lnTo>
+                    <a:pt x="4583841" y="1098602"/>
+                  </a:lnTo>
+                  <a:lnTo>
+                    <a:pt x="4512219" y="1081492"/>
+                  </a:lnTo>
+                  <a:lnTo>
+                    <a:pt x="4440596" y="1063737"/>
+                  </a:lnTo>
+                  <a:lnTo>
+                    <a:pt x="4368974" y="1045312"/>
+                  </a:lnTo>
+                  <a:lnTo>
+                    <a:pt x="4297351" y="1026192"/>
+                  </a:lnTo>
+                  <a:lnTo>
+                    <a:pt x="4225729" y="1006350"/>
+                  </a:lnTo>
+                  <a:lnTo>
+                    <a:pt x="4154106" y="985760"/>
+                  </a:lnTo>
+                  <a:lnTo>
+                    <a:pt x="4082483" y="964393"/>
+                  </a:lnTo>
+                  <a:lnTo>
+                    <a:pt x="4010861" y="942220"/>
+                  </a:lnTo>
+                  <a:lnTo>
+                    <a:pt x="3939238" y="919210"/>
+                  </a:lnTo>
+                  <a:lnTo>
+                    <a:pt x="3867616" y="895332"/>
+                  </a:lnTo>
+                  <a:lnTo>
+                    <a:pt x="3795993" y="870553"/>
+                  </a:lnTo>
+                  <a:lnTo>
+                    <a:pt x="3724371" y="844839"/>
+                  </a:lnTo>
+                  <a:lnTo>
+                    <a:pt x="3652748" y="818156"/>
+                  </a:lnTo>
+                  <a:lnTo>
+                    <a:pt x="3581126" y="790465"/>
+                  </a:lnTo>
+                  <a:lnTo>
+                    <a:pt x="3509503" y="761729"/>
+                  </a:lnTo>
+                  <a:lnTo>
+                    <a:pt x="3437881" y="731910"/>
+                  </a:lnTo>
+                  <a:lnTo>
+                    <a:pt x="3366258" y="715003"/>
+                  </a:lnTo>
+                  <a:lnTo>
+                    <a:pt x="3294636" y="703934"/>
+                  </a:lnTo>
+                  <a:lnTo>
+                    <a:pt x="3223013" y="692718"/>
+                  </a:lnTo>
+                  <a:lnTo>
+                    <a:pt x="3151391" y="681355"/>
+                  </a:lnTo>
+                  <a:lnTo>
+                    <a:pt x="3079768" y="669840"/>
+                  </a:lnTo>
+                  <a:lnTo>
+                    <a:pt x="3008146" y="658174"/>
+                  </a:lnTo>
+                  <a:lnTo>
+                    <a:pt x="2936523" y="646353"/>
+                  </a:lnTo>
+                  <a:lnTo>
+                    <a:pt x="2864901" y="634376"/>
+                  </a:lnTo>
+                  <a:lnTo>
+                    <a:pt x="2793278" y="622241"/>
+                  </a:lnTo>
+                  <a:lnTo>
+                    <a:pt x="2721655" y="609945"/>
+                  </a:lnTo>
+                  <a:lnTo>
+                    <a:pt x="2650033" y="597487"/>
+                  </a:lnTo>
+                  <a:lnTo>
+                    <a:pt x="2578410" y="584864"/>
+                  </a:lnTo>
+                  <a:lnTo>
+                    <a:pt x="2506788" y="572074"/>
+                  </a:lnTo>
+                  <a:lnTo>
+                    <a:pt x="2435165" y="559114"/>
+                  </a:lnTo>
+                  <a:lnTo>
+                    <a:pt x="2363543" y="545984"/>
+                  </a:lnTo>
+                  <a:lnTo>
+                    <a:pt x="2291920" y="532680"/>
+                  </a:lnTo>
+                  <a:lnTo>
+                    <a:pt x="2220298" y="519199"/>
+                  </a:lnTo>
+                  <a:lnTo>
+                    <a:pt x="2148675" y="505541"/>
+                  </a:lnTo>
+                  <a:lnTo>
+                    <a:pt x="2077053" y="491702"/>
+                  </a:lnTo>
+                  <a:lnTo>
+                    <a:pt x="2005430" y="477680"/>
+                  </a:lnTo>
+                  <a:lnTo>
+                    <a:pt x="1933808" y="463473"/>
+                  </a:lnTo>
+                  <a:lnTo>
+                    <a:pt x="1862185" y="449077"/>
+                  </a:lnTo>
+                  <a:lnTo>
+                    <a:pt x="1790563" y="434492"/>
+                  </a:lnTo>
+                  <a:lnTo>
+                    <a:pt x="1718940" y="419713"/>
+                  </a:lnTo>
+                  <a:lnTo>
+                    <a:pt x="1647318" y="404739"/>
+                  </a:lnTo>
+                  <a:lnTo>
+                    <a:pt x="1575695" y="389567"/>
+                  </a:lnTo>
+                  <a:lnTo>
+                    <a:pt x="1504073" y="374194"/>
+                  </a:lnTo>
+                  <a:lnTo>
+                    <a:pt x="1432450" y="358619"/>
+                  </a:lnTo>
+                  <a:lnTo>
+                    <a:pt x="1360827" y="342837"/>
+                  </a:lnTo>
+                  <a:lnTo>
+                    <a:pt x="1289205" y="326846"/>
+                  </a:lnTo>
+                  <a:lnTo>
+                    <a:pt x="1217582" y="310644"/>
+                  </a:lnTo>
+                  <a:lnTo>
+                    <a:pt x="1145960" y="294228"/>
+                  </a:lnTo>
+                  <a:lnTo>
+                    <a:pt x="1074337" y="277595"/>
+                  </a:lnTo>
+                  <a:lnTo>
+                    <a:pt x="1002715" y="260741"/>
+                  </a:lnTo>
+                  <a:lnTo>
+                    <a:pt x="931092" y="243665"/>
+                  </a:lnTo>
+                  <a:lnTo>
+                    <a:pt x="859470" y="226363"/>
+                  </a:lnTo>
+                  <a:lnTo>
+                    <a:pt x="787847" y="208833"/>
+                  </a:lnTo>
+                  <a:lnTo>
+                    <a:pt x="716225" y="191070"/>
+                  </a:lnTo>
+                  <a:lnTo>
+                    <a:pt x="644602" y="173073"/>
+                  </a:lnTo>
+                  <a:lnTo>
+                    <a:pt x="572980" y="154837"/>
+                  </a:lnTo>
+                  <a:lnTo>
+                    <a:pt x="501357" y="136361"/>
+                  </a:lnTo>
+                  <a:lnTo>
+                    <a:pt x="429735" y="117640"/>
+                  </a:lnTo>
+                  <a:lnTo>
+                    <a:pt x="358112" y="98671"/>
+                  </a:lnTo>
+                  <a:lnTo>
+                    <a:pt x="286490" y="79452"/>
+                  </a:lnTo>
+                  <a:lnTo>
+                    <a:pt x="214867" y="59978"/>
+                  </a:lnTo>
+                  <a:lnTo>
+                    <a:pt x="143245" y="40248"/>
+                  </a:lnTo>
+                  <a:lnTo>
+                    <a:pt x="71622" y="20256"/>
+                  </a:lnTo>
+                  <a:lnTo>
                     <a:pt x="0" y="0"/>
-                  </a:moveTo>
-                  <a:lnTo>
-                    <a:pt x="3874" y="6891"/>
-                  </a:lnTo>
-                  <a:lnTo>
-                    <a:pt x="77634" y="133301"/>
-                  </a:lnTo>
-                  <a:lnTo>
-                    <a:pt x="151394" y="255115"/>
-                  </a:lnTo>
-                  <a:lnTo>
-                    <a:pt x="225154" y="372500"/>
-                  </a:lnTo>
-                  <a:lnTo>
-                    <a:pt x="298914" y="485618"/>
-                  </a:lnTo>
-                  <a:lnTo>
-                    <a:pt x="372674" y="594623"/>
-                  </a:lnTo>
-                  <a:lnTo>
-                    <a:pt x="446434" y="699664"/>
-                  </a:lnTo>
-                  <a:lnTo>
-                    <a:pt x="520194" y="800887"/>
-                  </a:lnTo>
-                  <a:lnTo>
-                    <a:pt x="593954" y="898429"/>
-                  </a:lnTo>
-                  <a:lnTo>
-                    <a:pt x="667715" y="992425"/>
-                  </a:lnTo>
-                  <a:lnTo>
-                    <a:pt x="741475" y="1083004"/>
-                  </a:lnTo>
-                  <a:lnTo>
-                    <a:pt x="815235" y="1170289"/>
-                  </a:lnTo>
-                  <a:lnTo>
-                    <a:pt x="888995" y="1254401"/>
-                  </a:lnTo>
-                  <a:lnTo>
-                    <a:pt x="962755" y="1335455"/>
-                  </a:lnTo>
-                  <a:lnTo>
-                    <a:pt x="1036515" y="1413561"/>
-                  </a:lnTo>
-                  <a:lnTo>
-                    <a:pt x="1110275" y="1488828"/>
-                  </a:lnTo>
-                  <a:lnTo>
-                    <a:pt x="1184035" y="1561359"/>
-                  </a:lnTo>
-                  <a:lnTo>
-                    <a:pt x="1257795" y="1631252"/>
-                  </a:lnTo>
-                  <a:lnTo>
-                    <a:pt x="1331555" y="1698605"/>
-                  </a:lnTo>
-                  <a:lnTo>
-                    <a:pt x="1405315" y="1763508"/>
-                  </a:lnTo>
-                  <a:lnTo>
-                    <a:pt x="1479075" y="1826052"/>
-                  </a:lnTo>
-                  <a:lnTo>
-                    <a:pt x="1552835" y="1886322"/>
-                  </a:lnTo>
-                  <a:lnTo>
-                    <a:pt x="1626595" y="1944400"/>
-                  </a:lnTo>
-                  <a:lnTo>
-                    <a:pt x="1700355" y="2000367"/>
-                  </a:lnTo>
-                  <a:lnTo>
-                    <a:pt x="1774115" y="2054299"/>
-                  </a:lnTo>
-                  <a:lnTo>
-                    <a:pt x="1847875" y="2106271"/>
-                  </a:lnTo>
-                  <a:lnTo>
-                    <a:pt x="1921635" y="2156352"/>
-                  </a:lnTo>
-                  <a:lnTo>
-                    <a:pt x="1995395" y="2204613"/>
-                  </a:lnTo>
-                  <a:lnTo>
-                    <a:pt x="2069155" y="2251120"/>
-                  </a:lnTo>
-                  <a:lnTo>
-                    <a:pt x="2142915" y="2295935"/>
-                  </a:lnTo>
-                  <a:lnTo>
-                    <a:pt x="2216675" y="2339121"/>
-                  </a:lnTo>
-                  <a:lnTo>
-                    <a:pt x="2290435" y="2380737"/>
-                  </a:lnTo>
-                  <a:lnTo>
-                    <a:pt x="2364195" y="2420840"/>
-                  </a:lnTo>
-                  <a:lnTo>
-                    <a:pt x="2437955" y="2459484"/>
-                  </a:lnTo>
-                  <a:lnTo>
-                    <a:pt x="2511715" y="2496724"/>
-                  </a:lnTo>
-                  <a:lnTo>
-                    <a:pt x="2585475" y="2532610"/>
-                  </a:lnTo>
-                  <a:lnTo>
-                    <a:pt x="2659235" y="2567191"/>
-                  </a:lnTo>
-                  <a:lnTo>
-                    <a:pt x="2732995" y="2600515"/>
-                  </a:lnTo>
-                  <a:lnTo>
-                    <a:pt x="2806755" y="2632627"/>
-                  </a:lnTo>
-                  <a:lnTo>
-                    <a:pt x="2880515" y="2657590"/>
-                  </a:lnTo>
-                  <a:lnTo>
-                    <a:pt x="2954275" y="2668372"/>
-                  </a:lnTo>
-                  <a:lnTo>
-                    <a:pt x="3028035" y="2679013"/>
-                  </a:lnTo>
-                  <a:lnTo>
-                    <a:pt x="3101795" y="2689516"/>
-                  </a:lnTo>
-                  <a:lnTo>
-                    <a:pt x="3175555" y="2699881"/>
-                  </a:lnTo>
-                  <a:lnTo>
-                    <a:pt x="3249315" y="2710111"/>
-                  </a:lnTo>
-                  <a:lnTo>
-                    <a:pt x="3323075" y="2720208"/>
-                  </a:lnTo>
-                  <a:lnTo>
-                    <a:pt x="3396835" y="2730173"/>
-                  </a:lnTo>
-                  <a:lnTo>
-                    <a:pt x="3470595" y="2740008"/>
-                  </a:lnTo>
-                  <a:lnTo>
-                    <a:pt x="3544355" y="2749714"/>
-                  </a:lnTo>
-                  <a:lnTo>
-                    <a:pt x="3618116" y="2759294"/>
-                  </a:lnTo>
-                  <a:lnTo>
-                    <a:pt x="3691876" y="2768749"/>
-                  </a:lnTo>
-                  <a:lnTo>
-                    <a:pt x="3765636" y="2778080"/>
-                  </a:lnTo>
-                  <a:lnTo>
-                    <a:pt x="3839396" y="2787290"/>
-                  </a:lnTo>
-                  <a:lnTo>
-                    <a:pt x="3913156" y="2796379"/>
-                  </a:lnTo>
-                  <a:lnTo>
-                    <a:pt x="3986916" y="2805350"/>
-                  </a:lnTo>
-                  <a:lnTo>
-                    <a:pt x="4060676" y="2814204"/>
-                  </a:lnTo>
-                  <a:lnTo>
-                    <a:pt x="4134436" y="2822942"/>
-                  </a:lnTo>
-                  <a:lnTo>
-                    <a:pt x="4208196" y="2831566"/>
-                  </a:lnTo>
-                  <a:lnTo>
-                    <a:pt x="4281956" y="2840078"/>
-                  </a:lnTo>
-                  <a:lnTo>
-                    <a:pt x="4355716" y="2848478"/>
-                  </a:lnTo>
-                  <a:lnTo>
-                    <a:pt x="4429476" y="2856769"/>
-                  </a:lnTo>
-                  <a:lnTo>
-                    <a:pt x="4503236" y="2864952"/>
-                  </a:lnTo>
-                  <a:lnTo>
-                    <a:pt x="4576996" y="2873028"/>
-                  </a:lnTo>
-                  <a:lnTo>
-                    <a:pt x="4650756" y="2880998"/>
-                  </a:lnTo>
-                  <a:lnTo>
-                    <a:pt x="4724516" y="2888865"/>
-                  </a:lnTo>
-                  <a:lnTo>
-                    <a:pt x="4798276" y="2896628"/>
-                  </a:lnTo>
-                  <a:lnTo>
-                    <a:pt x="4872036" y="2904291"/>
-                  </a:lnTo>
-                  <a:lnTo>
-                    <a:pt x="4945796" y="2911853"/>
-                  </a:lnTo>
-                  <a:lnTo>
-                    <a:pt x="5019556" y="2919317"/>
-                  </a:lnTo>
-                  <a:lnTo>
-                    <a:pt x="5093316" y="2926683"/>
-                  </a:lnTo>
-                  <a:lnTo>
-                    <a:pt x="5167076" y="2933954"/>
-                  </a:lnTo>
-                  <a:lnTo>
-                    <a:pt x="5240836" y="2941129"/>
-                  </a:lnTo>
-                  <a:lnTo>
-                    <a:pt x="5314596" y="2948211"/>
-                  </a:lnTo>
-                  <a:lnTo>
-                    <a:pt x="5388356" y="2955200"/>
-                  </a:lnTo>
-                  <a:lnTo>
-                    <a:pt x="5462116" y="2962098"/>
-                  </a:lnTo>
-                  <a:lnTo>
-                    <a:pt x="5535876" y="2968906"/>
-                  </a:lnTo>
-                  <a:lnTo>
-                    <a:pt x="5609636" y="2975625"/>
-                  </a:lnTo>
-                  <a:lnTo>
-                    <a:pt x="5683396" y="2982257"/>
-                  </a:lnTo>
-                  <a:lnTo>
-                    <a:pt x="5757156" y="2988802"/>
-                  </a:lnTo>
-                  <a:lnTo>
-                    <a:pt x="5830916" y="2995261"/>
-                  </a:lnTo>
-                  <a:lnTo>
-                    <a:pt x="5904676" y="3001636"/>
-                  </a:lnTo>
-                  <a:lnTo>
-                    <a:pt x="5978436" y="3007928"/>
-                  </a:lnTo>
-                  <a:lnTo>
-                    <a:pt x="6052196" y="3014138"/>
-                  </a:lnTo>
-                  <a:lnTo>
-                    <a:pt x="6125956" y="3020267"/>
-                  </a:lnTo>
-                  <a:lnTo>
-                    <a:pt x="6199716" y="3026316"/>
-                  </a:lnTo>
-                  <a:lnTo>
-                    <a:pt x="6273476" y="3032286"/>
-                  </a:lnTo>
-                  <a:lnTo>
-                    <a:pt x="6347236" y="3038178"/>
-                  </a:lnTo>
-                  <a:lnTo>
-                    <a:pt x="6420996" y="3043993"/>
-                  </a:lnTo>
-                  <a:lnTo>
-                    <a:pt x="6494757" y="3049732"/>
-                  </a:lnTo>
-                  <a:lnTo>
-                    <a:pt x="6568517" y="3055396"/>
-                  </a:lnTo>
-                  <a:lnTo>
-                    <a:pt x="6642277" y="3060987"/>
                   </a:lnTo>
                 </a:path>
               </a:pathLst>
@@ -3910,637 +4192,312 @@
           </p:nvSpPr>
           <p:spPr>
             <a:xfrm>
-              <a:off x="817517" y="4023403"/>
-              <a:ext cx="7235830" cy="1409791"/>
+              <a:off x="1172049" y="2812962"/>
+              <a:ext cx="7090630" cy="2515277"/>
             </a:xfrm>
             <a:custGeom>
               <a:avLst/>
               <a:pathLst>
-                <a:path w="7235830" h="1409791">
-                  <a:moveTo>
-                    <a:pt x="7235830" y="1409791"/>
-                  </a:moveTo>
-                  <a:lnTo>
-                    <a:pt x="7162070" y="1405110"/>
-                  </a:lnTo>
-                  <a:lnTo>
-                    <a:pt x="7088310" y="1400253"/>
-                  </a:lnTo>
-                  <a:lnTo>
-                    <a:pt x="7014550" y="1395212"/>
-                  </a:lnTo>
-                  <a:lnTo>
-                    <a:pt x="6940789" y="1389982"/>
-                  </a:lnTo>
-                  <a:lnTo>
-                    <a:pt x="6867029" y="1384554"/>
-                  </a:lnTo>
-                  <a:lnTo>
-                    <a:pt x="6793269" y="1378921"/>
-                  </a:lnTo>
-                  <a:lnTo>
-                    <a:pt x="6719509" y="1373076"/>
-                  </a:lnTo>
-                  <a:lnTo>
-                    <a:pt x="6645749" y="1367010"/>
-                  </a:lnTo>
-                  <a:lnTo>
-                    <a:pt x="6571989" y="1360716"/>
-                  </a:lnTo>
-                  <a:lnTo>
-                    <a:pt x="6498229" y="1354184"/>
-                  </a:lnTo>
-                  <a:lnTo>
-                    <a:pt x="6424469" y="1347405"/>
-                  </a:lnTo>
-                  <a:lnTo>
-                    <a:pt x="6350709" y="1340371"/>
-                  </a:lnTo>
-                  <a:lnTo>
-                    <a:pt x="6276949" y="1333071"/>
-                  </a:lnTo>
-                  <a:lnTo>
-                    <a:pt x="6203189" y="1325496"/>
-                  </a:lnTo>
-                  <a:lnTo>
-                    <a:pt x="6129429" y="1317635"/>
-                  </a:lnTo>
-                  <a:lnTo>
-                    <a:pt x="6055669" y="1309477"/>
-                  </a:lnTo>
-                  <a:lnTo>
-                    <a:pt x="5981909" y="1301012"/>
-                  </a:lnTo>
-                  <a:lnTo>
-                    <a:pt x="5908149" y="1292227"/>
-                  </a:lnTo>
-                  <a:lnTo>
-                    <a:pt x="5834389" y="1283111"/>
-                  </a:lnTo>
-                  <a:lnTo>
-                    <a:pt x="5760629" y="1273651"/>
-                  </a:lnTo>
-                  <a:lnTo>
-                    <a:pt x="5686869" y="1263834"/>
-                  </a:lnTo>
-                  <a:lnTo>
-                    <a:pt x="5613109" y="1253647"/>
-                  </a:lnTo>
-                  <a:lnTo>
-                    <a:pt x="5539349" y="1243075"/>
-                  </a:lnTo>
-                  <a:lnTo>
-                    <a:pt x="5465589" y="1232104"/>
-                  </a:lnTo>
-                  <a:lnTo>
-                    <a:pt x="5391829" y="1220720"/>
-                  </a:lnTo>
-                  <a:lnTo>
-                    <a:pt x="5318069" y="1208906"/>
-                  </a:lnTo>
-                  <a:lnTo>
-                    <a:pt x="5244309" y="1196646"/>
-                  </a:lnTo>
-                  <a:lnTo>
-                    <a:pt x="5170549" y="1183924"/>
-                  </a:lnTo>
-                  <a:lnTo>
-                    <a:pt x="5096789" y="1170721"/>
-                  </a:lnTo>
-                  <a:lnTo>
-                    <a:pt x="5023029" y="1157021"/>
-                  </a:lnTo>
-                  <a:lnTo>
-                    <a:pt x="4949269" y="1142804"/>
-                  </a:lnTo>
-                  <a:lnTo>
-                    <a:pt x="4875509" y="1128050"/>
-                  </a:lnTo>
-                  <a:lnTo>
-                    <a:pt x="4801749" y="1112739"/>
-                  </a:lnTo>
-                  <a:lnTo>
-                    <a:pt x="4727989" y="1096851"/>
-                  </a:lnTo>
-                  <a:lnTo>
-                    <a:pt x="4654229" y="1080364"/>
-                  </a:lnTo>
-                  <a:lnTo>
-                    <a:pt x="4580469" y="1063254"/>
-                  </a:lnTo>
-                  <a:lnTo>
-                    <a:pt x="4506709" y="1045499"/>
-                  </a:lnTo>
-                  <a:lnTo>
-                    <a:pt x="4432949" y="1027074"/>
-                  </a:lnTo>
-                  <a:lnTo>
-                    <a:pt x="4359189" y="1007954"/>
-                  </a:lnTo>
-                  <a:lnTo>
-                    <a:pt x="4285429" y="988112"/>
-                  </a:lnTo>
-                  <a:lnTo>
-                    <a:pt x="4211669" y="967522"/>
-                  </a:lnTo>
-                  <a:lnTo>
-                    <a:pt x="4137909" y="946155"/>
-                  </a:lnTo>
-                  <a:lnTo>
-                    <a:pt x="4064149" y="923981"/>
-                  </a:lnTo>
-                  <a:lnTo>
-                    <a:pt x="3990388" y="900972"/>
-                  </a:lnTo>
-                  <a:lnTo>
-                    <a:pt x="3916628" y="877094"/>
-                  </a:lnTo>
-                  <a:lnTo>
-                    <a:pt x="3842868" y="852315"/>
-                  </a:lnTo>
-                  <a:lnTo>
-                    <a:pt x="3769108" y="826601"/>
-                  </a:lnTo>
-                  <a:lnTo>
-                    <a:pt x="3695348" y="799917"/>
-                  </a:lnTo>
-                  <a:lnTo>
-                    <a:pt x="3621588" y="772226"/>
-                  </a:lnTo>
-                  <a:lnTo>
-                    <a:pt x="3547828" y="743491"/>
-                  </a:lnTo>
-                  <a:lnTo>
-                    <a:pt x="3474068" y="713671"/>
-                  </a:lnTo>
-                  <a:lnTo>
-                    <a:pt x="3400308" y="696765"/>
-                  </a:lnTo>
-                  <a:lnTo>
-                    <a:pt x="3326548" y="685696"/>
-                  </a:lnTo>
-                  <a:lnTo>
-                    <a:pt x="3252788" y="674480"/>
-                  </a:lnTo>
-                  <a:lnTo>
-                    <a:pt x="3179028" y="663116"/>
-                  </a:lnTo>
-                  <a:lnTo>
-                    <a:pt x="3105268" y="651602"/>
-                  </a:lnTo>
-                  <a:lnTo>
-                    <a:pt x="3031508" y="639936"/>
-                  </a:lnTo>
-                  <a:lnTo>
-                    <a:pt x="2957748" y="628115"/>
-                  </a:lnTo>
-                  <a:lnTo>
-                    <a:pt x="2883988" y="616138"/>
-                  </a:lnTo>
-                  <a:lnTo>
-                    <a:pt x="2810228" y="604003"/>
-                  </a:lnTo>
-                  <a:lnTo>
-                    <a:pt x="2736468" y="591707"/>
-                  </a:lnTo>
-                  <a:lnTo>
-                    <a:pt x="2662708" y="579248"/>
-                  </a:lnTo>
-                  <a:lnTo>
-                    <a:pt x="2588948" y="566625"/>
-                  </a:lnTo>
-                  <a:lnTo>
-                    <a:pt x="2515188" y="553835"/>
-                  </a:lnTo>
-                  <a:lnTo>
-                    <a:pt x="2441428" y="540876"/>
-                  </a:lnTo>
-                  <a:lnTo>
-                    <a:pt x="2367668" y="527745"/>
-                  </a:lnTo>
-                  <a:lnTo>
-                    <a:pt x="2293908" y="514441"/>
-                  </a:lnTo>
-                  <a:lnTo>
-                    <a:pt x="2220148" y="500961"/>
-                  </a:lnTo>
-                  <a:lnTo>
-                    <a:pt x="2146388" y="487303"/>
-                  </a:lnTo>
-                  <a:lnTo>
-                    <a:pt x="2072628" y="473464"/>
-                  </a:lnTo>
-                  <a:lnTo>
-                    <a:pt x="1998868" y="459442"/>
-                  </a:lnTo>
-                  <a:lnTo>
-                    <a:pt x="1925108" y="445234"/>
-                  </a:lnTo>
-                  <a:lnTo>
-                    <a:pt x="1851348" y="430839"/>
-                  </a:lnTo>
-                  <a:lnTo>
-                    <a:pt x="1777588" y="416253"/>
-                  </a:lnTo>
-                  <a:lnTo>
-                    <a:pt x="1703828" y="401475"/>
-                  </a:lnTo>
-                  <a:lnTo>
-                    <a:pt x="1630068" y="386501"/>
-                  </a:lnTo>
-                  <a:lnTo>
-                    <a:pt x="1556308" y="371329"/>
-                  </a:lnTo>
-                  <a:lnTo>
-                    <a:pt x="1482548" y="355956"/>
-                  </a:lnTo>
-                  <a:lnTo>
-                    <a:pt x="1408788" y="340380"/>
-                  </a:lnTo>
-                  <a:lnTo>
-                    <a:pt x="1335028" y="324598"/>
-                  </a:lnTo>
-                  <a:lnTo>
-                    <a:pt x="1261268" y="308608"/>
-                  </a:lnTo>
-                  <a:lnTo>
-                    <a:pt x="1187508" y="292406"/>
-                  </a:lnTo>
-                  <a:lnTo>
-                    <a:pt x="1113747" y="275990"/>
-                  </a:lnTo>
-                  <a:lnTo>
-                    <a:pt x="1039987" y="259356"/>
-                  </a:lnTo>
-                  <a:lnTo>
-                    <a:pt x="966227" y="242503"/>
-                  </a:lnTo>
-                  <a:lnTo>
-                    <a:pt x="892467" y="225427"/>
-                  </a:lnTo>
-                  <a:lnTo>
-                    <a:pt x="818707" y="208125"/>
-                  </a:lnTo>
-                  <a:lnTo>
-                    <a:pt x="744947" y="190594"/>
-                  </a:lnTo>
-                  <a:lnTo>
-                    <a:pt x="671187" y="172832"/>
-                  </a:lnTo>
-                  <a:lnTo>
-                    <a:pt x="597427" y="154834"/>
-                  </a:lnTo>
-                  <a:lnTo>
-                    <a:pt x="523667" y="136599"/>
-                  </a:lnTo>
-                  <a:lnTo>
-                    <a:pt x="449907" y="118122"/>
-                  </a:lnTo>
-                  <a:lnTo>
-                    <a:pt x="376147" y="99401"/>
-                  </a:lnTo>
-                  <a:lnTo>
-                    <a:pt x="302387" y="80433"/>
-                  </a:lnTo>
-                  <a:lnTo>
-                    <a:pt x="228627" y="61214"/>
-                  </a:lnTo>
-                  <a:lnTo>
-                    <a:pt x="154867" y="41740"/>
-                  </a:lnTo>
-                  <a:lnTo>
-                    <a:pt x="81107" y="22009"/>
-                  </a:lnTo>
-                  <a:lnTo>
-                    <a:pt x="7347" y="2017"/>
-                  </a:lnTo>
-                  <a:lnTo>
-                    <a:pt x="0" y="0"/>
-                  </a:lnTo>
-                </a:path>
-              </a:pathLst>
-            </a:custGeom>
-          </p:spPr>
-          <p:txBody>
-            <a:bodyPr/>
-            <a:lstStyle/>
-            <a:p/>
-          </p:txBody>
-        </p:sp>
-        <p:sp>
-          <p:nvSpPr>
-            <p:cNvPr id="24" name="pl24"/>
-            <p:cNvSpPr/>
-            <p:nvPr/>
-          </p:nvSpPr>
-          <p:spPr>
-            <a:xfrm>
-              <a:off x="817517" y="2874176"/>
-              <a:ext cx="7235830" cy="2454062"/>
-            </a:xfrm>
-            <a:custGeom>
-              <a:avLst/>
-              <a:pathLst>
-                <a:path w="7235830" h="2454062">
+                <a:path w="7090630" h="2515277">
                   <a:moveTo>
                     <a:pt x="0" y="0"/>
                   </a:moveTo>
                   <a:lnTo>
-                    <a:pt x="7347" y="6772"/>
-                  </a:lnTo>
-                  <a:lnTo>
-                    <a:pt x="81107" y="73074"/>
-                  </a:lnTo>
-                  <a:lnTo>
-                    <a:pt x="154867" y="137734"/>
-                  </a:lnTo>
-                  <a:lnTo>
-                    <a:pt x="228627" y="200792"/>
-                  </a:lnTo>
-                  <a:lnTo>
-                    <a:pt x="302387" y="262288"/>
-                  </a:lnTo>
-                  <a:lnTo>
-                    <a:pt x="376147" y="322260"/>
-                  </a:lnTo>
-                  <a:lnTo>
-                    <a:pt x="449907" y="380747"/>
-                  </a:lnTo>
-                  <a:lnTo>
-                    <a:pt x="523667" y="437785"/>
-                  </a:lnTo>
-                  <a:lnTo>
-                    <a:pt x="597427" y="493409"/>
-                  </a:lnTo>
-                  <a:lnTo>
-                    <a:pt x="671187" y="547656"/>
-                  </a:lnTo>
-                  <a:lnTo>
-                    <a:pt x="744947" y="600558"/>
-                  </a:lnTo>
-                  <a:lnTo>
-                    <a:pt x="818707" y="652150"/>
-                  </a:lnTo>
-                  <a:lnTo>
-                    <a:pt x="892467" y="702464"/>
-                  </a:lnTo>
-                  <a:lnTo>
-                    <a:pt x="966227" y="751532"/>
-                  </a:lnTo>
-                  <a:lnTo>
-                    <a:pt x="1039987" y="799384"/>
-                  </a:lnTo>
-                  <a:lnTo>
-                    <a:pt x="1113747" y="846050"/>
-                  </a:lnTo>
-                  <a:lnTo>
-                    <a:pt x="1187508" y="891560"/>
-                  </a:lnTo>
-                  <a:lnTo>
-                    <a:pt x="1261268" y="935943"/>
-                  </a:lnTo>
-                  <a:lnTo>
-                    <a:pt x="1335028" y="979226"/>
-                  </a:lnTo>
-                  <a:lnTo>
-                    <a:pt x="1408788" y="1021437"/>
-                  </a:lnTo>
-                  <a:lnTo>
-                    <a:pt x="1482548" y="1062602"/>
-                  </a:lnTo>
-                  <a:lnTo>
-                    <a:pt x="1556308" y="1102748"/>
-                  </a:lnTo>
-                  <a:lnTo>
-                    <a:pt x="1630068" y="1141899"/>
-                  </a:lnTo>
-                  <a:lnTo>
-                    <a:pt x="1703828" y="1180079"/>
-                  </a:lnTo>
-                  <a:lnTo>
-                    <a:pt x="1777588" y="1217315"/>
-                  </a:lnTo>
-                  <a:lnTo>
-                    <a:pt x="1851348" y="1253627"/>
-                  </a:lnTo>
-                  <a:lnTo>
-                    <a:pt x="1925108" y="1289040"/>
-                  </a:lnTo>
-                  <a:lnTo>
-                    <a:pt x="1998868" y="1323576"/>
-                  </a:lnTo>
-                  <a:lnTo>
-                    <a:pt x="2072628" y="1357256"/>
-                  </a:lnTo>
-                  <a:lnTo>
-                    <a:pt x="2146388" y="1390101"/>
-                  </a:lnTo>
-                  <a:lnTo>
-                    <a:pt x="2220148" y="1422133"/>
-                  </a:lnTo>
-                  <a:lnTo>
-                    <a:pt x="2293908" y="1453372"/>
-                  </a:lnTo>
-                  <a:lnTo>
-                    <a:pt x="2367668" y="1483836"/>
-                  </a:lnTo>
-                  <a:lnTo>
-                    <a:pt x="2441428" y="1513546"/>
-                  </a:lnTo>
-                  <a:lnTo>
-                    <a:pt x="2515188" y="1542520"/>
-                  </a:lnTo>
-                  <a:lnTo>
-                    <a:pt x="2588948" y="1570776"/>
-                  </a:lnTo>
-                  <a:lnTo>
-                    <a:pt x="2662708" y="1598332"/>
-                  </a:lnTo>
-                  <a:lnTo>
-                    <a:pt x="2736468" y="1625205"/>
-                  </a:lnTo>
-                  <a:lnTo>
-                    <a:pt x="2810228" y="1651413"/>
-                  </a:lnTo>
-                  <a:lnTo>
-                    <a:pt x="2883988" y="1676971"/>
-                  </a:lnTo>
-                  <a:lnTo>
-                    <a:pt x="2957748" y="1701896"/>
-                  </a:lnTo>
-                  <a:lnTo>
-                    <a:pt x="3031508" y="1726203"/>
-                  </a:lnTo>
-                  <a:lnTo>
-                    <a:pt x="3105268" y="1749909"/>
-                  </a:lnTo>
-                  <a:lnTo>
-                    <a:pt x="3179028" y="1773027"/>
-                  </a:lnTo>
-                  <a:lnTo>
-                    <a:pt x="3252788" y="1795572"/>
-                  </a:lnTo>
-                  <a:lnTo>
-                    <a:pt x="3326548" y="1817559"/>
-                  </a:lnTo>
-                  <a:lnTo>
-                    <a:pt x="3400308" y="1839001"/>
-                  </a:lnTo>
-                  <a:lnTo>
-                    <a:pt x="3474068" y="1859912"/>
-                  </a:lnTo>
-                  <a:lnTo>
-                    <a:pt x="3547828" y="1880305"/>
-                  </a:lnTo>
-                  <a:lnTo>
-                    <a:pt x="3621588" y="1900193"/>
-                  </a:lnTo>
-                  <a:lnTo>
-                    <a:pt x="3695348" y="1919588"/>
-                  </a:lnTo>
-                  <a:lnTo>
-                    <a:pt x="3769108" y="1938502"/>
-                  </a:lnTo>
-                  <a:lnTo>
-                    <a:pt x="3842868" y="1956948"/>
-                  </a:lnTo>
-                  <a:lnTo>
-                    <a:pt x="3916628" y="1974937"/>
-                  </a:lnTo>
-                  <a:lnTo>
-                    <a:pt x="3990388" y="1992481"/>
-                  </a:lnTo>
-                  <a:lnTo>
-                    <a:pt x="4064149" y="2009589"/>
-                  </a:lnTo>
-                  <a:lnTo>
-                    <a:pt x="4137909" y="2026274"/>
-                  </a:lnTo>
-                  <a:lnTo>
-                    <a:pt x="4211669" y="2042546"/>
-                  </a:lnTo>
-                  <a:lnTo>
-                    <a:pt x="4285429" y="2058414"/>
-                  </a:lnTo>
-                  <a:lnTo>
-                    <a:pt x="4359189" y="2073889"/>
-                  </a:lnTo>
-                  <a:lnTo>
-                    <a:pt x="4432949" y="2088981"/>
-                  </a:lnTo>
-                  <a:lnTo>
-                    <a:pt x="4506709" y="2103699"/>
-                  </a:lnTo>
-                  <a:lnTo>
-                    <a:pt x="4580469" y="2118052"/>
-                  </a:lnTo>
-                  <a:lnTo>
-                    <a:pt x="4654229" y="2132050"/>
-                  </a:lnTo>
-                  <a:lnTo>
-                    <a:pt x="4727989" y="2145701"/>
-                  </a:lnTo>
-                  <a:lnTo>
-                    <a:pt x="4801749" y="2159014"/>
-                  </a:lnTo>
-                  <a:lnTo>
-                    <a:pt x="4875509" y="2171997"/>
-                  </a:lnTo>
-                  <a:lnTo>
-                    <a:pt x="4949269" y="2184658"/>
-                  </a:lnTo>
-                  <a:lnTo>
-                    <a:pt x="5023029" y="2197006"/>
-                  </a:lnTo>
-                  <a:lnTo>
-                    <a:pt x="5096789" y="2209048"/>
-                  </a:lnTo>
-                  <a:lnTo>
-                    <a:pt x="5170549" y="2220791"/>
-                  </a:lnTo>
-                  <a:lnTo>
-                    <a:pt x="5244309" y="2232244"/>
-                  </a:lnTo>
-                  <a:lnTo>
-                    <a:pt x="5318069" y="2243412"/>
-                  </a:lnTo>
-                  <a:lnTo>
-                    <a:pt x="5391829" y="2254305"/>
-                  </a:lnTo>
-                  <a:lnTo>
-                    <a:pt x="5465589" y="2264927"/>
-                  </a:lnTo>
-                  <a:lnTo>
-                    <a:pt x="5539349" y="2275286"/>
-                  </a:lnTo>
-                  <a:lnTo>
-                    <a:pt x="5613109" y="2285388"/>
-                  </a:lnTo>
-                  <a:lnTo>
-                    <a:pt x="5686869" y="2295241"/>
-                  </a:lnTo>
-                  <a:lnTo>
-                    <a:pt x="5760629" y="2304849"/>
-                  </a:lnTo>
-                  <a:lnTo>
-                    <a:pt x="5834389" y="2314219"/>
-                  </a:lnTo>
-                  <a:lnTo>
-                    <a:pt x="5908149" y="2323357"/>
-                  </a:lnTo>
-                  <a:lnTo>
-                    <a:pt x="5981909" y="2332268"/>
-                  </a:lnTo>
-                  <a:lnTo>
-                    <a:pt x="6055669" y="2340959"/>
-                  </a:lnTo>
-                  <a:lnTo>
-                    <a:pt x="6129429" y="2349435"/>
-                  </a:lnTo>
-                  <a:lnTo>
-                    <a:pt x="6203189" y="2357700"/>
-                  </a:lnTo>
-                  <a:lnTo>
-                    <a:pt x="6276949" y="2365761"/>
-                  </a:lnTo>
-                  <a:lnTo>
-                    <a:pt x="6350709" y="2373622"/>
-                  </a:lnTo>
-                  <a:lnTo>
-                    <a:pt x="6424469" y="2381288"/>
-                  </a:lnTo>
-                  <a:lnTo>
-                    <a:pt x="6498229" y="2388765"/>
-                  </a:lnTo>
-                  <a:lnTo>
-                    <a:pt x="6571989" y="2396056"/>
-                  </a:lnTo>
-                  <a:lnTo>
-                    <a:pt x="6645749" y="2403166"/>
-                  </a:lnTo>
-                  <a:lnTo>
-                    <a:pt x="6719509" y="2410101"/>
-                  </a:lnTo>
-                  <a:lnTo>
-                    <a:pt x="6793269" y="2416863"/>
-                  </a:lnTo>
-                  <a:lnTo>
-                    <a:pt x="6867029" y="2423458"/>
-                  </a:lnTo>
-                  <a:lnTo>
-                    <a:pt x="6940789" y="2429890"/>
-                  </a:lnTo>
-                  <a:lnTo>
-                    <a:pt x="7014550" y="2436162"/>
-                  </a:lnTo>
-                  <a:lnTo>
-                    <a:pt x="7088310" y="2442279"/>
-                  </a:lnTo>
-                  <a:lnTo>
-                    <a:pt x="7162070" y="2448245"/>
-                  </a:lnTo>
-                  <a:lnTo>
-                    <a:pt x="7235830" y="2454062"/>
+                    <a:pt x="71622" y="67986"/>
+                  </a:lnTo>
+                  <a:lnTo>
+                    <a:pt x="143245" y="134289"/>
+                  </a:lnTo>
+                  <a:lnTo>
+                    <a:pt x="214867" y="198949"/>
+                  </a:lnTo>
+                  <a:lnTo>
+                    <a:pt x="286490" y="262007"/>
+                  </a:lnTo>
+                  <a:lnTo>
+                    <a:pt x="358112" y="323502"/>
+                  </a:lnTo>
+                  <a:lnTo>
+                    <a:pt x="429735" y="383475"/>
+                  </a:lnTo>
+                  <a:lnTo>
+                    <a:pt x="501357" y="441961"/>
+                  </a:lnTo>
+                  <a:lnTo>
+                    <a:pt x="572980" y="498999"/>
+                  </a:lnTo>
+                  <a:lnTo>
+                    <a:pt x="644602" y="554623"/>
+                  </a:lnTo>
+                  <a:lnTo>
+                    <a:pt x="716225" y="608870"/>
+                  </a:lnTo>
+                  <a:lnTo>
+                    <a:pt x="787847" y="661773"/>
+                  </a:lnTo>
+                  <a:lnTo>
+                    <a:pt x="859470" y="713365"/>
+                  </a:lnTo>
+                  <a:lnTo>
+                    <a:pt x="931092" y="763679"/>
+                  </a:lnTo>
+                  <a:lnTo>
+                    <a:pt x="1002715" y="812746"/>
+                  </a:lnTo>
+                  <a:lnTo>
+                    <a:pt x="1074337" y="860598"/>
+                  </a:lnTo>
+                  <a:lnTo>
+                    <a:pt x="1145960" y="907264"/>
+                  </a:lnTo>
+                  <a:lnTo>
+                    <a:pt x="1217582" y="952774"/>
+                  </a:lnTo>
+                  <a:lnTo>
+                    <a:pt x="1289205" y="997157"/>
+                  </a:lnTo>
+                  <a:lnTo>
+                    <a:pt x="1360827" y="1040440"/>
+                  </a:lnTo>
+                  <a:lnTo>
+                    <a:pt x="1432450" y="1082651"/>
+                  </a:lnTo>
+                  <a:lnTo>
+                    <a:pt x="1504073" y="1123817"/>
+                  </a:lnTo>
+                  <a:lnTo>
+                    <a:pt x="1575695" y="1163962"/>
+                  </a:lnTo>
+                  <a:lnTo>
+                    <a:pt x="1647318" y="1203113"/>
+                  </a:lnTo>
+                  <a:lnTo>
+                    <a:pt x="1718940" y="1241294"/>
+                  </a:lnTo>
+                  <a:lnTo>
+                    <a:pt x="1790563" y="1278529"/>
+                  </a:lnTo>
+                  <a:lnTo>
+                    <a:pt x="1862185" y="1314841"/>
+                  </a:lnTo>
+                  <a:lnTo>
+                    <a:pt x="1933808" y="1350254"/>
+                  </a:lnTo>
+                  <a:lnTo>
+                    <a:pt x="2005430" y="1384790"/>
+                  </a:lnTo>
+                  <a:lnTo>
+                    <a:pt x="2077053" y="1418470"/>
+                  </a:lnTo>
+                  <a:lnTo>
+                    <a:pt x="2148675" y="1451316"/>
+                  </a:lnTo>
+                  <a:lnTo>
+                    <a:pt x="2220298" y="1483348"/>
+                  </a:lnTo>
+                  <a:lnTo>
+                    <a:pt x="2291920" y="1514586"/>
+                  </a:lnTo>
+                  <a:lnTo>
+                    <a:pt x="2363543" y="1545051"/>
+                  </a:lnTo>
+                  <a:lnTo>
+                    <a:pt x="2435165" y="1574760"/>
+                  </a:lnTo>
+                  <a:lnTo>
+                    <a:pt x="2506788" y="1603734"/>
+                  </a:lnTo>
+                  <a:lnTo>
+                    <a:pt x="2578410" y="1631990"/>
+                  </a:lnTo>
+                  <a:lnTo>
+                    <a:pt x="2650033" y="1659546"/>
+                  </a:lnTo>
+                  <a:lnTo>
+                    <a:pt x="2721655" y="1686419"/>
+                  </a:lnTo>
+                  <a:lnTo>
+                    <a:pt x="2793278" y="1712627"/>
+                  </a:lnTo>
+                  <a:lnTo>
+                    <a:pt x="2864901" y="1738185"/>
+                  </a:lnTo>
+                  <a:lnTo>
+                    <a:pt x="2936523" y="1763110"/>
+                  </a:lnTo>
+                  <a:lnTo>
+                    <a:pt x="3008146" y="1787418"/>
+                  </a:lnTo>
+                  <a:lnTo>
+                    <a:pt x="3079768" y="1811123"/>
+                  </a:lnTo>
+                  <a:lnTo>
+                    <a:pt x="3151391" y="1834241"/>
+                  </a:lnTo>
+                  <a:lnTo>
+                    <a:pt x="3223013" y="1856787"/>
+                  </a:lnTo>
+                  <a:lnTo>
+                    <a:pt x="3294636" y="1878773"/>
+                  </a:lnTo>
+                  <a:lnTo>
+                    <a:pt x="3366258" y="1900216"/>
+                  </a:lnTo>
+                  <a:lnTo>
+                    <a:pt x="3437881" y="1921127"/>
+                  </a:lnTo>
+                  <a:lnTo>
+                    <a:pt x="3509503" y="1941519"/>
+                  </a:lnTo>
+                  <a:lnTo>
+                    <a:pt x="3581126" y="1961407"/>
+                  </a:lnTo>
+                  <a:lnTo>
+                    <a:pt x="3652748" y="1980802"/>
+                  </a:lnTo>
+                  <a:lnTo>
+                    <a:pt x="3724371" y="1999717"/>
+                  </a:lnTo>
+                  <a:lnTo>
+                    <a:pt x="3795993" y="2018163"/>
+                  </a:lnTo>
+                  <a:lnTo>
+                    <a:pt x="3867616" y="2036152"/>
+                  </a:lnTo>
+                  <a:lnTo>
+                    <a:pt x="3939238" y="2053695"/>
+                  </a:lnTo>
+                  <a:lnTo>
+                    <a:pt x="4010861" y="2070804"/>
+                  </a:lnTo>
+                  <a:lnTo>
+                    <a:pt x="4082483" y="2087488"/>
+                  </a:lnTo>
+                  <a:lnTo>
+                    <a:pt x="4154106" y="2103760"/>
+                  </a:lnTo>
+                  <a:lnTo>
+                    <a:pt x="4225729" y="2119628"/>
+                  </a:lnTo>
+                  <a:lnTo>
+                    <a:pt x="4297351" y="2135103"/>
+                  </a:lnTo>
+                  <a:lnTo>
+                    <a:pt x="4368974" y="2150195"/>
+                  </a:lnTo>
+                  <a:lnTo>
+                    <a:pt x="4440596" y="2164913"/>
+                  </a:lnTo>
+                  <a:lnTo>
+                    <a:pt x="4512219" y="2179267"/>
+                  </a:lnTo>
+                  <a:lnTo>
+                    <a:pt x="4583841" y="2193264"/>
+                  </a:lnTo>
+                  <a:lnTo>
+                    <a:pt x="4655464" y="2206915"/>
+                  </a:lnTo>
+                  <a:lnTo>
+                    <a:pt x="4727086" y="2220228"/>
+                  </a:lnTo>
+                  <a:lnTo>
+                    <a:pt x="4798709" y="2233211"/>
+                  </a:lnTo>
+                  <a:lnTo>
+                    <a:pt x="4870331" y="2245872"/>
+                  </a:lnTo>
+                  <a:lnTo>
+                    <a:pt x="4941954" y="2258220"/>
+                  </a:lnTo>
+                  <a:lnTo>
+                    <a:pt x="5013576" y="2270262"/>
+                  </a:lnTo>
+                  <a:lnTo>
+                    <a:pt x="5085199" y="2282005"/>
+                  </a:lnTo>
+                  <a:lnTo>
+                    <a:pt x="5156821" y="2293458"/>
+                  </a:lnTo>
+                  <a:lnTo>
+                    <a:pt x="5228444" y="2304627"/>
+                  </a:lnTo>
+                  <a:lnTo>
+                    <a:pt x="5300066" y="2315519"/>
+                  </a:lnTo>
+                  <a:lnTo>
+                    <a:pt x="5371689" y="2326141"/>
+                  </a:lnTo>
+                  <a:lnTo>
+                    <a:pt x="5443311" y="2336500"/>
+                  </a:lnTo>
+                  <a:lnTo>
+                    <a:pt x="5514934" y="2346603"/>
+                  </a:lnTo>
+                  <a:lnTo>
+                    <a:pt x="5586557" y="2356455"/>
+                  </a:lnTo>
+                  <a:lnTo>
+                    <a:pt x="5658179" y="2366063"/>
+                  </a:lnTo>
+                  <a:lnTo>
+                    <a:pt x="5729802" y="2375433"/>
+                  </a:lnTo>
+                  <a:lnTo>
+                    <a:pt x="5801424" y="2384571"/>
+                  </a:lnTo>
+                  <a:lnTo>
+                    <a:pt x="5873047" y="2393483"/>
+                  </a:lnTo>
+                  <a:lnTo>
+                    <a:pt x="5944669" y="2402173"/>
+                  </a:lnTo>
+                  <a:lnTo>
+                    <a:pt x="6016292" y="2410649"/>
+                  </a:lnTo>
+                  <a:lnTo>
+                    <a:pt x="6087914" y="2418914"/>
+                  </a:lnTo>
+                  <a:lnTo>
+                    <a:pt x="6159537" y="2426975"/>
+                  </a:lnTo>
+                  <a:lnTo>
+                    <a:pt x="6231159" y="2434836"/>
+                  </a:lnTo>
+                  <a:lnTo>
+                    <a:pt x="6302782" y="2442503"/>
+                  </a:lnTo>
+                  <a:lnTo>
+                    <a:pt x="6374404" y="2449979"/>
+                  </a:lnTo>
+                  <a:lnTo>
+                    <a:pt x="6446027" y="2457270"/>
+                  </a:lnTo>
+                  <a:lnTo>
+                    <a:pt x="6517649" y="2464381"/>
+                  </a:lnTo>
+                  <a:lnTo>
+                    <a:pt x="6589272" y="2471315"/>
+                  </a:lnTo>
+                  <a:lnTo>
+                    <a:pt x="6660894" y="2478078"/>
+                  </a:lnTo>
+                  <a:lnTo>
+                    <a:pt x="6732517" y="2484673"/>
+                  </a:lnTo>
+                  <a:lnTo>
+                    <a:pt x="6804139" y="2491104"/>
+                  </a:lnTo>
+                  <a:lnTo>
+                    <a:pt x="6875762" y="2497377"/>
+                  </a:lnTo>
+                  <a:lnTo>
+                    <a:pt x="6947385" y="2503494"/>
+                  </a:lnTo>
+                  <a:lnTo>
+                    <a:pt x="7019007" y="2509459"/>
+                  </a:lnTo>
+                  <a:lnTo>
+                    <a:pt x="7090630" y="2515277"/>
                   </a:lnTo>
                 </a:path>
               </a:pathLst>
@@ -4563,7 +4520,7 @@
         </p:sp>
         <p:sp>
           <p:nvSpPr>
-            <p:cNvPr id="25" name="pl25"/>
+            <p:cNvPr id="24" name="pl24"/>
             <p:cNvSpPr/>
             <p:nvPr/>
           </p:nvSpPr>
@@ -4606,13 +4563,13 @@
         </p:sp>
         <p:sp>
           <p:nvSpPr>
-            <p:cNvPr id="26" name="pl26"/>
+            <p:cNvPr id="25" name="pl25"/>
             <p:cNvSpPr/>
             <p:nvPr/>
           </p:nvSpPr>
           <p:spPr>
             <a:xfrm>
-              <a:off x="4269157" y="2073503"/>
+              <a:off x="4588151" y="2073503"/>
               <a:ext cx="0" cy="3649639"/>
             </a:xfrm>
             <a:custGeom>
@@ -4649,7 +4606,7 @@
         </p:sp>
         <p:sp>
           <p:nvSpPr>
-            <p:cNvPr id="27" name="tx27"/>
+            <p:cNvPr id="26" name="tx26"/>
             <p:cNvSpPr/>
             <p:nvPr/>
           </p:nvSpPr>
@@ -4695,7 +4652,7 @@
         </p:sp>
         <p:sp>
           <p:nvSpPr>
-            <p:cNvPr id="28" name="tx28"/>
+            <p:cNvPr id="27" name="tx27"/>
             <p:cNvSpPr/>
             <p:nvPr/>
           </p:nvSpPr>
@@ -4741,7 +4698,7 @@
         </p:sp>
         <p:sp>
           <p:nvSpPr>
-            <p:cNvPr id="29" name="tx29"/>
+            <p:cNvPr id="28" name="tx28"/>
             <p:cNvSpPr/>
             <p:nvPr/>
           </p:nvSpPr>
@@ -4787,7 +4744,7 @@
         </p:sp>
         <p:sp>
           <p:nvSpPr>
-            <p:cNvPr id="30" name="tx30"/>
+            <p:cNvPr id="29" name="tx29"/>
             <p:cNvSpPr/>
             <p:nvPr/>
           </p:nvSpPr>
@@ -4833,7 +4790,7 @@
         </p:sp>
         <p:sp>
           <p:nvSpPr>
-            <p:cNvPr id="31" name="tx31"/>
+            <p:cNvPr id="30" name="tx30"/>
             <p:cNvSpPr/>
             <p:nvPr/>
           </p:nvSpPr>
@@ -4879,14 +4836,14 @@
         </p:sp>
         <p:sp>
           <p:nvSpPr>
-            <p:cNvPr id="32" name="tx32"/>
+            <p:cNvPr id="31" name="tx31"/>
             <p:cNvSpPr/>
             <p:nvPr/>
           </p:nvSpPr>
           <p:spPr>
             <a:xfrm>
-              <a:off x="2423864" y="5785772"/>
-              <a:ext cx="155356" cy="80101"/>
+              <a:off x="2360651" y="5785772"/>
+              <a:ext cx="161574" cy="80101"/>
             </a:xfrm>
             <a:prstGeom prst="rect">
               <a:avLst/>
@@ -4918,21 +4875,21 @@
                   <a:latin typeface="Helvetica"/>
                   <a:cs typeface="Helvetica"/>
                 </a:rPr>
-                <a:t>0.8</a:t>
+                <a:t>-25</a:t>
               </a:r>
             </a:p>
           </p:txBody>
         </p:sp>
         <p:sp>
           <p:nvSpPr>
-            <p:cNvPr id="33" name="tx33"/>
+            <p:cNvPr id="32" name="tx32"/>
             <p:cNvSpPr/>
             <p:nvPr/>
           </p:nvSpPr>
           <p:spPr>
             <a:xfrm>
-              <a:off x="4196521" y="5785772"/>
-              <a:ext cx="155356" cy="80101"/>
+              <a:off x="4561958" y="5785772"/>
+              <a:ext cx="62179" cy="80101"/>
             </a:xfrm>
             <a:prstGeom prst="rect">
               <a:avLst/>
@@ -4964,21 +4921,21 @@
                   <a:latin typeface="Helvetica"/>
                   <a:cs typeface="Helvetica"/>
                 </a:rPr>
-                <a:t>1.0</a:t>
+                <a:t>0</a:t>
               </a:r>
             </a:p>
           </p:txBody>
         </p:sp>
         <p:sp>
           <p:nvSpPr>
-            <p:cNvPr id="34" name="tx34"/>
+            <p:cNvPr id="33" name="tx33"/>
             <p:cNvSpPr/>
             <p:nvPr/>
           </p:nvSpPr>
           <p:spPr>
             <a:xfrm>
-              <a:off x="5969179" y="5785772"/>
-              <a:ext cx="155356" cy="80101"/>
+              <a:off x="6682478" y="5785772"/>
+              <a:ext cx="124358" cy="80101"/>
             </a:xfrm>
             <a:prstGeom prst="rect">
               <a:avLst/>
@@ -5010,67 +4967,21 @@
                   <a:latin typeface="Helvetica"/>
                   <a:cs typeface="Helvetica"/>
                 </a:rPr>
-                <a:t>1.2</a:t>
+                <a:t>25</a:t>
               </a:r>
             </a:p>
           </p:txBody>
         </p:sp>
         <p:sp>
           <p:nvSpPr>
-            <p:cNvPr id="35" name="tx35"/>
+            <p:cNvPr id="34" name="tx34"/>
             <p:cNvSpPr/>
             <p:nvPr/>
           </p:nvSpPr>
           <p:spPr>
             <a:xfrm>
-              <a:off x="7741836" y="5785772"/>
-              <a:ext cx="155356" cy="80101"/>
-            </a:xfrm>
-            <a:prstGeom prst="rect">
-              <a:avLst/>
-            </a:prstGeom>
-            <a:noFill/>
-          </p:spPr>
-          <p:txBody>
-            <a:bodyPr lIns="0" rIns="0" tIns="0" bIns="0" anchorCtr="1" anchor="ctr" wrap="none"/>
-            <a:lstStyle/>
-            <a:p>
-              <a:pPr algn="l" marL="0" marR="0" indent="0">
-                <a:lnSpc>
-                  <a:spcPts val="880"/>
-                </a:lnSpc>
-                <a:spcBef>
-                  <a:spcPts val="0"/>
-                </a:spcBef>
-                <a:spcAft>
-                  <a:spcPts val="0"/>
-                </a:spcAft>
-              </a:pPr>
-              <a:r>
-                <a:rPr sz="880">
-                  <a:solidFill>
-                    <a:srgbClr val="4D4D4D">
-                      <a:alpha val="100000"/>
-                    </a:srgbClr>
-                  </a:solidFill>
-                  <a:latin typeface="Helvetica"/>
-                  <a:cs typeface="Helvetica"/>
-                </a:rPr>
-                <a:t>1.4</a:t>
-              </a:r>
-            </a:p>
-          </p:txBody>
-        </p:sp>
-        <p:sp>
-          <p:nvSpPr>
-            <p:cNvPr id="36" name="tx36"/>
-            <p:cNvSpPr/>
-            <p:nvPr/>
-          </p:nvSpPr>
-          <p:spPr>
-            <a:xfrm>
-              <a:off x="3879271" y="5925448"/>
-              <a:ext cx="1676186" cy="100218"/>
+              <a:off x="2928340" y="5925448"/>
+              <a:ext cx="3578047" cy="100218"/>
             </a:xfrm>
             <a:prstGeom prst="rect">
               <a:avLst/>
@@ -5102,14 +5013,14 @@
                   <a:latin typeface="Helvetica"/>
                   <a:cs typeface="Helvetica"/>
                 </a:rPr>
-                <a:t>CKD-EPI Cr-Cys / CG ratio</a:t>
+                <a:t>eGFR difference (%): 100 × (CKD-EPI Cr-Cys − CG) / CG</a:t>
               </a:r>
             </a:p>
           </p:txBody>
         </p:sp>
         <p:sp>
           <p:nvSpPr>
-            <p:cNvPr id="37" name="tx37"/>
+            <p:cNvPr id="35" name="tx35"/>
             <p:cNvSpPr/>
             <p:nvPr/>
           </p:nvSpPr>
@@ -5155,14 +5066,14 @@
         </p:sp>
         <p:sp>
           <p:nvSpPr>
-            <p:cNvPr id="38" name="tx38"/>
+            <p:cNvPr id="36" name="tx36"/>
             <p:cNvSpPr/>
             <p:nvPr/>
           </p:nvSpPr>
           <p:spPr>
             <a:xfrm>
               <a:off x="817517" y="1896563"/>
-              <a:ext cx="6899879" cy="82021"/>
+              <a:ext cx="7052127" cy="82021"/>
             </a:xfrm>
             <a:prstGeom prst="rect">
               <a:avLst/>
@@ -5194,14 +5105,14 @@
                   <a:latin typeface="Helvetica"/>
                   <a:cs typeface="Helvetica"/>
                 </a:rPr>
-                <a:t>subHR per 0.1 ratio decline: 1.35 (1.17-1.56), p_Bonf = &lt;0.001 (n = 6)  |  per IQR decline (Δ = 0.29): 2.42 (1.59-3.68)  |  IQR: [0.85, 1.15]</a:t>
+                <a:t>subHR per 10 % decline: 1.35 (1.17-1.56), p_Bonf = &lt;0.001 (n = 6)  |  per IQR decline (Δ = 29.3 %): 2.42 (1.59-3.68)  |  IQR: [-14.6, 14.7] %</a:t>
               </a:r>
             </a:p>
           </p:txBody>
         </p:sp>
         <p:sp>
           <p:nvSpPr>
-            <p:cNvPr id="39" name="tx39"/>
+            <p:cNvPr id="37" name="tx37"/>
             <p:cNvSpPr/>
             <p:nvPr/>
           </p:nvSpPr>

--- a/docs/pptx/whole/jx-linsubhr-ratio-akikdigo.pptx
+++ b/docs/pptx/whole/jx-linsubhr-ratio-akikdigo.pptx
@@ -2265,34 +2265,26 @@
         </p:sp>
         <p:sp>
           <p:nvSpPr>
-            <p:cNvPr id="4" name="pl4"/>
+            <p:cNvPr id="4" name="rc4"/>
             <p:cNvSpPr/>
             <p:nvPr/>
           </p:nvSpPr>
           <p:spPr>
             <a:xfrm>
-              <a:off x="817517" y="5142518"/>
-              <a:ext cx="7799693" cy="0"/>
+              <a:off x="457200" y="1600200"/>
+              <a:ext cx="8229600" cy="4525962"/>
             </a:xfrm>
-            <a:custGeom>
+            <a:prstGeom prst="rect">
               <a:avLst/>
-              <a:pathLst>
-                <a:path w="7799693" h="0">
-                  <a:moveTo>
-                    <a:pt x="0" y="0"/>
-                  </a:moveTo>
-                  <a:lnTo>
-                    <a:pt x="7799693" y="0"/>
-                  </a:lnTo>
-                  <a:lnTo>
-                    <a:pt x="7799693" y="0"/>
-                  </a:lnTo>
-                </a:path>
-              </a:pathLst>
-            </a:custGeom>
-            <a:ln w="6775" cap="flat">
+            </a:prstGeom>
+            <a:solidFill>
+              <a:srgbClr val="FFFFFF">
+                <a:alpha val="100000"/>
+              </a:srgbClr>
+            </a:solidFill>
+            <a:ln w="13550" cap="rnd">
               <a:solidFill>
-                <a:srgbClr val="EBEBEB">
+                <a:srgbClr val="FFFFFF">
                   <a:alpha val="100000"/>
                 </a:srgbClr>
               </a:solidFill>
@@ -2314,21 +2306,21 @@
           </p:nvSpPr>
           <p:spPr>
             <a:xfrm>
-              <a:off x="817517" y="4313054"/>
-              <a:ext cx="7799693" cy="0"/>
+              <a:off x="887106" y="3250627"/>
+              <a:ext cx="7660515" cy="0"/>
             </a:xfrm>
             <a:custGeom>
               <a:avLst/>
               <a:pathLst>
-                <a:path w="7799693" h="0">
+                <a:path w="7660515" h="0">
                   <a:moveTo>
                     <a:pt x="0" y="0"/>
                   </a:moveTo>
                   <a:lnTo>
-                    <a:pt x="7799693" y="0"/>
-                  </a:lnTo>
-                  <a:lnTo>
-                    <a:pt x="7799693" y="0"/>
+                    <a:pt x="7660515" y="0"/>
+                  </a:lnTo>
+                  <a:lnTo>
+                    <a:pt x="7660515" y="0"/>
                   </a:lnTo>
                 </a:path>
               </a:pathLst>
@@ -2357,21 +2349,21 @@
           </p:nvSpPr>
           <p:spPr>
             <a:xfrm>
-              <a:off x="817517" y="3483591"/>
-              <a:ext cx="7799693" cy="0"/>
+              <a:off x="887106" y="2951293"/>
+              <a:ext cx="7660515" cy="0"/>
             </a:xfrm>
             <a:custGeom>
               <a:avLst/>
               <a:pathLst>
-                <a:path w="7799693" h="0">
+                <a:path w="7660515" h="0">
                   <a:moveTo>
                     <a:pt x="0" y="0"/>
                   </a:moveTo>
                   <a:lnTo>
-                    <a:pt x="7799693" y="0"/>
-                  </a:lnTo>
-                  <a:lnTo>
-                    <a:pt x="7799693" y="0"/>
+                    <a:pt x="7660515" y="0"/>
+                  </a:lnTo>
+                  <a:lnTo>
+                    <a:pt x="7660515" y="0"/>
                   </a:lnTo>
                 </a:path>
               </a:pathLst>
@@ -2400,21 +2392,21 @@
           </p:nvSpPr>
           <p:spPr>
             <a:xfrm>
-              <a:off x="817517" y="2654127"/>
-              <a:ext cx="7799693" cy="0"/>
+              <a:off x="887106" y="2651959"/>
+              <a:ext cx="7660515" cy="0"/>
             </a:xfrm>
             <a:custGeom>
               <a:avLst/>
               <a:pathLst>
-                <a:path w="7799693" h="0">
+                <a:path w="7660515" h="0">
                   <a:moveTo>
                     <a:pt x="0" y="0"/>
                   </a:moveTo>
                   <a:lnTo>
-                    <a:pt x="7799693" y="0"/>
-                  </a:lnTo>
-                  <a:lnTo>
-                    <a:pt x="7799693" y="0"/>
+                    <a:pt x="7660515" y="0"/>
+                  </a:lnTo>
+                  <a:lnTo>
+                    <a:pt x="7660515" y="0"/>
                   </a:lnTo>
                 </a:path>
               </a:pathLst>
@@ -2443,21 +2435,21 @@
           </p:nvSpPr>
           <p:spPr>
             <a:xfrm>
-              <a:off x="1365633" y="2073503"/>
-              <a:ext cx="0" cy="3649639"/>
+              <a:off x="887106" y="2352625"/>
+              <a:ext cx="7660515" cy="0"/>
             </a:xfrm>
             <a:custGeom>
               <a:avLst/>
               <a:pathLst>
-                <a:path w="0" h="3649639">
+                <a:path w="7660515" h="0">
                   <a:moveTo>
-                    <a:pt x="0" y="3649639"/>
+                    <a:pt x="0" y="0"/>
                   </a:moveTo>
                   <a:lnTo>
-                    <a:pt x="0" y="0"/>
-                  </a:lnTo>
-                  <a:lnTo>
-                    <a:pt x="0" y="0"/>
+                    <a:pt x="7660515" y="0"/>
+                  </a:lnTo>
+                  <a:lnTo>
+                    <a:pt x="7660515" y="0"/>
                   </a:lnTo>
                 </a:path>
               </a:pathLst>
@@ -2486,15 +2478,15 @@
           </p:nvSpPr>
           <p:spPr>
             <a:xfrm>
-              <a:off x="3517243" y="2073503"/>
-              <a:ext cx="0" cy="3649639"/>
+              <a:off x="1425442" y="2143092"/>
+              <a:ext cx="0" cy="1317069"/>
             </a:xfrm>
             <a:custGeom>
               <a:avLst/>
               <a:pathLst>
-                <a:path w="0" h="3649639">
+                <a:path w="0" h="1317069">
                   <a:moveTo>
-                    <a:pt x="0" y="3649639"/>
+                    <a:pt x="0" y="1317069"/>
                   </a:moveTo>
                   <a:lnTo>
                     <a:pt x="0" y="0"/>
@@ -2529,15 +2521,15 @@
           </p:nvSpPr>
           <p:spPr>
             <a:xfrm>
-              <a:off x="5668852" y="2073503"/>
-              <a:ext cx="0" cy="3649639"/>
+              <a:off x="3538658" y="2143092"/>
+              <a:ext cx="0" cy="1317069"/>
             </a:xfrm>
             <a:custGeom>
               <a:avLst/>
               <a:pathLst>
-                <a:path w="0" h="3649639">
+                <a:path w="0" h="1317069">
                   <a:moveTo>
-                    <a:pt x="0" y="3649639"/>
+                    <a:pt x="0" y="1317069"/>
                   </a:moveTo>
                   <a:lnTo>
                     <a:pt x="0" y="0"/>
@@ -2572,15 +2564,15 @@
           </p:nvSpPr>
           <p:spPr>
             <a:xfrm>
-              <a:off x="7820461" y="2073503"/>
-              <a:ext cx="0" cy="3649639"/>
+              <a:off x="5651874" y="2143092"/>
+              <a:ext cx="0" cy="1317069"/>
             </a:xfrm>
             <a:custGeom>
               <a:avLst/>
               <a:pathLst>
-                <a:path w="0" h="3649639">
+                <a:path w="0" h="1317069">
                   <a:moveTo>
-                    <a:pt x="0" y="3649639"/>
+                    <a:pt x="0" y="1317069"/>
                   </a:moveTo>
                   <a:lnTo>
                     <a:pt x="0" y="0"/>
@@ -2615,26 +2607,26 @@
           </p:nvSpPr>
           <p:spPr>
             <a:xfrm>
-              <a:off x="817517" y="5557249"/>
-              <a:ext cx="7799693" cy="0"/>
+              <a:off x="7765090" y="2143092"/>
+              <a:ext cx="0" cy="1317069"/>
             </a:xfrm>
             <a:custGeom>
               <a:avLst/>
               <a:pathLst>
-                <a:path w="7799693" h="0">
+                <a:path w="0" h="1317069">
                   <a:moveTo>
+                    <a:pt x="0" y="1317069"/>
+                  </a:moveTo>
+                  <a:lnTo>
                     <a:pt x="0" y="0"/>
-                  </a:moveTo>
-                  <a:lnTo>
-                    <a:pt x="7799693" y="0"/>
-                  </a:lnTo>
-                  <a:lnTo>
-                    <a:pt x="7799693" y="0"/>
+                  </a:lnTo>
+                  <a:lnTo>
+                    <a:pt x="0" y="0"/>
                   </a:lnTo>
                 </a:path>
               </a:pathLst>
             </a:custGeom>
-            <a:ln w="13550" cap="flat">
+            <a:ln w="6775" cap="flat">
               <a:solidFill>
                 <a:srgbClr val="EBEBEB">
                   <a:alpha val="100000"/>
@@ -2658,21 +2650,21 @@
           </p:nvSpPr>
           <p:spPr>
             <a:xfrm>
-              <a:off x="817517" y="4727786"/>
-              <a:ext cx="7799693" cy="0"/>
+              <a:off x="887106" y="3400294"/>
+              <a:ext cx="7660515" cy="0"/>
             </a:xfrm>
             <a:custGeom>
               <a:avLst/>
               <a:pathLst>
-                <a:path w="7799693" h="0">
+                <a:path w="7660515" h="0">
                   <a:moveTo>
                     <a:pt x="0" y="0"/>
                   </a:moveTo>
                   <a:lnTo>
-                    <a:pt x="7799693" y="0"/>
-                  </a:lnTo>
-                  <a:lnTo>
-                    <a:pt x="7799693" y="0"/>
+                    <a:pt x="7660515" y="0"/>
+                  </a:lnTo>
+                  <a:lnTo>
+                    <a:pt x="7660515" y="0"/>
                   </a:lnTo>
                 </a:path>
               </a:pathLst>
@@ -2701,21 +2693,21 @@
           </p:nvSpPr>
           <p:spPr>
             <a:xfrm>
-              <a:off x="817517" y="3898322"/>
-              <a:ext cx="7799693" cy="0"/>
+              <a:off x="887106" y="3100960"/>
+              <a:ext cx="7660515" cy="0"/>
             </a:xfrm>
             <a:custGeom>
               <a:avLst/>
               <a:pathLst>
-                <a:path w="7799693" h="0">
+                <a:path w="7660515" h="0">
                   <a:moveTo>
                     <a:pt x="0" y="0"/>
                   </a:moveTo>
                   <a:lnTo>
-                    <a:pt x="7799693" y="0"/>
-                  </a:lnTo>
-                  <a:lnTo>
-                    <a:pt x="7799693" y="0"/>
+                    <a:pt x="7660515" y="0"/>
+                  </a:lnTo>
+                  <a:lnTo>
+                    <a:pt x="7660515" y="0"/>
                   </a:lnTo>
                 </a:path>
               </a:pathLst>
@@ -2744,21 +2736,21 @@
           </p:nvSpPr>
           <p:spPr>
             <a:xfrm>
-              <a:off x="817517" y="3068859"/>
-              <a:ext cx="7799693" cy="0"/>
+              <a:off x="887106" y="2801626"/>
+              <a:ext cx="7660515" cy="0"/>
             </a:xfrm>
             <a:custGeom>
               <a:avLst/>
               <a:pathLst>
-                <a:path w="7799693" h="0">
+                <a:path w="7660515" h="0">
                   <a:moveTo>
                     <a:pt x="0" y="0"/>
                   </a:moveTo>
                   <a:lnTo>
-                    <a:pt x="7799693" y="0"/>
-                  </a:lnTo>
-                  <a:lnTo>
-                    <a:pt x="7799693" y="0"/>
+                    <a:pt x="7660515" y="0"/>
+                  </a:lnTo>
+                  <a:lnTo>
+                    <a:pt x="7660515" y="0"/>
                   </a:lnTo>
                 </a:path>
               </a:pathLst>
@@ -2787,21 +2779,21 @@
           </p:nvSpPr>
           <p:spPr>
             <a:xfrm>
-              <a:off x="817517" y="2239395"/>
-              <a:ext cx="7799693" cy="0"/>
+              <a:off x="887106" y="2502292"/>
+              <a:ext cx="7660515" cy="0"/>
             </a:xfrm>
             <a:custGeom>
               <a:avLst/>
               <a:pathLst>
-                <a:path w="7799693" h="0">
+                <a:path w="7660515" h="0">
                   <a:moveTo>
                     <a:pt x="0" y="0"/>
                   </a:moveTo>
                   <a:lnTo>
-                    <a:pt x="7799693" y="0"/>
-                  </a:lnTo>
-                  <a:lnTo>
-                    <a:pt x="7799693" y="0"/>
+                    <a:pt x="7660515" y="0"/>
+                  </a:lnTo>
+                  <a:lnTo>
+                    <a:pt x="7660515" y="0"/>
                   </a:lnTo>
                 </a:path>
               </a:pathLst>
@@ -2830,21 +2822,21 @@
           </p:nvSpPr>
           <p:spPr>
             <a:xfrm>
-              <a:off x="2441438" y="2073503"/>
-              <a:ext cx="0" cy="3649639"/>
+              <a:off x="887106" y="2202958"/>
+              <a:ext cx="7660515" cy="0"/>
             </a:xfrm>
             <a:custGeom>
               <a:avLst/>
               <a:pathLst>
-                <a:path w="0" h="3649639">
+                <a:path w="7660515" h="0">
                   <a:moveTo>
-                    <a:pt x="0" y="3649639"/>
+                    <a:pt x="0" y="0"/>
                   </a:moveTo>
                   <a:lnTo>
-                    <a:pt x="0" y="0"/>
-                  </a:lnTo>
-                  <a:lnTo>
-                    <a:pt x="0" y="0"/>
+                    <a:pt x="7660515" y="0"/>
+                  </a:lnTo>
+                  <a:lnTo>
+                    <a:pt x="7660515" y="0"/>
                   </a:lnTo>
                 </a:path>
               </a:pathLst>
@@ -2873,15 +2865,15 @@
           </p:nvSpPr>
           <p:spPr>
             <a:xfrm>
-              <a:off x="4593047" y="2073503"/>
-              <a:ext cx="0" cy="3649639"/>
+              <a:off x="2482050" y="2143092"/>
+              <a:ext cx="0" cy="1317069"/>
             </a:xfrm>
             <a:custGeom>
               <a:avLst/>
               <a:pathLst>
-                <a:path w="0" h="3649639">
+                <a:path w="0" h="1317069">
                   <a:moveTo>
-                    <a:pt x="0" y="3649639"/>
+                    <a:pt x="0" y="1317069"/>
                   </a:moveTo>
                   <a:lnTo>
                     <a:pt x="0" y="0"/>
@@ -2916,15 +2908,15 @@
           </p:nvSpPr>
           <p:spPr>
             <a:xfrm>
-              <a:off x="6744657" y="2073503"/>
-              <a:ext cx="0" cy="3649639"/>
+              <a:off x="4595266" y="2143092"/>
+              <a:ext cx="0" cy="1317069"/>
             </a:xfrm>
             <a:custGeom>
               <a:avLst/>
               <a:pathLst>
-                <a:path w="0" h="3649639">
+                <a:path w="0" h="1317069">
                   <a:moveTo>
-                    <a:pt x="0" y="3649639"/>
+                    <a:pt x="0" y="1317069"/>
                   </a:moveTo>
                   <a:lnTo>
                     <a:pt x="0" y="0"/>
@@ -2953,594 +2945,637 @@
         </p:sp>
         <p:sp>
           <p:nvSpPr>
-            <p:cNvPr id="20" name="pg20"/>
+            <p:cNvPr id="20" name="pl20"/>
             <p:cNvSpPr/>
             <p:nvPr/>
           </p:nvSpPr>
           <p:spPr>
             <a:xfrm>
-              <a:off x="1172049" y="2073503"/>
-              <a:ext cx="7090630" cy="3359691"/>
+              <a:off x="6708482" y="2143092"/>
+              <a:ext cx="0" cy="1317069"/>
             </a:xfrm>
             <a:custGeom>
               <a:avLst/>
               <a:pathLst>
-                <a:path w="7090630" h="3359691">
+                <a:path w="0" h="1317069">
                   <a:moveTo>
-                    <a:pt x="640840" y="0"/>
+                    <a:pt x="0" y="1317069"/>
                   </a:moveTo>
                   <a:lnTo>
-                    <a:pt x="644602" y="6891"/>
-                  </a:lnTo>
-                  <a:lnTo>
-                    <a:pt x="716225" y="133301"/>
-                  </a:lnTo>
-                  <a:lnTo>
-                    <a:pt x="787847" y="255115"/>
-                  </a:lnTo>
-                  <a:lnTo>
-                    <a:pt x="859470" y="372500"/>
-                  </a:lnTo>
-                  <a:lnTo>
-                    <a:pt x="931092" y="485618"/>
-                  </a:lnTo>
-                  <a:lnTo>
-                    <a:pt x="1002715" y="594623"/>
-                  </a:lnTo>
-                  <a:lnTo>
-                    <a:pt x="1074337" y="699664"/>
-                  </a:lnTo>
-                  <a:lnTo>
-                    <a:pt x="1145960" y="800887"/>
-                  </a:lnTo>
-                  <a:lnTo>
-                    <a:pt x="1217582" y="898429"/>
-                  </a:lnTo>
-                  <a:lnTo>
-                    <a:pt x="1289205" y="992425"/>
-                  </a:lnTo>
-                  <a:lnTo>
-                    <a:pt x="1360827" y="1083004"/>
-                  </a:lnTo>
-                  <a:lnTo>
-                    <a:pt x="1432450" y="1170289"/>
-                  </a:lnTo>
-                  <a:lnTo>
-                    <a:pt x="1504073" y="1254401"/>
-                  </a:lnTo>
-                  <a:lnTo>
-                    <a:pt x="1575695" y="1335455"/>
-                  </a:lnTo>
-                  <a:lnTo>
-                    <a:pt x="1647318" y="1413561"/>
-                  </a:lnTo>
-                  <a:lnTo>
-                    <a:pt x="1718940" y="1488828"/>
-                  </a:lnTo>
-                  <a:lnTo>
-                    <a:pt x="1790563" y="1561359"/>
-                  </a:lnTo>
-                  <a:lnTo>
-                    <a:pt x="1862185" y="1631252"/>
-                  </a:lnTo>
-                  <a:lnTo>
-                    <a:pt x="1933808" y="1698605"/>
-                  </a:lnTo>
-                  <a:lnTo>
-                    <a:pt x="2005430" y="1763508"/>
-                  </a:lnTo>
-                  <a:lnTo>
-                    <a:pt x="2077053" y="1826052"/>
-                  </a:lnTo>
-                  <a:lnTo>
-                    <a:pt x="2148675" y="1886322"/>
-                  </a:lnTo>
-                  <a:lnTo>
-                    <a:pt x="2220298" y="1944400"/>
-                  </a:lnTo>
-                  <a:lnTo>
-                    <a:pt x="2291920" y="2000367"/>
-                  </a:lnTo>
-                  <a:lnTo>
-                    <a:pt x="2363543" y="2054299"/>
-                  </a:lnTo>
-                  <a:lnTo>
-                    <a:pt x="2435165" y="2106271"/>
-                  </a:lnTo>
-                  <a:lnTo>
-                    <a:pt x="2506788" y="2156352"/>
-                  </a:lnTo>
-                  <a:lnTo>
-                    <a:pt x="2578410" y="2204613"/>
-                  </a:lnTo>
-                  <a:lnTo>
-                    <a:pt x="2650033" y="2251120"/>
-                  </a:lnTo>
-                  <a:lnTo>
-                    <a:pt x="2721655" y="2295935"/>
-                  </a:lnTo>
-                  <a:lnTo>
-                    <a:pt x="2793278" y="2339121"/>
-                  </a:lnTo>
-                  <a:lnTo>
-                    <a:pt x="2864901" y="2380737"/>
-                  </a:lnTo>
-                  <a:lnTo>
-                    <a:pt x="2936523" y="2420840"/>
-                  </a:lnTo>
-                  <a:lnTo>
-                    <a:pt x="3008146" y="2459484"/>
-                  </a:lnTo>
-                  <a:lnTo>
-                    <a:pt x="3079768" y="2496724"/>
-                  </a:lnTo>
-                  <a:lnTo>
-                    <a:pt x="3151391" y="2532610"/>
-                  </a:lnTo>
-                  <a:lnTo>
-                    <a:pt x="3223013" y="2567191"/>
-                  </a:lnTo>
-                  <a:lnTo>
-                    <a:pt x="3294636" y="2600515"/>
-                  </a:lnTo>
-                  <a:lnTo>
-                    <a:pt x="3366258" y="2632627"/>
-                  </a:lnTo>
-                  <a:lnTo>
-                    <a:pt x="3437881" y="2657590"/>
-                  </a:lnTo>
-                  <a:lnTo>
-                    <a:pt x="3509503" y="2668372"/>
-                  </a:lnTo>
-                  <a:lnTo>
-                    <a:pt x="3581126" y="2679013"/>
-                  </a:lnTo>
-                  <a:lnTo>
-                    <a:pt x="3652748" y="2689516"/>
-                  </a:lnTo>
-                  <a:lnTo>
-                    <a:pt x="3724371" y="2699881"/>
-                  </a:lnTo>
-                  <a:lnTo>
-                    <a:pt x="3795993" y="2710111"/>
-                  </a:lnTo>
-                  <a:lnTo>
-                    <a:pt x="3867616" y="2720208"/>
-                  </a:lnTo>
-                  <a:lnTo>
-                    <a:pt x="3939238" y="2730173"/>
-                  </a:lnTo>
-                  <a:lnTo>
-                    <a:pt x="4010861" y="2740008"/>
-                  </a:lnTo>
-                  <a:lnTo>
-                    <a:pt x="4082483" y="2749714"/>
-                  </a:lnTo>
-                  <a:lnTo>
-                    <a:pt x="4154106" y="2759294"/>
-                  </a:lnTo>
-                  <a:lnTo>
-                    <a:pt x="4225729" y="2768749"/>
-                  </a:lnTo>
-                  <a:lnTo>
-                    <a:pt x="4297351" y="2778080"/>
-                  </a:lnTo>
-                  <a:lnTo>
-                    <a:pt x="4368974" y="2787290"/>
-                  </a:lnTo>
-                  <a:lnTo>
-                    <a:pt x="4440596" y="2796379"/>
-                  </a:lnTo>
-                  <a:lnTo>
-                    <a:pt x="4512219" y="2805350"/>
-                  </a:lnTo>
-                  <a:lnTo>
-                    <a:pt x="4583841" y="2814204"/>
-                  </a:lnTo>
-                  <a:lnTo>
-                    <a:pt x="4655464" y="2822942"/>
-                  </a:lnTo>
-                  <a:lnTo>
-                    <a:pt x="4727086" y="2831566"/>
-                  </a:lnTo>
-                  <a:lnTo>
-                    <a:pt x="4798709" y="2840078"/>
-                  </a:lnTo>
-                  <a:lnTo>
-                    <a:pt x="4870331" y="2848478"/>
-                  </a:lnTo>
-                  <a:lnTo>
-                    <a:pt x="4941954" y="2856769"/>
-                  </a:lnTo>
-                  <a:lnTo>
-                    <a:pt x="5013576" y="2864952"/>
-                  </a:lnTo>
-                  <a:lnTo>
-                    <a:pt x="5085199" y="2873028"/>
-                  </a:lnTo>
-                  <a:lnTo>
-                    <a:pt x="5156821" y="2880998"/>
-                  </a:lnTo>
-                  <a:lnTo>
-                    <a:pt x="5228444" y="2888865"/>
-                  </a:lnTo>
-                  <a:lnTo>
-                    <a:pt x="5300066" y="2896628"/>
-                  </a:lnTo>
-                  <a:lnTo>
-                    <a:pt x="5371689" y="2904291"/>
-                  </a:lnTo>
-                  <a:lnTo>
-                    <a:pt x="5443311" y="2911853"/>
-                  </a:lnTo>
-                  <a:lnTo>
-                    <a:pt x="5514934" y="2919317"/>
-                  </a:lnTo>
-                  <a:lnTo>
-                    <a:pt x="5586557" y="2926683"/>
-                  </a:lnTo>
-                  <a:lnTo>
-                    <a:pt x="5658179" y="2933954"/>
-                  </a:lnTo>
-                  <a:lnTo>
-                    <a:pt x="5729802" y="2941129"/>
-                  </a:lnTo>
-                  <a:lnTo>
-                    <a:pt x="5801424" y="2948211"/>
-                  </a:lnTo>
-                  <a:lnTo>
-                    <a:pt x="5873047" y="2955200"/>
-                  </a:lnTo>
-                  <a:lnTo>
-                    <a:pt x="5944669" y="2962098"/>
-                  </a:lnTo>
-                  <a:lnTo>
-                    <a:pt x="6016292" y="2968906"/>
-                  </a:lnTo>
-                  <a:lnTo>
-                    <a:pt x="6087914" y="2975625"/>
-                  </a:lnTo>
-                  <a:lnTo>
-                    <a:pt x="6159537" y="2982257"/>
-                  </a:lnTo>
-                  <a:lnTo>
-                    <a:pt x="6231159" y="2988802"/>
-                  </a:lnTo>
-                  <a:lnTo>
-                    <a:pt x="6302782" y="2995261"/>
-                  </a:lnTo>
-                  <a:lnTo>
-                    <a:pt x="6374404" y="3001636"/>
-                  </a:lnTo>
-                  <a:lnTo>
-                    <a:pt x="6446027" y="3007928"/>
-                  </a:lnTo>
-                  <a:lnTo>
-                    <a:pt x="6517649" y="3014138"/>
-                  </a:lnTo>
-                  <a:lnTo>
-                    <a:pt x="6589272" y="3020267"/>
-                  </a:lnTo>
-                  <a:lnTo>
-                    <a:pt x="6660894" y="3026316"/>
-                  </a:lnTo>
-                  <a:lnTo>
-                    <a:pt x="6732517" y="3032286"/>
-                  </a:lnTo>
-                  <a:lnTo>
-                    <a:pt x="6804139" y="3038178"/>
-                  </a:lnTo>
-                  <a:lnTo>
-                    <a:pt x="6875762" y="3043993"/>
-                  </a:lnTo>
-                  <a:lnTo>
-                    <a:pt x="6947385" y="3049732"/>
-                  </a:lnTo>
-                  <a:lnTo>
-                    <a:pt x="7019007" y="3055396"/>
-                  </a:lnTo>
-                  <a:lnTo>
-                    <a:pt x="7090630" y="3060987"/>
-                  </a:lnTo>
-                  <a:lnTo>
-                    <a:pt x="7090630" y="3359691"/>
-                  </a:lnTo>
-                  <a:lnTo>
-                    <a:pt x="7019007" y="3355010"/>
-                  </a:lnTo>
-                  <a:lnTo>
-                    <a:pt x="6947385" y="3350153"/>
-                  </a:lnTo>
-                  <a:lnTo>
-                    <a:pt x="6875762" y="3345113"/>
-                  </a:lnTo>
-                  <a:lnTo>
-                    <a:pt x="6804139" y="3339882"/>
-                  </a:lnTo>
-                  <a:lnTo>
-                    <a:pt x="6732517" y="3334454"/>
-                  </a:lnTo>
-                  <a:lnTo>
-                    <a:pt x="6660894" y="3328821"/>
-                  </a:lnTo>
-                  <a:lnTo>
-                    <a:pt x="6589272" y="3322976"/>
-                  </a:lnTo>
-                  <a:lnTo>
-                    <a:pt x="6517649" y="3316910"/>
-                  </a:lnTo>
-                  <a:lnTo>
-                    <a:pt x="6446027" y="3310616"/>
-                  </a:lnTo>
-                  <a:lnTo>
-                    <a:pt x="6374404" y="3304084"/>
-                  </a:lnTo>
-                  <a:lnTo>
-                    <a:pt x="6302782" y="3297305"/>
-                  </a:lnTo>
-                  <a:lnTo>
-                    <a:pt x="6231159" y="3290271"/>
-                  </a:lnTo>
-                  <a:lnTo>
-                    <a:pt x="6159537" y="3282971"/>
-                  </a:lnTo>
-                  <a:lnTo>
-                    <a:pt x="6087914" y="3275396"/>
-                  </a:lnTo>
-                  <a:lnTo>
-                    <a:pt x="6016292" y="3267535"/>
-                  </a:lnTo>
-                  <a:lnTo>
-                    <a:pt x="5944669" y="3259378"/>
-                  </a:lnTo>
-                  <a:lnTo>
-                    <a:pt x="5873047" y="3250912"/>
-                  </a:lnTo>
-                  <a:lnTo>
-                    <a:pt x="5801424" y="3242128"/>
-                  </a:lnTo>
-                  <a:lnTo>
-                    <a:pt x="5729802" y="3233011"/>
-                  </a:lnTo>
-                  <a:lnTo>
-                    <a:pt x="5658179" y="3223551"/>
-                  </a:lnTo>
-                  <a:lnTo>
-                    <a:pt x="5586557" y="3213734"/>
-                  </a:lnTo>
-                  <a:lnTo>
-                    <a:pt x="5514934" y="3203547"/>
-                  </a:lnTo>
-                  <a:lnTo>
-                    <a:pt x="5443311" y="3192975"/>
-                  </a:lnTo>
-                  <a:lnTo>
-                    <a:pt x="5371689" y="3182005"/>
-                  </a:lnTo>
-                  <a:lnTo>
-                    <a:pt x="5300066" y="3170620"/>
-                  </a:lnTo>
-                  <a:lnTo>
-                    <a:pt x="5228444" y="3158806"/>
-                  </a:lnTo>
-                  <a:lnTo>
-                    <a:pt x="5156821" y="3146546"/>
-                  </a:lnTo>
-                  <a:lnTo>
-                    <a:pt x="5085199" y="3133824"/>
-                  </a:lnTo>
-                  <a:lnTo>
-                    <a:pt x="5013576" y="3120621"/>
-                  </a:lnTo>
-                  <a:lnTo>
-                    <a:pt x="4941954" y="3106921"/>
-                  </a:lnTo>
-                  <a:lnTo>
-                    <a:pt x="4870331" y="3092704"/>
-                  </a:lnTo>
-                  <a:lnTo>
-                    <a:pt x="4798709" y="3077950"/>
-                  </a:lnTo>
-                  <a:lnTo>
-                    <a:pt x="4727086" y="3062639"/>
-                  </a:lnTo>
-                  <a:lnTo>
-                    <a:pt x="4655464" y="3046751"/>
-                  </a:lnTo>
-                  <a:lnTo>
-                    <a:pt x="4583841" y="3030264"/>
-                  </a:lnTo>
-                  <a:lnTo>
-                    <a:pt x="4512219" y="3013154"/>
-                  </a:lnTo>
-                  <a:lnTo>
-                    <a:pt x="4440596" y="2995399"/>
-                  </a:lnTo>
-                  <a:lnTo>
-                    <a:pt x="4368974" y="2976974"/>
-                  </a:lnTo>
-                  <a:lnTo>
-                    <a:pt x="4297351" y="2957854"/>
-                  </a:lnTo>
-                  <a:lnTo>
-                    <a:pt x="4225729" y="2938012"/>
-                  </a:lnTo>
-                  <a:lnTo>
-                    <a:pt x="4154106" y="2917422"/>
-                  </a:lnTo>
-                  <a:lnTo>
-                    <a:pt x="4082483" y="2896055"/>
-                  </a:lnTo>
-                  <a:lnTo>
-                    <a:pt x="4010861" y="2873882"/>
-                  </a:lnTo>
-                  <a:lnTo>
-                    <a:pt x="3939238" y="2850872"/>
-                  </a:lnTo>
-                  <a:lnTo>
-                    <a:pt x="3867616" y="2826994"/>
-                  </a:lnTo>
-                  <a:lnTo>
-                    <a:pt x="3795993" y="2802215"/>
-                  </a:lnTo>
-                  <a:lnTo>
-                    <a:pt x="3724371" y="2776501"/>
-                  </a:lnTo>
-                  <a:lnTo>
-                    <a:pt x="3652748" y="2749817"/>
-                  </a:lnTo>
-                  <a:lnTo>
-                    <a:pt x="3581126" y="2722127"/>
-                  </a:lnTo>
-                  <a:lnTo>
-                    <a:pt x="3509503" y="2693391"/>
-                  </a:lnTo>
-                  <a:lnTo>
-                    <a:pt x="3437881" y="2663572"/>
-                  </a:lnTo>
-                  <a:lnTo>
-                    <a:pt x="3366258" y="2646665"/>
-                  </a:lnTo>
-                  <a:lnTo>
-                    <a:pt x="3294636" y="2635596"/>
-                  </a:lnTo>
-                  <a:lnTo>
-                    <a:pt x="3223013" y="2624380"/>
-                  </a:lnTo>
-                  <a:lnTo>
-                    <a:pt x="3151391" y="2613016"/>
-                  </a:lnTo>
-                  <a:lnTo>
-                    <a:pt x="3079768" y="2601502"/>
-                  </a:lnTo>
-                  <a:lnTo>
-                    <a:pt x="3008146" y="2589836"/>
-                  </a:lnTo>
-                  <a:lnTo>
-                    <a:pt x="2936523" y="2578015"/>
-                  </a:lnTo>
-                  <a:lnTo>
-                    <a:pt x="2864901" y="2566038"/>
-                  </a:lnTo>
-                  <a:lnTo>
-                    <a:pt x="2793278" y="2553903"/>
-                  </a:lnTo>
-                  <a:lnTo>
-                    <a:pt x="2721655" y="2541607"/>
-                  </a:lnTo>
-                  <a:lnTo>
-                    <a:pt x="2650033" y="2529149"/>
-                  </a:lnTo>
-                  <a:lnTo>
-                    <a:pt x="2578410" y="2516525"/>
-                  </a:lnTo>
-                  <a:lnTo>
-                    <a:pt x="2506788" y="2503735"/>
-                  </a:lnTo>
-                  <a:lnTo>
-                    <a:pt x="2435165" y="2490776"/>
-                  </a:lnTo>
-                  <a:lnTo>
-                    <a:pt x="2363543" y="2477645"/>
-                  </a:lnTo>
-                  <a:lnTo>
-                    <a:pt x="2291920" y="2464341"/>
-                  </a:lnTo>
-                  <a:lnTo>
-                    <a:pt x="2220298" y="2450861"/>
-                  </a:lnTo>
-                  <a:lnTo>
-                    <a:pt x="2148675" y="2437203"/>
-                  </a:lnTo>
-                  <a:lnTo>
-                    <a:pt x="2077053" y="2423364"/>
-                  </a:lnTo>
-                  <a:lnTo>
-                    <a:pt x="2005430" y="2409342"/>
-                  </a:lnTo>
-                  <a:lnTo>
-                    <a:pt x="1933808" y="2395134"/>
-                  </a:lnTo>
-                  <a:lnTo>
-                    <a:pt x="1862185" y="2380739"/>
-                  </a:lnTo>
-                  <a:lnTo>
-                    <a:pt x="1790563" y="2366153"/>
-                  </a:lnTo>
-                  <a:lnTo>
-                    <a:pt x="1718940" y="2351375"/>
-                  </a:lnTo>
-                  <a:lnTo>
-                    <a:pt x="1647318" y="2336401"/>
-                  </a:lnTo>
-                  <a:lnTo>
-                    <a:pt x="1575695" y="2321229"/>
-                  </a:lnTo>
-                  <a:lnTo>
-                    <a:pt x="1504073" y="2305856"/>
-                  </a:lnTo>
-                  <a:lnTo>
-                    <a:pt x="1432450" y="2290280"/>
-                  </a:lnTo>
-                  <a:lnTo>
-                    <a:pt x="1360827" y="2274498"/>
-                  </a:lnTo>
-                  <a:lnTo>
-                    <a:pt x="1289205" y="2258508"/>
-                  </a:lnTo>
-                  <a:lnTo>
-                    <a:pt x="1217582" y="2242306"/>
-                  </a:lnTo>
-                  <a:lnTo>
-                    <a:pt x="1145960" y="2225890"/>
-                  </a:lnTo>
-                  <a:lnTo>
-                    <a:pt x="1074337" y="2209256"/>
-                  </a:lnTo>
-                  <a:lnTo>
-                    <a:pt x="1002715" y="2192403"/>
-                  </a:lnTo>
-                  <a:lnTo>
-                    <a:pt x="931092" y="2175327"/>
-                  </a:lnTo>
-                  <a:lnTo>
-                    <a:pt x="859470" y="2158025"/>
-                  </a:lnTo>
-                  <a:lnTo>
-                    <a:pt x="787847" y="2140494"/>
-                  </a:lnTo>
-                  <a:lnTo>
-                    <a:pt x="716225" y="2122732"/>
-                  </a:lnTo>
-                  <a:lnTo>
-                    <a:pt x="644602" y="2104734"/>
-                  </a:lnTo>
-                  <a:lnTo>
-                    <a:pt x="572980" y="2086499"/>
-                  </a:lnTo>
-                  <a:lnTo>
-                    <a:pt x="501357" y="2068022"/>
-                  </a:lnTo>
-                  <a:lnTo>
-                    <a:pt x="429735" y="2049301"/>
-                  </a:lnTo>
-                  <a:lnTo>
-                    <a:pt x="358112" y="2030333"/>
-                  </a:lnTo>
-                  <a:lnTo>
-                    <a:pt x="286490" y="2011114"/>
-                  </a:lnTo>
-                  <a:lnTo>
-                    <a:pt x="214867" y="1991640"/>
-                  </a:lnTo>
-                  <a:lnTo>
-                    <a:pt x="143245" y="1971909"/>
-                  </a:lnTo>
-                  <a:lnTo>
-                    <a:pt x="71622" y="1951917"/>
-                  </a:lnTo>
-                  <a:lnTo>
-                    <a:pt x="0" y="1931661"/>
+                    <a:pt x="0" y="0"/>
+                  </a:lnTo>
+                  <a:lnTo>
+                    <a:pt x="0" y="0"/>
+                  </a:lnTo>
+                </a:path>
+              </a:pathLst>
+            </a:custGeom>
+            <a:ln w="13550" cap="flat">
+              <a:solidFill>
+                <a:srgbClr val="EBEBEB">
+                  <a:alpha val="100000"/>
+                </a:srgbClr>
+              </a:solidFill>
+              <a:prstDash val="solid"/>
+              <a:round/>
+            </a:ln>
+          </p:spPr>
+          <p:txBody>
+            <a:bodyPr/>
+            <a:lstStyle/>
+            <a:p/>
+          </p:txBody>
+        </p:sp>
+        <p:sp>
+          <p:nvSpPr>
+            <p:cNvPr id="21" name="pg21"/>
+            <p:cNvSpPr/>
+            <p:nvPr/>
+          </p:nvSpPr>
+          <p:spPr>
+            <a:xfrm>
+              <a:off x="1235312" y="2143092"/>
+              <a:ext cx="6964104" cy="1212433"/>
+            </a:xfrm>
+            <a:custGeom>
+              <a:avLst/>
+              <a:pathLst>
+                <a:path w="6964104" h="1212433">
+                  <a:moveTo>
+                    <a:pt x="629405" y="0"/>
+                  </a:moveTo>
+                  <a:lnTo>
+                    <a:pt x="633100" y="2486"/>
+                  </a:lnTo>
+                  <a:lnTo>
+                    <a:pt x="703444" y="48105"/>
+                  </a:lnTo>
+                  <a:lnTo>
+                    <a:pt x="773789" y="92065"/>
+                  </a:lnTo>
+                  <a:lnTo>
+                    <a:pt x="844133" y="134426"/>
+                  </a:lnTo>
+                  <a:lnTo>
+                    <a:pt x="914478" y="175248"/>
+                  </a:lnTo>
+                  <a:lnTo>
+                    <a:pt x="984822" y="214585"/>
+                  </a:lnTo>
+                  <a:lnTo>
+                    <a:pt x="1055167" y="252492"/>
+                  </a:lnTo>
+                  <a:lnTo>
+                    <a:pt x="1125511" y="289021"/>
+                  </a:lnTo>
+                  <a:lnTo>
+                    <a:pt x="1195856" y="324222"/>
+                  </a:lnTo>
+                  <a:lnTo>
+                    <a:pt x="1266200" y="358143"/>
+                  </a:lnTo>
+                  <a:lnTo>
+                    <a:pt x="1336545" y="390830"/>
+                  </a:lnTo>
+                  <a:lnTo>
+                    <a:pt x="1406889" y="422330"/>
+                  </a:lnTo>
+                  <a:lnTo>
+                    <a:pt x="1477234" y="452683"/>
+                  </a:lnTo>
+                  <a:lnTo>
+                    <a:pt x="1547578" y="481934"/>
+                  </a:lnTo>
+                  <a:lnTo>
+                    <a:pt x="1617923" y="510121"/>
+                  </a:lnTo>
+                  <a:lnTo>
+                    <a:pt x="1688267" y="537283"/>
+                  </a:lnTo>
+                  <a:lnTo>
+                    <a:pt x="1758612" y="563457"/>
+                  </a:lnTo>
+                  <a:lnTo>
+                    <a:pt x="1828956" y="588680"/>
+                  </a:lnTo>
+                  <a:lnTo>
+                    <a:pt x="1899301" y="612986"/>
+                  </a:lnTo>
+                  <a:lnTo>
+                    <a:pt x="1969645" y="636408"/>
+                  </a:lnTo>
+                  <a:lnTo>
+                    <a:pt x="2039990" y="658979"/>
+                  </a:lnTo>
+                  <a:lnTo>
+                    <a:pt x="2110334" y="680729"/>
+                  </a:lnTo>
+                  <a:lnTo>
+                    <a:pt x="2180679" y="701688"/>
+                  </a:lnTo>
+                  <a:lnTo>
+                    <a:pt x="2251023" y="721885"/>
+                  </a:lnTo>
+                  <a:lnTo>
+                    <a:pt x="2321368" y="741348"/>
+                  </a:lnTo>
+                  <a:lnTo>
+                    <a:pt x="2391712" y="760103"/>
+                  </a:lnTo>
+                  <a:lnTo>
+                    <a:pt x="2462057" y="778177"/>
+                  </a:lnTo>
+                  <a:lnTo>
+                    <a:pt x="2532401" y="795593"/>
+                  </a:lnTo>
+                  <a:lnTo>
+                    <a:pt x="2602746" y="812376"/>
+                  </a:lnTo>
+                  <a:lnTo>
+                    <a:pt x="2673090" y="828549"/>
+                  </a:lnTo>
+                  <a:lnTo>
+                    <a:pt x="2743435" y="844133"/>
+                  </a:lnTo>
+                  <a:lnTo>
+                    <a:pt x="2813779" y="859152"/>
+                  </a:lnTo>
+                  <a:lnTo>
+                    <a:pt x="2884124" y="873624"/>
+                  </a:lnTo>
+                  <a:lnTo>
+                    <a:pt x="2954468" y="887570"/>
+                  </a:lnTo>
+                  <a:lnTo>
+                    <a:pt x="3024813" y="901009"/>
+                  </a:lnTo>
+                  <a:lnTo>
+                    <a:pt x="3095157" y="913959"/>
+                  </a:lnTo>
+                  <a:lnTo>
+                    <a:pt x="3165502" y="926438"/>
+                  </a:lnTo>
+                  <a:lnTo>
+                    <a:pt x="3235846" y="938464"/>
+                  </a:lnTo>
+                  <a:lnTo>
+                    <a:pt x="3306191" y="950053"/>
+                  </a:lnTo>
+                  <a:lnTo>
+                    <a:pt x="3376535" y="959061"/>
+                  </a:lnTo>
+                  <a:lnTo>
+                    <a:pt x="3446880" y="962952"/>
+                  </a:lnTo>
+                  <a:lnTo>
+                    <a:pt x="3517224" y="966793"/>
+                  </a:lnTo>
+                  <a:lnTo>
+                    <a:pt x="3587569" y="970583"/>
+                  </a:lnTo>
+                  <a:lnTo>
+                    <a:pt x="3657913" y="974323"/>
+                  </a:lnTo>
+                  <a:lnTo>
+                    <a:pt x="3728257" y="978015"/>
+                  </a:lnTo>
+                  <a:lnTo>
+                    <a:pt x="3798602" y="981659"/>
+                  </a:lnTo>
+                  <a:lnTo>
+                    <a:pt x="3868946" y="985255"/>
+                  </a:lnTo>
+                  <a:lnTo>
+                    <a:pt x="3939291" y="988804"/>
+                  </a:lnTo>
+                  <a:lnTo>
+                    <a:pt x="4009635" y="992307"/>
+                  </a:lnTo>
+                  <a:lnTo>
+                    <a:pt x="4079980" y="995764"/>
+                  </a:lnTo>
+                  <a:lnTo>
+                    <a:pt x="4150324" y="999176"/>
+                  </a:lnTo>
+                  <a:lnTo>
+                    <a:pt x="4220669" y="1002544"/>
+                  </a:lnTo>
+                  <a:lnTo>
+                    <a:pt x="4291013" y="1005867"/>
+                  </a:lnTo>
+                  <a:lnTo>
+                    <a:pt x="4361358" y="1009147"/>
+                  </a:lnTo>
+                  <a:lnTo>
+                    <a:pt x="4431702" y="1012385"/>
+                  </a:lnTo>
+                  <a:lnTo>
+                    <a:pt x="4502047" y="1015580"/>
+                  </a:lnTo>
+                  <a:lnTo>
+                    <a:pt x="4572391" y="1018733"/>
+                  </a:lnTo>
+                  <a:lnTo>
+                    <a:pt x="4642736" y="1021845"/>
+                  </a:lnTo>
+                  <a:lnTo>
+                    <a:pt x="4713080" y="1024917"/>
+                  </a:lnTo>
+                  <a:lnTo>
+                    <a:pt x="4783425" y="1027949"/>
+                  </a:lnTo>
+                  <a:lnTo>
+                    <a:pt x="4853769" y="1030940"/>
+                  </a:lnTo>
+                  <a:lnTo>
+                    <a:pt x="4924114" y="1033893"/>
+                  </a:lnTo>
+                  <a:lnTo>
+                    <a:pt x="4994458" y="1036808"/>
+                  </a:lnTo>
+                  <a:lnTo>
+                    <a:pt x="5064803" y="1039684"/>
+                  </a:lnTo>
+                  <a:lnTo>
+                    <a:pt x="5135147" y="1042523"/>
+                  </a:lnTo>
+                  <a:lnTo>
+                    <a:pt x="5205492" y="1045325"/>
+                  </a:lnTo>
+                  <a:lnTo>
+                    <a:pt x="5275836" y="1048090"/>
+                  </a:lnTo>
+                  <a:lnTo>
+                    <a:pt x="5346181" y="1050819"/>
+                  </a:lnTo>
+                  <a:lnTo>
+                    <a:pt x="5416525" y="1053513"/>
+                  </a:lnTo>
+                  <a:lnTo>
+                    <a:pt x="5486870" y="1056171"/>
+                  </a:lnTo>
+                  <a:lnTo>
+                    <a:pt x="5557214" y="1058795"/>
+                  </a:lnTo>
+                  <a:lnTo>
+                    <a:pt x="5627559" y="1061384"/>
+                  </a:lnTo>
+                  <a:lnTo>
+                    <a:pt x="5697903" y="1063940"/>
+                  </a:lnTo>
+                  <a:lnTo>
+                    <a:pt x="5768248" y="1066462"/>
+                  </a:lnTo>
+                  <a:lnTo>
+                    <a:pt x="5838592" y="1068951"/>
+                  </a:lnTo>
+                  <a:lnTo>
+                    <a:pt x="5908937" y="1071408"/>
+                  </a:lnTo>
+                  <a:lnTo>
+                    <a:pt x="5979281" y="1073833"/>
+                  </a:lnTo>
+                  <a:lnTo>
+                    <a:pt x="6049626" y="1076226"/>
+                  </a:lnTo>
+                  <a:lnTo>
+                    <a:pt x="6119970" y="1078588"/>
+                  </a:lnTo>
+                  <a:lnTo>
+                    <a:pt x="6190315" y="1080919"/>
+                  </a:lnTo>
+                  <a:lnTo>
+                    <a:pt x="6260659" y="1083220"/>
+                  </a:lnTo>
+                  <a:lnTo>
+                    <a:pt x="6331004" y="1085490"/>
+                  </a:lnTo>
+                  <a:lnTo>
+                    <a:pt x="6401348" y="1087731"/>
+                  </a:lnTo>
+                  <a:lnTo>
+                    <a:pt x="6471693" y="1089943"/>
+                  </a:lnTo>
+                  <a:lnTo>
+                    <a:pt x="6542037" y="1092126"/>
+                  </a:lnTo>
+                  <a:lnTo>
+                    <a:pt x="6612382" y="1094280"/>
+                  </a:lnTo>
+                  <a:lnTo>
+                    <a:pt x="6682726" y="1096407"/>
+                  </a:lnTo>
+                  <a:lnTo>
+                    <a:pt x="6753071" y="1098505"/>
+                  </a:lnTo>
+                  <a:lnTo>
+                    <a:pt x="6823415" y="1100576"/>
+                  </a:lnTo>
+                  <a:lnTo>
+                    <a:pt x="6893760" y="1102620"/>
+                  </a:lnTo>
+                  <a:lnTo>
+                    <a:pt x="6964104" y="1104638"/>
+                  </a:lnTo>
+                  <a:lnTo>
+                    <a:pt x="6964104" y="1212433"/>
+                  </a:lnTo>
+                  <a:lnTo>
+                    <a:pt x="6893760" y="1210744"/>
+                  </a:lnTo>
+                  <a:lnTo>
+                    <a:pt x="6823415" y="1208991"/>
+                  </a:lnTo>
+                  <a:lnTo>
+                    <a:pt x="6753071" y="1207172"/>
+                  </a:lnTo>
+                  <a:lnTo>
+                    <a:pt x="6682726" y="1205285"/>
+                  </a:lnTo>
+                  <a:lnTo>
+                    <a:pt x="6612382" y="1203326"/>
+                  </a:lnTo>
+                  <a:lnTo>
+                    <a:pt x="6542037" y="1201293"/>
+                  </a:lnTo>
+                  <a:lnTo>
+                    <a:pt x="6471693" y="1199184"/>
+                  </a:lnTo>
+                  <a:lnTo>
+                    <a:pt x="6401348" y="1196995"/>
+                  </a:lnTo>
+                  <a:lnTo>
+                    <a:pt x="6331004" y="1194723"/>
+                  </a:lnTo>
+                  <a:lnTo>
+                    <a:pt x="6260659" y="1192366"/>
+                  </a:lnTo>
+                  <a:lnTo>
+                    <a:pt x="6190315" y="1189920"/>
+                  </a:lnTo>
+                  <a:lnTo>
+                    <a:pt x="6119970" y="1187381"/>
+                  </a:lnTo>
+                  <a:lnTo>
+                    <a:pt x="6049626" y="1184747"/>
+                  </a:lnTo>
+                  <a:lnTo>
+                    <a:pt x="5979281" y="1182013"/>
+                  </a:lnTo>
+                  <a:lnTo>
+                    <a:pt x="5908937" y="1179176"/>
+                  </a:lnTo>
+                  <a:lnTo>
+                    <a:pt x="5838592" y="1176232"/>
+                  </a:lnTo>
+                  <a:lnTo>
+                    <a:pt x="5768248" y="1173177"/>
+                  </a:lnTo>
+                  <a:lnTo>
+                    <a:pt x="5697903" y="1170007"/>
+                  </a:lnTo>
+                  <a:lnTo>
+                    <a:pt x="5627559" y="1166717"/>
+                  </a:lnTo>
+                  <a:lnTo>
+                    <a:pt x="5557214" y="1163304"/>
+                  </a:lnTo>
+                  <a:lnTo>
+                    <a:pt x="5486870" y="1159761"/>
+                  </a:lnTo>
+                  <a:lnTo>
+                    <a:pt x="5416525" y="1156084"/>
+                  </a:lnTo>
+                  <a:lnTo>
+                    <a:pt x="5346181" y="1152269"/>
+                  </a:lnTo>
+                  <a:lnTo>
+                    <a:pt x="5275836" y="1148310"/>
+                  </a:lnTo>
+                  <a:lnTo>
+                    <a:pt x="5205492" y="1144202"/>
+                  </a:lnTo>
+                  <a:lnTo>
+                    <a:pt x="5135147" y="1139938"/>
+                  </a:lnTo>
+                  <a:lnTo>
+                    <a:pt x="5064803" y="1135514"/>
+                  </a:lnTo>
+                  <a:lnTo>
+                    <a:pt x="4994458" y="1130923"/>
+                  </a:lnTo>
+                  <a:lnTo>
+                    <a:pt x="4924114" y="1126159"/>
+                  </a:lnTo>
+                  <a:lnTo>
+                    <a:pt x="4853769" y="1121214"/>
+                  </a:lnTo>
+                  <a:lnTo>
+                    <a:pt x="4783425" y="1116084"/>
+                  </a:lnTo>
+                  <a:lnTo>
+                    <a:pt x="4713080" y="1110759"/>
+                  </a:lnTo>
+                  <a:lnTo>
+                    <a:pt x="4642736" y="1105234"/>
+                  </a:lnTo>
+                  <a:lnTo>
+                    <a:pt x="4572391" y="1099501"/>
+                  </a:lnTo>
+                  <a:lnTo>
+                    <a:pt x="4502047" y="1093551"/>
+                  </a:lnTo>
+                  <a:lnTo>
+                    <a:pt x="4431702" y="1087376"/>
+                  </a:lnTo>
+                  <a:lnTo>
+                    <a:pt x="4361358" y="1080969"/>
+                  </a:lnTo>
+                  <a:lnTo>
+                    <a:pt x="4291013" y="1074320"/>
+                  </a:lnTo>
+                  <a:lnTo>
+                    <a:pt x="4220669" y="1067419"/>
+                  </a:lnTo>
+                  <a:lnTo>
+                    <a:pt x="4150324" y="1060259"/>
+                  </a:lnTo>
+                  <a:lnTo>
+                    <a:pt x="4079980" y="1052829"/>
+                  </a:lnTo>
+                  <a:lnTo>
+                    <a:pt x="4009635" y="1045118"/>
+                  </a:lnTo>
+                  <a:lnTo>
+                    <a:pt x="3939291" y="1037116"/>
+                  </a:lnTo>
+                  <a:lnTo>
+                    <a:pt x="3868946" y="1028812"/>
+                  </a:lnTo>
+                  <a:lnTo>
+                    <a:pt x="3798602" y="1020195"/>
+                  </a:lnTo>
+                  <a:lnTo>
+                    <a:pt x="3728257" y="1011253"/>
+                  </a:lnTo>
+                  <a:lnTo>
+                    <a:pt x="3657913" y="1001974"/>
+                  </a:lnTo>
+                  <a:lnTo>
+                    <a:pt x="3587569" y="992344"/>
+                  </a:lnTo>
+                  <a:lnTo>
+                    <a:pt x="3517224" y="982351"/>
+                  </a:lnTo>
+                  <a:lnTo>
+                    <a:pt x="3446880" y="971981"/>
+                  </a:lnTo>
+                  <a:lnTo>
+                    <a:pt x="3376535" y="961220"/>
+                  </a:lnTo>
+                  <a:lnTo>
+                    <a:pt x="3306191" y="955119"/>
+                  </a:lnTo>
+                  <a:lnTo>
+                    <a:pt x="3235846" y="951124"/>
+                  </a:lnTo>
+                  <a:lnTo>
+                    <a:pt x="3165502" y="947077"/>
+                  </a:lnTo>
+                  <a:lnTo>
+                    <a:pt x="3095157" y="942976"/>
+                  </a:lnTo>
+                  <a:lnTo>
+                    <a:pt x="3024813" y="938821"/>
+                  </a:lnTo>
+                  <a:lnTo>
+                    <a:pt x="2954468" y="934610"/>
+                  </a:lnTo>
+                  <a:lnTo>
+                    <a:pt x="2884124" y="930345"/>
+                  </a:lnTo>
+                  <a:lnTo>
+                    <a:pt x="2813779" y="926022"/>
+                  </a:lnTo>
+                  <a:lnTo>
+                    <a:pt x="2743435" y="921643"/>
+                  </a:lnTo>
+                  <a:lnTo>
+                    <a:pt x="2673090" y="917206"/>
+                  </a:lnTo>
+                  <a:lnTo>
+                    <a:pt x="2602746" y="912710"/>
+                  </a:lnTo>
+                  <a:lnTo>
+                    <a:pt x="2532401" y="908154"/>
+                  </a:lnTo>
+                  <a:lnTo>
+                    <a:pt x="2462057" y="903539"/>
+                  </a:lnTo>
+                  <a:lnTo>
+                    <a:pt x="2391712" y="898862"/>
+                  </a:lnTo>
+                  <a:lnTo>
+                    <a:pt x="2321368" y="894124"/>
+                  </a:lnTo>
+                  <a:lnTo>
+                    <a:pt x="2251023" y="889322"/>
+                  </a:lnTo>
+                  <a:lnTo>
+                    <a:pt x="2180679" y="884458"/>
+                  </a:lnTo>
+                  <a:lnTo>
+                    <a:pt x="2110334" y="879529"/>
+                  </a:lnTo>
+                  <a:lnTo>
+                    <a:pt x="2039990" y="874535"/>
+                  </a:lnTo>
+                  <a:lnTo>
+                    <a:pt x="1969645" y="869474"/>
+                  </a:lnTo>
+                  <a:lnTo>
+                    <a:pt x="1899301" y="864347"/>
+                  </a:lnTo>
+                  <a:lnTo>
+                    <a:pt x="1828956" y="859152"/>
+                  </a:lnTo>
+                  <a:lnTo>
+                    <a:pt x="1758612" y="853889"/>
+                  </a:lnTo>
+                  <a:lnTo>
+                    <a:pt x="1688267" y="848556"/>
+                  </a:lnTo>
+                  <a:lnTo>
+                    <a:pt x="1617923" y="843152"/>
+                  </a:lnTo>
+                  <a:lnTo>
+                    <a:pt x="1547578" y="837677"/>
+                  </a:lnTo>
+                  <a:lnTo>
+                    <a:pt x="1477234" y="832129"/>
+                  </a:lnTo>
+                  <a:lnTo>
+                    <a:pt x="1406889" y="826508"/>
+                  </a:lnTo>
+                  <a:lnTo>
+                    <a:pt x="1336545" y="820813"/>
+                  </a:lnTo>
+                  <a:lnTo>
+                    <a:pt x="1266200" y="815042"/>
+                  </a:lnTo>
+                  <a:lnTo>
+                    <a:pt x="1195856" y="809195"/>
+                  </a:lnTo>
+                  <a:lnTo>
+                    <a:pt x="1125511" y="803271"/>
+                  </a:lnTo>
+                  <a:lnTo>
+                    <a:pt x="1055167" y="797268"/>
+                  </a:lnTo>
+                  <a:lnTo>
+                    <a:pt x="984822" y="791186"/>
+                  </a:lnTo>
+                  <a:lnTo>
+                    <a:pt x="914478" y="785024"/>
+                  </a:lnTo>
+                  <a:lnTo>
+                    <a:pt x="844133" y="778780"/>
+                  </a:lnTo>
+                  <a:lnTo>
+                    <a:pt x="773789" y="772454"/>
+                  </a:lnTo>
+                  <a:lnTo>
+                    <a:pt x="703444" y="766044"/>
+                  </a:lnTo>
+                  <a:lnTo>
+                    <a:pt x="633100" y="759549"/>
+                  </a:lnTo>
+                  <a:lnTo>
+                    <a:pt x="562755" y="752968"/>
+                  </a:lnTo>
+                  <a:lnTo>
+                    <a:pt x="492411" y="746300"/>
+                  </a:lnTo>
+                  <a:lnTo>
+                    <a:pt x="422066" y="739544"/>
+                  </a:lnTo>
+                  <a:lnTo>
+                    <a:pt x="351722" y="732699"/>
+                  </a:lnTo>
+                  <a:lnTo>
+                    <a:pt x="281377" y="725763"/>
+                  </a:lnTo>
+                  <a:lnTo>
+                    <a:pt x="211033" y="718736"/>
+                  </a:lnTo>
+                  <a:lnTo>
+                    <a:pt x="140688" y="711615"/>
+                  </a:lnTo>
+                  <a:lnTo>
+                    <a:pt x="70344" y="704401"/>
+                  </a:lnTo>
+                  <a:lnTo>
+                    <a:pt x="0" y="697091"/>
                   </a:lnTo>
                   <a:close/>
                 </a:path>
@@ -3560,619 +3595,294 @@
         </p:sp>
         <p:sp>
           <p:nvSpPr>
-            <p:cNvPr id="21" name="pl21"/>
-            <p:cNvSpPr/>
-            <p:nvPr/>
-          </p:nvSpPr>
-          <p:spPr>
-            <a:xfrm>
-              <a:off x="1812889" y="2073503"/>
-              <a:ext cx="6449789" cy="3060987"/>
-            </a:xfrm>
-            <a:custGeom>
-              <a:avLst/>
-              <a:pathLst>
-                <a:path w="6449789" h="3060987">
-                  <a:moveTo>
-                    <a:pt x="0" y="0"/>
-                  </a:moveTo>
-                  <a:lnTo>
-                    <a:pt x="3762" y="6891"/>
-                  </a:lnTo>
-                  <a:lnTo>
-                    <a:pt x="75385" y="133301"/>
-                  </a:lnTo>
-                  <a:lnTo>
-                    <a:pt x="147007" y="255115"/>
-                  </a:lnTo>
-                  <a:lnTo>
-                    <a:pt x="218630" y="372500"/>
-                  </a:lnTo>
-                  <a:lnTo>
-                    <a:pt x="290252" y="485618"/>
-                  </a:lnTo>
-                  <a:lnTo>
-                    <a:pt x="361875" y="594623"/>
-                  </a:lnTo>
-                  <a:lnTo>
-                    <a:pt x="433497" y="699664"/>
-                  </a:lnTo>
-                  <a:lnTo>
-                    <a:pt x="505120" y="800887"/>
-                  </a:lnTo>
-                  <a:lnTo>
-                    <a:pt x="576742" y="898429"/>
-                  </a:lnTo>
-                  <a:lnTo>
-                    <a:pt x="648365" y="992425"/>
-                  </a:lnTo>
-                  <a:lnTo>
-                    <a:pt x="719987" y="1083004"/>
-                  </a:lnTo>
-                  <a:lnTo>
-                    <a:pt x="791610" y="1170289"/>
-                  </a:lnTo>
-                  <a:lnTo>
-                    <a:pt x="863232" y="1254401"/>
-                  </a:lnTo>
-                  <a:lnTo>
-                    <a:pt x="934855" y="1335455"/>
-                  </a:lnTo>
-                  <a:lnTo>
-                    <a:pt x="1006477" y="1413561"/>
-                  </a:lnTo>
-                  <a:lnTo>
-                    <a:pt x="1078100" y="1488828"/>
-                  </a:lnTo>
-                  <a:lnTo>
-                    <a:pt x="1149722" y="1561359"/>
-                  </a:lnTo>
-                  <a:lnTo>
-                    <a:pt x="1221345" y="1631252"/>
-                  </a:lnTo>
-                  <a:lnTo>
-                    <a:pt x="1292967" y="1698605"/>
-                  </a:lnTo>
-                  <a:lnTo>
-                    <a:pt x="1364590" y="1763508"/>
-                  </a:lnTo>
-                  <a:lnTo>
-                    <a:pt x="1436213" y="1826052"/>
-                  </a:lnTo>
-                  <a:lnTo>
-                    <a:pt x="1507835" y="1886322"/>
-                  </a:lnTo>
-                  <a:lnTo>
-                    <a:pt x="1579458" y="1944400"/>
-                  </a:lnTo>
-                  <a:lnTo>
-                    <a:pt x="1651080" y="2000367"/>
-                  </a:lnTo>
-                  <a:lnTo>
-                    <a:pt x="1722703" y="2054299"/>
-                  </a:lnTo>
-                  <a:lnTo>
-                    <a:pt x="1794325" y="2106271"/>
-                  </a:lnTo>
-                  <a:lnTo>
-                    <a:pt x="1865948" y="2156352"/>
-                  </a:lnTo>
-                  <a:lnTo>
-                    <a:pt x="1937570" y="2204613"/>
-                  </a:lnTo>
-                  <a:lnTo>
-                    <a:pt x="2009193" y="2251120"/>
-                  </a:lnTo>
-                  <a:lnTo>
-                    <a:pt x="2080815" y="2295935"/>
-                  </a:lnTo>
-                  <a:lnTo>
-                    <a:pt x="2152438" y="2339121"/>
-                  </a:lnTo>
-                  <a:lnTo>
-                    <a:pt x="2224060" y="2380737"/>
-                  </a:lnTo>
-                  <a:lnTo>
-                    <a:pt x="2295683" y="2420840"/>
-                  </a:lnTo>
-                  <a:lnTo>
-                    <a:pt x="2367305" y="2459484"/>
-                  </a:lnTo>
-                  <a:lnTo>
-                    <a:pt x="2438928" y="2496724"/>
-                  </a:lnTo>
-                  <a:lnTo>
-                    <a:pt x="2510550" y="2532610"/>
-                  </a:lnTo>
-                  <a:lnTo>
-                    <a:pt x="2582173" y="2567191"/>
-                  </a:lnTo>
-                  <a:lnTo>
-                    <a:pt x="2653795" y="2600515"/>
-                  </a:lnTo>
-                  <a:lnTo>
-                    <a:pt x="2725418" y="2632627"/>
-                  </a:lnTo>
-                  <a:lnTo>
-                    <a:pt x="2797041" y="2657590"/>
-                  </a:lnTo>
-                  <a:lnTo>
-                    <a:pt x="2868663" y="2668372"/>
-                  </a:lnTo>
-                  <a:lnTo>
-                    <a:pt x="2940286" y="2679013"/>
-                  </a:lnTo>
-                  <a:lnTo>
-                    <a:pt x="3011908" y="2689516"/>
-                  </a:lnTo>
-                  <a:lnTo>
-                    <a:pt x="3083531" y="2699881"/>
-                  </a:lnTo>
-                  <a:lnTo>
-                    <a:pt x="3155153" y="2710111"/>
-                  </a:lnTo>
-                  <a:lnTo>
-                    <a:pt x="3226776" y="2720208"/>
-                  </a:lnTo>
-                  <a:lnTo>
-                    <a:pt x="3298398" y="2730173"/>
-                  </a:lnTo>
-                  <a:lnTo>
-                    <a:pt x="3370021" y="2740008"/>
-                  </a:lnTo>
-                  <a:lnTo>
-                    <a:pt x="3441643" y="2749714"/>
-                  </a:lnTo>
-                  <a:lnTo>
-                    <a:pt x="3513266" y="2759294"/>
-                  </a:lnTo>
-                  <a:lnTo>
-                    <a:pt x="3584888" y="2768749"/>
-                  </a:lnTo>
-                  <a:lnTo>
-                    <a:pt x="3656511" y="2778080"/>
-                  </a:lnTo>
-                  <a:lnTo>
-                    <a:pt x="3728133" y="2787290"/>
-                  </a:lnTo>
-                  <a:lnTo>
-                    <a:pt x="3799756" y="2796379"/>
-                  </a:lnTo>
-                  <a:lnTo>
-                    <a:pt x="3871378" y="2805350"/>
-                  </a:lnTo>
-                  <a:lnTo>
-                    <a:pt x="3943001" y="2814204"/>
-                  </a:lnTo>
-                  <a:lnTo>
-                    <a:pt x="4014623" y="2822942"/>
-                  </a:lnTo>
-                  <a:lnTo>
-                    <a:pt x="4086246" y="2831566"/>
-                  </a:lnTo>
-                  <a:lnTo>
-                    <a:pt x="4157869" y="2840078"/>
-                  </a:lnTo>
-                  <a:lnTo>
-                    <a:pt x="4229491" y="2848478"/>
-                  </a:lnTo>
-                  <a:lnTo>
-                    <a:pt x="4301114" y="2856769"/>
-                  </a:lnTo>
-                  <a:lnTo>
-                    <a:pt x="4372736" y="2864952"/>
-                  </a:lnTo>
-                  <a:lnTo>
-                    <a:pt x="4444359" y="2873028"/>
-                  </a:lnTo>
-                  <a:lnTo>
-                    <a:pt x="4515981" y="2880998"/>
-                  </a:lnTo>
-                  <a:lnTo>
-                    <a:pt x="4587604" y="2888865"/>
-                  </a:lnTo>
-                  <a:lnTo>
-                    <a:pt x="4659226" y="2896628"/>
-                  </a:lnTo>
-                  <a:lnTo>
-                    <a:pt x="4730849" y="2904291"/>
-                  </a:lnTo>
-                  <a:lnTo>
-                    <a:pt x="4802471" y="2911853"/>
-                  </a:lnTo>
-                  <a:lnTo>
-                    <a:pt x="4874094" y="2919317"/>
-                  </a:lnTo>
-                  <a:lnTo>
-                    <a:pt x="4945716" y="2926683"/>
-                  </a:lnTo>
-                  <a:lnTo>
-                    <a:pt x="5017339" y="2933954"/>
-                  </a:lnTo>
-                  <a:lnTo>
-                    <a:pt x="5088961" y="2941129"/>
-                  </a:lnTo>
-                  <a:lnTo>
-                    <a:pt x="5160584" y="2948211"/>
-                  </a:lnTo>
-                  <a:lnTo>
-                    <a:pt x="5232206" y="2955200"/>
-                  </a:lnTo>
-                  <a:lnTo>
-                    <a:pt x="5303829" y="2962098"/>
-                  </a:lnTo>
-                  <a:lnTo>
-                    <a:pt x="5375451" y="2968906"/>
-                  </a:lnTo>
-                  <a:lnTo>
-                    <a:pt x="5447074" y="2975625"/>
-                  </a:lnTo>
-                  <a:lnTo>
-                    <a:pt x="5518697" y="2982257"/>
-                  </a:lnTo>
-                  <a:lnTo>
-                    <a:pt x="5590319" y="2988802"/>
-                  </a:lnTo>
-                  <a:lnTo>
-                    <a:pt x="5661942" y="2995261"/>
-                  </a:lnTo>
-                  <a:lnTo>
-                    <a:pt x="5733564" y="3001636"/>
-                  </a:lnTo>
-                  <a:lnTo>
-                    <a:pt x="5805187" y="3007928"/>
-                  </a:lnTo>
-                  <a:lnTo>
-                    <a:pt x="5876809" y="3014138"/>
-                  </a:lnTo>
-                  <a:lnTo>
-                    <a:pt x="5948432" y="3020267"/>
-                  </a:lnTo>
-                  <a:lnTo>
-                    <a:pt x="6020054" y="3026316"/>
-                  </a:lnTo>
-                  <a:lnTo>
-                    <a:pt x="6091677" y="3032286"/>
-                  </a:lnTo>
-                  <a:lnTo>
-                    <a:pt x="6163299" y="3038178"/>
-                  </a:lnTo>
-                  <a:lnTo>
-                    <a:pt x="6234922" y="3043993"/>
-                  </a:lnTo>
-                  <a:lnTo>
-                    <a:pt x="6306544" y="3049732"/>
-                  </a:lnTo>
-                  <a:lnTo>
-                    <a:pt x="6378167" y="3055396"/>
-                  </a:lnTo>
-                  <a:lnTo>
-                    <a:pt x="6449789" y="3060987"/>
-                  </a:lnTo>
-                </a:path>
-              </a:pathLst>
-            </a:custGeom>
-          </p:spPr>
-          <p:txBody>
-            <a:bodyPr/>
-            <a:lstStyle/>
-            <a:p/>
-          </p:txBody>
-        </p:sp>
-        <p:sp>
-          <p:nvSpPr>
             <p:cNvPr id="22" name="pl22"/>
             <p:cNvSpPr/>
             <p:nvPr/>
           </p:nvSpPr>
           <p:spPr>
             <a:xfrm>
-              <a:off x="1172049" y="4005164"/>
-              <a:ext cx="7090630" cy="1428029"/>
+              <a:off x="1864717" y="2143092"/>
+              <a:ext cx="6334699" cy="1104638"/>
             </a:xfrm>
             <a:custGeom>
               <a:avLst/>
               <a:pathLst>
-                <a:path w="7090630" h="1428029">
+                <a:path w="6334699" h="1104638">
                   <a:moveTo>
-                    <a:pt x="7090630" y="1428029"/>
+                    <a:pt x="0" y="0"/>
                   </a:moveTo>
                   <a:lnTo>
-                    <a:pt x="7019007" y="1423348"/>
-                  </a:lnTo>
-                  <a:lnTo>
-                    <a:pt x="6947385" y="1418491"/>
-                  </a:lnTo>
-                  <a:lnTo>
-                    <a:pt x="6875762" y="1413451"/>
-                  </a:lnTo>
-                  <a:lnTo>
-                    <a:pt x="6804139" y="1408220"/>
-                  </a:lnTo>
-                  <a:lnTo>
-                    <a:pt x="6732517" y="1402792"/>
-                  </a:lnTo>
-                  <a:lnTo>
-                    <a:pt x="6660894" y="1397160"/>
-                  </a:lnTo>
-                  <a:lnTo>
-                    <a:pt x="6589272" y="1391314"/>
-                  </a:lnTo>
-                  <a:lnTo>
-                    <a:pt x="6517649" y="1385249"/>
-                  </a:lnTo>
-                  <a:lnTo>
-                    <a:pt x="6446027" y="1378954"/>
-                  </a:lnTo>
-                  <a:lnTo>
-                    <a:pt x="6374404" y="1372422"/>
-                  </a:lnTo>
-                  <a:lnTo>
-                    <a:pt x="6302782" y="1365643"/>
-                  </a:lnTo>
-                  <a:lnTo>
-                    <a:pt x="6231159" y="1358609"/>
-                  </a:lnTo>
-                  <a:lnTo>
-                    <a:pt x="6159537" y="1351309"/>
-                  </a:lnTo>
-                  <a:lnTo>
-                    <a:pt x="6087914" y="1343734"/>
-                  </a:lnTo>
-                  <a:lnTo>
-                    <a:pt x="6016292" y="1335873"/>
-                  </a:lnTo>
-                  <a:lnTo>
-                    <a:pt x="5944669" y="1327716"/>
-                  </a:lnTo>
-                  <a:lnTo>
-                    <a:pt x="5873047" y="1319250"/>
-                  </a:lnTo>
-                  <a:lnTo>
-                    <a:pt x="5801424" y="1310466"/>
-                  </a:lnTo>
-                  <a:lnTo>
-                    <a:pt x="5729802" y="1301350"/>
-                  </a:lnTo>
-                  <a:lnTo>
-                    <a:pt x="5658179" y="1291890"/>
-                  </a:lnTo>
-                  <a:lnTo>
-                    <a:pt x="5586557" y="1282073"/>
-                  </a:lnTo>
-                  <a:lnTo>
-                    <a:pt x="5514934" y="1271885"/>
-                  </a:lnTo>
-                  <a:lnTo>
-                    <a:pt x="5443311" y="1261313"/>
-                  </a:lnTo>
-                  <a:lnTo>
-                    <a:pt x="5371689" y="1250343"/>
-                  </a:lnTo>
-                  <a:lnTo>
-                    <a:pt x="5300066" y="1238958"/>
-                  </a:lnTo>
-                  <a:lnTo>
-                    <a:pt x="5228444" y="1227144"/>
-                  </a:lnTo>
-                  <a:lnTo>
-                    <a:pt x="5156821" y="1214884"/>
-                  </a:lnTo>
-                  <a:lnTo>
-                    <a:pt x="5085199" y="1202162"/>
-                  </a:lnTo>
-                  <a:lnTo>
-                    <a:pt x="5013576" y="1188960"/>
-                  </a:lnTo>
-                  <a:lnTo>
-                    <a:pt x="4941954" y="1175259"/>
-                  </a:lnTo>
-                  <a:lnTo>
-                    <a:pt x="4870331" y="1161042"/>
-                  </a:lnTo>
-                  <a:lnTo>
-                    <a:pt x="4798709" y="1146288"/>
-                  </a:lnTo>
-                  <a:lnTo>
-                    <a:pt x="4727086" y="1130978"/>
-                  </a:lnTo>
-                  <a:lnTo>
-                    <a:pt x="4655464" y="1115090"/>
-                  </a:lnTo>
-                  <a:lnTo>
-                    <a:pt x="4583841" y="1098602"/>
-                  </a:lnTo>
-                  <a:lnTo>
-                    <a:pt x="4512219" y="1081492"/>
-                  </a:lnTo>
-                  <a:lnTo>
-                    <a:pt x="4440596" y="1063737"/>
-                  </a:lnTo>
-                  <a:lnTo>
-                    <a:pt x="4368974" y="1045312"/>
-                  </a:lnTo>
-                  <a:lnTo>
-                    <a:pt x="4297351" y="1026192"/>
-                  </a:lnTo>
-                  <a:lnTo>
-                    <a:pt x="4225729" y="1006350"/>
-                  </a:lnTo>
-                  <a:lnTo>
-                    <a:pt x="4154106" y="985760"/>
-                  </a:lnTo>
-                  <a:lnTo>
-                    <a:pt x="4082483" y="964393"/>
-                  </a:lnTo>
-                  <a:lnTo>
-                    <a:pt x="4010861" y="942220"/>
-                  </a:lnTo>
-                  <a:lnTo>
-                    <a:pt x="3939238" y="919210"/>
-                  </a:lnTo>
-                  <a:lnTo>
-                    <a:pt x="3867616" y="895332"/>
-                  </a:lnTo>
-                  <a:lnTo>
-                    <a:pt x="3795993" y="870553"/>
-                  </a:lnTo>
-                  <a:lnTo>
-                    <a:pt x="3724371" y="844839"/>
-                  </a:lnTo>
-                  <a:lnTo>
-                    <a:pt x="3652748" y="818156"/>
-                  </a:lnTo>
-                  <a:lnTo>
-                    <a:pt x="3581126" y="790465"/>
-                  </a:lnTo>
-                  <a:lnTo>
-                    <a:pt x="3509503" y="761729"/>
-                  </a:lnTo>
-                  <a:lnTo>
-                    <a:pt x="3437881" y="731910"/>
-                  </a:lnTo>
-                  <a:lnTo>
-                    <a:pt x="3366258" y="715003"/>
-                  </a:lnTo>
-                  <a:lnTo>
-                    <a:pt x="3294636" y="703934"/>
-                  </a:lnTo>
-                  <a:lnTo>
-                    <a:pt x="3223013" y="692718"/>
-                  </a:lnTo>
-                  <a:lnTo>
-                    <a:pt x="3151391" y="681355"/>
-                  </a:lnTo>
-                  <a:lnTo>
-                    <a:pt x="3079768" y="669840"/>
-                  </a:lnTo>
-                  <a:lnTo>
-                    <a:pt x="3008146" y="658174"/>
-                  </a:lnTo>
-                  <a:lnTo>
-                    <a:pt x="2936523" y="646353"/>
-                  </a:lnTo>
-                  <a:lnTo>
-                    <a:pt x="2864901" y="634376"/>
-                  </a:lnTo>
-                  <a:lnTo>
-                    <a:pt x="2793278" y="622241"/>
-                  </a:lnTo>
-                  <a:lnTo>
-                    <a:pt x="2721655" y="609945"/>
-                  </a:lnTo>
-                  <a:lnTo>
-                    <a:pt x="2650033" y="597487"/>
-                  </a:lnTo>
-                  <a:lnTo>
-                    <a:pt x="2578410" y="584864"/>
-                  </a:lnTo>
-                  <a:lnTo>
-                    <a:pt x="2506788" y="572074"/>
-                  </a:lnTo>
-                  <a:lnTo>
-                    <a:pt x="2435165" y="559114"/>
-                  </a:lnTo>
-                  <a:lnTo>
-                    <a:pt x="2363543" y="545984"/>
-                  </a:lnTo>
-                  <a:lnTo>
-                    <a:pt x="2291920" y="532680"/>
-                  </a:lnTo>
-                  <a:lnTo>
-                    <a:pt x="2220298" y="519199"/>
-                  </a:lnTo>
-                  <a:lnTo>
-                    <a:pt x="2148675" y="505541"/>
-                  </a:lnTo>
-                  <a:lnTo>
-                    <a:pt x="2077053" y="491702"/>
-                  </a:lnTo>
-                  <a:lnTo>
-                    <a:pt x="2005430" y="477680"/>
-                  </a:lnTo>
-                  <a:lnTo>
-                    <a:pt x="1933808" y="463473"/>
-                  </a:lnTo>
-                  <a:lnTo>
-                    <a:pt x="1862185" y="449077"/>
-                  </a:lnTo>
-                  <a:lnTo>
-                    <a:pt x="1790563" y="434492"/>
-                  </a:lnTo>
-                  <a:lnTo>
-                    <a:pt x="1718940" y="419713"/>
-                  </a:lnTo>
-                  <a:lnTo>
-                    <a:pt x="1647318" y="404739"/>
-                  </a:lnTo>
-                  <a:lnTo>
-                    <a:pt x="1575695" y="389567"/>
-                  </a:lnTo>
-                  <a:lnTo>
-                    <a:pt x="1504073" y="374194"/>
-                  </a:lnTo>
-                  <a:lnTo>
-                    <a:pt x="1432450" y="358619"/>
-                  </a:lnTo>
-                  <a:lnTo>
-                    <a:pt x="1360827" y="342837"/>
-                  </a:lnTo>
-                  <a:lnTo>
-                    <a:pt x="1289205" y="326846"/>
-                  </a:lnTo>
-                  <a:lnTo>
-                    <a:pt x="1217582" y="310644"/>
-                  </a:lnTo>
-                  <a:lnTo>
-                    <a:pt x="1145960" y="294228"/>
-                  </a:lnTo>
-                  <a:lnTo>
-                    <a:pt x="1074337" y="277595"/>
-                  </a:lnTo>
-                  <a:lnTo>
-                    <a:pt x="1002715" y="260741"/>
-                  </a:lnTo>
-                  <a:lnTo>
-                    <a:pt x="931092" y="243665"/>
-                  </a:lnTo>
-                  <a:lnTo>
-                    <a:pt x="859470" y="226363"/>
-                  </a:lnTo>
-                  <a:lnTo>
-                    <a:pt x="787847" y="208833"/>
-                  </a:lnTo>
-                  <a:lnTo>
-                    <a:pt x="716225" y="191070"/>
-                  </a:lnTo>
-                  <a:lnTo>
-                    <a:pt x="644602" y="173073"/>
-                  </a:lnTo>
-                  <a:lnTo>
-                    <a:pt x="572980" y="154837"/>
-                  </a:lnTo>
-                  <a:lnTo>
-                    <a:pt x="501357" y="136361"/>
-                  </a:lnTo>
-                  <a:lnTo>
-                    <a:pt x="429735" y="117640"/>
-                  </a:lnTo>
-                  <a:lnTo>
-                    <a:pt x="358112" y="98671"/>
-                  </a:lnTo>
-                  <a:lnTo>
-                    <a:pt x="286490" y="79452"/>
-                  </a:lnTo>
-                  <a:lnTo>
-                    <a:pt x="214867" y="59978"/>
-                  </a:lnTo>
-                  <a:lnTo>
-                    <a:pt x="143245" y="40248"/>
-                  </a:lnTo>
-                  <a:lnTo>
-                    <a:pt x="71622" y="20256"/>
-                  </a:lnTo>
-                  <a:lnTo>
-                    <a:pt x="0" y="0"/>
+                    <a:pt x="3695" y="2486"/>
+                  </a:lnTo>
+                  <a:lnTo>
+                    <a:pt x="74039" y="48105"/>
+                  </a:lnTo>
+                  <a:lnTo>
+                    <a:pt x="144384" y="92065"/>
+                  </a:lnTo>
+                  <a:lnTo>
+                    <a:pt x="214728" y="134426"/>
+                  </a:lnTo>
+                  <a:lnTo>
+                    <a:pt x="285073" y="175248"/>
+                  </a:lnTo>
+                  <a:lnTo>
+                    <a:pt x="355417" y="214585"/>
+                  </a:lnTo>
+                  <a:lnTo>
+                    <a:pt x="425762" y="252492"/>
+                  </a:lnTo>
+                  <a:lnTo>
+                    <a:pt x="496106" y="289021"/>
+                  </a:lnTo>
+                  <a:lnTo>
+                    <a:pt x="566451" y="324222"/>
+                  </a:lnTo>
+                  <a:lnTo>
+                    <a:pt x="636795" y="358143"/>
+                  </a:lnTo>
+                  <a:lnTo>
+                    <a:pt x="707140" y="390830"/>
+                  </a:lnTo>
+                  <a:lnTo>
+                    <a:pt x="777484" y="422330"/>
+                  </a:lnTo>
+                  <a:lnTo>
+                    <a:pt x="847829" y="452683"/>
+                  </a:lnTo>
+                  <a:lnTo>
+                    <a:pt x="918173" y="481934"/>
+                  </a:lnTo>
+                  <a:lnTo>
+                    <a:pt x="988518" y="510121"/>
+                  </a:lnTo>
+                  <a:lnTo>
+                    <a:pt x="1058862" y="537283"/>
+                  </a:lnTo>
+                  <a:lnTo>
+                    <a:pt x="1129207" y="563457"/>
+                  </a:lnTo>
+                  <a:lnTo>
+                    <a:pt x="1199551" y="588680"/>
+                  </a:lnTo>
+                  <a:lnTo>
+                    <a:pt x="1269896" y="612986"/>
+                  </a:lnTo>
+                  <a:lnTo>
+                    <a:pt x="1340240" y="636408"/>
+                  </a:lnTo>
+                  <a:lnTo>
+                    <a:pt x="1410585" y="658979"/>
+                  </a:lnTo>
+                  <a:lnTo>
+                    <a:pt x="1480929" y="680729"/>
+                  </a:lnTo>
+                  <a:lnTo>
+                    <a:pt x="1551274" y="701688"/>
+                  </a:lnTo>
+                  <a:lnTo>
+                    <a:pt x="1621618" y="721885"/>
+                  </a:lnTo>
+                  <a:lnTo>
+                    <a:pt x="1691963" y="741348"/>
+                  </a:lnTo>
+                  <a:lnTo>
+                    <a:pt x="1762307" y="760103"/>
+                  </a:lnTo>
+                  <a:lnTo>
+                    <a:pt x="1832652" y="778177"/>
+                  </a:lnTo>
+                  <a:lnTo>
+                    <a:pt x="1902996" y="795593"/>
+                  </a:lnTo>
+                  <a:lnTo>
+                    <a:pt x="1973341" y="812376"/>
+                  </a:lnTo>
+                  <a:lnTo>
+                    <a:pt x="2043685" y="828549"/>
+                  </a:lnTo>
+                  <a:lnTo>
+                    <a:pt x="2114030" y="844133"/>
+                  </a:lnTo>
+                  <a:lnTo>
+                    <a:pt x="2184374" y="859152"/>
+                  </a:lnTo>
+                  <a:lnTo>
+                    <a:pt x="2254719" y="873624"/>
+                  </a:lnTo>
+                  <a:lnTo>
+                    <a:pt x="2325063" y="887570"/>
+                  </a:lnTo>
+                  <a:lnTo>
+                    <a:pt x="2395408" y="901009"/>
+                  </a:lnTo>
+                  <a:lnTo>
+                    <a:pt x="2465752" y="913959"/>
+                  </a:lnTo>
+                  <a:lnTo>
+                    <a:pt x="2536097" y="926438"/>
+                  </a:lnTo>
+                  <a:lnTo>
+                    <a:pt x="2606441" y="938464"/>
+                  </a:lnTo>
+                  <a:lnTo>
+                    <a:pt x="2676786" y="950053"/>
+                  </a:lnTo>
+                  <a:lnTo>
+                    <a:pt x="2747130" y="959061"/>
+                  </a:lnTo>
+                  <a:lnTo>
+                    <a:pt x="2817474" y="962952"/>
+                  </a:lnTo>
+                  <a:lnTo>
+                    <a:pt x="2887819" y="966793"/>
+                  </a:lnTo>
+                  <a:lnTo>
+                    <a:pt x="2958163" y="970583"/>
+                  </a:lnTo>
+                  <a:lnTo>
+                    <a:pt x="3028508" y="974323"/>
+                  </a:lnTo>
+                  <a:lnTo>
+                    <a:pt x="3098852" y="978015"/>
+                  </a:lnTo>
+                  <a:lnTo>
+                    <a:pt x="3169197" y="981659"/>
+                  </a:lnTo>
+                  <a:lnTo>
+                    <a:pt x="3239541" y="985255"/>
+                  </a:lnTo>
+                  <a:lnTo>
+                    <a:pt x="3309886" y="988804"/>
+                  </a:lnTo>
+                  <a:lnTo>
+                    <a:pt x="3380230" y="992307"/>
+                  </a:lnTo>
+                  <a:lnTo>
+                    <a:pt x="3450575" y="995764"/>
+                  </a:lnTo>
+                  <a:lnTo>
+                    <a:pt x="3520919" y="999176"/>
+                  </a:lnTo>
+                  <a:lnTo>
+                    <a:pt x="3591264" y="1002544"/>
+                  </a:lnTo>
+                  <a:lnTo>
+                    <a:pt x="3661608" y="1005867"/>
+                  </a:lnTo>
+                  <a:lnTo>
+                    <a:pt x="3731953" y="1009147"/>
+                  </a:lnTo>
+                  <a:lnTo>
+                    <a:pt x="3802297" y="1012385"/>
+                  </a:lnTo>
+                  <a:lnTo>
+                    <a:pt x="3872642" y="1015580"/>
+                  </a:lnTo>
+                  <a:lnTo>
+                    <a:pt x="3942986" y="1018733"/>
+                  </a:lnTo>
+                  <a:lnTo>
+                    <a:pt x="4013331" y="1021845"/>
+                  </a:lnTo>
+                  <a:lnTo>
+                    <a:pt x="4083675" y="1024917"/>
+                  </a:lnTo>
+                  <a:lnTo>
+                    <a:pt x="4154020" y="1027949"/>
+                  </a:lnTo>
+                  <a:lnTo>
+                    <a:pt x="4224364" y="1030940"/>
+                  </a:lnTo>
+                  <a:lnTo>
+                    <a:pt x="4294709" y="1033893"/>
+                  </a:lnTo>
+                  <a:lnTo>
+                    <a:pt x="4365053" y="1036808"/>
+                  </a:lnTo>
+                  <a:lnTo>
+                    <a:pt x="4435398" y="1039684"/>
+                  </a:lnTo>
+                  <a:lnTo>
+                    <a:pt x="4505742" y="1042523"/>
+                  </a:lnTo>
+                  <a:lnTo>
+                    <a:pt x="4576087" y="1045325"/>
+                  </a:lnTo>
+                  <a:lnTo>
+                    <a:pt x="4646431" y="1048090"/>
+                  </a:lnTo>
+                  <a:lnTo>
+                    <a:pt x="4716776" y="1050819"/>
+                  </a:lnTo>
+                  <a:lnTo>
+                    <a:pt x="4787120" y="1053513"/>
+                  </a:lnTo>
+                  <a:lnTo>
+                    <a:pt x="4857465" y="1056171"/>
+                  </a:lnTo>
+                  <a:lnTo>
+                    <a:pt x="4927809" y="1058795"/>
+                  </a:lnTo>
+                  <a:lnTo>
+                    <a:pt x="4998154" y="1061384"/>
+                  </a:lnTo>
+                  <a:lnTo>
+                    <a:pt x="5068498" y="1063940"/>
+                  </a:lnTo>
+                  <a:lnTo>
+                    <a:pt x="5138843" y="1066462"/>
+                  </a:lnTo>
+                  <a:lnTo>
+                    <a:pt x="5209187" y="1068951"/>
+                  </a:lnTo>
+                  <a:lnTo>
+                    <a:pt x="5279532" y="1071408"/>
+                  </a:lnTo>
+                  <a:lnTo>
+                    <a:pt x="5349876" y="1073833"/>
+                  </a:lnTo>
+                  <a:lnTo>
+                    <a:pt x="5420221" y="1076226"/>
+                  </a:lnTo>
+                  <a:lnTo>
+                    <a:pt x="5490565" y="1078588"/>
+                  </a:lnTo>
+                  <a:lnTo>
+                    <a:pt x="5560910" y="1080919"/>
+                  </a:lnTo>
+                  <a:lnTo>
+                    <a:pt x="5631254" y="1083220"/>
+                  </a:lnTo>
+                  <a:lnTo>
+                    <a:pt x="5701599" y="1085490"/>
+                  </a:lnTo>
+                  <a:lnTo>
+                    <a:pt x="5771943" y="1087731"/>
+                  </a:lnTo>
+                  <a:lnTo>
+                    <a:pt x="5842288" y="1089943"/>
+                  </a:lnTo>
+                  <a:lnTo>
+                    <a:pt x="5912632" y="1092126"/>
+                  </a:lnTo>
+                  <a:lnTo>
+                    <a:pt x="5982977" y="1094280"/>
+                  </a:lnTo>
+                  <a:lnTo>
+                    <a:pt x="6053321" y="1096407"/>
+                  </a:lnTo>
+                  <a:lnTo>
+                    <a:pt x="6123666" y="1098505"/>
+                  </a:lnTo>
+                  <a:lnTo>
+                    <a:pt x="6194010" y="1100576"/>
+                  </a:lnTo>
+                  <a:lnTo>
+                    <a:pt x="6264355" y="1102620"/>
+                  </a:lnTo>
+                  <a:lnTo>
+                    <a:pt x="6334699" y="1104638"/>
                   </a:lnTo>
                 </a:path>
               </a:pathLst>
@@ -4192,312 +3902,637 @@
           </p:nvSpPr>
           <p:spPr>
             <a:xfrm>
-              <a:off x="1172049" y="2812962"/>
-              <a:ext cx="7090630" cy="2515277"/>
+              <a:off x="1235312" y="2840183"/>
+              <a:ext cx="6964104" cy="515342"/>
             </a:xfrm>
             <a:custGeom>
               <a:avLst/>
               <a:pathLst>
-                <a:path w="7090630" h="2515277">
+                <a:path w="6964104" h="515342">
+                  <a:moveTo>
+                    <a:pt x="6964104" y="515342"/>
+                  </a:moveTo>
+                  <a:lnTo>
+                    <a:pt x="6893760" y="513653"/>
+                  </a:lnTo>
+                  <a:lnTo>
+                    <a:pt x="6823415" y="511900"/>
+                  </a:lnTo>
+                  <a:lnTo>
+                    <a:pt x="6753071" y="510081"/>
+                  </a:lnTo>
+                  <a:lnTo>
+                    <a:pt x="6682726" y="508193"/>
+                  </a:lnTo>
+                  <a:lnTo>
+                    <a:pt x="6612382" y="506234"/>
+                  </a:lnTo>
+                  <a:lnTo>
+                    <a:pt x="6542037" y="504202"/>
+                  </a:lnTo>
+                  <a:lnTo>
+                    <a:pt x="6471693" y="502092"/>
+                  </a:lnTo>
+                  <a:lnTo>
+                    <a:pt x="6401348" y="499903"/>
+                  </a:lnTo>
+                  <a:lnTo>
+                    <a:pt x="6331004" y="497632"/>
+                  </a:lnTo>
+                  <a:lnTo>
+                    <a:pt x="6260659" y="495274"/>
+                  </a:lnTo>
+                  <a:lnTo>
+                    <a:pt x="6190315" y="492828"/>
+                  </a:lnTo>
+                  <a:lnTo>
+                    <a:pt x="6119970" y="490290"/>
+                  </a:lnTo>
+                  <a:lnTo>
+                    <a:pt x="6049626" y="487655"/>
+                  </a:lnTo>
+                  <a:lnTo>
+                    <a:pt x="5979281" y="484922"/>
+                  </a:lnTo>
+                  <a:lnTo>
+                    <a:pt x="5908937" y="482085"/>
+                  </a:lnTo>
+                  <a:lnTo>
+                    <a:pt x="5838592" y="479141"/>
+                  </a:lnTo>
+                  <a:lnTo>
+                    <a:pt x="5768248" y="476086"/>
+                  </a:lnTo>
+                  <a:lnTo>
+                    <a:pt x="5697903" y="472916"/>
+                  </a:lnTo>
+                  <a:lnTo>
+                    <a:pt x="5627559" y="469626"/>
+                  </a:lnTo>
+                  <a:lnTo>
+                    <a:pt x="5557214" y="466212"/>
+                  </a:lnTo>
+                  <a:lnTo>
+                    <a:pt x="5486870" y="462670"/>
+                  </a:lnTo>
+                  <a:lnTo>
+                    <a:pt x="5416525" y="458993"/>
+                  </a:lnTo>
+                  <a:lnTo>
+                    <a:pt x="5346181" y="455178"/>
+                  </a:lnTo>
+                  <a:lnTo>
+                    <a:pt x="5275836" y="451219"/>
+                  </a:lnTo>
+                  <a:lnTo>
+                    <a:pt x="5205492" y="447111"/>
+                  </a:lnTo>
+                  <a:lnTo>
+                    <a:pt x="5135147" y="442847"/>
+                  </a:lnTo>
+                  <a:lnTo>
+                    <a:pt x="5064803" y="438423"/>
+                  </a:lnTo>
+                  <a:lnTo>
+                    <a:pt x="4994458" y="433832"/>
+                  </a:lnTo>
+                  <a:lnTo>
+                    <a:pt x="4924114" y="429067"/>
+                  </a:lnTo>
+                  <a:lnTo>
+                    <a:pt x="4853769" y="424123"/>
+                  </a:lnTo>
+                  <a:lnTo>
+                    <a:pt x="4783425" y="418992"/>
+                  </a:lnTo>
+                  <a:lnTo>
+                    <a:pt x="4713080" y="413668"/>
+                  </a:lnTo>
+                  <a:lnTo>
+                    <a:pt x="4642736" y="408143"/>
+                  </a:lnTo>
+                  <a:lnTo>
+                    <a:pt x="4572391" y="402409"/>
+                  </a:lnTo>
+                  <a:lnTo>
+                    <a:pt x="4502047" y="396459"/>
+                  </a:lnTo>
+                  <a:lnTo>
+                    <a:pt x="4431702" y="390285"/>
+                  </a:lnTo>
+                  <a:lnTo>
+                    <a:pt x="4361358" y="383877"/>
+                  </a:lnTo>
+                  <a:lnTo>
+                    <a:pt x="4291013" y="377228"/>
+                  </a:lnTo>
+                  <a:lnTo>
+                    <a:pt x="4220669" y="370328"/>
+                  </a:lnTo>
+                  <a:lnTo>
+                    <a:pt x="4150324" y="363168"/>
+                  </a:lnTo>
+                  <a:lnTo>
+                    <a:pt x="4079980" y="355737"/>
+                  </a:lnTo>
+                  <a:lnTo>
+                    <a:pt x="4009635" y="348026"/>
+                  </a:lnTo>
+                  <a:lnTo>
+                    <a:pt x="3939291" y="340025"/>
+                  </a:lnTo>
+                  <a:lnTo>
+                    <a:pt x="3868946" y="331721"/>
+                  </a:lnTo>
+                  <a:lnTo>
+                    <a:pt x="3798602" y="323104"/>
+                  </a:lnTo>
+                  <a:lnTo>
+                    <a:pt x="3728257" y="314162"/>
+                  </a:lnTo>
+                  <a:lnTo>
+                    <a:pt x="3657913" y="304882"/>
+                  </a:lnTo>
+                  <a:lnTo>
+                    <a:pt x="3587569" y="295253"/>
+                  </a:lnTo>
+                  <a:lnTo>
+                    <a:pt x="3517224" y="285260"/>
+                  </a:lnTo>
+                  <a:lnTo>
+                    <a:pt x="3446880" y="274890"/>
+                  </a:lnTo>
+                  <a:lnTo>
+                    <a:pt x="3376535" y="264129"/>
+                  </a:lnTo>
+                  <a:lnTo>
+                    <a:pt x="3306191" y="258028"/>
+                  </a:lnTo>
+                  <a:lnTo>
+                    <a:pt x="3235846" y="254033"/>
+                  </a:lnTo>
+                  <a:lnTo>
+                    <a:pt x="3165502" y="249985"/>
+                  </a:lnTo>
+                  <a:lnTo>
+                    <a:pt x="3095157" y="245885"/>
+                  </a:lnTo>
+                  <a:lnTo>
+                    <a:pt x="3024813" y="241729"/>
+                  </a:lnTo>
+                  <a:lnTo>
+                    <a:pt x="2954468" y="237519"/>
+                  </a:lnTo>
+                  <a:lnTo>
+                    <a:pt x="2884124" y="233253"/>
+                  </a:lnTo>
+                  <a:lnTo>
+                    <a:pt x="2813779" y="228931"/>
+                  </a:lnTo>
+                  <a:lnTo>
+                    <a:pt x="2743435" y="224552"/>
+                  </a:lnTo>
+                  <a:lnTo>
+                    <a:pt x="2673090" y="220115"/>
+                  </a:lnTo>
+                  <a:lnTo>
+                    <a:pt x="2602746" y="215619"/>
+                  </a:lnTo>
+                  <a:lnTo>
+                    <a:pt x="2532401" y="211063"/>
+                  </a:lnTo>
+                  <a:lnTo>
+                    <a:pt x="2462057" y="206448"/>
+                  </a:lnTo>
+                  <a:lnTo>
+                    <a:pt x="2391712" y="201771"/>
+                  </a:lnTo>
+                  <a:lnTo>
+                    <a:pt x="2321368" y="197032"/>
+                  </a:lnTo>
+                  <a:lnTo>
+                    <a:pt x="2251023" y="192231"/>
+                  </a:lnTo>
+                  <a:lnTo>
+                    <a:pt x="2180679" y="187367"/>
+                  </a:lnTo>
+                  <a:lnTo>
+                    <a:pt x="2110334" y="182438"/>
+                  </a:lnTo>
+                  <a:lnTo>
+                    <a:pt x="2039990" y="177443"/>
+                  </a:lnTo>
+                  <a:lnTo>
+                    <a:pt x="1969645" y="172383"/>
+                  </a:lnTo>
+                  <a:lnTo>
+                    <a:pt x="1899301" y="167256"/>
+                  </a:lnTo>
+                  <a:lnTo>
+                    <a:pt x="1828956" y="162061"/>
+                  </a:lnTo>
+                  <a:lnTo>
+                    <a:pt x="1758612" y="156797"/>
+                  </a:lnTo>
+                  <a:lnTo>
+                    <a:pt x="1688267" y="151464"/>
+                  </a:lnTo>
+                  <a:lnTo>
+                    <a:pt x="1617923" y="146060"/>
+                  </a:lnTo>
+                  <a:lnTo>
+                    <a:pt x="1547578" y="140585"/>
+                  </a:lnTo>
+                  <a:lnTo>
+                    <a:pt x="1477234" y="135038"/>
+                  </a:lnTo>
+                  <a:lnTo>
+                    <a:pt x="1406889" y="129417"/>
+                  </a:lnTo>
+                  <a:lnTo>
+                    <a:pt x="1336545" y="123721"/>
+                  </a:lnTo>
+                  <a:lnTo>
+                    <a:pt x="1266200" y="117951"/>
+                  </a:lnTo>
+                  <a:lnTo>
+                    <a:pt x="1195856" y="112104"/>
+                  </a:lnTo>
+                  <a:lnTo>
+                    <a:pt x="1125511" y="106180"/>
+                  </a:lnTo>
+                  <a:lnTo>
+                    <a:pt x="1055167" y="100177"/>
+                  </a:lnTo>
+                  <a:lnTo>
+                    <a:pt x="984822" y="94095"/>
+                  </a:lnTo>
+                  <a:lnTo>
+                    <a:pt x="914478" y="87933"/>
+                  </a:lnTo>
+                  <a:lnTo>
+                    <a:pt x="844133" y="81689"/>
+                  </a:lnTo>
+                  <a:lnTo>
+                    <a:pt x="773789" y="75362"/>
+                  </a:lnTo>
+                  <a:lnTo>
+                    <a:pt x="703444" y="68952"/>
+                  </a:lnTo>
+                  <a:lnTo>
+                    <a:pt x="633100" y="62457"/>
+                  </a:lnTo>
+                  <a:lnTo>
+                    <a:pt x="562755" y="55877"/>
+                  </a:lnTo>
+                  <a:lnTo>
+                    <a:pt x="492411" y="49209"/>
+                  </a:lnTo>
+                  <a:lnTo>
+                    <a:pt x="422066" y="42453"/>
+                  </a:lnTo>
+                  <a:lnTo>
+                    <a:pt x="351722" y="35608"/>
+                  </a:lnTo>
+                  <a:lnTo>
+                    <a:pt x="281377" y="28672"/>
+                  </a:lnTo>
+                  <a:lnTo>
+                    <a:pt x="211033" y="21645"/>
+                  </a:lnTo>
+                  <a:lnTo>
+                    <a:pt x="140688" y="14524"/>
+                  </a:lnTo>
+                  <a:lnTo>
+                    <a:pt x="70344" y="7309"/>
+                  </a:lnTo>
+                  <a:lnTo>
+                    <a:pt x="0" y="0"/>
+                  </a:lnTo>
+                </a:path>
+              </a:pathLst>
+            </a:custGeom>
+          </p:spPr>
+          <p:txBody>
+            <a:bodyPr/>
+            <a:lstStyle/>
+            <a:p/>
+          </p:txBody>
+        </p:sp>
+        <p:sp>
+          <p:nvSpPr>
+            <p:cNvPr id="24" name="pl24"/>
+            <p:cNvSpPr/>
+            <p:nvPr/>
+          </p:nvSpPr>
+          <p:spPr>
+            <a:xfrm>
+              <a:off x="1235312" y="2409945"/>
+              <a:ext cx="6964104" cy="907704"/>
+            </a:xfrm>
+            <a:custGeom>
+              <a:avLst/>
+              <a:pathLst>
+                <a:path w="6964104" h="907704">
                   <a:moveTo>
                     <a:pt x="0" y="0"/>
                   </a:moveTo>
                   <a:lnTo>
-                    <a:pt x="71622" y="67986"/>
-                  </a:lnTo>
-                  <a:lnTo>
-                    <a:pt x="143245" y="134289"/>
-                  </a:lnTo>
-                  <a:lnTo>
-                    <a:pt x="214867" y="198949"/>
-                  </a:lnTo>
-                  <a:lnTo>
-                    <a:pt x="286490" y="262007"/>
-                  </a:lnTo>
-                  <a:lnTo>
-                    <a:pt x="358112" y="323502"/>
-                  </a:lnTo>
-                  <a:lnTo>
-                    <a:pt x="429735" y="383475"/>
-                  </a:lnTo>
-                  <a:lnTo>
-                    <a:pt x="501357" y="441961"/>
-                  </a:lnTo>
-                  <a:lnTo>
-                    <a:pt x="572980" y="498999"/>
-                  </a:lnTo>
-                  <a:lnTo>
-                    <a:pt x="644602" y="554623"/>
-                  </a:lnTo>
-                  <a:lnTo>
-                    <a:pt x="716225" y="608870"/>
-                  </a:lnTo>
-                  <a:lnTo>
-                    <a:pt x="787847" y="661773"/>
-                  </a:lnTo>
-                  <a:lnTo>
-                    <a:pt x="859470" y="713365"/>
-                  </a:lnTo>
-                  <a:lnTo>
-                    <a:pt x="931092" y="763679"/>
-                  </a:lnTo>
-                  <a:lnTo>
-                    <a:pt x="1002715" y="812746"/>
-                  </a:lnTo>
-                  <a:lnTo>
-                    <a:pt x="1074337" y="860598"/>
-                  </a:lnTo>
-                  <a:lnTo>
-                    <a:pt x="1145960" y="907264"/>
-                  </a:lnTo>
-                  <a:lnTo>
-                    <a:pt x="1217582" y="952774"/>
-                  </a:lnTo>
-                  <a:lnTo>
-                    <a:pt x="1289205" y="997157"/>
-                  </a:lnTo>
-                  <a:lnTo>
-                    <a:pt x="1360827" y="1040440"/>
-                  </a:lnTo>
-                  <a:lnTo>
-                    <a:pt x="1432450" y="1082651"/>
-                  </a:lnTo>
-                  <a:lnTo>
-                    <a:pt x="1504073" y="1123817"/>
-                  </a:lnTo>
-                  <a:lnTo>
-                    <a:pt x="1575695" y="1163962"/>
-                  </a:lnTo>
-                  <a:lnTo>
-                    <a:pt x="1647318" y="1203113"/>
-                  </a:lnTo>
-                  <a:lnTo>
-                    <a:pt x="1718940" y="1241294"/>
-                  </a:lnTo>
-                  <a:lnTo>
-                    <a:pt x="1790563" y="1278529"/>
-                  </a:lnTo>
-                  <a:lnTo>
-                    <a:pt x="1862185" y="1314841"/>
-                  </a:lnTo>
-                  <a:lnTo>
-                    <a:pt x="1933808" y="1350254"/>
-                  </a:lnTo>
-                  <a:lnTo>
-                    <a:pt x="2005430" y="1384790"/>
-                  </a:lnTo>
-                  <a:lnTo>
-                    <a:pt x="2077053" y="1418470"/>
-                  </a:lnTo>
-                  <a:lnTo>
-                    <a:pt x="2148675" y="1451316"/>
-                  </a:lnTo>
-                  <a:lnTo>
-                    <a:pt x="2220298" y="1483348"/>
-                  </a:lnTo>
-                  <a:lnTo>
-                    <a:pt x="2291920" y="1514586"/>
-                  </a:lnTo>
-                  <a:lnTo>
-                    <a:pt x="2363543" y="1545051"/>
-                  </a:lnTo>
-                  <a:lnTo>
-                    <a:pt x="2435165" y="1574760"/>
-                  </a:lnTo>
-                  <a:lnTo>
-                    <a:pt x="2506788" y="1603734"/>
-                  </a:lnTo>
-                  <a:lnTo>
-                    <a:pt x="2578410" y="1631990"/>
-                  </a:lnTo>
-                  <a:lnTo>
-                    <a:pt x="2650033" y="1659546"/>
-                  </a:lnTo>
-                  <a:lnTo>
-                    <a:pt x="2721655" y="1686419"/>
-                  </a:lnTo>
-                  <a:lnTo>
-                    <a:pt x="2793278" y="1712627"/>
-                  </a:lnTo>
-                  <a:lnTo>
-                    <a:pt x="2864901" y="1738185"/>
-                  </a:lnTo>
-                  <a:lnTo>
-                    <a:pt x="2936523" y="1763110"/>
-                  </a:lnTo>
-                  <a:lnTo>
-                    <a:pt x="3008146" y="1787418"/>
-                  </a:lnTo>
-                  <a:lnTo>
-                    <a:pt x="3079768" y="1811123"/>
-                  </a:lnTo>
-                  <a:lnTo>
-                    <a:pt x="3151391" y="1834241"/>
-                  </a:lnTo>
-                  <a:lnTo>
-                    <a:pt x="3223013" y="1856787"/>
-                  </a:lnTo>
-                  <a:lnTo>
-                    <a:pt x="3294636" y="1878773"/>
-                  </a:lnTo>
-                  <a:lnTo>
-                    <a:pt x="3366258" y="1900216"/>
-                  </a:lnTo>
-                  <a:lnTo>
-                    <a:pt x="3437881" y="1921127"/>
-                  </a:lnTo>
-                  <a:lnTo>
-                    <a:pt x="3509503" y="1941519"/>
-                  </a:lnTo>
-                  <a:lnTo>
-                    <a:pt x="3581126" y="1961407"/>
-                  </a:lnTo>
-                  <a:lnTo>
-                    <a:pt x="3652748" y="1980802"/>
-                  </a:lnTo>
-                  <a:lnTo>
-                    <a:pt x="3724371" y="1999717"/>
-                  </a:lnTo>
-                  <a:lnTo>
-                    <a:pt x="3795993" y="2018163"/>
-                  </a:lnTo>
-                  <a:lnTo>
-                    <a:pt x="3867616" y="2036152"/>
-                  </a:lnTo>
-                  <a:lnTo>
-                    <a:pt x="3939238" y="2053695"/>
-                  </a:lnTo>
-                  <a:lnTo>
-                    <a:pt x="4010861" y="2070804"/>
-                  </a:lnTo>
-                  <a:lnTo>
-                    <a:pt x="4082483" y="2087488"/>
-                  </a:lnTo>
-                  <a:lnTo>
-                    <a:pt x="4154106" y="2103760"/>
-                  </a:lnTo>
-                  <a:lnTo>
-                    <a:pt x="4225729" y="2119628"/>
-                  </a:lnTo>
-                  <a:lnTo>
-                    <a:pt x="4297351" y="2135103"/>
-                  </a:lnTo>
-                  <a:lnTo>
-                    <a:pt x="4368974" y="2150195"/>
-                  </a:lnTo>
-                  <a:lnTo>
-                    <a:pt x="4440596" y="2164913"/>
-                  </a:lnTo>
-                  <a:lnTo>
-                    <a:pt x="4512219" y="2179267"/>
-                  </a:lnTo>
-                  <a:lnTo>
-                    <a:pt x="4583841" y="2193264"/>
-                  </a:lnTo>
-                  <a:lnTo>
-                    <a:pt x="4655464" y="2206915"/>
-                  </a:lnTo>
-                  <a:lnTo>
-                    <a:pt x="4727086" y="2220228"/>
-                  </a:lnTo>
-                  <a:lnTo>
-                    <a:pt x="4798709" y="2233211"/>
-                  </a:lnTo>
-                  <a:lnTo>
-                    <a:pt x="4870331" y="2245872"/>
-                  </a:lnTo>
-                  <a:lnTo>
-                    <a:pt x="4941954" y="2258220"/>
-                  </a:lnTo>
-                  <a:lnTo>
-                    <a:pt x="5013576" y="2270262"/>
-                  </a:lnTo>
-                  <a:lnTo>
-                    <a:pt x="5085199" y="2282005"/>
-                  </a:lnTo>
-                  <a:lnTo>
-                    <a:pt x="5156821" y="2293458"/>
-                  </a:lnTo>
-                  <a:lnTo>
-                    <a:pt x="5228444" y="2304627"/>
-                  </a:lnTo>
-                  <a:lnTo>
-                    <a:pt x="5300066" y="2315519"/>
-                  </a:lnTo>
-                  <a:lnTo>
-                    <a:pt x="5371689" y="2326141"/>
-                  </a:lnTo>
-                  <a:lnTo>
-                    <a:pt x="5443311" y="2336500"/>
-                  </a:lnTo>
-                  <a:lnTo>
-                    <a:pt x="5514934" y="2346603"/>
-                  </a:lnTo>
-                  <a:lnTo>
-                    <a:pt x="5586557" y="2356455"/>
-                  </a:lnTo>
-                  <a:lnTo>
-                    <a:pt x="5658179" y="2366063"/>
-                  </a:lnTo>
-                  <a:lnTo>
-                    <a:pt x="5729802" y="2375433"/>
-                  </a:lnTo>
-                  <a:lnTo>
-                    <a:pt x="5801424" y="2384571"/>
-                  </a:lnTo>
-                  <a:lnTo>
-                    <a:pt x="5873047" y="2393483"/>
-                  </a:lnTo>
-                  <a:lnTo>
-                    <a:pt x="5944669" y="2402173"/>
-                  </a:lnTo>
-                  <a:lnTo>
-                    <a:pt x="6016292" y="2410649"/>
-                  </a:lnTo>
-                  <a:lnTo>
-                    <a:pt x="6087914" y="2418914"/>
-                  </a:lnTo>
-                  <a:lnTo>
-                    <a:pt x="6159537" y="2426975"/>
-                  </a:lnTo>
-                  <a:lnTo>
-                    <a:pt x="6231159" y="2434836"/>
-                  </a:lnTo>
-                  <a:lnTo>
-                    <a:pt x="6302782" y="2442503"/>
-                  </a:lnTo>
-                  <a:lnTo>
-                    <a:pt x="6374404" y="2449979"/>
-                  </a:lnTo>
-                  <a:lnTo>
-                    <a:pt x="6446027" y="2457270"/>
-                  </a:lnTo>
-                  <a:lnTo>
-                    <a:pt x="6517649" y="2464381"/>
-                  </a:lnTo>
-                  <a:lnTo>
-                    <a:pt x="6589272" y="2471315"/>
-                  </a:lnTo>
-                  <a:lnTo>
-                    <a:pt x="6660894" y="2478078"/>
-                  </a:lnTo>
-                  <a:lnTo>
-                    <a:pt x="6732517" y="2484673"/>
-                  </a:lnTo>
-                  <a:lnTo>
-                    <a:pt x="6804139" y="2491104"/>
-                  </a:lnTo>
-                  <a:lnTo>
-                    <a:pt x="6875762" y="2497377"/>
-                  </a:lnTo>
-                  <a:lnTo>
-                    <a:pt x="6947385" y="2503494"/>
-                  </a:lnTo>
-                  <a:lnTo>
-                    <a:pt x="7019007" y="2509459"/>
-                  </a:lnTo>
-                  <a:lnTo>
-                    <a:pt x="7090630" y="2515277"/>
+                    <a:pt x="70344" y="24534"/>
+                  </a:lnTo>
+                  <a:lnTo>
+                    <a:pt x="140688" y="48461"/>
+                  </a:lnTo>
+                  <a:lnTo>
+                    <a:pt x="211033" y="71796"/>
+                  </a:lnTo>
+                  <a:lnTo>
+                    <a:pt x="281377" y="94552"/>
+                  </a:lnTo>
+                  <a:lnTo>
+                    <a:pt x="351722" y="116744"/>
+                  </a:lnTo>
+                  <a:lnTo>
+                    <a:pt x="422066" y="138387"/>
+                  </a:lnTo>
+                  <a:lnTo>
+                    <a:pt x="492411" y="159493"/>
+                  </a:lnTo>
+                  <a:lnTo>
+                    <a:pt x="562755" y="180077"/>
+                  </a:lnTo>
+                  <a:lnTo>
+                    <a:pt x="633100" y="200150"/>
+                  </a:lnTo>
+                  <a:lnTo>
+                    <a:pt x="703444" y="219727"/>
+                  </a:lnTo>
+                  <a:lnTo>
+                    <a:pt x="773789" y="238818"/>
+                  </a:lnTo>
+                  <a:lnTo>
+                    <a:pt x="844133" y="257436"/>
+                  </a:lnTo>
+                  <a:lnTo>
+                    <a:pt x="914478" y="275593"/>
+                  </a:lnTo>
+                  <a:lnTo>
+                    <a:pt x="984822" y="293301"/>
+                  </a:lnTo>
+                  <a:lnTo>
+                    <a:pt x="1055167" y="310569"/>
+                  </a:lnTo>
+                  <a:lnTo>
+                    <a:pt x="1125511" y="327410"/>
+                  </a:lnTo>
+                  <a:lnTo>
+                    <a:pt x="1195856" y="343834"/>
+                  </a:lnTo>
+                  <a:lnTo>
+                    <a:pt x="1266200" y="359850"/>
+                  </a:lnTo>
+                  <a:lnTo>
+                    <a:pt x="1336545" y="375470"/>
+                  </a:lnTo>
+                  <a:lnTo>
+                    <a:pt x="1406889" y="390703"/>
+                  </a:lnTo>
+                  <a:lnTo>
+                    <a:pt x="1477234" y="405559"/>
+                  </a:lnTo>
+                  <a:lnTo>
+                    <a:pt x="1547578" y="420046"/>
+                  </a:lnTo>
+                  <a:lnTo>
+                    <a:pt x="1617923" y="434175"/>
+                  </a:lnTo>
+                  <a:lnTo>
+                    <a:pt x="1688267" y="447953"/>
+                  </a:lnTo>
+                  <a:lnTo>
+                    <a:pt x="1758612" y="461391"/>
+                  </a:lnTo>
+                  <a:lnTo>
+                    <a:pt x="1828956" y="474495"/>
+                  </a:lnTo>
+                  <a:lnTo>
+                    <a:pt x="1899301" y="487275"/>
+                  </a:lnTo>
+                  <a:lnTo>
+                    <a:pt x="1969645" y="499738"/>
+                  </a:lnTo>
+                  <a:lnTo>
+                    <a:pt x="2039990" y="511892"/>
+                  </a:lnTo>
+                  <a:lnTo>
+                    <a:pt x="2110334" y="523745"/>
+                  </a:lnTo>
+                  <a:lnTo>
+                    <a:pt x="2180679" y="535305"/>
+                  </a:lnTo>
+                  <a:lnTo>
+                    <a:pt x="2251023" y="546578"/>
+                  </a:lnTo>
+                  <a:lnTo>
+                    <a:pt x="2321368" y="557572"/>
+                  </a:lnTo>
+                  <a:lnTo>
+                    <a:pt x="2391712" y="568294"/>
+                  </a:lnTo>
+                  <a:lnTo>
+                    <a:pt x="2462057" y="578750"/>
+                  </a:lnTo>
+                  <a:lnTo>
+                    <a:pt x="2532401" y="588946"/>
+                  </a:lnTo>
+                  <a:lnTo>
+                    <a:pt x="2602746" y="598891"/>
+                  </a:lnTo>
+                  <a:lnTo>
+                    <a:pt x="2673090" y="608589"/>
+                  </a:lnTo>
+                  <a:lnTo>
+                    <a:pt x="2743435" y="618046"/>
+                  </a:lnTo>
+                  <a:lnTo>
+                    <a:pt x="2813779" y="627270"/>
+                  </a:lnTo>
+                  <a:lnTo>
+                    <a:pt x="2884124" y="636265"/>
+                  </a:lnTo>
+                  <a:lnTo>
+                    <a:pt x="2954468" y="645037"/>
+                  </a:lnTo>
+                  <a:lnTo>
+                    <a:pt x="3024813" y="653591"/>
+                  </a:lnTo>
+                  <a:lnTo>
+                    <a:pt x="3095157" y="661934"/>
+                  </a:lnTo>
+                  <a:lnTo>
+                    <a:pt x="3165502" y="670070"/>
+                  </a:lnTo>
+                  <a:lnTo>
+                    <a:pt x="3235846" y="678005"/>
+                  </a:lnTo>
+                  <a:lnTo>
+                    <a:pt x="3306191" y="685743"/>
+                  </a:lnTo>
+                  <a:lnTo>
+                    <a:pt x="3376535" y="693289"/>
+                  </a:lnTo>
+                  <a:lnTo>
+                    <a:pt x="3446880" y="700648"/>
+                  </a:lnTo>
+                  <a:lnTo>
+                    <a:pt x="3517224" y="707825"/>
+                  </a:lnTo>
+                  <a:lnTo>
+                    <a:pt x="3587569" y="714825"/>
+                  </a:lnTo>
+                  <a:lnTo>
+                    <a:pt x="3657913" y="721650"/>
+                  </a:lnTo>
+                  <a:lnTo>
+                    <a:pt x="3728257" y="728307"/>
+                  </a:lnTo>
+                  <a:lnTo>
+                    <a:pt x="3798602" y="734799"/>
+                  </a:lnTo>
+                  <a:lnTo>
+                    <a:pt x="3868946" y="741130"/>
+                  </a:lnTo>
+                  <a:lnTo>
+                    <a:pt x="3939291" y="747304"/>
+                  </a:lnTo>
+                  <a:lnTo>
+                    <a:pt x="4009635" y="753325"/>
+                  </a:lnTo>
+                  <a:lnTo>
+                    <a:pt x="4079980" y="759197"/>
+                  </a:lnTo>
+                  <a:lnTo>
+                    <a:pt x="4150324" y="764924"/>
+                  </a:lnTo>
+                  <a:lnTo>
+                    <a:pt x="4220669" y="770508"/>
+                  </a:lnTo>
+                  <a:lnTo>
+                    <a:pt x="4291013" y="775955"/>
+                  </a:lnTo>
+                  <a:lnTo>
+                    <a:pt x="4361358" y="781266"/>
+                  </a:lnTo>
+                  <a:lnTo>
+                    <a:pt x="4431702" y="786446"/>
+                  </a:lnTo>
+                  <a:lnTo>
+                    <a:pt x="4502047" y="791497"/>
+                  </a:lnTo>
+                  <a:lnTo>
+                    <a:pt x="4572391" y="796424"/>
+                  </a:lnTo>
+                  <a:lnTo>
+                    <a:pt x="4642736" y="801228"/>
+                  </a:lnTo>
+                  <a:lnTo>
+                    <a:pt x="4713080" y="805913"/>
+                  </a:lnTo>
+                  <a:lnTo>
+                    <a:pt x="4783425" y="810482"/>
+                  </a:lnTo>
+                  <a:lnTo>
+                    <a:pt x="4853769" y="814938"/>
+                  </a:lnTo>
+                  <a:lnTo>
+                    <a:pt x="4924114" y="819284"/>
+                  </a:lnTo>
+                  <a:lnTo>
+                    <a:pt x="4994458" y="823522"/>
+                  </a:lnTo>
+                  <a:lnTo>
+                    <a:pt x="5064803" y="827655"/>
+                  </a:lnTo>
+                  <a:lnTo>
+                    <a:pt x="5135147" y="831685"/>
+                  </a:lnTo>
+                  <a:lnTo>
+                    <a:pt x="5205492" y="835616"/>
+                  </a:lnTo>
+                  <a:lnTo>
+                    <a:pt x="5275836" y="839449"/>
+                  </a:lnTo>
+                  <a:lnTo>
+                    <a:pt x="5346181" y="843188"/>
+                  </a:lnTo>
+                  <a:lnTo>
+                    <a:pt x="5416525" y="846833"/>
+                  </a:lnTo>
+                  <a:lnTo>
+                    <a:pt x="5486870" y="850389"/>
+                  </a:lnTo>
+                  <a:lnTo>
+                    <a:pt x="5557214" y="853856"/>
+                  </a:lnTo>
+                  <a:lnTo>
+                    <a:pt x="5627559" y="857238"/>
+                  </a:lnTo>
+                  <a:lnTo>
+                    <a:pt x="5697903" y="860535"/>
+                  </a:lnTo>
+                  <a:lnTo>
+                    <a:pt x="5768248" y="863751"/>
+                  </a:lnTo>
+                  <a:lnTo>
+                    <a:pt x="5838592" y="866888"/>
+                  </a:lnTo>
+                  <a:lnTo>
+                    <a:pt x="5908937" y="869946"/>
+                  </a:lnTo>
+                  <a:lnTo>
+                    <a:pt x="5979281" y="872929"/>
+                  </a:lnTo>
+                  <a:lnTo>
+                    <a:pt x="6049626" y="875838"/>
+                  </a:lnTo>
+                  <a:lnTo>
+                    <a:pt x="6119970" y="878675"/>
+                  </a:lnTo>
+                  <a:lnTo>
+                    <a:pt x="6190315" y="881441"/>
+                  </a:lnTo>
+                  <a:lnTo>
+                    <a:pt x="6260659" y="884139"/>
+                  </a:lnTo>
+                  <a:lnTo>
+                    <a:pt x="6331004" y="886771"/>
+                  </a:lnTo>
+                  <a:lnTo>
+                    <a:pt x="6401348" y="889337"/>
+                  </a:lnTo>
+                  <a:lnTo>
+                    <a:pt x="6471693" y="891839"/>
+                  </a:lnTo>
+                  <a:lnTo>
+                    <a:pt x="6542037" y="894280"/>
+                  </a:lnTo>
+                  <a:lnTo>
+                    <a:pt x="6612382" y="896660"/>
+                  </a:lnTo>
+                  <a:lnTo>
+                    <a:pt x="6682726" y="898981"/>
+                  </a:lnTo>
+                  <a:lnTo>
+                    <a:pt x="6753071" y="901244"/>
+                  </a:lnTo>
+                  <a:lnTo>
+                    <a:pt x="6823415" y="903452"/>
+                  </a:lnTo>
+                  <a:lnTo>
+                    <a:pt x="6893760" y="905604"/>
+                  </a:lnTo>
+                  <a:lnTo>
+                    <a:pt x="6964104" y="907704"/>
                   </a:lnTo>
                 </a:path>
               </a:pathLst>
@@ -4520,27 +4555,27 @@
         </p:sp>
         <p:sp>
           <p:nvSpPr>
-            <p:cNvPr id="24" name="pl24"/>
+            <p:cNvPr id="25" name="pl25"/>
             <p:cNvSpPr/>
             <p:nvPr/>
           </p:nvSpPr>
           <p:spPr>
             <a:xfrm>
-              <a:off x="817517" y="4727786"/>
-              <a:ext cx="7799693" cy="0"/>
+              <a:off x="887106" y="3100960"/>
+              <a:ext cx="7660515" cy="0"/>
             </a:xfrm>
             <a:custGeom>
               <a:avLst/>
               <a:pathLst>
-                <a:path w="7799693" h="0">
+                <a:path w="7660515" h="0">
                   <a:moveTo>
                     <a:pt x="0" y="0"/>
                   </a:moveTo>
                   <a:lnTo>
-                    <a:pt x="7799693" y="0"/>
-                  </a:lnTo>
-                  <a:lnTo>
-                    <a:pt x="7799693" y="0"/>
+                    <a:pt x="7660515" y="0"/>
+                  </a:lnTo>
+                  <a:lnTo>
+                    <a:pt x="7660515" y="0"/>
                   </a:lnTo>
                 </a:path>
               </a:pathLst>
@@ -4563,21 +4598,21 @@
         </p:sp>
         <p:sp>
           <p:nvSpPr>
-            <p:cNvPr id="25" name="pl25"/>
+            <p:cNvPr id="26" name="pl26"/>
             <p:cNvSpPr/>
             <p:nvPr/>
           </p:nvSpPr>
           <p:spPr>
             <a:xfrm>
-              <a:off x="4588151" y="2073503"/>
-              <a:ext cx="0" cy="3649639"/>
+              <a:off x="4590457" y="2143092"/>
+              <a:ext cx="0" cy="1317069"/>
             </a:xfrm>
             <a:custGeom>
               <a:avLst/>
               <a:pathLst>
-                <a:path w="0" h="3649639">
+                <a:path w="0" h="1317069">
                   <a:moveTo>
-                    <a:pt x="0" y="3649639"/>
+                    <a:pt x="0" y="1317069"/>
                   </a:moveTo>
                   <a:lnTo>
                     <a:pt x="0" y="0"/>
@@ -4606,13 +4641,13 @@
         </p:sp>
         <p:sp>
           <p:nvSpPr>
-            <p:cNvPr id="26" name="tx26"/>
+            <p:cNvPr id="27" name="tx27"/>
             <p:cNvSpPr/>
             <p:nvPr/>
           </p:nvSpPr>
           <p:spPr>
             <a:xfrm>
-              <a:off x="692708" y="5517199"/>
+              <a:off x="762297" y="3360243"/>
               <a:ext cx="62179" cy="80101"/>
             </a:xfrm>
             <a:prstGeom prst="rect">
@@ -4652,13 +4687,13 @@
         </p:sp>
         <p:sp>
           <p:nvSpPr>
-            <p:cNvPr id="27" name="tx27"/>
+            <p:cNvPr id="28" name="tx28"/>
             <p:cNvSpPr/>
             <p:nvPr/>
           </p:nvSpPr>
           <p:spPr>
             <a:xfrm>
-              <a:off x="692708" y="4687735"/>
+              <a:off x="762297" y="3060909"/>
               <a:ext cx="62179" cy="80101"/>
             </a:xfrm>
             <a:prstGeom prst="rect">
@@ -4698,13 +4733,13 @@
         </p:sp>
         <p:sp>
           <p:nvSpPr>
-            <p:cNvPr id="28" name="tx28"/>
+            <p:cNvPr id="29" name="tx29"/>
             <p:cNvSpPr/>
             <p:nvPr/>
           </p:nvSpPr>
           <p:spPr>
             <a:xfrm>
-              <a:off x="692708" y="3858272"/>
+              <a:off x="762297" y="2761575"/>
               <a:ext cx="62179" cy="80101"/>
             </a:xfrm>
             <a:prstGeom prst="rect">
@@ -4744,13 +4779,13 @@
         </p:sp>
         <p:sp>
           <p:nvSpPr>
-            <p:cNvPr id="29" name="tx29"/>
+            <p:cNvPr id="30" name="tx30"/>
             <p:cNvSpPr/>
             <p:nvPr/>
           </p:nvSpPr>
           <p:spPr>
             <a:xfrm>
-              <a:off x="692708" y="3028808"/>
+              <a:off x="762297" y="2462242"/>
               <a:ext cx="62179" cy="80101"/>
             </a:xfrm>
             <a:prstGeom prst="rect">
@@ -4790,13 +4825,13 @@
         </p:sp>
         <p:sp>
           <p:nvSpPr>
-            <p:cNvPr id="30" name="tx30"/>
+            <p:cNvPr id="31" name="tx31"/>
             <p:cNvSpPr/>
             <p:nvPr/>
           </p:nvSpPr>
           <p:spPr>
             <a:xfrm>
-              <a:off x="692708" y="2199345"/>
+              <a:off x="762297" y="2162908"/>
               <a:ext cx="62179" cy="80101"/>
             </a:xfrm>
             <a:prstGeom prst="rect">
@@ -4836,13 +4871,13 @@
         </p:sp>
         <p:sp>
           <p:nvSpPr>
-            <p:cNvPr id="31" name="tx31"/>
+            <p:cNvPr id="32" name="tx32"/>
             <p:cNvSpPr/>
             <p:nvPr/>
           </p:nvSpPr>
           <p:spPr>
             <a:xfrm>
-              <a:off x="2360651" y="5785772"/>
+              <a:off x="2401262" y="3522791"/>
               <a:ext cx="161574" cy="80101"/>
             </a:xfrm>
             <a:prstGeom prst="rect">
@@ -4882,13 +4917,13 @@
         </p:sp>
         <p:sp>
           <p:nvSpPr>
-            <p:cNvPr id="32" name="tx32"/>
+            <p:cNvPr id="33" name="tx33"/>
             <p:cNvSpPr/>
             <p:nvPr/>
           </p:nvSpPr>
           <p:spPr>
             <a:xfrm>
-              <a:off x="4561958" y="5785772"/>
+              <a:off x="4564176" y="3522791"/>
               <a:ext cx="62179" cy="80101"/>
             </a:xfrm>
             <a:prstGeom prst="rect">
@@ -4928,13 +4963,13 @@
         </p:sp>
         <p:sp>
           <p:nvSpPr>
-            <p:cNvPr id="33" name="tx33"/>
+            <p:cNvPr id="34" name="tx34"/>
             <p:cNvSpPr/>
             <p:nvPr/>
           </p:nvSpPr>
           <p:spPr>
             <a:xfrm>
-              <a:off x="6682478" y="5785772"/>
+              <a:off x="6646302" y="3522791"/>
               <a:ext cx="124358" cy="80101"/>
             </a:xfrm>
             <a:prstGeom prst="rect">
@@ -4974,13 +5009,13 @@
         </p:sp>
         <p:sp>
           <p:nvSpPr>
-            <p:cNvPr id="34" name="tx34"/>
+            <p:cNvPr id="35" name="tx35"/>
             <p:cNvSpPr/>
             <p:nvPr/>
           </p:nvSpPr>
           <p:spPr>
             <a:xfrm>
-              <a:off x="2928340" y="5925448"/>
+              <a:off x="2928340" y="3662467"/>
               <a:ext cx="3578047" cy="100218"/>
             </a:xfrm>
             <a:prstGeom prst="rect">
@@ -5020,13 +5055,13 @@
         </p:sp>
         <p:sp>
           <p:nvSpPr>
-            <p:cNvPr id="35" name="tx35"/>
+            <p:cNvPr id="36" name="tx36"/>
             <p:cNvSpPr/>
             <p:nvPr/>
           </p:nvSpPr>
           <p:spPr>
             <a:xfrm rot="-5400000">
-              <a:off x="68446" y="3848213"/>
+              <a:off x="138035" y="2751517"/>
               <a:ext cx="1016904" cy="100218"/>
             </a:xfrm>
             <a:prstGeom prst="rect">
@@ -5066,13 +5101,13 @@
         </p:sp>
         <p:sp>
           <p:nvSpPr>
-            <p:cNvPr id="36" name="tx36"/>
+            <p:cNvPr id="37" name="tx37"/>
             <p:cNvSpPr/>
             <p:nvPr/>
           </p:nvSpPr>
           <p:spPr>
             <a:xfrm>
-              <a:off x="817517" y="1896563"/>
+              <a:off x="887106" y="1966152"/>
               <a:ext cx="7052127" cy="82021"/>
             </a:xfrm>
             <a:prstGeom prst="rect">
@@ -5112,13 +5147,3655 @@
         </p:sp>
         <p:sp>
           <p:nvSpPr>
-            <p:cNvPr id="37" name="tx37"/>
+            <p:cNvPr id="38" name="tx38"/>
             <p:cNvSpPr/>
             <p:nvPr/>
           </p:nvSpPr>
           <p:spPr>
             <a:xfrm>
-              <a:off x="817517" y="1669789"/>
+              <a:off x="887106" y="1739378"/>
+              <a:ext cx="967983" cy="120152"/>
+            </a:xfrm>
+            <a:prstGeom prst="rect">
+              <a:avLst/>
+            </a:prstGeom>
+            <a:noFill/>
+          </p:spPr>
+          <p:txBody>
+            <a:bodyPr lIns="0" rIns="0" tIns="0" bIns="0" anchorCtr="1" anchor="ctr" wrap="none"/>
+            <a:lstStyle/>
+            <a:p>
+              <a:pPr algn="l" marL="0" marR="0" indent="0">
+                <a:lnSpc>
+                  <a:spcPts val="1320"/>
+                </a:lnSpc>
+                <a:spcBef>
+                  <a:spcPts val="0"/>
+                </a:spcBef>
+                <a:spcAft>
+                  <a:spcPts val="0"/>
+                </a:spcAft>
+              </a:pPr>
+              <a:r>
+                <a:rPr sz="1320">
+                  <a:solidFill>
+                    <a:srgbClr val="000000">
+                      <a:alpha val="100000"/>
+                    </a:srgbClr>
+                  </a:solidFill>
+                  <a:latin typeface="Helvetica"/>
+                  <a:cs typeface="Helvetica"/>
+                </a:rPr>
+                <a:t>AKI (KDIGO)</a:t>
+              </a:r>
+            </a:p>
+          </p:txBody>
+        </p:sp>
+        <p:sp>
+          <p:nvSpPr>
+            <p:cNvPr id="39" name="pl39"/>
+            <p:cNvSpPr/>
+            <p:nvPr/>
+          </p:nvSpPr>
+          <p:spPr>
+            <a:xfrm>
+              <a:off x="887106" y="5444019"/>
+              <a:ext cx="7660515" cy="0"/>
+            </a:xfrm>
+            <a:custGeom>
+              <a:avLst/>
+              <a:pathLst>
+                <a:path w="7660515" h="0">
+                  <a:moveTo>
+                    <a:pt x="0" y="0"/>
+                  </a:moveTo>
+                  <a:lnTo>
+                    <a:pt x="7660515" y="0"/>
+                  </a:lnTo>
+                  <a:lnTo>
+                    <a:pt x="7660515" y="0"/>
+                  </a:lnTo>
+                </a:path>
+              </a:pathLst>
+            </a:custGeom>
+            <a:ln w="6775" cap="flat">
+              <a:solidFill>
+                <a:srgbClr val="EBEBEB">
+                  <a:alpha val="100000"/>
+                </a:srgbClr>
+              </a:solidFill>
+              <a:prstDash val="solid"/>
+              <a:round/>
+            </a:ln>
+          </p:spPr>
+          <p:txBody>
+            <a:bodyPr/>
+            <a:lstStyle/>
+            <a:p/>
+          </p:txBody>
+        </p:sp>
+        <p:sp>
+          <p:nvSpPr>
+            <p:cNvPr id="40" name="pl40"/>
+            <p:cNvSpPr/>
+            <p:nvPr/>
+          </p:nvSpPr>
+          <p:spPr>
+            <a:xfrm>
+              <a:off x="887106" y="5144686"/>
+              <a:ext cx="7660515" cy="0"/>
+            </a:xfrm>
+            <a:custGeom>
+              <a:avLst/>
+              <a:pathLst>
+                <a:path w="7660515" h="0">
+                  <a:moveTo>
+                    <a:pt x="0" y="0"/>
+                  </a:moveTo>
+                  <a:lnTo>
+                    <a:pt x="7660515" y="0"/>
+                  </a:lnTo>
+                  <a:lnTo>
+                    <a:pt x="7660515" y="0"/>
+                  </a:lnTo>
+                </a:path>
+              </a:pathLst>
+            </a:custGeom>
+            <a:ln w="6775" cap="flat">
+              <a:solidFill>
+                <a:srgbClr val="EBEBEB">
+                  <a:alpha val="100000"/>
+                </a:srgbClr>
+              </a:solidFill>
+              <a:prstDash val="solid"/>
+              <a:round/>
+            </a:ln>
+          </p:spPr>
+          <p:txBody>
+            <a:bodyPr/>
+            <a:lstStyle/>
+            <a:p/>
+          </p:txBody>
+        </p:sp>
+        <p:sp>
+          <p:nvSpPr>
+            <p:cNvPr id="41" name="pl41"/>
+            <p:cNvSpPr/>
+            <p:nvPr/>
+          </p:nvSpPr>
+          <p:spPr>
+            <a:xfrm>
+              <a:off x="887106" y="4845352"/>
+              <a:ext cx="7660515" cy="0"/>
+            </a:xfrm>
+            <a:custGeom>
+              <a:avLst/>
+              <a:pathLst>
+                <a:path w="7660515" h="0">
+                  <a:moveTo>
+                    <a:pt x="0" y="0"/>
+                  </a:moveTo>
+                  <a:lnTo>
+                    <a:pt x="7660515" y="0"/>
+                  </a:lnTo>
+                  <a:lnTo>
+                    <a:pt x="7660515" y="0"/>
+                  </a:lnTo>
+                </a:path>
+              </a:pathLst>
+            </a:custGeom>
+            <a:ln w="6775" cap="flat">
+              <a:solidFill>
+                <a:srgbClr val="EBEBEB">
+                  <a:alpha val="100000"/>
+                </a:srgbClr>
+              </a:solidFill>
+              <a:prstDash val="solid"/>
+              <a:round/>
+            </a:ln>
+          </p:spPr>
+          <p:txBody>
+            <a:bodyPr/>
+            <a:lstStyle/>
+            <a:p/>
+          </p:txBody>
+        </p:sp>
+        <p:sp>
+          <p:nvSpPr>
+            <p:cNvPr id="42" name="pl42"/>
+            <p:cNvSpPr/>
+            <p:nvPr/>
+          </p:nvSpPr>
+          <p:spPr>
+            <a:xfrm>
+              <a:off x="887106" y="4546018"/>
+              <a:ext cx="7660515" cy="0"/>
+            </a:xfrm>
+            <a:custGeom>
+              <a:avLst/>
+              <a:pathLst>
+                <a:path w="7660515" h="0">
+                  <a:moveTo>
+                    <a:pt x="0" y="0"/>
+                  </a:moveTo>
+                  <a:lnTo>
+                    <a:pt x="7660515" y="0"/>
+                  </a:lnTo>
+                  <a:lnTo>
+                    <a:pt x="7660515" y="0"/>
+                  </a:lnTo>
+                </a:path>
+              </a:pathLst>
+            </a:custGeom>
+            <a:ln w="6775" cap="flat">
+              <a:solidFill>
+                <a:srgbClr val="EBEBEB">
+                  <a:alpha val="100000"/>
+                </a:srgbClr>
+              </a:solidFill>
+              <a:prstDash val="solid"/>
+              <a:round/>
+            </a:ln>
+          </p:spPr>
+          <p:txBody>
+            <a:bodyPr/>
+            <a:lstStyle/>
+            <a:p/>
+          </p:txBody>
+        </p:sp>
+        <p:sp>
+          <p:nvSpPr>
+            <p:cNvPr id="43" name="pl43"/>
+            <p:cNvSpPr/>
+            <p:nvPr/>
+          </p:nvSpPr>
+          <p:spPr>
+            <a:xfrm>
+              <a:off x="1636763" y="4336484"/>
+              <a:ext cx="0" cy="1317069"/>
+            </a:xfrm>
+            <a:custGeom>
+              <a:avLst/>
+              <a:pathLst>
+                <a:path w="0" h="1317069">
+                  <a:moveTo>
+                    <a:pt x="0" y="1317069"/>
+                  </a:moveTo>
+                  <a:lnTo>
+                    <a:pt x="0" y="0"/>
+                  </a:lnTo>
+                  <a:lnTo>
+                    <a:pt x="0" y="0"/>
+                  </a:lnTo>
+                </a:path>
+              </a:pathLst>
+            </a:custGeom>
+            <a:ln w="6775" cap="flat">
+              <a:solidFill>
+                <a:srgbClr val="EBEBEB">
+                  <a:alpha val="100000"/>
+                </a:srgbClr>
+              </a:solidFill>
+              <a:prstDash val="solid"/>
+              <a:round/>
+            </a:ln>
+          </p:spPr>
+          <p:txBody>
+            <a:bodyPr/>
+            <a:lstStyle/>
+            <a:p/>
+          </p:txBody>
+        </p:sp>
+        <p:sp>
+          <p:nvSpPr>
+            <p:cNvPr id="44" name="pl44"/>
+            <p:cNvSpPr/>
+            <p:nvPr/>
+          </p:nvSpPr>
+          <p:spPr>
+            <a:xfrm>
+              <a:off x="2482050" y="4336484"/>
+              <a:ext cx="0" cy="1317069"/>
+            </a:xfrm>
+            <a:custGeom>
+              <a:avLst/>
+              <a:pathLst>
+                <a:path w="0" h="1317069">
+                  <a:moveTo>
+                    <a:pt x="0" y="1317069"/>
+                  </a:moveTo>
+                  <a:lnTo>
+                    <a:pt x="0" y="0"/>
+                  </a:lnTo>
+                  <a:lnTo>
+                    <a:pt x="0" y="0"/>
+                  </a:lnTo>
+                </a:path>
+              </a:pathLst>
+            </a:custGeom>
+            <a:ln w="6775" cap="flat">
+              <a:solidFill>
+                <a:srgbClr val="EBEBEB">
+                  <a:alpha val="100000"/>
+                </a:srgbClr>
+              </a:solidFill>
+              <a:prstDash val="solid"/>
+              <a:round/>
+            </a:ln>
+          </p:spPr>
+          <p:txBody>
+            <a:bodyPr/>
+            <a:lstStyle/>
+            <a:p/>
+          </p:txBody>
+        </p:sp>
+        <p:sp>
+          <p:nvSpPr>
+            <p:cNvPr id="45" name="pl45"/>
+            <p:cNvSpPr/>
+            <p:nvPr/>
+          </p:nvSpPr>
+          <p:spPr>
+            <a:xfrm>
+              <a:off x="3327336" y="4336484"/>
+              <a:ext cx="0" cy="1317069"/>
+            </a:xfrm>
+            <a:custGeom>
+              <a:avLst/>
+              <a:pathLst>
+                <a:path w="0" h="1317069">
+                  <a:moveTo>
+                    <a:pt x="0" y="1317069"/>
+                  </a:moveTo>
+                  <a:lnTo>
+                    <a:pt x="0" y="0"/>
+                  </a:lnTo>
+                  <a:lnTo>
+                    <a:pt x="0" y="0"/>
+                  </a:lnTo>
+                </a:path>
+              </a:pathLst>
+            </a:custGeom>
+            <a:ln w="6775" cap="flat">
+              <a:solidFill>
+                <a:srgbClr val="EBEBEB">
+                  <a:alpha val="100000"/>
+                </a:srgbClr>
+              </a:solidFill>
+              <a:prstDash val="solid"/>
+              <a:round/>
+            </a:ln>
+          </p:spPr>
+          <p:txBody>
+            <a:bodyPr/>
+            <a:lstStyle/>
+            <a:p/>
+          </p:txBody>
+        </p:sp>
+        <p:sp>
+          <p:nvSpPr>
+            <p:cNvPr id="46" name="pl46"/>
+            <p:cNvSpPr/>
+            <p:nvPr/>
+          </p:nvSpPr>
+          <p:spPr>
+            <a:xfrm>
+              <a:off x="4172622" y="4336484"/>
+              <a:ext cx="0" cy="1317069"/>
+            </a:xfrm>
+            <a:custGeom>
+              <a:avLst/>
+              <a:pathLst>
+                <a:path w="0" h="1317069">
+                  <a:moveTo>
+                    <a:pt x="0" y="1317069"/>
+                  </a:moveTo>
+                  <a:lnTo>
+                    <a:pt x="0" y="0"/>
+                  </a:lnTo>
+                  <a:lnTo>
+                    <a:pt x="0" y="0"/>
+                  </a:lnTo>
+                </a:path>
+              </a:pathLst>
+            </a:custGeom>
+            <a:ln w="6775" cap="flat">
+              <a:solidFill>
+                <a:srgbClr val="EBEBEB">
+                  <a:alpha val="100000"/>
+                </a:srgbClr>
+              </a:solidFill>
+              <a:prstDash val="solid"/>
+              <a:round/>
+            </a:ln>
+          </p:spPr>
+          <p:txBody>
+            <a:bodyPr/>
+            <a:lstStyle/>
+            <a:p/>
+          </p:txBody>
+        </p:sp>
+        <p:sp>
+          <p:nvSpPr>
+            <p:cNvPr id="47" name="pl47"/>
+            <p:cNvSpPr/>
+            <p:nvPr/>
+          </p:nvSpPr>
+          <p:spPr>
+            <a:xfrm>
+              <a:off x="5017909" y="4336484"/>
+              <a:ext cx="0" cy="1317069"/>
+            </a:xfrm>
+            <a:custGeom>
+              <a:avLst/>
+              <a:pathLst>
+                <a:path w="0" h="1317069">
+                  <a:moveTo>
+                    <a:pt x="0" y="1317069"/>
+                  </a:moveTo>
+                  <a:lnTo>
+                    <a:pt x="0" y="0"/>
+                  </a:lnTo>
+                  <a:lnTo>
+                    <a:pt x="0" y="0"/>
+                  </a:lnTo>
+                </a:path>
+              </a:pathLst>
+            </a:custGeom>
+            <a:ln w="6775" cap="flat">
+              <a:solidFill>
+                <a:srgbClr val="EBEBEB">
+                  <a:alpha val="100000"/>
+                </a:srgbClr>
+              </a:solidFill>
+              <a:prstDash val="solid"/>
+              <a:round/>
+            </a:ln>
+          </p:spPr>
+          <p:txBody>
+            <a:bodyPr/>
+            <a:lstStyle/>
+            <a:p/>
+          </p:txBody>
+        </p:sp>
+        <p:sp>
+          <p:nvSpPr>
+            <p:cNvPr id="48" name="pl48"/>
+            <p:cNvSpPr/>
+            <p:nvPr/>
+          </p:nvSpPr>
+          <p:spPr>
+            <a:xfrm>
+              <a:off x="5863195" y="4336484"/>
+              <a:ext cx="0" cy="1317069"/>
+            </a:xfrm>
+            <a:custGeom>
+              <a:avLst/>
+              <a:pathLst>
+                <a:path w="0" h="1317069">
+                  <a:moveTo>
+                    <a:pt x="0" y="1317069"/>
+                  </a:moveTo>
+                  <a:lnTo>
+                    <a:pt x="0" y="0"/>
+                  </a:lnTo>
+                  <a:lnTo>
+                    <a:pt x="0" y="0"/>
+                  </a:lnTo>
+                </a:path>
+              </a:pathLst>
+            </a:custGeom>
+            <a:ln w="6775" cap="flat">
+              <a:solidFill>
+                <a:srgbClr val="EBEBEB">
+                  <a:alpha val="100000"/>
+                </a:srgbClr>
+              </a:solidFill>
+              <a:prstDash val="solid"/>
+              <a:round/>
+            </a:ln>
+          </p:spPr>
+          <p:txBody>
+            <a:bodyPr/>
+            <a:lstStyle/>
+            <a:p/>
+          </p:txBody>
+        </p:sp>
+        <p:sp>
+          <p:nvSpPr>
+            <p:cNvPr id="49" name="pl49"/>
+            <p:cNvSpPr/>
+            <p:nvPr/>
+          </p:nvSpPr>
+          <p:spPr>
+            <a:xfrm>
+              <a:off x="6708482" y="4336484"/>
+              <a:ext cx="0" cy="1317069"/>
+            </a:xfrm>
+            <a:custGeom>
+              <a:avLst/>
+              <a:pathLst>
+                <a:path w="0" h="1317069">
+                  <a:moveTo>
+                    <a:pt x="0" y="1317069"/>
+                  </a:moveTo>
+                  <a:lnTo>
+                    <a:pt x="0" y="0"/>
+                  </a:lnTo>
+                  <a:lnTo>
+                    <a:pt x="0" y="0"/>
+                  </a:lnTo>
+                </a:path>
+              </a:pathLst>
+            </a:custGeom>
+            <a:ln w="6775" cap="flat">
+              <a:solidFill>
+                <a:srgbClr val="EBEBEB">
+                  <a:alpha val="100000"/>
+                </a:srgbClr>
+              </a:solidFill>
+              <a:prstDash val="solid"/>
+              <a:round/>
+            </a:ln>
+          </p:spPr>
+          <p:txBody>
+            <a:bodyPr/>
+            <a:lstStyle/>
+            <a:p/>
+          </p:txBody>
+        </p:sp>
+        <p:sp>
+          <p:nvSpPr>
+            <p:cNvPr id="50" name="pl50"/>
+            <p:cNvSpPr/>
+            <p:nvPr/>
+          </p:nvSpPr>
+          <p:spPr>
+            <a:xfrm>
+              <a:off x="7553768" y="4336484"/>
+              <a:ext cx="0" cy="1317069"/>
+            </a:xfrm>
+            <a:custGeom>
+              <a:avLst/>
+              <a:pathLst>
+                <a:path w="0" h="1317069">
+                  <a:moveTo>
+                    <a:pt x="0" y="1317069"/>
+                  </a:moveTo>
+                  <a:lnTo>
+                    <a:pt x="0" y="0"/>
+                  </a:lnTo>
+                  <a:lnTo>
+                    <a:pt x="0" y="0"/>
+                  </a:lnTo>
+                </a:path>
+              </a:pathLst>
+            </a:custGeom>
+            <a:ln w="6775" cap="flat">
+              <a:solidFill>
+                <a:srgbClr val="EBEBEB">
+                  <a:alpha val="100000"/>
+                </a:srgbClr>
+              </a:solidFill>
+              <a:prstDash val="solid"/>
+              <a:round/>
+            </a:ln>
+          </p:spPr>
+          <p:txBody>
+            <a:bodyPr/>
+            <a:lstStyle/>
+            <a:p/>
+          </p:txBody>
+        </p:sp>
+        <p:sp>
+          <p:nvSpPr>
+            <p:cNvPr id="51" name="pl51"/>
+            <p:cNvSpPr/>
+            <p:nvPr/>
+          </p:nvSpPr>
+          <p:spPr>
+            <a:xfrm>
+              <a:off x="8399054" y="4336484"/>
+              <a:ext cx="0" cy="1317069"/>
+            </a:xfrm>
+            <a:custGeom>
+              <a:avLst/>
+              <a:pathLst>
+                <a:path w="0" h="1317069">
+                  <a:moveTo>
+                    <a:pt x="0" y="1317069"/>
+                  </a:moveTo>
+                  <a:lnTo>
+                    <a:pt x="0" y="0"/>
+                  </a:lnTo>
+                  <a:lnTo>
+                    <a:pt x="0" y="0"/>
+                  </a:lnTo>
+                </a:path>
+              </a:pathLst>
+            </a:custGeom>
+            <a:ln w="6775" cap="flat">
+              <a:solidFill>
+                <a:srgbClr val="EBEBEB">
+                  <a:alpha val="100000"/>
+                </a:srgbClr>
+              </a:solidFill>
+              <a:prstDash val="solid"/>
+              <a:round/>
+            </a:ln>
+          </p:spPr>
+          <p:txBody>
+            <a:bodyPr/>
+            <a:lstStyle/>
+            <a:p/>
+          </p:txBody>
+        </p:sp>
+        <p:sp>
+          <p:nvSpPr>
+            <p:cNvPr id="52" name="pl52"/>
+            <p:cNvSpPr/>
+            <p:nvPr/>
+          </p:nvSpPr>
+          <p:spPr>
+            <a:xfrm>
+              <a:off x="887106" y="5593686"/>
+              <a:ext cx="7660515" cy="0"/>
+            </a:xfrm>
+            <a:custGeom>
+              <a:avLst/>
+              <a:pathLst>
+                <a:path w="7660515" h="0">
+                  <a:moveTo>
+                    <a:pt x="0" y="0"/>
+                  </a:moveTo>
+                  <a:lnTo>
+                    <a:pt x="7660515" y="0"/>
+                  </a:lnTo>
+                  <a:lnTo>
+                    <a:pt x="7660515" y="0"/>
+                  </a:lnTo>
+                </a:path>
+              </a:pathLst>
+            </a:custGeom>
+            <a:ln w="13550" cap="flat">
+              <a:solidFill>
+                <a:srgbClr val="EBEBEB">
+                  <a:alpha val="100000"/>
+                </a:srgbClr>
+              </a:solidFill>
+              <a:prstDash val="solid"/>
+              <a:round/>
+            </a:ln>
+          </p:spPr>
+          <p:txBody>
+            <a:bodyPr/>
+            <a:lstStyle/>
+            <a:p/>
+          </p:txBody>
+        </p:sp>
+        <p:sp>
+          <p:nvSpPr>
+            <p:cNvPr id="53" name="pl53"/>
+            <p:cNvSpPr/>
+            <p:nvPr/>
+          </p:nvSpPr>
+          <p:spPr>
+            <a:xfrm>
+              <a:off x="887106" y="5294352"/>
+              <a:ext cx="7660515" cy="0"/>
+            </a:xfrm>
+            <a:custGeom>
+              <a:avLst/>
+              <a:pathLst>
+                <a:path w="7660515" h="0">
+                  <a:moveTo>
+                    <a:pt x="0" y="0"/>
+                  </a:moveTo>
+                  <a:lnTo>
+                    <a:pt x="7660515" y="0"/>
+                  </a:lnTo>
+                  <a:lnTo>
+                    <a:pt x="7660515" y="0"/>
+                  </a:lnTo>
+                </a:path>
+              </a:pathLst>
+            </a:custGeom>
+            <a:ln w="13550" cap="flat">
+              <a:solidFill>
+                <a:srgbClr val="EBEBEB">
+                  <a:alpha val="100000"/>
+                </a:srgbClr>
+              </a:solidFill>
+              <a:prstDash val="solid"/>
+              <a:round/>
+            </a:ln>
+          </p:spPr>
+          <p:txBody>
+            <a:bodyPr/>
+            <a:lstStyle/>
+            <a:p/>
+          </p:txBody>
+        </p:sp>
+        <p:sp>
+          <p:nvSpPr>
+            <p:cNvPr id="54" name="pl54"/>
+            <p:cNvSpPr/>
+            <p:nvPr/>
+          </p:nvSpPr>
+          <p:spPr>
+            <a:xfrm>
+              <a:off x="887106" y="4995019"/>
+              <a:ext cx="7660515" cy="0"/>
+            </a:xfrm>
+            <a:custGeom>
+              <a:avLst/>
+              <a:pathLst>
+                <a:path w="7660515" h="0">
+                  <a:moveTo>
+                    <a:pt x="0" y="0"/>
+                  </a:moveTo>
+                  <a:lnTo>
+                    <a:pt x="7660515" y="0"/>
+                  </a:lnTo>
+                  <a:lnTo>
+                    <a:pt x="7660515" y="0"/>
+                  </a:lnTo>
+                </a:path>
+              </a:pathLst>
+            </a:custGeom>
+            <a:ln w="13550" cap="flat">
+              <a:solidFill>
+                <a:srgbClr val="EBEBEB">
+                  <a:alpha val="100000"/>
+                </a:srgbClr>
+              </a:solidFill>
+              <a:prstDash val="solid"/>
+              <a:round/>
+            </a:ln>
+          </p:spPr>
+          <p:txBody>
+            <a:bodyPr/>
+            <a:lstStyle/>
+            <a:p/>
+          </p:txBody>
+        </p:sp>
+        <p:sp>
+          <p:nvSpPr>
+            <p:cNvPr id="55" name="pl55"/>
+            <p:cNvSpPr/>
+            <p:nvPr/>
+          </p:nvSpPr>
+          <p:spPr>
+            <a:xfrm>
+              <a:off x="887106" y="4695685"/>
+              <a:ext cx="7660515" cy="0"/>
+            </a:xfrm>
+            <a:custGeom>
+              <a:avLst/>
+              <a:pathLst>
+                <a:path w="7660515" h="0">
+                  <a:moveTo>
+                    <a:pt x="0" y="0"/>
+                  </a:moveTo>
+                  <a:lnTo>
+                    <a:pt x="7660515" y="0"/>
+                  </a:lnTo>
+                  <a:lnTo>
+                    <a:pt x="7660515" y="0"/>
+                  </a:lnTo>
+                </a:path>
+              </a:pathLst>
+            </a:custGeom>
+            <a:ln w="13550" cap="flat">
+              <a:solidFill>
+                <a:srgbClr val="EBEBEB">
+                  <a:alpha val="100000"/>
+                </a:srgbClr>
+              </a:solidFill>
+              <a:prstDash val="solid"/>
+              <a:round/>
+            </a:ln>
+          </p:spPr>
+          <p:txBody>
+            <a:bodyPr/>
+            <a:lstStyle/>
+            <a:p/>
+          </p:txBody>
+        </p:sp>
+        <p:sp>
+          <p:nvSpPr>
+            <p:cNvPr id="56" name="pl56"/>
+            <p:cNvSpPr/>
+            <p:nvPr/>
+          </p:nvSpPr>
+          <p:spPr>
+            <a:xfrm>
+              <a:off x="887106" y="4396351"/>
+              <a:ext cx="7660515" cy="0"/>
+            </a:xfrm>
+            <a:custGeom>
+              <a:avLst/>
+              <a:pathLst>
+                <a:path w="7660515" h="0">
+                  <a:moveTo>
+                    <a:pt x="0" y="0"/>
+                  </a:moveTo>
+                  <a:lnTo>
+                    <a:pt x="7660515" y="0"/>
+                  </a:lnTo>
+                  <a:lnTo>
+                    <a:pt x="7660515" y="0"/>
+                  </a:lnTo>
+                </a:path>
+              </a:pathLst>
+            </a:custGeom>
+            <a:ln w="13550" cap="flat">
+              <a:solidFill>
+                <a:srgbClr val="EBEBEB">
+                  <a:alpha val="100000"/>
+                </a:srgbClr>
+              </a:solidFill>
+              <a:prstDash val="solid"/>
+              <a:round/>
+            </a:ln>
+          </p:spPr>
+          <p:txBody>
+            <a:bodyPr/>
+            <a:lstStyle/>
+            <a:p/>
+          </p:txBody>
+        </p:sp>
+        <p:sp>
+          <p:nvSpPr>
+            <p:cNvPr id="57" name="pl57"/>
+            <p:cNvSpPr/>
+            <p:nvPr/>
+          </p:nvSpPr>
+          <p:spPr>
+            <a:xfrm>
+              <a:off x="1214120" y="4336484"/>
+              <a:ext cx="0" cy="1317069"/>
+            </a:xfrm>
+            <a:custGeom>
+              <a:avLst/>
+              <a:pathLst>
+                <a:path w="0" h="1317069">
+                  <a:moveTo>
+                    <a:pt x="0" y="1317069"/>
+                  </a:moveTo>
+                  <a:lnTo>
+                    <a:pt x="0" y="0"/>
+                  </a:lnTo>
+                  <a:lnTo>
+                    <a:pt x="0" y="0"/>
+                  </a:lnTo>
+                </a:path>
+              </a:pathLst>
+            </a:custGeom>
+            <a:ln w="13550" cap="flat">
+              <a:solidFill>
+                <a:srgbClr val="EBEBEB">
+                  <a:alpha val="100000"/>
+                </a:srgbClr>
+              </a:solidFill>
+              <a:prstDash val="solid"/>
+              <a:round/>
+            </a:ln>
+          </p:spPr>
+          <p:txBody>
+            <a:bodyPr/>
+            <a:lstStyle/>
+            <a:p/>
+          </p:txBody>
+        </p:sp>
+        <p:sp>
+          <p:nvSpPr>
+            <p:cNvPr id="58" name="pl58"/>
+            <p:cNvSpPr/>
+            <p:nvPr/>
+          </p:nvSpPr>
+          <p:spPr>
+            <a:xfrm>
+              <a:off x="2059406" y="4336484"/>
+              <a:ext cx="0" cy="1317069"/>
+            </a:xfrm>
+            <a:custGeom>
+              <a:avLst/>
+              <a:pathLst>
+                <a:path w="0" h="1317069">
+                  <a:moveTo>
+                    <a:pt x="0" y="1317069"/>
+                  </a:moveTo>
+                  <a:lnTo>
+                    <a:pt x="0" y="0"/>
+                  </a:lnTo>
+                  <a:lnTo>
+                    <a:pt x="0" y="0"/>
+                  </a:lnTo>
+                </a:path>
+              </a:pathLst>
+            </a:custGeom>
+            <a:ln w="13550" cap="flat">
+              <a:solidFill>
+                <a:srgbClr val="EBEBEB">
+                  <a:alpha val="100000"/>
+                </a:srgbClr>
+              </a:solidFill>
+              <a:prstDash val="solid"/>
+              <a:round/>
+            </a:ln>
+          </p:spPr>
+          <p:txBody>
+            <a:bodyPr/>
+            <a:lstStyle/>
+            <a:p/>
+          </p:txBody>
+        </p:sp>
+        <p:sp>
+          <p:nvSpPr>
+            <p:cNvPr id="59" name="pl59"/>
+            <p:cNvSpPr/>
+            <p:nvPr/>
+          </p:nvSpPr>
+          <p:spPr>
+            <a:xfrm>
+              <a:off x="2904693" y="4336484"/>
+              <a:ext cx="0" cy="1317069"/>
+            </a:xfrm>
+            <a:custGeom>
+              <a:avLst/>
+              <a:pathLst>
+                <a:path w="0" h="1317069">
+                  <a:moveTo>
+                    <a:pt x="0" y="1317069"/>
+                  </a:moveTo>
+                  <a:lnTo>
+                    <a:pt x="0" y="0"/>
+                  </a:lnTo>
+                  <a:lnTo>
+                    <a:pt x="0" y="0"/>
+                  </a:lnTo>
+                </a:path>
+              </a:pathLst>
+            </a:custGeom>
+            <a:ln w="13550" cap="flat">
+              <a:solidFill>
+                <a:srgbClr val="EBEBEB">
+                  <a:alpha val="100000"/>
+                </a:srgbClr>
+              </a:solidFill>
+              <a:prstDash val="solid"/>
+              <a:round/>
+            </a:ln>
+          </p:spPr>
+          <p:txBody>
+            <a:bodyPr/>
+            <a:lstStyle/>
+            <a:p/>
+          </p:txBody>
+        </p:sp>
+        <p:sp>
+          <p:nvSpPr>
+            <p:cNvPr id="60" name="pl60"/>
+            <p:cNvSpPr/>
+            <p:nvPr/>
+          </p:nvSpPr>
+          <p:spPr>
+            <a:xfrm>
+              <a:off x="3749979" y="4336484"/>
+              <a:ext cx="0" cy="1317069"/>
+            </a:xfrm>
+            <a:custGeom>
+              <a:avLst/>
+              <a:pathLst>
+                <a:path w="0" h="1317069">
+                  <a:moveTo>
+                    <a:pt x="0" y="1317069"/>
+                  </a:moveTo>
+                  <a:lnTo>
+                    <a:pt x="0" y="0"/>
+                  </a:lnTo>
+                  <a:lnTo>
+                    <a:pt x="0" y="0"/>
+                  </a:lnTo>
+                </a:path>
+              </a:pathLst>
+            </a:custGeom>
+            <a:ln w="13550" cap="flat">
+              <a:solidFill>
+                <a:srgbClr val="EBEBEB">
+                  <a:alpha val="100000"/>
+                </a:srgbClr>
+              </a:solidFill>
+              <a:prstDash val="solid"/>
+              <a:round/>
+            </a:ln>
+          </p:spPr>
+          <p:txBody>
+            <a:bodyPr/>
+            <a:lstStyle/>
+            <a:p/>
+          </p:txBody>
+        </p:sp>
+        <p:sp>
+          <p:nvSpPr>
+            <p:cNvPr id="61" name="pl61"/>
+            <p:cNvSpPr/>
+            <p:nvPr/>
+          </p:nvSpPr>
+          <p:spPr>
+            <a:xfrm>
+              <a:off x="4595266" y="4336484"/>
+              <a:ext cx="0" cy="1317069"/>
+            </a:xfrm>
+            <a:custGeom>
+              <a:avLst/>
+              <a:pathLst>
+                <a:path w="0" h="1317069">
+                  <a:moveTo>
+                    <a:pt x="0" y="1317069"/>
+                  </a:moveTo>
+                  <a:lnTo>
+                    <a:pt x="0" y="0"/>
+                  </a:lnTo>
+                  <a:lnTo>
+                    <a:pt x="0" y="0"/>
+                  </a:lnTo>
+                </a:path>
+              </a:pathLst>
+            </a:custGeom>
+            <a:ln w="13550" cap="flat">
+              <a:solidFill>
+                <a:srgbClr val="EBEBEB">
+                  <a:alpha val="100000"/>
+                </a:srgbClr>
+              </a:solidFill>
+              <a:prstDash val="solid"/>
+              <a:round/>
+            </a:ln>
+          </p:spPr>
+          <p:txBody>
+            <a:bodyPr/>
+            <a:lstStyle/>
+            <a:p/>
+          </p:txBody>
+        </p:sp>
+        <p:sp>
+          <p:nvSpPr>
+            <p:cNvPr id="62" name="pl62"/>
+            <p:cNvSpPr/>
+            <p:nvPr/>
+          </p:nvSpPr>
+          <p:spPr>
+            <a:xfrm>
+              <a:off x="5440552" y="4336484"/>
+              <a:ext cx="0" cy="1317069"/>
+            </a:xfrm>
+            <a:custGeom>
+              <a:avLst/>
+              <a:pathLst>
+                <a:path w="0" h="1317069">
+                  <a:moveTo>
+                    <a:pt x="0" y="1317069"/>
+                  </a:moveTo>
+                  <a:lnTo>
+                    <a:pt x="0" y="0"/>
+                  </a:lnTo>
+                  <a:lnTo>
+                    <a:pt x="0" y="0"/>
+                  </a:lnTo>
+                </a:path>
+              </a:pathLst>
+            </a:custGeom>
+            <a:ln w="13550" cap="flat">
+              <a:solidFill>
+                <a:srgbClr val="EBEBEB">
+                  <a:alpha val="100000"/>
+                </a:srgbClr>
+              </a:solidFill>
+              <a:prstDash val="solid"/>
+              <a:round/>
+            </a:ln>
+          </p:spPr>
+          <p:txBody>
+            <a:bodyPr/>
+            <a:lstStyle/>
+            <a:p/>
+          </p:txBody>
+        </p:sp>
+        <p:sp>
+          <p:nvSpPr>
+            <p:cNvPr id="63" name="pl63"/>
+            <p:cNvSpPr/>
+            <p:nvPr/>
+          </p:nvSpPr>
+          <p:spPr>
+            <a:xfrm>
+              <a:off x="6285838" y="4336484"/>
+              <a:ext cx="0" cy="1317069"/>
+            </a:xfrm>
+            <a:custGeom>
+              <a:avLst/>
+              <a:pathLst>
+                <a:path w="0" h="1317069">
+                  <a:moveTo>
+                    <a:pt x="0" y="1317069"/>
+                  </a:moveTo>
+                  <a:lnTo>
+                    <a:pt x="0" y="0"/>
+                  </a:lnTo>
+                  <a:lnTo>
+                    <a:pt x="0" y="0"/>
+                  </a:lnTo>
+                </a:path>
+              </a:pathLst>
+            </a:custGeom>
+            <a:ln w="13550" cap="flat">
+              <a:solidFill>
+                <a:srgbClr val="EBEBEB">
+                  <a:alpha val="100000"/>
+                </a:srgbClr>
+              </a:solidFill>
+              <a:prstDash val="solid"/>
+              <a:round/>
+            </a:ln>
+          </p:spPr>
+          <p:txBody>
+            <a:bodyPr/>
+            <a:lstStyle/>
+            <a:p/>
+          </p:txBody>
+        </p:sp>
+        <p:sp>
+          <p:nvSpPr>
+            <p:cNvPr id="64" name="pl64"/>
+            <p:cNvSpPr/>
+            <p:nvPr/>
+          </p:nvSpPr>
+          <p:spPr>
+            <a:xfrm>
+              <a:off x="7131125" y="4336484"/>
+              <a:ext cx="0" cy="1317069"/>
+            </a:xfrm>
+            <a:custGeom>
+              <a:avLst/>
+              <a:pathLst>
+                <a:path w="0" h="1317069">
+                  <a:moveTo>
+                    <a:pt x="0" y="1317069"/>
+                  </a:moveTo>
+                  <a:lnTo>
+                    <a:pt x="0" y="0"/>
+                  </a:lnTo>
+                  <a:lnTo>
+                    <a:pt x="0" y="0"/>
+                  </a:lnTo>
+                </a:path>
+              </a:pathLst>
+            </a:custGeom>
+            <a:ln w="13550" cap="flat">
+              <a:solidFill>
+                <a:srgbClr val="EBEBEB">
+                  <a:alpha val="100000"/>
+                </a:srgbClr>
+              </a:solidFill>
+              <a:prstDash val="solid"/>
+              <a:round/>
+            </a:ln>
+          </p:spPr>
+          <p:txBody>
+            <a:bodyPr/>
+            <a:lstStyle/>
+            <a:p/>
+          </p:txBody>
+        </p:sp>
+        <p:sp>
+          <p:nvSpPr>
+            <p:cNvPr id="65" name="pl65"/>
+            <p:cNvSpPr/>
+            <p:nvPr/>
+          </p:nvSpPr>
+          <p:spPr>
+            <a:xfrm>
+              <a:off x="7976411" y="4336484"/>
+              <a:ext cx="0" cy="1317069"/>
+            </a:xfrm>
+            <a:custGeom>
+              <a:avLst/>
+              <a:pathLst>
+                <a:path w="0" h="1317069">
+                  <a:moveTo>
+                    <a:pt x="0" y="1317069"/>
+                  </a:moveTo>
+                  <a:lnTo>
+                    <a:pt x="0" y="0"/>
+                  </a:lnTo>
+                  <a:lnTo>
+                    <a:pt x="0" y="0"/>
+                  </a:lnTo>
+                </a:path>
+              </a:pathLst>
+            </a:custGeom>
+            <a:ln w="13550" cap="flat">
+              <a:solidFill>
+                <a:srgbClr val="EBEBEB">
+                  <a:alpha val="100000"/>
+                </a:srgbClr>
+              </a:solidFill>
+              <a:prstDash val="solid"/>
+              <a:round/>
+            </a:ln>
+          </p:spPr>
+          <p:txBody>
+            <a:bodyPr/>
+            <a:lstStyle/>
+            <a:p/>
+          </p:txBody>
+        </p:sp>
+        <p:sp>
+          <p:nvSpPr>
+            <p:cNvPr id="66" name="pg66"/>
+            <p:cNvSpPr/>
+            <p:nvPr/>
+          </p:nvSpPr>
+          <p:spPr>
+            <a:xfrm>
+              <a:off x="1235312" y="4336484"/>
+              <a:ext cx="6964104" cy="1212433"/>
+            </a:xfrm>
+            <a:custGeom>
+              <a:avLst/>
+              <a:pathLst>
+                <a:path w="6964104" h="1212433">
+                  <a:moveTo>
+                    <a:pt x="629405" y="0"/>
+                  </a:moveTo>
+                  <a:lnTo>
+                    <a:pt x="633100" y="2486"/>
+                  </a:lnTo>
+                  <a:lnTo>
+                    <a:pt x="703444" y="48105"/>
+                  </a:lnTo>
+                  <a:lnTo>
+                    <a:pt x="773789" y="92065"/>
+                  </a:lnTo>
+                  <a:lnTo>
+                    <a:pt x="844133" y="134426"/>
+                  </a:lnTo>
+                  <a:lnTo>
+                    <a:pt x="914478" y="175248"/>
+                  </a:lnTo>
+                  <a:lnTo>
+                    <a:pt x="984822" y="214585"/>
+                  </a:lnTo>
+                  <a:lnTo>
+                    <a:pt x="1055167" y="252492"/>
+                  </a:lnTo>
+                  <a:lnTo>
+                    <a:pt x="1125511" y="289021"/>
+                  </a:lnTo>
+                  <a:lnTo>
+                    <a:pt x="1195856" y="324222"/>
+                  </a:lnTo>
+                  <a:lnTo>
+                    <a:pt x="1266200" y="358143"/>
+                  </a:lnTo>
+                  <a:lnTo>
+                    <a:pt x="1336545" y="390830"/>
+                  </a:lnTo>
+                  <a:lnTo>
+                    <a:pt x="1406889" y="422330"/>
+                  </a:lnTo>
+                  <a:lnTo>
+                    <a:pt x="1477234" y="452683"/>
+                  </a:lnTo>
+                  <a:lnTo>
+                    <a:pt x="1547578" y="481934"/>
+                  </a:lnTo>
+                  <a:lnTo>
+                    <a:pt x="1617923" y="510121"/>
+                  </a:lnTo>
+                  <a:lnTo>
+                    <a:pt x="1688267" y="537283"/>
+                  </a:lnTo>
+                  <a:lnTo>
+                    <a:pt x="1758612" y="563457"/>
+                  </a:lnTo>
+                  <a:lnTo>
+                    <a:pt x="1828956" y="588680"/>
+                  </a:lnTo>
+                  <a:lnTo>
+                    <a:pt x="1899301" y="612986"/>
+                  </a:lnTo>
+                  <a:lnTo>
+                    <a:pt x="1969645" y="636408"/>
+                  </a:lnTo>
+                  <a:lnTo>
+                    <a:pt x="2039990" y="658979"/>
+                  </a:lnTo>
+                  <a:lnTo>
+                    <a:pt x="2110334" y="680729"/>
+                  </a:lnTo>
+                  <a:lnTo>
+                    <a:pt x="2180679" y="701688"/>
+                  </a:lnTo>
+                  <a:lnTo>
+                    <a:pt x="2251023" y="721885"/>
+                  </a:lnTo>
+                  <a:lnTo>
+                    <a:pt x="2321368" y="741348"/>
+                  </a:lnTo>
+                  <a:lnTo>
+                    <a:pt x="2391712" y="760103"/>
+                  </a:lnTo>
+                  <a:lnTo>
+                    <a:pt x="2462057" y="778177"/>
+                  </a:lnTo>
+                  <a:lnTo>
+                    <a:pt x="2532401" y="795593"/>
+                  </a:lnTo>
+                  <a:lnTo>
+                    <a:pt x="2602746" y="812376"/>
+                  </a:lnTo>
+                  <a:lnTo>
+                    <a:pt x="2673090" y="828549"/>
+                  </a:lnTo>
+                  <a:lnTo>
+                    <a:pt x="2743435" y="844133"/>
+                  </a:lnTo>
+                  <a:lnTo>
+                    <a:pt x="2813779" y="859152"/>
+                  </a:lnTo>
+                  <a:lnTo>
+                    <a:pt x="2884124" y="873624"/>
+                  </a:lnTo>
+                  <a:lnTo>
+                    <a:pt x="2954468" y="887570"/>
+                  </a:lnTo>
+                  <a:lnTo>
+                    <a:pt x="3024813" y="901009"/>
+                  </a:lnTo>
+                  <a:lnTo>
+                    <a:pt x="3095157" y="913959"/>
+                  </a:lnTo>
+                  <a:lnTo>
+                    <a:pt x="3165502" y="926438"/>
+                  </a:lnTo>
+                  <a:lnTo>
+                    <a:pt x="3235846" y="938464"/>
+                  </a:lnTo>
+                  <a:lnTo>
+                    <a:pt x="3306191" y="950053"/>
+                  </a:lnTo>
+                  <a:lnTo>
+                    <a:pt x="3376535" y="959061"/>
+                  </a:lnTo>
+                  <a:lnTo>
+                    <a:pt x="3446880" y="962952"/>
+                  </a:lnTo>
+                  <a:lnTo>
+                    <a:pt x="3517224" y="966793"/>
+                  </a:lnTo>
+                  <a:lnTo>
+                    <a:pt x="3587569" y="970583"/>
+                  </a:lnTo>
+                  <a:lnTo>
+                    <a:pt x="3657913" y="974323"/>
+                  </a:lnTo>
+                  <a:lnTo>
+                    <a:pt x="3728257" y="978015"/>
+                  </a:lnTo>
+                  <a:lnTo>
+                    <a:pt x="3798602" y="981659"/>
+                  </a:lnTo>
+                  <a:lnTo>
+                    <a:pt x="3868946" y="985255"/>
+                  </a:lnTo>
+                  <a:lnTo>
+                    <a:pt x="3939291" y="988804"/>
+                  </a:lnTo>
+                  <a:lnTo>
+                    <a:pt x="4009635" y="992307"/>
+                  </a:lnTo>
+                  <a:lnTo>
+                    <a:pt x="4079980" y="995764"/>
+                  </a:lnTo>
+                  <a:lnTo>
+                    <a:pt x="4150324" y="999176"/>
+                  </a:lnTo>
+                  <a:lnTo>
+                    <a:pt x="4220669" y="1002544"/>
+                  </a:lnTo>
+                  <a:lnTo>
+                    <a:pt x="4291013" y="1005867"/>
+                  </a:lnTo>
+                  <a:lnTo>
+                    <a:pt x="4361358" y="1009147"/>
+                  </a:lnTo>
+                  <a:lnTo>
+                    <a:pt x="4431702" y="1012385"/>
+                  </a:lnTo>
+                  <a:lnTo>
+                    <a:pt x="4502047" y="1015580"/>
+                  </a:lnTo>
+                  <a:lnTo>
+                    <a:pt x="4572391" y="1018733"/>
+                  </a:lnTo>
+                  <a:lnTo>
+                    <a:pt x="4642736" y="1021845"/>
+                  </a:lnTo>
+                  <a:lnTo>
+                    <a:pt x="4713080" y="1024917"/>
+                  </a:lnTo>
+                  <a:lnTo>
+                    <a:pt x="4783425" y="1027949"/>
+                  </a:lnTo>
+                  <a:lnTo>
+                    <a:pt x="4853769" y="1030940"/>
+                  </a:lnTo>
+                  <a:lnTo>
+                    <a:pt x="4924114" y="1033893"/>
+                  </a:lnTo>
+                  <a:lnTo>
+                    <a:pt x="4994458" y="1036808"/>
+                  </a:lnTo>
+                  <a:lnTo>
+                    <a:pt x="5064803" y="1039684"/>
+                  </a:lnTo>
+                  <a:lnTo>
+                    <a:pt x="5135147" y="1042523"/>
+                  </a:lnTo>
+                  <a:lnTo>
+                    <a:pt x="5205492" y="1045325"/>
+                  </a:lnTo>
+                  <a:lnTo>
+                    <a:pt x="5275836" y="1048090"/>
+                  </a:lnTo>
+                  <a:lnTo>
+                    <a:pt x="5346181" y="1050819"/>
+                  </a:lnTo>
+                  <a:lnTo>
+                    <a:pt x="5416525" y="1053513"/>
+                  </a:lnTo>
+                  <a:lnTo>
+                    <a:pt x="5486870" y="1056171"/>
+                  </a:lnTo>
+                  <a:lnTo>
+                    <a:pt x="5557214" y="1058795"/>
+                  </a:lnTo>
+                  <a:lnTo>
+                    <a:pt x="5627559" y="1061384"/>
+                  </a:lnTo>
+                  <a:lnTo>
+                    <a:pt x="5697903" y="1063940"/>
+                  </a:lnTo>
+                  <a:lnTo>
+                    <a:pt x="5768248" y="1066462"/>
+                  </a:lnTo>
+                  <a:lnTo>
+                    <a:pt x="5838592" y="1068951"/>
+                  </a:lnTo>
+                  <a:lnTo>
+                    <a:pt x="5908937" y="1071408"/>
+                  </a:lnTo>
+                  <a:lnTo>
+                    <a:pt x="5979281" y="1073833"/>
+                  </a:lnTo>
+                  <a:lnTo>
+                    <a:pt x="6049626" y="1076226"/>
+                  </a:lnTo>
+                  <a:lnTo>
+                    <a:pt x="6119970" y="1078588"/>
+                  </a:lnTo>
+                  <a:lnTo>
+                    <a:pt x="6190315" y="1080919"/>
+                  </a:lnTo>
+                  <a:lnTo>
+                    <a:pt x="6260659" y="1083220"/>
+                  </a:lnTo>
+                  <a:lnTo>
+                    <a:pt x="6331004" y="1085490"/>
+                  </a:lnTo>
+                  <a:lnTo>
+                    <a:pt x="6401348" y="1087731"/>
+                  </a:lnTo>
+                  <a:lnTo>
+                    <a:pt x="6471693" y="1089943"/>
+                  </a:lnTo>
+                  <a:lnTo>
+                    <a:pt x="6542037" y="1092126"/>
+                  </a:lnTo>
+                  <a:lnTo>
+                    <a:pt x="6612382" y="1094280"/>
+                  </a:lnTo>
+                  <a:lnTo>
+                    <a:pt x="6682726" y="1096407"/>
+                  </a:lnTo>
+                  <a:lnTo>
+                    <a:pt x="6753071" y="1098505"/>
+                  </a:lnTo>
+                  <a:lnTo>
+                    <a:pt x="6823415" y="1100576"/>
+                  </a:lnTo>
+                  <a:lnTo>
+                    <a:pt x="6893760" y="1102620"/>
+                  </a:lnTo>
+                  <a:lnTo>
+                    <a:pt x="6964104" y="1104638"/>
+                  </a:lnTo>
+                  <a:lnTo>
+                    <a:pt x="6964104" y="1212433"/>
+                  </a:lnTo>
+                  <a:lnTo>
+                    <a:pt x="6893760" y="1210744"/>
+                  </a:lnTo>
+                  <a:lnTo>
+                    <a:pt x="6823415" y="1208991"/>
+                  </a:lnTo>
+                  <a:lnTo>
+                    <a:pt x="6753071" y="1207172"/>
+                  </a:lnTo>
+                  <a:lnTo>
+                    <a:pt x="6682726" y="1205285"/>
+                  </a:lnTo>
+                  <a:lnTo>
+                    <a:pt x="6612382" y="1203326"/>
+                  </a:lnTo>
+                  <a:lnTo>
+                    <a:pt x="6542037" y="1201293"/>
+                  </a:lnTo>
+                  <a:lnTo>
+                    <a:pt x="6471693" y="1199184"/>
+                  </a:lnTo>
+                  <a:lnTo>
+                    <a:pt x="6401348" y="1196995"/>
+                  </a:lnTo>
+                  <a:lnTo>
+                    <a:pt x="6331004" y="1194723"/>
+                  </a:lnTo>
+                  <a:lnTo>
+                    <a:pt x="6260659" y="1192366"/>
+                  </a:lnTo>
+                  <a:lnTo>
+                    <a:pt x="6190315" y="1189920"/>
+                  </a:lnTo>
+                  <a:lnTo>
+                    <a:pt x="6119970" y="1187381"/>
+                  </a:lnTo>
+                  <a:lnTo>
+                    <a:pt x="6049626" y="1184747"/>
+                  </a:lnTo>
+                  <a:lnTo>
+                    <a:pt x="5979281" y="1182013"/>
+                  </a:lnTo>
+                  <a:lnTo>
+                    <a:pt x="5908937" y="1179176"/>
+                  </a:lnTo>
+                  <a:lnTo>
+                    <a:pt x="5838592" y="1176232"/>
+                  </a:lnTo>
+                  <a:lnTo>
+                    <a:pt x="5768248" y="1173177"/>
+                  </a:lnTo>
+                  <a:lnTo>
+                    <a:pt x="5697903" y="1170007"/>
+                  </a:lnTo>
+                  <a:lnTo>
+                    <a:pt x="5627559" y="1166717"/>
+                  </a:lnTo>
+                  <a:lnTo>
+                    <a:pt x="5557214" y="1163304"/>
+                  </a:lnTo>
+                  <a:lnTo>
+                    <a:pt x="5486870" y="1159761"/>
+                  </a:lnTo>
+                  <a:lnTo>
+                    <a:pt x="5416525" y="1156084"/>
+                  </a:lnTo>
+                  <a:lnTo>
+                    <a:pt x="5346181" y="1152269"/>
+                  </a:lnTo>
+                  <a:lnTo>
+                    <a:pt x="5275836" y="1148310"/>
+                  </a:lnTo>
+                  <a:lnTo>
+                    <a:pt x="5205492" y="1144202"/>
+                  </a:lnTo>
+                  <a:lnTo>
+                    <a:pt x="5135147" y="1139938"/>
+                  </a:lnTo>
+                  <a:lnTo>
+                    <a:pt x="5064803" y="1135514"/>
+                  </a:lnTo>
+                  <a:lnTo>
+                    <a:pt x="4994458" y="1130923"/>
+                  </a:lnTo>
+                  <a:lnTo>
+                    <a:pt x="4924114" y="1126159"/>
+                  </a:lnTo>
+                  <a:lnTo>
+                    <a:pt x="4853769" y="1121214"/>
+                  </a:lnTo>
+                  <a:lnTo>
+                    <a:pt x="4783425" y="1116084"/>
+                  </a:lnTo>
+                  <a:lnTo>
+                    <a:pt x="4713080" y="1110759"/>
+                  </a:lnTo>
+                  <a:lnTo>
+                    <a:pt x="4642736" y="1105234"/>
+                  </a:lnTo>
+                  <a:lnTo>
+                    <a:pt x="4572391" y="1099501"/>
+                  </a:lnTo>
+                  <a:lnTo>
+                    <a:pt x="4502047" y="1093551"/>
+                  </a:lnTo>
+                  <a:lnTo>
+                    <a:pt x="4431702" y="1087376"/>
+                  </a:lnTo>
+                  <a:lnTo>
+                    <a:pt x="4361358" y="1080969"/>
+                  </a:lnTo>
+                  <a:lnTo>
+                    <a:pt x="4291013" y="1074320"/>
+                  </a:lnTo>
+                  <a:lnTo>
+                    <a:pt x="4220669" y="1067419"/>
+                  </a:lnTo>
+                  <a:lnTo>
+                    <a:pt x="4150324" y="1060259"/>
+                  </a:lnTo>
+                  <a:lnTo>
+                    <a:pt x="4079980" y="1052829"/>
+                  </a:lnTo>
+                  <a:lnTo>
+                    <a:pt x="4009635" y="1045118"/>
+                  </a:lnTo>
+                  <a:lnTo>
+                    <a:pt x="3939291" y="1037116"/>
+                  </a:lnTo>
+                  <a:lnTo>
+                    <a:pt x="3868946" y="1028812"/>
+                  </a:lnTo>
+                  <a:lnTo>
+                    <a:pt x="3798602" y="1020195"/>
+                  </a:lnTo>
+                  <a:lnTo>
+                    <a:pt x="3728257" y="1011253"/>
+                  </a:lnTo>
+                  <a:lnTo>
+                    <a:pt x="3657913" y="1001974"/>
+                  </a:lnTo>
+                  <a:lnTo>
+                    <a:pt x="3587569" y="992344"/>
+                  </a:lnTo>
+                  <a:lnTo>
+                    <a:pt x="3517224" y="982351"/>
+                  </a:lnTo>
+                  <a:lnTo>
+                    <a:pt x="3446880" y="971981"/>
+                  </a:lnTo>
+                  <a:lnTo>
+                    <a:pt x="3376535" y="961220"/>
+                  </a:lnTo>
+                  <a:lnTo>
+                    <a:pt x="3306191" y="955119"/>
+                  </a:lnTo>
+                  <a:lnTo>
+                    <a:pt x="3235846" y="951124"/>
+                  </a:lnTo>
+                  <a:lnTo>
+                    <a:pt x="3165502" y="947077"/>
+                  </a:lnTo>
+                  <a:lnTo>
+                    <a:pt x="3095157" y="942976"/>
+                  </a:lnTo>
+                  <a:lnTo>
+                    <a:pt x="3024813" y="938821"/>
+                  </a:lnTo>
+                  <a:lnTo>
+                    <a:pt x="2954468" y="934610"/>
+                  </a:lnTo>
+                  <a:lnTo>
+                    <a:pt x="2884124" y="930345"/>
+                  </a:lnTo>
+                  <a:lnTo>
+                    <a:pt x="2813779" y="926022"/>
+                  </a:lnTo>
+                  <a:lnTo>
+                    <a:pt x="2743435" y="921643"/>
+                  </a:lnTo>
+                  <a:lnTo>
+                    <a:pt x="2673090" y="917206"/>
+                  </a:lnTo>
+                  <a:lnTo>
+                    <a:pt x="2602746" y="912710"/>
+                  </a:lnTo>
+                  <a:lnTo>
+                    <a:pt x="2532401" y="908154"/>
+                  </a:lnTo>
+                  <a:lnTo>
+                    <a:pt x="2462057" y="903539"/>
+                  </a:lnTo>
+                  <a:lnTo>
+                    <a:pt x="2391712" y="898862"/>
+                  </a:lnTo>
+                  <a:lnTo>
+                    <a:pt x="2321368" y="894124"/>
+                  </a:lnTo>
+                  <a:lnTo>
+                    <a:pt x="2251023" y="889322"/>
+                  </a:lnTo>
+                  <a:lnTo>
+                    <a:pt x="2180679" y="884458"/>
+                  </a:lnTo>
+                  <a:lnTo>
+                    <a:pt x="2110334" y="879529"/>
+                  </a:lnTo>
+                  <a:lnTo>
+                    <a:pt x="2039990" y="874535"/>
+                  </a:lnTo>
+                  <a:lnTo>
+                    <a:pt x="1969645" y="869474"/>
+                  </a:lnTo>
+                  <a:lnTo>
+                    <a:pt x="1899301" y="864347"/>
+                  </a:lnTo>
+                  <a:lnTo>
+                    <a:pt x="1828956" y="859152"/>
+                  </a:lnTo>
+                  <a:lnTo>
+                    <a:pt x="1758612" y="853889"/>
+                  </a:lnTo>
+                  <a:lnTo>
+                    <a:pt x="1688267" y="848556"/>
+                  </a:lnTo>
+                  <a:lnTo>
+                    <a:pt x="1617923" y="843152"/>
+                  </a:lnTo>
+                  <a:lnTo>
+                    <a:pt x="1547578" y="837677"/>
+                  </a:lnTo>
+                  <a:lnTo>
+                    <a:pt x="1477234" y="832129"/>
+                  </a:lnTo>
+                  <a:lnTo>
+                    <a:pt x="1406889" y="826508"/>
+                  </a:lnTo>
+                  <a:lnTo>
+                    <a:pt x="1336545" y="820813"/>
+                  </a:lnTo>
+                  <a:lnTo>
+                    <a:pt x="1266200" y="815042"/>
+                  </a:lnTo>
+                  <a:lnTo>
+                    <a:pt x="1195856" y="809195"/>
+                  </a:lnTo>
+                  <a:lnTo>
+                    <a:pt x="1125511" y="803271"/>
+                  </a:lnTo>
+                  <a:lnTo>
+                    <a:pt x="1055167" y="797268"/>
+                  </a:lnTo>
+                  <a:lnTo>
+                    <a:pt x="984822" y="791186"/>
+                  </a:lnTo>
+                  <a:lnTo>
+                    <a:pt x="914478" y="785024"/>
+                  </a:lnTo>
+                  <a:lnTo>
+                    <a:pt x="844133" y="778780"/>
+                  </a:lnTo>
+                  <a:lnTo>
+                    <a:pt x="773789" y="772454"/>
+                  </a:lnTo>
+                  <a:lnTo>
+                    <a:pt x="703444" y="766044"/>
+                  </a:lnTo>
+                  <a:lnTo>
+                    <a:pt x="633100" y="759549"/>
+                  </a:lnTo>
+                  <a:lnTo>
+                    <a:pt x="562755" y="752968"/>
+                  </a:lnTo>
+                  <a:lnTo>
+                    <a:pt x="492411" y="746300"/>
+                  </a:lnTo>
+                  <a:lnTo>
+                    <a:pt x="422066" y="739544"/>
+                  </a:lnTo>
+                  <a:lnTo>
+                    <a:pt x="351722" y="732699"/>
+                  </a:lnTo>
+                  <a:lnTo>
+                    <a:pt x="281377" y="725763"/>
+                  </a:lnTo>
+                  <a:lnTo>
+                    <a:pt x="211033" y="718736"/>
+                  </a:lnTo>
+                  <a:lnTo>
+                    <a:pt x="140688" y="711615"/>
+                  </a:lnTo>
+                  <a:lnTo>
+                    <a:pt x="70344" y="704401"/>
+                  </a:lnTo>
+                  <a:lnTo>
+                    <a:pt x="0" y="697091"/>
+                  </a:lnTo>
+                  <a:close/>
+                </a:path>
+              </a:pathLst>
+            </a:custGeom>
+            <a:solidFill>
+              <a:srgbClr val="FF8C00">
+                <a:alpha val="20000"/>
+              </a:srgbClr>
+            </a:solidFill>
+          </p:spPr>
+          <p:txBody>
+            <a:bodyPr/>
+            <a:lstStyle/>
+            <a:p/>
+          </p:txBody>
+        </p:sp>
+        <p:sp>
+          <p:nvSpPr>
+            <p:cNvPr id="67" name="pl67"/>
+            <p:cNvSpPr/>
+            <p:nvPr/>
+          </p:nvSpPr>
+          <p:spPr>
+            <a:xfrm>
+              <a:off x="1864717" y="4336484"/>
+              <a:ext cx="6334699" cy="1104638"/>
+            </a:xfrm>
+            <a:custGeom>
+              <a:avLst/>
+              <a:pathLst>
+                <a:path w="6334699" h="1104638">
+                  <a:moveTo>
+                    <a:pt x="0" y="0"/>
+                  </a:moveTo>
+                  <a:lnTo>
+                    <a:pt x="3695" y="2486"/>
+                  </a:lnTo>
+                  <a:lnTo>
+                    <a:pt x="74039" y="48105"/>
+                  </a:lnTo>
+                  <a:lnTo>
+                    <a:pt x="144384" y="92065"/>
+                  </a:lnTo>
+                  <a:lnTo>
+                    <a:pt x="214728" y="134426"/>
+                  </a:lnTo>
+                  <a:lnTo>
+                    <a:pt x="285073" y="175248"/>
+                  </a:lnTo>
+                  <a:lnTo>
+                    <a:pt x="355417" y="214585"/>
+                  </a:lnTo>
+                  <a:lnTo>
+                    <a:pt x="425762" y="252492"/>
+                  </a:lnTo>
+                  <a:lnTo>
+                    <a:pt x="496106" y="289021"/>
+                  </a:lnTo>
+                  <a:lnTo>
+                    <a:pt x="566451" y="324222"/>
+                  </a:lnTo>
+                  <a:lnTo>
+                    <a:pt x="636795" y="358143"/>
+                  </a:lnTo>
+                  <a:lnTo>
+                    <a:pt x="707140" y="390830"/>
+                  </a:lnTo>
+                  <a:lnTo>
+                    <a:pt x="777484" y="422330"/>
+                  </a:lnTo>
+                  <a:lnTo>
+                    <a:pt x="847829" y="452683"/>
+                  </a:lnTo>
+                  <a:lnTo>
+                    <a:pt x="918173" y="481934"/>
+                  </a:lnTo>
+                  <a:lnTo>
+                    <a:pt x="988518" y="510121"/>
+                  </a:lnTo>
+                  <a:lnTo>
+                    <a:pt x="1058862" y="537283"/>
+                  </a:lnTo>
+                  <a:lnTo>
+                    <a:pt x="1129207" y="563457"/>
+                  </a:lnTo>
+                  <a:lnTo>
+                    <a:pt x="1199551" y="588680"/>
+                  </a:lnTo>
+                  <a:lnTo>
+                    <a:pt x="1269896" y="612986"/>
+                  </a:lnTo>
+                  <a:lnTo>
+                    <a:pt x="1340240" y="636408"/>
+                  </a:lnTo>
+                  <a:lnTo>
+                    <a:pt x="1410585" y="658979"/>
+                  </a:lnTo>
+                  <a:lnTo>
+                    <a:pt x="1480929" y="680729"/>
+                  </a:lnTo>
+                  <a:lnTo>
+                    <a:pt x="1551274" y="701688"/>
+                  </a:lnTo>
+                  <a:lnTo>
+                    <a:pt x="1621618" y="721885"/>
+                  </a:lnTo>
+                  <a:lnTo>
+                    <a:pt x="1691963" y="741348"/>
+                  </a:lnTo>
+                  <a:lnTo>
+                    <a:pt x="1762307" y="760103"/>
+                  </a:lnTo>
+                  <a:lnTo>
+                    <a:pt x="1832652" y="778177"/>
+                  </a:lnTo>
+                  <a:lnTo>
+                    <a:pt x="1902996" y="795593"/>
+                  </a:lnTo>
+                  <a:lnTo>
+                    <a:pt x="1973341" y="812376"/>
+                  </a:lnTo>
+                  <a:lnTo>
+                    <a:pt x="2043685" y="828549"/>
+                  </a:lnTo>
+                  <a:lnTo>
+                    <a:pt x="2114030" y="844133"/>
+                  </a:lnTo>
+                  <a:lnTo>
+                    <a:pt x="2184374" y="859152"/>
+                  </a:lnTo>
+                  <a:lnTo>
+                    <a:pt x="2254719" y="873624"/>
+                  </a:lnTo>
+                  <a:lnTo>
+                    <a:pt x="2325063" y="887570"/>
+                  </a:lnTo>
+                  <a:lnTo>
+                    <a:pt x="2395408" y="901009"/>
+                  </a:lnTo>
+                  <a:lnTo>
+                    <a:pt x="2465752" y="913959"/>
+                  </a:lnTo>
+                  <a:lnTo>
+                    <a:pt x="2536097" y="926438"/>
+                  </a:lnTo>
+                  <a:lnTo>
+                    <a:pt x="2606441" y="938464"/>
+                  </a:lnTo>
+                  <a:lnTo>
+                    <a:pt x="2676786" y="950053"/>
+                  </a:lnTo>
+                  <a:lnTo>
+                    <a:pt x="2747130" y="959061"/>
+                  </a:lnTo>
+                  <a:lnTo>
+                    <a:pt x="2817474" y="962952"/>
+                  </a:lnTo>
+                  <a:lnTo>
+                    <a:pt x="2887819" y="966793"/>
+                  </a:lnTo>
+                  <a:lnTo>
+                    <a:pt x="2958163" y="970583"/>
+                  </a:lnTo>
+                  <a:lnTo>
+                    <a:pt x="3028508" y="974323"/>
+                  </a:lnTo>
+                  <a:lnTo>
+                    <a:pt x="3098852" y="978015"/>
+                  </a:lnTo>
+                  <a:lnTo>
+                    <a:pt x="3169197" y="981659"/>
+                  </a:lnTo>
+                  <a:lnTo>
+                    <a:pt x="3239541" y="985255"/>
+                  </a:lnTo>
+                  <a:lnTo>
+                    <a:pt x="3309886" y="988804"/>
+                  </a:lnTo>
+                  <a:lnTo>
+                    <a:pt x="3380230" y="992307"/>
+                  </a:lnTo>
+                  <a:lnTo>
+                    <a:pt x="3450575" y="995764"/>
+                  </a:lnTo>
+                  <a:lnTo>
+                    <a:pt x="3520919" y="999176"/>
+                  </a:lnTo>
+                  <a:lnTo>
+                    <a:pt x="3591264" y="1002544"/>
+                  </a:lnTo>
+                  <a:lnTo>
+                    <a:pt x="3661608" y="1005867"/>
+                  </a:lnTo>
+                  <a:lnTo>
+                    <a:pt x="3731953" y="1009147"/>
+                  </a:lnTo>
+                  <a:lnTo>
+                    <a:pt x="3802297" y="1012385"/>
+                  </a:lnTo>
+                  <a:lnTo>
+                    <a:pt x="3872642" y="1015580"/>
+                  </a:lnTo>
+                  <a:lnTo>
+                    <a:pt x="3942986" y="1018733"/>
+                  </a:lnTo>
+                  <a:lnTo>
+                    <a:pt x="4013331" y="1021845"/>
+                  </a:lnTo>
+                  <a:lnTo>
+                    <a:pt x="4083675" y="1024917"/>
+                  </a:lnTo>
+                  <a:lnTo>
+                    <a:pt x="4154020" y="1027949"/>
+                  </a:lnTo>
+                  <a:lnTo>
+                    <a:pt x="4224364" y="1030940"/>
+                  </a:lnTo>
+                  <a:lnTo>
+                    <a:pt x="4294709" y="1033893"/>
+                  </a:lnTo>
+                  <a:lnTo>
+                    <a:pt x="4365053" y="1036808"/>
+                  </a:lnTo>
+                  <a:lnTo>
+                    <a:pt x="4435398" y="1039684"/>
+                  </a:lnTo>
+                  <a:lnTo>
+                    <a:pt x="4505742" y="1042523"/>
+                  </a:lnTo>
+                  <a:lnTo>
+                    <a:pt x="4576087" y="1045325"/>
+                  </a:lnTo>
+                  <a:lnTo>
+                    <a:pt x="4646431" y="1048090"/>
+                  </a:lnTo>
+                  <a:lnTo>
+                    <a:pt x="4716776" y="1050819"/>
+                  </a:lnTo>
+                  <a:lnTo>
+                    <a:pt x="4787120" y="1053513"/>
+                  </a:lnTo>
+                  <a:lnTo>
+                    <a:pt x="4857465" y="1056171"/>
+                  </a:lnTo>
+                  <a:lnTo>
+                    <a:pt x="4927809" y="1058795"/>
+                  </a:lnTo>
+                  <a:lnTo>
+                    <a:pt x="4998154" y="1061384"/>
+                  </a:lnTo>
+                  <a:lnTo>
+                    <a:pt x="5068498" y="1063940"/>
+                  </a:lnTo>
+                  <a:lnTo>
+                    <a:pt x="5138843" y="1066462"/>
+                  </a:lnTo>
+                  <a:lnTo>
+                    <a:pt x="5209187" y="1068951"/>
+                  </a:lnTo>
+                  <a:lnTo>
+                    <a:pt x="5279532" y="1071408"/>
+                  </a:lnTo>
+                  <a:lnTo>
+                    <a:pt x="5349876" y="1073833"/>
+                  </a:lnTo>
+                  <a:lnTo>
+                    <a:pt x="5420221" y="1076226"/>
+                  </a:lnTo>
+                  <a:lnTo>
+                    <a:pt x="5490565" y="1078588"/>
+                  </a:lnTo>
+                  <a:lnTo>
+                    <a:pt x="5560910" y="1080919"/>
+                  </a:lnTo>
+                  <a:lnTo>
+                    <a:pt x="5631254" y="1083220"/>
+                  </a:lnTo>
+                  <a:lnTo>
+                    <a:pt x="5701599" y="1085490"/>
+                  </a:lnTo>
+                  <a:lnTo>
+                    <a:pt x="5771943" y="1087731"/>
+                  </a:lnTo>
+                  <a:lnTo>
+                    <a:pt x="5842288" y="1089943"/>
+                  </a:lnTo>
+                  <a:lnTo>
+                    <a:pt x="5912632" y="1092126"/>
+                  </a:lnTo>
+                  <a:lnTo>
+                    <a:pt x="5982977" y="1094280"/>
+                  </a:lnTo>
+                  <a:lnTo>
+                    <a:pt x="6053321" y="1096407"/>
+                  </a:lnTo>
+                  <a:lnTo>
+                    <a:pt x="6123666" y="1098505"/>
+                  </a:lnTo>
+                  <a:lnTo>
+                    <a:pt x="6194010" y="1100576"/>
+                  </a:lnTo>
+                  <a:lnTo>
+                    <a:pt x="6264355" y="1102620"/>
+                  </a:lnTo>
+                  <a:lnTo>
+                    <a:pt x="6334699" y="1104638"/>
+                  </a:lnTo>
+                </a:path>
+              </a:pathLst>
+            </a:custGeom>
+          </p:spPr>
+          <p:txBody>
+            <a:bodyPr/>
+            <a:lstStyle/>
+            <a:p/>
+          </p:txBody>
+        </p:sp>
+        <p:sp>
+          <p:nvSpPr>
+            <p:cNvPr id="68" name="pl68"/>
+            <p:cNvSpPr/>
+            <p:nvPr/>
+          </p:nvSpPr>
+          <p:spPr>
+            <a:xfrm>
+              <a:off x="1235312" y="5033575"/>
+              <a:ext cx="6964104" cy="515342"/>
+            </a:xfrm>
+            <a:custGeom>
+              <a:avLst/>
+              <a:pathLst>
+                <a:path w="6964104" h="515342">
+                  <a:moveTo>
+                    <a:pt x="6964104" y="515342"/>
+                  </a:moveTo>
+                  <a:lnTo>
+                    <a:pt x="6893760" y="513653"/>
+                  </a:lnTo>
+                  <a:lnTo>
+                    <a:pt x="6823415" y="511900"/>
+                  </a:lnTo>
+                  <a:lnTo>
+                    <a:pt x="6753071" y="510081"/>
+                  </a:lnTo>
+                  <a:lnTo>
+                    <a:pt x="6682726" y="508193"/>
+                  </a:lnTo>
+                  <a:lnTo>
+                    <a:pt x="6612382" y="506234"/>
+                  </a:lnTo>
+                  <a:lnTo>
+                    <a:pt x="6542037" y="504202"/>
+                  </a:lnTo>
+                  <a:lnTo>
+                    <a:pt x="6471693" y="502092"/>
+                  </a:lnTo>
+                  <a:lnTo>
+                    <a:pt x="6401348" y="499903"/>
+                  </a:lnTo>
+                  <a:lnTo>
+                    <a:pt x="6331004" y="497632"/>
+                  </a:lnTo>
+                  <a:lnTo>
+                    <a:pt x="6260659" y="495274"/>
+                  </a:lnTo>
+                  <a:lnTo>
+                    <a:pt x="6190315" y="492828"/>
+                  </a:lnTo>
+                  <a:lnTo>
+                    <a:pt x="6119970" y="490290"/>
+                  </a:lnTo>
+                  <a:lnTo>
+                    <a:pt x="6049626" y="487655"/>
+                  </a:lnTo>
+                  <a:lnTo>
+                    <a:pt x="5979281" y="484922"/>
+                  </a:lnTo>
+                  <a:lnTo>
+                    <a:pt x="5908937" y="482085"/>
+                  </a:lnTo>
+                  <a:lnTo>
+                    <a:pt x="5838592" y="479141"/>
+                  </a:lnTo>
+                  <a:lnTo>
+                    <a:pt x="5768248" y="476086"/>
+                  </a:lnTo>
+                  <a:lnTo>
+                    <a:pt x="5697903" y="472916"/>
+                  </a:lnTo>
+                  <a:lnTo>
+                    <a:pt x="5627559" y="469626"/>
+                  </a:lnTo>
+                  <a:lnTo>
+                    <a:pt x="5557214" y="466212"/>
+                  </a:lnTo>
+                  <a:lnTo>
+                    <a:pt x="5486870" y="462670"/>
+                  </a:lnTo>
+                  <a:lnTo>
+                    <a:pt x="5416525" y="458993"/>
+                  </a:lnTo>
+                  <a:lnTo>
+                    <a:pt x="5346181" y="455178"/>
+                  </a:lnTo>
+                  <a:lnTo>
+                    <a:pt x="5275836" y="451219"/>
+                  </a:lnTo>
+                  <a:lnTo>
+                    <a:pt x="5205492" y="447111"/>
+                  </a:lnTo>
+                  <a:lnTo>
+                    <a:pt x="5135147" y="442847"/>
+                  </a:lnTo>
+                  <a:lnTo>
+                    <a:pt x="5064803" y="438423"/>
+                  </a:lnTo>
+                  <a:lnTo>
+                    <a:pt x="4994458" y="433832"/>
+                  </a:lnTo>
+                  <a:lnTo>
+                    <a:pt x="4924114" y="429067"/>
+                  </a:lnTo>
+                  <a:lnTo>
+                    <a:pt x="4853769" y="424123"/>
+                  </a:lnTo>
+                  <a:lnTo>
+                    <a:pt x="4783425" y="418992"/>
+                  </a:lnTo>
+                  <a:lnTo>
+                    <a:pt x="4713080" y="413668"/>
+                  </a:lnTo>
+                  <a:lnTo>
+                    <a:pt x="4642736" y="408143"/>
+                  </a:lnTo>
+                  <a:lnTo>
+                    <a:pt x="4572391" y="402409"/>
+                  </a:lnTo>
+                  <a:lnTo>
+                    <a:pt x="4502047" y="396459"/>
+                  </a:lnTo>
+                  <a:lnTo>
+                    <a:pt x="4431702" y="390285"/>
+                  </a:lnTo>
+                  <a:lnTo>
+                    <a:pt x="4361358" y="383877"/>
+                  </a:lnTo>
+                  <a:lnTo>
+                    <a:pt x="4291013" y="377228"/>
+                  </a:lnTo>
+                  <a:lnTo>
+                    <a:pt x="4220669" y="370328"/>
+                  </a:lnTo>
+                  <a:lnTo>
+                    <a:pt x="4150324" y="363168"/>
+                  </a:lnTo>
+                  <a:lnTo>
+                    <a:pt x="4079980" y="355737"/>
+                  </a:lnTo>
+                  <a:lnTo>
+                    <a:pt x="4009635" y="348026"/>
+                  </a:lnTo>
+                  <a:lnTo>
+                    <a:pt x="3939291" y="340025"/>
+                  </a:lnTo>
+                  <a:lnTo>
+                    <a:pt x="3868946" y="331721"/>
+                  </a:lnTo>
+                  <a:lnTo>
+                    <a:pt x="3798602" y="323104"/>
+                  </a:lnTo>
+                  <a:lnTo>
+                    <a:pt x="3728257" y="314162"/>
+                  </a:lnTo>
+                  <a:lnTo>
+                    <a:pt x="3657913" y="304882"/>
+                  </a:lnTo>
+                  <a:lnTo>
+                    <a:pt x="3587569" y="295253"/>
+                  </a:lnTo>
+                  <a:lnTo>
+                    <a:pt x="3517224" y="285260"/>
+                  </a:lnTo>
+                  <a:lnTo>
+                    <a:pt x="3446880" y="274890"/>
+                  </a:lnTo>
+                  <a:lnTo>
+                    <a:pt x="3376535" y="264129"/>
+                  </a:lnTo>
+                  <a:lnTo>
+                    <a:pt x="3306191" y="258028"/>
+                  </a:lnTo>
+                  <a:lnTo>
+                    <a:pt x="3235846" y="254033"/>
+                  </a:lnTo>
+                  <a:lnTo>
+                    <a:pt x="3165502" y="249985"/>
+                  </a:lnTo>
+                  <a:lnTo>
+                    <a:pt x="3095157" y="245885"/>
+                  </a:lnTo>
+                  <a:lnTo>
+                    <a:pt x="3024813" y="241729"/>
+                  </a:lnTo>
+                  <a:lnTo>
+                    <a:pt x="2954468" y="237519"/>
+                  </a:lnTo>
+                  <a:lnTo>
+                    <a:pt x="2884124" y="233253"/>
+                  </a:lnTo>
+                  <a:lnTo>
+                    <a:pt x="2813779" y="228931"/>
+                  </a:lnTo>
+                  <a:lnTo>
+                    <a:pt x="2743435" y="224552"/>
+                  </a:lnTo>
+                  <a:lnTo>
+                    <a:pt x="2673090" y="220115"/>
+                  </a:lnTo>
+                  <a:lnTo>
+                    <a:pt x="2602746" y="215619"/>
+                  </a:lnTo>
+                  <a:lnTo>
+                    <a:pt x="2532401" y="211063"/>
+                  </a:lnTo>
+                  <a:lnTo>
+                    <a:pt x="2462057" y="206448"/>
+                  </a:lnTo>
+                  <a:lnTo>
+                    <a:pt x="2391712" y="201771"/>
+                  </a:lnTo>
+                  <a:lnTo>
+                    <a:pt x="2321368" y="197032"/>
+                  </a:lnTo>
+                  <a:lnTo>
+                    <a:pt x="2251023" y="192231"/>
+                  </a:lnTo>
+                  <a:lnTo>
+                    <a:pt x="2180679" y="187367"/>
+                  </a:lnTo>
+                  <a:lnTo>
+                    <a:pt x="2110334" y="182438"/>
+                  </a:lnTo>
+                  <a:lnTo>
+                    <a:pt x="2039990" y="177443"/>
+                  </a:lnTo>
+                  <a:lnTo>
+                    <a:pt x="1969645" y="172383"/>
+                  </a:lnTo>
+                  <a:lnTo>
+                    <a:pt x="1899301" y="167256"/>
+                  </a:lnTo>
+                  <a:lnTo>
+                    <a:pt x="1828956" y="162061"/>
+                  </a:lnTo>
+                  <a:lnTo>
+                    <a:pt x="1758612" y="156797"/>
+                  </a:lnTo>
+                  <a:lnTo>
+                    <a:pt x="1688267" y="151464"/>
+                  </a:lnTo>
+                  <a:lnTo>
+                    <a:pt x="1617923" y="146060"/>
+                  </a:lnTo>
+                  <a:lnTo>
+                    <a:pt x="1547578" y="140585"/>
+                  </a:lnTo>
+                  <a:lnTo>
+                    <a:pt x="1477234" y="135038"/>
+                  </a:lnTo>
+                  <a:lnTo>
+                    <a:pt x="1406889" y="129417"/>
+                  </a:lnTo>
+                  <a:lnTo>
+                    <a:pt x="1336545" y="123721"/>
+                  </a:lnTo>
+                  <a:lnTo>
+                    <a:pt x="1266200" y="117951"/>
+                  </a:lnTo>
+                  <a:lnTo>
+                    <a:pt x="1195856" y="112104"/>
+                  </a:lnTo>
+                  <a:lnTo>
+                    <a:pt x="1125511" y="106180"/>
+                  </a:lnTo>
+                  <a:lnTo>
+                    <a:pt x="1055167" y="100177"/>
+                  </a:lnTo>
+                  <a:lnTo>
+                    <a:pt x="984822" y="94095"/>
+                  </a:lnTo>
+                  <a:lnTo>
+                    <a:pt x="914478" y="87933"/>
+                  </a:lnTo>
+                  <a:lnTo>
+                    <a:pt x="844133" y="81689"/>
+                  </a:lnTo>
+                  <a:lnTo>
+                    <a:pt x="773789" y="75362"/>
+                  </a:lnTo>
+                  <a:lnTo>
+                    <a:pt x="703444" y="68952"/>
+                  </a:lnTo>
+                  <a:lnTo>
+                    <a:pt x="633100" y="62457"/>
+                  </a:lnTo>
+                  <a:lnTo>
+                    <a:pt x="562755" y="55877"/>
+                  </a:lnTo>
+                  <a:lnTo>
+                    <a:pt x="492411" y="49209"/>
+                  </a:lnTo>
+                  <a:lnTo>
+                    <a:pt x="422066" y="42453"/>
+                  </a:lnTo>
+                  <a:lnTo>
+                    <a:pt x="351722" y="35608"/>
+                  </a:lnTo>
+                  <a:lnTo>
+                    <a:pt x="281377" y="28672"/>
+                  </a:lnTo>
+                  <a:lnTo>
+                    <a:pt x="211033" y="21645"/>
+                  </a:lnTo>
+                  <a:lnTo>
+                    <a:pt x="140688" y="14524"/>
+                  </a:lnTo>
+                  <a:lnTo>
+                    <a:pt x="70344" y="7309"/>
+                  </a:lnTo>
+                  <a:lnTo>
+                    <a:pt x="0" y="0"/>
+                  </a:lnTo>
+                </a:path>
+              </a:pathLst>
+            </a:custGeom>
+          </p:spPr>
+          <p:txBody>
+            <a:bodyPr/>
+            <a:lstStyle/>
+            <a:p/>
+          </p:txBody>
+        </p:sp>
+        <p:sp>
+          <p:nvSpPr>
+            <p:cNvPr id="69" name="pl69"/>
+            <p:cNvSpPr/>
+            <p:nvPr/>
+          </p:nvSpPr>
+          <p:spPr>
+            <a:xfrm>
+              <a:off x="1235312" y="4603338"/>
+              <a:ext cx="6964104" cy="907704"/>
+            </a:xfrm>
+            <a:custGeom>
+              <a:avLst/>
+              <a:pathLst>
+                <a:path w="6964104" h="907704">
+                  <a:moveTo>
+                    <a:pt x="0" y="0"/>
+                  </a:moveTo>
+                  <a:lnTo>
+                    <a:pt x="70344" y="24534"/>
+                  </a:lnTo>
+                  <a:lnTo>
+                    <a:pt x="140688" y="48461"/>
+                  </a:lnTo>
+                  <a:lnTo>
+                    <a:pt x="211033" y="71796"/>
+                  </a:lnTo>
+                  <a:lnTo>
+                    <a:pt x="281377" y="94552"/>
+                  </a:lnTo>
+                  <a:lnTo>
+                    <a:pt x="351722" y="116744"/>
+                  </a:lnTo>
+                  <a:lnTo>
+                    <a:pt x="422066" y="138387"/>
+                  </a:lnTo>
+                  <a:lnTo>
+                    <a:pt x="492411" y="159493"/>
+                  </a:lnTo>
+                  <a:lnTo>
+                    <a:pt x="562755" y="180077"/>
+                  </a:lnTo>
+                  <a:lnTo>
+                    <a:pt x="633100" y="200150"/>
+                  </a:lnTo>
+                  <a:lnTo>
+                    <a:pt x="703444" y="219727"/>
+                  </a:lnTo>
+                  <a:lnTo>
+                    <a:pt x="773789" y="238818"/>
+                  </a:lnTo>
+                  <a:lnTo>
+                    <a:pt x="844133" y="257436"/>
+                  </a:lnTo>
+                  <a:lnTo>
+                    <a:pt x="914478" y="275593"/>
+                  </a:lnTo>
+                  <a:lnTo>
+                    <a:pt x="984822" y="293301"/>
+                  </a:lnTo>
+                  <a:lnTo>
+                    <a:pt x="1055167" y="310569"/>
+                  </a:lnTo>
+                  <a:lnTo>
+                    <a:pt x="1125511" y="327410"/>
+                  </a:lnTo>
+                  <a:lnTo>
+                    <a:pt x="1195856" y="343834"/>
+                  </a:lnTo>
+                  <a:lnTo>
+                    <a:pt x="1266200" y="359850"/>
+                  </a:lnTo>
+                  <a:lnTo>
+                    <a:pt x="1336545" y="375470"/>
+                  </a:lnTo>
+                  <a:lnTo>
+                    <a:pt x="1406889" y="390703"/>
+                  </a:lnTo>
+                  <a:lnTo>
+                    <a:pt x="1477234" y="405559"/>
+                  </a:lnTo>
+                  <a:lnTo>
+                    <a:pt x="1547578" y="420046"/>
+                  </a:lnTo>
+                  <a:lnTo>
+                    <a:pt x="1617923" y="434175"/>
+                  </a:lnTo>
+                  <a:lnTo>
+                    <a:pt x="1688267" y="447953"/>
+                  </a:lnTo>
+                  <a:lnTo>
+                    <a:pt x="1758612" y="461391"/>
+                  </a:lnTo>
+                  <a:lnTo>
+                    <a:pt x="1828956" y="474495"/>
+                  </a:lnTo>
+                  <a:lnTo>
+                    <a:pt x="1899301" y="487275"/>
+                  </a:lnTo>
+                  <a:lnTo>
+                    <a:pt x="1969645" y="499738"/>
+                  </a:lnTo>
+                  <a:lnTo>
+                    <a:pt x="2039990" y="511892"/>
+                  </a:lnTo>
+                  <a:lnTo>
+                    <a:pt x="2110334" y="523745"/>
+                  </a:lnTo>
+                  <a:lnTo>
+                    <a:pt x="2180679" y="535305"/>
+                  </a:lnTo>
+                  <a:lnTo>
+                    <a:pt x="2251023" y="546578"/>
+                  </a:lnTo>
+                  <a:lnTo>
+                    <a:pt x="2321368" y="557572"/>
+                  </a:lnTo>
+                  <a:lnTo>
+                    <a:pt x="2391712" y="568294"/>
+                  </a:lnTo>
+                  <a:lnTo>
+                    <a:pt x="2462057" y="578750"/>
+                  </a:lnTo>
+                  <a:lnTo>
+                    <a:pt x="2532401" y="588946"/>
+                  </a:lnTo>
+                  <a:lnTo>
+                    <a:pt x="2602746" y="598891"/>
+                  </a:lnTo>
+                  <a:lnTo>
+                    <a:pt x="2673090" y="608589"/>
+                  </a:lnTo>
+                  <a:lnTo>
+                    <a:pt x="2743435" y="618046"/>
+                  </a:lnTo>
+                  <a:lnTo>
+                    <a:pt x="2813779" y="627270"/>
+                  </a:lnTo>
+                  <a:lnTo>
+                    <a:pt x="2884124" y="636265"/>
+                  </a:lnTo>
+                  <a:lnTo>
+                    <a:pt x="2954468" y="645037"/>
+                  </a:lnTo>
+                  <a:lnTo>
+                    <a:pt x="3024813" y="653591"/>
+                  </a:lnTo>
+                  <a:lnTo>
+                    <a:pt x="3095157" y="661934"/>
+                  </a:lnTo>
+                  <a:lnTo>
+                    <a:pt x="3165502" y="670070"/>
+                  </a:lnTo>
+                  <a:lnTo>
+                    <a:pt x="3235846" y="678005"/>
+                  </a:lnTo>
+                  <a:lnTo>
+                    <a:pt x="3306191" y="685743"/>
+                  </a:lnTo>
+                  <a:lnTo>
+                    <a:pt x="3376535" y="693289"/>
+                  </a:lnTo>
+                  <a:lnTo>
+                    <a:pt x="3446880" y="700648"/>
+                  </a:lnTo>
+                  <a:lnTo>
+                    <a:pt x="3517224" y="707825"/>
+                  </a:lnTo>
+                  <a:lnTo>
+                    <a:pt x="3587569" y="714825"/>
+                  </a:lnTo>
+                  <a:lnTo>
+                    <a:pt x="3657913" y="721650"/>
+                  </a:lnTo>
+                  <a:lnTo>
+                    <a:pt x="3728257" y="728307"/>
+                  </a:lnTo>
+                  <a:lnTo>
+                    <a:pt x="3798602" y="734799"/>
+                  </a:lnTo>
+                  <a:lnTo>
+                    <a:pt x="3868946" y="741130"/>
+                  </a:lnTo>
+                  <a:lnTo>
+                    <a:pt x="3939291" y="747304"/>
+                  </a:lnTo>
+                  <a:lnTo>
+                    <a:pt x="4009635" y="753325"/>
+                  </a:lnTo>
+                  <a:lnTo>
+                    <a:pt x="4079980" y="759197"/>
+                  </a:lnTo>
+                  <a:lnTo>
+                    <a:pt x="4150324" y="764924"/>
+                  </a:lnTo>
+                  <a:lnTo>
+                    <a:pt x="4220669" y="770508"/>
+                  </a:lnTo>
+                  <a:lnTo>
+                    <a:pt x="4291013" y="775955"/>
+                  </a:lnTo>
+                  <a:lnTo>
+                    <a:pt x="4361358" y="781266"/>
+                  </a:lnTo>
+                  <a:lnTo>
+                    <a:pt x="4431702" y="786446"/>
+                  </a:lnTo>
+                  <a:lnTo>
+                    <a:pt x="4502047" y="791497"/>
+                  </a:lnTo>
+                  <a:lnTo>
+                    <a:pt x="4572391" y="796424"/>
+                  </a:lnTo>
+                  <a:lnTo>
+                    <a:pt x="4642736" y="801228"/>
+                  </a:lnTo>
+                  <a:lnTo>
+                    <a:pt x="4713080" y="805913"/>
+                  </a:lnTo>
+                  <a:lnTo>
+                    <a:pt x="4783425" y="810482"/>
+                  </a:lnTo>
+                  <a:lnTo>
+                    <a:pt x="4853769" y="814938"/>
+                  </a:lnTo>
+                  <a:lnTo>
+                    <a:pt x="4924114" y="819284"/>
+                  </a:lnTo>
+                  <a:lnTo>
+                    <a:pt x="4994458" y="823522"/>
+                  </a:lnTo>
+                  <a:lnTo>
+                    <a:pt x="5064803" y="827655"/>
+                  </a:lnTo>
+                  <a:lnTo>
+                    <a:pt x="5135147" y="831685"/>
+                  </a:lnTo>
+                  <a:lnTo>
+                    <a:pt x="5205492" y="835616"/>
+                  </a:lnTo>
+                  <a:lnTo>
+                    <a:pt x="5275836" y="839449"/>
+                  </a:lnTo>
+                  <a:lnTo>
+                    <a:pt x="5346181" y="843188"/>
+                  </a:lnTo>
+                  <a:lnTo>
+                    <a:pt x="5416525" y="846833"/>
+                  </a:lnTo>
+                  <a:lnTo>
+                    <a:pt x="5486870" y="850389"/>
+                  </a:lnTo>
+                  <a:lnTo>
+                    <a:pt x="5557214" y="853856"/>
+                  </a:lnTo>
+                  <a:lnTo>
+                    <a:pt x="5627559" y="857238"/>
+                  </a:lnTo>
+                  <a:lnTo>
+                    <a:pt x="5697903" y="860535"/>
+                  </a:lnTo>
+                  <a:lnTo>
+                    <a:pt x="5768248" y="863751"/>
+                  </a:lnTo>
+                  <a:lnTo>
+                    <a:pt x="5838592" y="866888"/>
+                  </a:lnTo>
+                  <a:lnTo>
+                    <a:pt x="5908937" y="869946"/>
+                  </a:lnTo>
+                  <a:lnTo>
+                    <a:pt x="5979281" y="872929"/>
+                  </a:lnTo>
+                  <a:lnTo>
+                    <a:pt x="6049626" y="875838"/>
+                  </a:lnTo>
+                  <a:lnTo>
+                    <a:pt x="6119970" y="878675"/>
+                  </a:lnTo>
+                  <a:lnTo>
+                    <a:pt x="6190315" y="881441"/>
+                  </a:lnTo>
+                  <a:lnTo>
+                    <a:pt x="6260659" y="884139"/>
+                  </a:lnTo>
+                  <a:lnTo>
+                    <a:pt x="6331004" y="886771"/>
+                  </a:lnTo>
+                  <a:lnTo>
+                    <a:pt x="6401348" y="889337"/>
+                  </a:lnTo>
+                  <a:lnTo>
+                    <a:pt x="6471693" y="891839"/>
+                  </a:lnTo>
+                  <a:lnTo>
+                    <a:pt x="6542037" y="894280"/>
+                  </a:lnTo>
+                  <a:lnTo>
+                    <a:pt x="6612382" y="896660"/>
+                  </a:lnTo>
+                  <a:lnTo>
+                    <a:pt x="6682726" y="898981"/>
+                  </a:lnTo>
+                  <a:lnTo>
+                    <a:pt x="6753071" y="901244"/>
+                  </a:lnTo>
+                  <a:lnTo>
+                    <a:pt x="6823415" y="903452"/>
+                  </a:lnTo>
+                  <a:lnTo>
+                    <a:pt x="6893760" y="905604"/>
+                  </a:lnTo>
+                  <a:lnTo>
+                    <a:pt x="6964104" y="907704"/>
+                  </a:lnTo>
+                </a:path>
+              </a:pathLst>
+            </a:custGeom>
+            <a:ln w="27101" cap="flat">
+              <a:solidFill>
+                <a:srgbClr val="FF8C00">
+                  <a:alpha val="100000"/>
+                </a:srgbClr>
+              </a:solidFill>
+              <a:prstDash val="solid"/>
+              <a:round/>
+            </a:ln>
+          </p:spPr>
+          <p:txBody>
+            <a:bodyPr/>
+            <a:lstStyle/>
+            <a:p/>
+          </p:txBody>
+        </p:sp>
+        <p:sp>
+          <p:nvSpPr>
+            <p:cNvPr id="70" name="pl70"/>
+            <p:cNvSpPr/>
+            <p:nvPr/>
+          </p:nvSpPr>
+          <p:spPr>
+            <a:xfrm>
+              <a:off x="887106" y="5294352"/>
+              <a:ext cx="7660515" cy="0"/>
+            </a:xfrm>
+            <a:custGeom>
+              <a:avLst/>
+              <a:pathLst>
+                <a:path w="7660515" h="0">
+                  <a:moveTo>
+                    <a:pt x="0" y="0"/>
+                  </a:moveTo>
+                  <a:lnTo>
+                    <a:pt x="7660515" y="0"/>
+                  </a:lnTo>
+                  <a:lnTo>
+                    <a:pt x="7660515" y="0"/>
+                  </a:lnTo>
+                </a:path>
+              </a:pathLst>
+            </a:custGeom>
+            <a:ln w="13550" cap="flat">
+              <a:solidFill>
+                <a:srgbClr val="7F7F7F">
+                  <a:alpha val="100000"/>
+                </a:srgbClr>
+              </a:solidFill>
+              <a:prstDash val="dash"/>
+              <a:round/>
+            </a:ln>
+          </p:spPr>
+          <p:txBody>
+            <a:bodyPr/>
+            <a:lstStyle/>
+            <a:p/>
+          </p:txBody>
+        </p:sp>
+        <p:sp>
+          <p:nvSpPr>
+            <p:cNvPr id="71" name="pl71"/>
+            <p:cNvSpPr/>
+            <p:nvPr/>
+          </p:nvSpPr>
+          <p:spPr>
+            <a:xfrm>
+              <a:off x="4590457" y="4336484"/>
+              <a:ext cx="0" cy="1317069"/>
+            </a:xfrm>
+            <a:custGeom>
+              <a:avLst/>
+              <a:pathLst>
+                <a:path w="0" h="1317069">
+                  <a:moveTo>
+                    <a:pt x="0" y="1317069"/>
+                  </a:moveTo>
+                  <a:lnTo>
+                    <a:pt x="0" y="0"/>
+                  </a:lnTo>
+                  <a:lnTo>
+                    <a:pt x="0" y="0"/>
+                  </a:lnTo>
+                </a:path>
+              </a:pathLst>
+            </a:custGeom>
+            <a:ln w="13550" cap="flat">
+              <a:solidFill>
+                <a:srgbClr val="666666">
+                  <a:alpha val="100000"/>
+                </a:srgbClr>
+              </a:solidFill>
+              <a:prstDash val="dot"/>
+              <a:round/>
+            </a:ln>
+          </p:spPr>
+          <p:txBody>
+            <a:bodyPr/>
+            <a:lstStyle/>
+            <a:p/>
+          </p:txBody>
+        </p:sp>
+        <p:sp>
+          <p:nvSpPr>
+            <p:cNvPr id="72" name="tx72"/>
+            <p:cNvSpPr/>
+            <p:nvPr/>
+          </p:nvSpPr>
+          <p:spPr>
+            <a:xfrm>
+              <a:off x="762297" y="5553636"/>
+              <a:ext cx="62179" cy="80101"/>
+            </a:xfrm>
+            <a:prstGeom prst="rect">
+              <a:avLst/>
+            </a:prstGeom>
+            <a:noFill/>
+          </p:spPr>
+          <p:txBody>
+            <a:bodyPr lIns="0" rIns="0" tIns="0" bIns="0" anchorCtr="1" anchor="ctr" wrap="none"/>
+            <a:lstStyle/>
+            <a:p>
+              <a:pPr algn="l" marL="0" marR="0" indent="0">
+                <a:lnSpc>
+                  <a:spcPts val="880"/>
+                </a:lnSpc>
+                <a:spcBef>
+                  <a:spcPts val="0"/>
+                </a:spcBef>
+                <a:spcAft>
+                  <a:spcPts val="0"/>
+                </a:spcAft>
+              </a:pPr>
+              <a:r>
+                <a:rPr sz="880">
+                  <a:solidFill>
+                    <a:srgbClr val="4D4D4D">
+                      <a:alpha val="100000"/>
+                    </a:srgbClr>
+                  </a:solidFill>
+                  <a:latin typeface="Helvetica"/>
+                  <a:cs typeface="Helvetica"/>
+                </a:rPr>
+                <a:t>0</a:t>
+              </a:r>
+            </a:p>
+          </p:txBody>
+        </p:sp>
+        <p:sp>
+          <p:nvSpPr>
+            <p:cNvPr id="73" name="tx73"/>
+            <p:cNvSpPr/>
+            <p:nvPr/>
+          </p:nvSpPr>
+          <p:spPr>
+            <a:xfrm>
+              <a:off x="762297" y="5254302"/>
+              <a:ext cx="62179" cy="80101"/>
+            </a:xfrm>
+            <a:prstGeom prst="rect">
+              <a:avLst/>
+            </a:prstGeom>
+            <a:noFill/>
+          </p:spPr>
+          <p:txBody>
+            <a:bodyPr lIns="0" rIns="0" tIns="0" bIns="0" anchorCtr="1" anchor="ctr" wrap="none"/>
+            <a:lstStyle/>
+            <a:p>
+              <a:pPr algn="l" marL="0" marR="0" indent="0">
+                <a:lnSpc>
+                  <a:spcPts val="880"/>
+                </a:lnSpc>
+                <a:spcBef>
+                  <a:spcPts val="0"/>
+                </a:spcBef>
+                <a:spcAft>
+                  <a:spcPts val="0"/>
+                </a:spcAft>
+              </a:pPr>
+              <a:r>
+                <a:rPr sz="880">
+                  <a:solidFill>
+                    <a:srgbClr val="4D4D4D">
+                      <a:alpha val="100000"/>
+                    </a:srgbClr>
+                  </a:solidFill>
+                  <a:latin typeface="Helvetica"/>
+                  <a:cs typeface="Helvetica"/>
+                </a:rPr>
+                <a:t>1</a:t>
+              </a:r>
+            </a:p>
+          </p:txBody>
+        </p:sp>
+        <p:sp>
+          <p:nvSpPr>
+            <p:cNvPr id="74" name="tx74"/>
+            <p:cNvSpPr/>
+            <p:nvPr/>
+          </p:nvSpPr>
+          <p:spPr>
+            <a:xfrm>
+              <a:off x="762297" y="4954968"/>
+              <a:ext cx="62179" cy="80101"/>
+            </a:xfrm>
+            <a:prstGeom prst="rect">
+              <a:avLst/>
+            </a:prstGeom>
+            <a:noFill/>
+          </p:spPr>
+          <p:txBody>
+            <a:bodyPr lIns="0" rIns="0" tIns="0" bIns="0" anchorCtr="1" anchor="ctr" wrap="none"/>
+            <a:lstStyle/>
+            <a:p>
+              <a:pPr algn="l" marL="0" marR="0" indent="0">
+                <a:lnSpc>
+                  <a:spcPts val="880"/>
+                </a:lnSpc>
+                <a:spcBef>
+                  <a:spcPts val="0"/>
+                </a:spcBef>
+                <a:spcAft>
+                  <a:spcPts val="0"/>
+                </a:spcAft>
+              </a:pPr>
+              <a:r>
+                <a:rPr sz="880">
+                  <a:solidFill>
+                    <a:srgbClr val="4D4D4D">
+                      <a:alpha val="100000"/>
+                    </a:srgbClr>
+                  </a:solidFill>
+                  <a:latin typeface="Helvetica"/>
+                  <a:cs typeface="Helvetica"/>
+                </a:rPr>
+                <a:t>2</a:t>
+              </a:r>
+            </a:p>
+          </p:txBody>
+        </p:sp>
+        <p:sp>
+          <p:nvSpPr>
+            <p:cNvPr id="75" name="tx75"/>
+            <p:cNvSpPr/>
+            <p:nvPr/>
+          </p:nvSpPr>
+          <p:spPr>
+            <a:xfrm>
+              <a:off x="762297" y="4655634"/>
+              <a:ext cx="62179" cy="80101"/>
+            </a:xfrm>
+            <a:prstGeom prst="rect">
+              <a:avLst/>
+            </a:prstGeom>
+            <a:noFill/>
+          </p:spPr>
+          <p:txBody>
+            <a:bodyPr lIns="0" rIns="0" tIns="0" bIns="0" anchorCtr="1" anchor="ctr" wrap="none"/>
+            <a:lstStyle/>
+            <a:p>
+              <a:pPr algn="l" marL="0" marR="0" indent="0">
+                <a:lnSpc>
+                  <a:spcPts val="880"/>
+                </a:lnSpc>
+                <a:spcBef>
+                  <a:spcPts val="0"/>
+                </a:spcBef>
+                <a:spcAft>
+                  <a:spcPts val="0"/>
+                </a:spcAft>
+              </a:pPr>
+              <a:r>
+                <a:rPr sz="880">
+                  <a:solidFill>
+                    <a:srgbClr val="4D4D4D">
+                      <a:alpha val="100000"/>
+                    </a:srgbClr>
+                  </a:solidFill>
+                  <a:latin typeface="Helvetica"/>
+                  <a:cs typeface="Helvetica"/>
+                </a:rPr>
+                <a:t>3</a:t>
+              </a:r>
+            </a:p>
+          </p:txBody>
+        </p:sp>
+        <p:sp>
+          <p:nvSpPr>
+            <p:cNvPr id="76" name="tx76"/>
+            <p:cNvSpPr/>
+            <p:nvPr/>
+          </p:nvSpPr>
+          <p:spPr>
+            <a:xfrm>
+              <a:off x="762297" y="4356300"/>
+              <a:ext cx="62179" cy="80101"/>
+            </a:xfrm>
+            <a:prstGeom prst="rect">
+              <a:avLst/>
+            </a:prstGeom>
+            <a:noFill/>
+          </p:spPr>
+          <p:txBody>
+            <a:bodyPr lIns="0" rIns="0" tIns="0" bIns="0" anchorCtr="1" anchor="ctr" wrap="none"/>
+            <a:lstStyle/>
+            <a:p>
+              <a:pPr algn="l" marL="0" marR="0" indent="0">
+                <a:lnSpc>
+                  <a:spcPts val="880"/>
+                </a:lnSpc>
+                <a:spcBef>
+                  <a:spcPts val="0"/>
+                </a:spcBef>
+                <a:spcAft>
+                  <a:spcPts val="0"/>
+                </a:spcAft>
+              </a:pPr>
+              <a:r>
+                <a:rPr sz="880">
+                  <a:solidFill>
+                    <a:srgbClr val="4D4D4D">
+                      <a:alpha val="100000"/>
+                    </a:srgbClr>
+                  </a:solidFill>
+                  <a:latin typeface="Helvetica"/>
+                  <a:cs typeface="Helvetica"/>
+                </a:rPr>
+                <a:t>4</a:t>
+              </a:r>
+            </a:p>
+          </p:txBody>
+        </p:sp>
+        <p:sp>
+          <p:nvSpPr>
+            <p:cNvPr id="77" name="tx77"/>
+            <p:cNvSpPr/>
+            <p:nvPr/>
+          </p:nvSpPr>
+          <p:spPr>
+            <a:xfrm>
+              <a:off x="1133333" y="5716183"/>
+              <a:ext cx="161574" cy="80101"/>
+            </a:xfrm>
+            <a:prstGeom prst="rect">
+              <a:avLst/>
+            </a:prstGeom>
+            <a:noFill/>
+          </p:spPr>
+          <p:txBody>
+            <a:bodyPr lIns="0" rIns="0" tIns="0" bIns="0" anchorCtr="1" anchor="ctr" wrap="none"/>
+            <a:lstStyle/>
+            <a:p>
+              <a:pPr algn="l" marL="0" marR="0" indent="0">
+                <a:lnSpc>
+                  <a:spcPts val="880"/>
+                </a:lnSpc>
+                <a:spcBef>
+                  <a:spcPts val="0"/>
+                </a:spcBef>
+                <a:spcAft>
+                  <a:spcPts val="0"/>
+                </a:spcAft>
+              </a:pPr>
+              <a:r>
+                <a:rPr sz="880">
+                  <a:solidFill>
+                    <a:srgbClr val="4D4D4D">
+                      <a:alpha val="100000"/>
+                    </a:srgbClr>
+                  </a:solidFill>
+                  <a:latin typeface="Helvetica"/>
+                  <a:cs typeface="Helvetica"/>
+                </a:rPr>
+                <a:t>-40</a:t>
+              </a:r>
+            </a:p>
+          </p:txBody>
+        </p:sp>
+        <p:sp>
+          <p:nvSpPr>
+            <p:cNvPr id="78" name="tx78"/>
+            <p:cNvSpPr/>
+            <p:nvPr/>
+          </p:nvSpPr>
+          <p:spPr>
+            <a:xfrm>
+              <a:off x="1978619" y="5716183"/>
+              <a:ext cx="161574" cy="80101"/>
+            </a:xfrm>
+            <a:prstGeom prst="rect">
+              <a:avLst/>
+            </a:prstGeom>
+            <a:noFill/>
+          </p:spPr>
+          <p:txBody>
+            <a:bodyPr lIns="0" rIns="0" tIns="0" bIns="0" anchorCtr="1" anchor="ctr" wrap="none"/>
+            <a:lstStyle/>
+            <a:p>
+              <a:pPr algn="l" marL="0" marR="0" indent="0">
+                <a:lnSpc>
+                  <a:spcPts val="880"/>
+                </a:lnSpc>
+                <a:spcBef>
+                  <a:spcPts val="0"/>
+                </a:spcBef>
+                <a:spcAft>
+                  <a:spcPts val="0"/>
+                </a:spcAft>
+              </a:pPr>
+              <a:r>
+                <a:rPr sz="880">
+                  <a:solidFill>
+                    <a:srgbClr val="4D4D4D">
+                      <a:alpha val="100000"/>
+                    </a:srgbClr>
+                  </a:solidFill>
+                  <a:latin typeface="Helvetica"/>
+                  <a:cs typeface="Helvetica"/>
+                </a:rPr>
+                <a:t>-30</a:t>
+              </a:r>
+            </a:p>
+          </p:txBody>
+        </p:sp>
+        <p:sp>
+          <p:nvSpPr>
+            <p:cNvPr id="79" name="tx79"/>
+            <p:cNvSpPr/>
+            <p:nvPr/>
+          </p:nvSpPr>
+          <p:spPr>
+            <a:xfrm>
+              <a:off x="2823906" y="5716183"/>
+              <a:ext cx="161574" cy="80101"/>
+            </a:xfrm>
+            <a:prstGeom prst="rect">
+              <a:avLst/>
+            </a:prstGeom>
+            <a:noFill/>
+          </p:spPr>
+          <p:txBody>
+            <a:bodyPr lIns="0" rIns="0" tIns="0" bIns="0" anchorCtr="1" anchor="ctr" wrap="none"/>
+            <a:lstStyle/>
+            <a:p>
+              <a:pPr algn="l" marL="0" marR="0" indent="0">
+                <a:lnSpc>
+                  <a:spcPts val="880"/>
+                </a:lnSpc>
+                <a:spcBef>
+                  <a:spcPts val="0"/>
+                </a:spcBef>
+                <a:spcAft>
+                  <a:spcPts val="0"/>
+                </a:spcAft>
+              </a:pPr>
+              <a:r>
+                <a:rPr sz="880">
+                  <a:solidFill>
+                    <a:srgbClr val="4D4D4D">
+                      <a:alpha val="100000"/>
+                    </a:srgbClr>
+                  </a:solidFill>
+                  <a:latin typeface="Helvetica"/>
+                  <a:cs typeface="Helvetica"/>
+                </a:rPr>
+                <a:t>-20</a:t>
+              </a:r>
+            </a:p>
+          </p:txBody>
+        </p:sp>
+        <p:sp>
+          <p:nvSpPr>
+            <p:cNvPr id="80" name="tx80"/>
+            <p:cNvSpPr/>
+            <p:nvPr/>
+          </p:nvSpPr>
+          <p:spPr>
+            <a:xfrm>
+              <a:off x="3669192" y="5716183"/>
+              <a:ext cx="161574" cy="80101"/>
+            </a:xfrm>
+            <a:prstGeom prst="rect">
+              <a:avLst/>
+            </a:prstGeom>
+            <a:noFill/>
+          </p:spPr>
+          <p:txBody>
+            <a:bodyPr lIns="0" rIns="0" tIns="0" bIns="0" anchorCtr="1" anchor="ctr" wrap="none"/>
+            <a:lstStyle/>
+            <a:p>
+              <a:pPr algn="l" marL="0" marR="0" indent="0">
+                <a:lnSpc>
+                  <a:spcPts val="880"/>
+                </a:lnSpc>
+                <a:spcBef>
+                  <a:spcPts val="0"/>
+                </a:spcBef>
+                <a:spcAft>
+                  <a:spcPts val="0"/>
+                </a:spcAft>
+              </a:pPr>
+              <a:r>
+                <a:rPr sz="880">
+                  <a:solidFill>
+                    <a:srgbClr val="4D4D4D">
+                      <a:alpha val="100000"/>
+                    </a:srgbClr>
+                  </a:solidFill>
+                  <a:latin typeface="Helvetica"/>
+                  <a:cs typeface="Helvetica"/>
+                </a:rPr>
+                <a:t>-10</a:t>
+              </a:r>
+            </a:p>
+          </p:txBody>
+        </p:sp>
+        <p:sp>
+          <p:nvSpPr>
+            <p:cNvPr id="81" name="tx81"/>
+            <p:cNvSpPr/>
+            <p:nvPr/>
+          </p:nvSpPr>
+          <p:spPr>
+            <a:xfrm>
+              <a:off x="4564176" y="5716183"/>
+              <a:ext cx="62179" cy="80101"/>
+            </a:xfrm>
+            <a:prstGeom prst="rect">
+              <a:avLst/>
+            </a:prstGeom>
+            <a:noFill/>
+          </p:spPr>
+          <p:txBody>
+            <a:bodyPr lIns="0" rIns="0" tIns="0" bIns="0" anchorCtr="1" anchor="ctr" wrap="none"/>
+            <a:lstStyle/>
+            <a:p>
+              <a:pPr algn="l" marL="0" marR="0" indent="0">
+                <a:lnSpc>
+                  <a:spcPts val="880"/>
+                </a:lnSpc>
+                <a:spcBef>
+                  <a:spcPts val="0"/>
+                </a:spcBef>
+                <a:spcAft>
+                  <a:spcPts val="0"/>
+                </a:spcAft>
+              </a:pPr>
+              <a:r>
+                <a:rPr sz="880">
+                  <a:solidFill>
+                    <a:srgbClr val="4D4D4D">
+                      <a:alpha val="100000"/>
+                    </a:srgbClr>
+                  </a:solidFill>
+                  <a:latin typeface="Helvetica"/>
+                  <a:cs typeface="Helvetica"/>
+                </a:rPr>
+                <a:t>0</a:t>
+              </a:r>
+            </a:p>
+          </p:txBody>
+        </p:sp>
+        <p:sp>
+          <p:nvSpPr>
+            <p:cNvPr id="82" name="tx82"/>
+            <p:cNvSpPr/>
+            <p:nvPr/>
+          </p:nvSpPr>
+          <p:spPr>
+            <a:xfrm>
+              <a:off x="5378373" y="5716183"/>
+              <a:ext cx="124358" cy="80101"/>
+            </a:xfrm>
+            <a:prstGeom prst="rect">
+              <a:avLst/>
+            </a:prstGeom>
+            <a:noFill/>
+          </p:spPr>
+          <p:txBody>
+            <a:bodyPr lIns="0" rIns="0" tIns="0" bIns="0" anchorCtr="1" anchor="ctr" wrap="none"/>
+            <a:lstStyle/>
+            <a:p>
+              <a:pPr algn="l" marL="0" marR="0" indent="0">
+                <a:lnSpc>
+                  <a:spcPts val="880"/>
+                </a:lnSpc>
+                <a:spcBef>
+                  <a:spcPts val="0"/>
+                </a:spcBef>
+                <a:spcAft>
+                  <a:spcPts val="0"/>
+                </a:spcAft>
+              </a:pPr>
+              <a:r>
+                <a:rPr sz="880">
+                  <a:solidFill>
+                    <a:srgbClr val="4D4D4D">
+                      <a:alpha val="100000"/>
+                    </a:srgbClr>
+                  </a:solidFill>
+                  <a:latin typeface="Helvetica"/>
+                  <a:cs typeface="Helvetica"/>
+                </a:rPr>
+                <a:t>10</a:t>
+              </a:r>
+            </a:p>
+          </p:txBody>
+        </p:sp>
+        <p:sp>
+          <p:nvSpPr>
+            <p:cNvPr id="83" name="tx83"/>
+            <p:cNvSpPr/>
+            <p:nvPr/>
+          </p:nvSpPr>
+          <p:spPr>
+            <a:xfrm>
+              <a:off x="6223659" y="5716183"/>
+              <a:ext cx="124358" cy="80101"/>
+            </a:xfrm>
+            <a:prstGeom prst="rect">
+              <a:avLst/>
+            </a:prstGeom>
+            <a:noFill/>
+          </p:spPr>
+          <p:txBody>
+            <a:bodyPr lIns="0" rIns="0" tIns="0" bIns="0" anchorCtr="1" anchor="ctr" wrap="none"/>
+            <a:lstStyle/>
+            <a:p>
+              <a:pPr algn="l" marL="0" marR="0" indent="0">
+                <a:lnSpc>
+                  <a:spcPts val="880"/>
+                </a:lnSpc>
+                <a:spcBef>
+                  <a:spcPts val="0"/>
+                </a:spcBef>
+                <a:spcAft>
+                  <a:spcPts val="0"/>
+                </a:spcAft>
+              </a:pPr>
+              <a:r>
+                <a:rPr sz="880">
+                  <a:solidFill>
+                    <a:srgbClr val="4D4D4D">
+                      <a:alpha val="100000"/>
+                    </a:srgbClr>
+                  </a:solidFill>
+                  <a:latin typeface="Helvetica"/>
+                  <a:cs typeface="Helvetica"/>
+                </a:rPr>
+                <a:t>20</a:t>
+              </a:r>
+            </a:p>
+          </p:txBody>
+        </p:sp>
+        <p:sp>
+          <p:nvSpPr>
+            <p:cNvPr id="84" name="tx84"/>
+            <p:cNvSpPr/>
+            <p:nvPr/>
+          </p:nvSpPr>
+          <p:spPr>
+            <a:xfrm>
+              <a:off x="7068946" y="5716183"/>
+              <a:ext cx="124358" cy="80101"/>
+            </a:xfrm>
+            <a:prstGeom prst="rect">
+              <a:avLst/>
+            </a:prstGeom>
+            <a:noFill/>
+          </p:spPr>
+          <p:txBody>
+            <a:bodyPr lIns="0" rIns="0" tIns="0" bIns="0" anchorCtr="1" anchor="ctr" wrap="none"/>
+            <a:lstStyle/>
+            <a:p>
+              <a:pPr algn="l" marL="0" marR="0" indent="0">
+                <a:lnSpc>
+                  <a:spcPts val="880"/>
+                </a:lnSpc>
+                <a:spcBef>
+                  <a:spcPts val="0"/>
+                </a:spcBef>
+                <a:spcAft>
+                  <a:spcPts val="0"/>
+                </a:spcAft>
+              </a:pPr>
+              <a:r>
+                <a:rPr sz="880">
+                  <a:solidFill>
+                    <a:srgbClr val="4D4D4D">
+                      <a:alpha val="100000"/>
+                    </a:srgbClr>
+                  </a:solidFill>
+                  <a:latin typeface="Helvetica"/>
+                  <a:cs typeface="Helvetica"/>
+                </a:rPr>
+                <a:t>30</a:t>
+              </a:r>
+            </a:p>
+          </p:txBody>
+        </p:sp>
+        <p:sp>
+          <p:nvSpPr>
+            <p:cNvPr id="85" name="tx85"/>
+            <p:cNvSpPr/>
+            <p:nvPr/>
+          </p:nvSpPr>
+          <p:spPr>
+            <a:xfrm>
+              <a:off x="7914232" y="5716183"/>
+              <a:ext cx="124358" cy="80101"/>
+            </a:xfrm>
+            <a:prstGeom prst="rect">
+              <a:avLst/>
+            </a:prstGeom>
+            <a:noFill/>
+          </p:spPr>
+          <p:txBody>
+            <a:bodyPr lIns="0" rIns="0" tIns="0" bIns="0" anchorCtr="1" anchor="ctr" wrap="none"/>
+            <a:lstStyle/>
+            <a:p>
+              <a:pPr algn="l" marL="0" marR="0" indent="0">
+                <a:lnSpc>
+                  <a:spcPts val="880"/>
+                </a:lnSpc>
+                <a:spcBef>
+                  <a:spcPts val="0"/>
+                </a:spcBef>
+                <a:spcAft>
+                  <a:spcPts val="0"/>
+                </a:spcAft>
+              </a:pPr>
+              <a:r>
+                <a:rPr sz="880">
+                  <a:solidFill>
+                    <a:srgbClr val="4D4D4D">
+                      <a:alpha val="100000"/>
+                    </a:srgbClr>
+                  </a:solidFill>
+                  <a:latin typeface="Helvetica"/>
+                  <a:cs typeface="Helvetica"/>
+                </a:rPr>
+                <a:t>40</a:t>
+              </a:r>
+            </a:p>
+          </p:txBody>
+        </p:sp>
+        <p:sp>
+          <p:nvSpPr>
+            <p:cNvPr id="86" name="tx86"/>
+            <p:cNvSpPr/>
+            <p:nvPr/>
+          </p:nvSpPr>
+          <p:spPr>
+            <a:xfrm>
+              <a:off x="2928340" y="5855859"/>
+              <a:ext cx="3578047" cy="100218"/>
+            </a:xfrm>
+            <a:prstGeom prst="rect">
+              <a:avLst/>
+            </a:prstGeom>
+            <a:noFill/>
+          </p:spPr>
+          <p:txBody>
+            <a:bodyPr lIns="0" rIns="0" tIns="0" bIns="0" anchorCtr="1" anchor="ctr" wrap="none"/>
+            <a:lstStyle/>
+            <a:p>
+              <a:pPr algn="l" marL="0" marR="0" indent="0">
+                <a:lnSpc>
+                  <a:spcPts val="1100"/>
+                </a:lnSpc>
+                <a:spcBef>
+                  <a:spcPts val="0"/>
+                </a:spcBef>
+                <a:spcAft>
+                  <a:spcPts val="0"/>
+                </a:spcAft>
+              </a:pPr>
+              <a:r>
+                <a:rPr sz="1100">
+                  <a:solidFill>
+                    <a:srgbClr val="000000">
+                      <a:alpha val="100000"/>
+                    </a:srgbClr>
+                  </a:solidFill>
+                  <a:latin typeface="Helvetica"/>
+                  <a:cs typeface="Helvetica"/>
+                </a:rPr>
+                <a:t>eGFR difference (%): 100 × (CKD-EPI Cr-Cys − CG) / CG</a:t>
+              </a:r>
+            </a:p>
+          </p:txBody>
+        </p:sp>
+        <p:sp>
+          <p:nvSpPr>
+            <p:cNvPr id="87" name="tx87"/>
+            <p:cNvSpPr/>
+            <p:nvPr/>
+          </p:nvSpPr>
+          <p:spPr>
+            <a:xfrm rot="-5400000">
+              <a:off x="138035" y="4944909"/>
+              <a:ext cx="1016904" cy="100218"/>
+            </a:xfrm>
+            <a:prstGeom prst="rect">
+              <a:avLst/>
+            </a:prstGeom>
+            <a:noFill/>
+          </p:spPr>
+          <p:txBody>
+            <a:bodyPr lIns="0" rIns="0" tIns="0" bIns="0" anchorCtr="1" anchor="ctr" wrap="none"/>
+            <a:lstStyle/>
+            <a:p>
+              <a:pPr algn="l" marL="0" marR="0" indent="0">
+                <a:lnSpc>
+                  <a:spcPts val="1100"/>
+                </a:lnSpc>
+                <a:spcBef>
+                  <a:spcPts val="0"/>
+                </a:spcBef>
+                <a:spcAft>
+                  <a:spcPts val="0"/>
+                </a:spcAft>
+              </a:pPr>
+              <a:r>
+                <a:rPr sz="1100">
+                  <a:solidFill>
+                    <a:srgbClr val="000000">
+                      <a:alpha val="100000"/>
+                    </a:srgbClr>
+                  </a:solidFill>
+                  <a:latin typeface="Helvetica"/>
+                  <a:cs typeface="Helvetica"/>
+                </a:rPr>
+                <a:t>subHR (95% CI)</a:t>
+              </a:r>
+            </a:p>
+          </p:txBody>
+        </p:sp>
+        <p:sp>
+          <p:nvSpPr>
+            <p:cNvPr id="88" name="tx88"/>
+            <p:cNvSpPr/>
+            <p:nvPr/>
+          </p:nvSpPr>
+          <p:spPr>
+            <a:xfrm>
+              <a:off x="887106" y="4159544"/>
+              <a:ext cx="7052127" cy="82021"/>
+            </a:xfrm>
+            <a:prstGeom prst="rect">
+              <a:avLst/>
+            </a:prstGeom>
+            <a:noFill/>
+          </p:spPr>
+          <p:txBody>
+            <a:bodyPr lIns="0" rIns="0" tIns="0" bIns="0" anchorCtr="1" anchor="ctr" wrap="none"/>
+            <a:lstStyle/>
+            <a:p>
+              <a:pPr algn="l" marL="0" marR="0" indent="0">
+                <a:lnSpc>
+                  <a:spcPts val="900"/>
+                </a:lnSpc>
+                <a:spcBef>
+                  <a:spcPts val="0"/>
+                </a:spcBef>
+                <a:spcAft>
+                  <a:spcPts val="0"/>
+                </a:spcAft>
+              </a:pPr>
+              <a:r>
+                <a:rPr sz="900">
+                  <a:solidFill>
+                    <a:srgbClr val="404040">
+                      <a:alpha val="100000"/>
+                    </a:srgbClr>
+                  </a:solidFill>
+                  <a:latin typeface="Helvetica"/>
+                  <a:cs typeface="Helvetica"/>
+                </a:rPr>
+                <a:t>subHR per 10 % decline: 1.35 (1.17-1.56), p_Bonf = &lt;0.001 (n = 6)  |  per IQR decline (Δ = 29.3 %): 2.42 (1.59-3.68)  |  IQR: [-14.6, 14.7] %</a:t>
+              </a:r>
+            </a:p>
+          </p:txBody>
+        </p:sp>
+        <p:sp>
+          <p:nvSpPr>
+            <p:cNvPr id="89" name="tx89"/>
+            <p:cNvSpPr/>
+            <p:nvPr/>
+          </p:nvSpPr>
+          <p:spPr>
+            <a:xfrm>
+              <a:off x="887106" y="3932770"/>
               <a:ext cx="967983" cy="120152"/>
             </a:xfrm>
             <a:prstGeom prst="rect">
